--- a/material/Arduino/05_태양광패널.pptx
+++ b/material/Arduino/05_태양광패널.pptx
@@ -5,17 +5,19 @@
     <p:sldMasterId id="2147483661" r:id="rId1"/>
   </p:sldMasterIdLst>
   <p:notesMasterIdLst>
-    <p:notesMasterId r:id="rId10"/>
+    <p:notesMasterId r:id="rId12"/>
   </p:notesMasterIdLst>
   <p:sldIdLst>
     <p:sldId id="1004" r:id="rId2"/>
-    <p:sldId id="1102" r:id="rId3"/>
-    <p:sldId id="1060" r:id="rId4"/>
-    <p:sldId id="1066" r:id="rId5"/>
-    <p:sldId id="1080" r:id="rId6"/>
-    <p:sldId id="1085" r:id="rId7"/>
-    <p:sldId id="1086" r:id="rId8"/>
-    <p:sldId id="1101" r:id="rId9"/>
+    <p:sldId id="1103" r:id="rId3"/>
+    <p:sldId id="1102" r:id="rId4"/>
+    <p:sldId id="996" r:id="rId5"/>
+    <p:sldId id="1060" r:id="rId6"/>
+    <p:sldId id="1066" r:id="rId7"/>
+    <p:sldId id="1080" r:id="rId8"/>
+    <p:sldId id="1085" r:id="rId9"/>
+    <p:sldId id="1086" r:id="rId10"/>
+    <p:sldId id="1101" r:id="rId11"/>
   </p:sldIdLst>
   <p:sldSz cx="12192000" cy="6858000"/>
   <p:notesSz cx="6858000" cy="9144000"/>
@@ -207,7 +209,7 @@
           <a:p>
             <a:fld id="{31A4D7BB-9D09-4DB4-979A-1857C46342D6}" type="datetimeFigureOut">
               <a:rPr lang="ko-KR" altLang="en-US" smtClean="0"/>
-              <a:t>2025-10-27</a:t>
+              <a:t>2025-10-28</a:t>
             </a:fld>
             <a:endParaRPr lang="ko-KR" altLang="en-US"/>
           </a:p>
@@ -567,6 +569,988 @@
         <p:cNvPr id="1" name="">
           <a:extLst>
             <a:ext uri="{FF2B5EF4-FFF2-40B4-BE49-F238E27FC236}">
+              <a16:creationId xmlns:a16="http://schemas.microsoft.com/office/drawing/2014/main" id="{E43736D4-020C-3A90-092A-499F1E5F2F03}"/>
+            </a:ext>
+          </a:extLst>
+        </p:cNvPr>
+        <p:cNvGrpSpPr/>
+        <p:nvPr/>
+      </p:nvGrpSpPr>
+      <p:grpSpPr>
+        <a:xfrm>
+          <a:off x="0" y="0"/>
+          <a:ext cx="0" cy="0"/>
+          <a:chOff x="0" y="0"/>
+          <a:chExt cx="0" cy="0"/>
+        </a:xfrm>
+      </p:grpSpPr>
+      <p:sp>
+        <p:nvSpPr>
+          <p:cNvPr id="2" name="슬라이드 이미지 개체 틀 1">
+            <a:extLst>
+              <a:ext uri="{FF2B5EF4-FFF2-40B4-BE49-F238E27FC236}">
+                <a16:creationId xmlns:a16="http://schemas.microsoft.com/office/drawing/2014/main" id="{91FA6FB9-864D-AE44-449A-83A50909CDF2}"/>
+              </a:ext>
+            </a:extLst>
+          </p:cNvPr>
+          <p:cNvSpPr>
+            <a:spLocks noGrp="1" noRot="1" noChangeAspect="1"/>
+          </p:cNvSpPr>
+          <p:nvPr>
+            <p:ph type="sldImg"/>
+          </p:nvPr>
+        </p:nvSpPr>
+        <p:spPr/>
+      </p:sp>
+      <p:sp>
+        <p:nvSpPr>
+          <p:cNvPr id="3" name="슬라이드 노트 개체 틀 2">
+            <a:extLst>
+              <a:ext uri="{FF2B5EF4-FFF2-40B4-BE49-F238E27FC236}">
+                <a16:creationId xmlns:a16="http://schemas.microsoft.com/office/drawing/2014/main" id="{4B3B35A5-5224-FEB7-6F03-FDD1866482BB}"/>
+              </a:ext>
+            </a:extLst>
+          </p:cNvPr>
+          <p:cNvSpPr>
+            <a:spLocks noGrp="1"/>
+          </p:cNvSpPr>
+          <p:nvPr>
+            <p:ph type="body" idx="1"/>
+          </p:nvPr>
+        </p:nvSpPr>
+        <p:spPr/>
+        <p:txBody>
+          <a:bodyPr/>
+          <a:lstStyle/>
+          <a:p>
+            <a:pPr algn="l" fontAlgn="base"/>
+            <a:r>
+              <a:rPr lang="en-US" altLang="ko-KR" b="1" i="0" dirty="0">
+                <a:solidFill>
+                  <a:srgbClr val="000000"/>
+                </a:solidFill>
+                <a:effectLst/>
+                <a:highlight>
+                  <a:srgbClr val="FFFFFF"/>
+                </a:highlight>
+                <a:latin typeface="+mn-lt"/>
+              </a:rPr>
+              <a:t>Pulse : </a:t>
+            </a:r>
+            <a:r>
+              <a:rPr lang="ko-KR" altLang="en-US" b="1" i="0" dirty="0" err="1">
+                <a:solidFill>
+                  <a:srgbClr val="000000"/>
+                </a:solidFill>
+                <a:effectLst/>
+                <a:highlight>
+                  <a:srgbClr val="FFFFFF"/>
+                </a:highlight>
+                <a:latin typeface="+mn-lt"/>
+              </a:rPr>
+              <a:t>사각파</a:t>
+            </a:r>
+            <a:endParaRPr lang="ko-KR" altLang="en-US" b="0" i="0" dirty="0">
+              <a:solidFill>
+                <a:srgbClr val="666666"/>
+              </a:solidFill>
+              <a:effectLst/>
+              <a:highlight>
+                <a:srgbClr val="FFFFFF"/>
+              </a:highlight>
+              <a:latin typeface="+mn-lt"/>
+            </a:endParaRPr>
+          </a:p>
+          <a:p>
+            <a:pPr algn="l" fontAlgn="base"/>
+            <a:r>
+              <a:rPr lang="en-US" altLang="ko-KR" b="1" i="0" dirty="0">
+                <a:solidFill>
+                  <a:srgbClr val="000000"/>
+                </a:solidFill>
+                <a:effectLst/>
+                <a:highlight>
+                  <a:srgbClr val="FFFFFF"/>
+                </a:highlight>
+                <a:latin typeface="+mn-lt"/>
+              </a:rPr>
+              <a:t>Width : </a:t>
+            </a:r>
+            <a:r>
+              <a:rPr lang="ko-KR" altLang="en-US" b="1" i="0" dirty="0">
+                <a:solidFill>
+                  <a:srgbClr val="000000"/>
+                </a:solidFill>
+                <a:effectLst/>
+                <a:highlight>
+                  <a:srgbClr val="FFFFFF"/>
+                </a:highlight>
+                <a:latin typeface="+mn-lt"/>
+              </a:rPr>
+              <a:t>폭</a:t>
+            </a:r>
+            <a:endParaRPr lang="ko-KR" altLang="en-US" b="0" i="0" dirty="0">
+              <a:solidFill>
+                <a:srgbClr val="666666"/>
+              </a:solidFill>
+              <a:effectLst/>
+              <a:highlight>
+                <a:srgbClr val="FFFFFF"/>
+              </a:highlight>
+              <a:latin typeface="+mn-lt"/>
+            </a:endParaRPr>
+          </a:p>
+          <a:p>
+            <a:pPr algn="l" fontAlgn="base"/>
+            <a:r>
+              <a:rPr lang="en-US" altLang="ko-KR" b="1" i="0" dirty="0">
+                <a:solidFill>
+                  <a:srgbClr val="000000"/>
+                </a:solidFill>
+                <a:effectLst/>
+                <a:highlight>
+                  <a:srgbClr val="FFFFFF"/>
+                </a:highlight>
+                <a:latin typeface="+mn-lt"/>
+              </a:rPr>
+              <a:t>Modulation : </a:t>
+            </a:r>
+            <a:r>
+              <a:rPr lang="ko-KR" altLang="en-US" b="1" i="0" dirty="0">
+                <a:solidFill>
+                  <a:srgbClr val="000000"/>
+                </a:solidFill>
+                <a:effectLst/>
+                <a:highlight>
+                  <a:srgbClr val="FFFFFF"/>
+                </a:highlight>
+                <a:latin typeface="+mn-lt"/>
+              </a:rPr>
+              <a:t>변조</a:t>
+            </a:r>
+            <a:r>
+              <a:rPr lang="en-US" altLang="ko-KR" b="1" i="0" dirty="0">
+                <a:solidFill>
+                  <a:srgbClr val="000000"/>
+                </a:solidFill>
+                <a:effectLst/>
+                <a:highlight>
+                  <a:srgbClr val="FFFFFF"/>
+                </a:highlight>
+                <a:latin typeface="+mn-lt"/>
+                <a:ea typeface="Dotum" panose="020B0600000101010101" pitchFamily="50" charset="-127"/>
+              </a:rPr>
+              <a:t>[</a:t>
+            </a:r>
+            <a:r>
+              <a:rPr lang="ko-KR" altLang="en-US" b="1" i="0" dirty="0">
+                <a:solidFill>
+                  <a:srgbClr val="000000"/>
+                </a:solidFill>
+                <a:effectLst/>
+                <a:highlight>
+                  <a:srgbClr val="FFFFFF"/>
+                </a:highlight>
+                <a:latin typeface="+mn-lt"/>
+                <a:ea typeface="Dotum" panose="020B0600000101010101" pitchFamily="50" charset="-127"/>
+              </a:rPr>
+              <a:t>출처</a:t>
+            </a:r>
+            <a:r>
+              <a:rPr lang="en-US" altLang="ko-KR" b="1" i="0" dirty="0">
+                <a:solidFill>
+                  <a:srgbClr val="000000"/>
+                </a:solidFill>
+                <a:effectLst/>
+                <a:highlight>
+                  <a:srgbClr val="FFFFFF"/>
+                </a:highlight>
+                <a:latin typeface="+mn-lt"/>
+                <a:ea typeface="Dotum" panose="020B0600000101010101" pitchFamily="50" charset="-127"/>
+              </a:rPr>
+              <a:t>]</a:t>
+            </a:r>
+            <a:r>
+              <a:rPr lang="ko-KR" altLang="en-US" b="0" i="0" dirty="0">
+                <a:solidFill>
+                  <a:srgbClr val="000000"/>
+                </a:solidFill>
+                <a:effectLst/>
+                <a:highlight>
+                  <a:srgbClr val="FFFFFF"/>
+                </a:highlight>
+                <a:latin typeface="+mn-lt"/>
+                <a:ea typeface="Dotum" panose="020B0600000101010101" pitchFamily="50" charset="-127"/>
+              </a:rPr>
+              <a:t> </a:t>
+            </a:r>
+            <a:r>
+              <a:rPr lang="en-US" altLang="ko-KR" b="0" i="0" u="none" strike="noStrike" dirty="0">
+                <a:solidFill>
+                  <a:srgbClr val="000000"/>
+                </a:solidFill>
+                <a:effectLst/>
+                <a:highlight>
+                  <a:srgbClr val="FFFFFF"/>
+                </a:highlight>
+                <a:latin typeface="+mn-lt"/>
+                <a:ea typeface="Dotum" panose="020B0600000101010101" pitchFamily="50" charset="-127"/>
+                <a:hlinkClick r:id="rId3"/>
+              </a:rPr>
+              <a:t>PWM </a:t>
+            </a:r>
+            <a:r>
+              <a:rPr lang="ko-KR" altLang="en-US" b="0" i="0" u="none" strike="noStrike" dirty="0" err="1">
+                <a:solidFill>
+                  <a:srgbClr val="000000"/>
+                </a:solidFill>
+                <a:effectLst/>
+                <a:highlight>
+                  <a:srgbClr val="FFFFFF"/>
+                </a:highlight>
+                <a:latin typeface="+mn-lt"/>
+                <a:ea typeface="Dotum" panose="020B0600000101010101" pitchFamily="50" charset="-127"/>
+                <a:hlinkClick r:id="rId3"/>
+              </a:rPr>
+              <a:t>제어란</a:t>
+            </a:r>
+            <a:r>
+              <a:rPr lang="en-US" altLang="ko-KR" b="0" i="0" u="none" strike="noStrike" dirty="0">
+                <a:solidFill>
+                  <a:srgbClr val="000000"/>
+                </a:solidFill>
+                <a:effectLst/>
+                <a:highlight>
+                  <a:srgbClr val="FFFFFF"/>
+                </a:highlight>
+                <a:latin typeface="+mn-lt"/>
+                <a:ea typeface="Dotum" panose="020B0600000101010101" pitchFamily="50" charset="-127"/>
+                <a:hlinkClick r:id="rId3"/>
+              </a:rPr>
+              <a:t>? (Pulse Width Modulation)</a:t>
+            </a:r>
+            <a:r>
+              <a:rPr lang="en-US" altLang="ko-KR" b="0" i="0" dirty="0">
+                <a:solidFill>
+                  <a:srgbClr val="000000"/>
+                </a:solidFill>
+                <a:effectLst/>
+                <a:highlight>
+                  <a:srgbClr val="FFFFFF"/>
+                </a:highlight>
+                <a:latin typeface="+mn-lt"/>
+                <a:ea typeface="Dotum" panose="020B0600000101010101" pitchFamily="50" charset="-127"/>
+              </a:rPr>
+              <a:t>|</a:t>
+            </a:r>
+            <a:r>
+              <a:rPr lang="ko-KR" altLang="en-US" b="1" i="0" dirty="0">
+                <a:solidFill>
+                  <a:srgbClr val="000000"/>
+                </a:solidFill>
+                <a:effectLst/>
+                <a:highlight>
+                  <a:srgbClr val="FFFFFF"/>
+                </a:highlight>
+                <a:latin typeface="+mn-lt"/>
+                <a:ea typeface="Dotum" panose="020B0600000101010101" pitchFamily="50" charset="-127"/>
+              </a:rPr>
+              <a:t>작성자</a:t>
+            </a:r>
+            <a:r>
+              <a:rPr lang="ko-KR" altLang="en-US" b="0" i="0" dirty="0">
+                <a:solidFill>
+                  <a:srgbClr val="000000"/>
+                </a:solidFill>
+                <a:effectLst/>
+                <a:highlight>
+                  <a:srgbClr val="FFFFFF"/>
+                </a:highlight>
+                <a:latin typeface="+mn-lt"/>
+                <a:ea typeface="Dotum" panose="020B0600000101010101" pitchFamily="50" charset="-127"/>
+              </a:rPr>
+              <a:t> </a:t>
+            </a:r>
+            <a:r>
+              <a:rPr lang="ko-KR" altLang="en-US" b="0" i="0" u="none" strike="noStrike" dirty="0" err="1">
+                <a:solidFill>
+                  <a:srgbClr val="000000"/>
+                </a:solidFill>
+                <a:effectLst/>
+                <a:highlight>
+                  <a:srgbClr val="FFFFFF"/>
+                </a:highlight>
+                <a:latin typeface="+mn-lt"/>
+                <a:ea typeface="Dotum" panose="020B0600000101010101" pitchFamily="50" charset="-127"/>
+                <a:hlinkClick r:id="rId4"/>
+              </a:rPr>
+              <a:t>엠에스리</a:t>
+            </a:r>
+            <a:endParaRPr lang="ko-KR" altLang="en-US" b="0" i="0" dirty="0">
+              <a:solidFill>
+                <a:srgbClr val="000000"/>
+              </a:solidFill>
+              <a:effectLst/>
+              <a:highlight>
+                <a:srgbClr val="FFFFFF"/>
+              </a:highlight>
+              <a:latin typeface="+mn-lt"/>
+              <a:ea typeface="Dotum" panose="020B0600000101010101" pitchFamily="50" charset="-127"/>
+            </a:endParaRPr>
+          </a:p>
+          <a:p>
+            <a:pPr algn="l"/>
+            <a:endParaRPr lang="en-US" altLang="ko-KR" b="0" i="0" dirty="0">
+              <a:solidFill>
+                <a:srgbClr val="000000"/>
+              </a:solidFill>
+              <a:effectLst/>
+              <a:highlight>
+                <a:srgbClr val="FFFFFF"/>
+              </a:highlight>
+              <a:latin typeface="+mn-lt"/>
+              <a:ea typeface="나눔고딕" pitchFamily="2" charset="-127"/>
+            </a:endParaRPr>
+          </a:p>
+          <a:p>
+            <a:pPr algn="l"/>
+            <a:r>
+              <a:rPr lang="ko-KR" altLang="en-US" dirty="0"/>
+              <a:t>디지털 신호 </a:t>
+            </a:r>
+            <a:r>
+              <a:rPr lang="en-US" altLang="ko-KR" dirty="0"/>
+              <a:t>0,1</a:t>
+            </a:r>
+            <a:r>
+              <a:rPr lang="ko-KR" altLang="en-US" dirty="0"/>
+              <a:t>을 빠르게 반복해서 평균값을 내는 것처럼 보이게 하는 것</a:t>
+            </a:r>
+            <a:endParaRPr lang="en-US" altLang="ko-KR" b="0" i="0" dirty="0">
+              <a:solidFill>
+                <a:srgbClr val="000000"/>
+              </a:solidFill>
+              <a:effectLst/>
+              <a:highlight>
+                <a:srgbClr val="FFFFFF"/>
+              </a:highlight>
+              <a:latin typeface="+mn-lt"/>
+              <a:ea typeface="나눔고딕" pitchFamily="2" charset="-127"/>
+            </a:endParaRPr>
+          </a:p>
+          <a:p>
+            <a:pPr algn="l"/>
+            <a:r>
+              <a:rPr lang="ko-KR" altLang="en-US" b="0" i="0" dirty="0">
+                <a:solidFill>
+                  <a:srgbClr val="000000"/>
+                </a:solidFill>
+                <a:effectLst/>
+                <a:highlight>
+                  <a:srgbClr val="FFFFFF"/>
+                </a:highlight>
+                <a:latin typeface="+mn-lt"/>
+                <a:ea typeface="나눔고딕" pitchFamily="2" charset="-127"/>
+              </a:rPr>
+              <a:t>아래 그림과 같이 </a:t>
+            </a:r>
+            <a:r>
+              <a:rPr lang="en-US" altLang="ko-KR" b="0" i="0" dirty="0">
+                <a:solidFill>
+                  <a:srgbClr val="000000"/>
+                </a:solidFill>
+                <a:effectLst/>
+                <a:highlight>
+                  <a:srgbClr val="FFFFFF"/>
+                </a:highlight>
+                <a:latin typeface="+mn-lt"/>
+                <a:ea typeface="나눔고딕" pitchFamily="2" charset="-127"/>
+              </a:rPr>
+              <a:t>5v</a:t>
+            </a:r>
+            <a:r>
+              <a:rPr lang="ko-KR" altLang="en-US" b="0" i="0" dirty="0">
+                <a:solidFill>
+                  <a:srgbClr val="000000"/>
+                </a:solidFill>
+                <a:effectLst/>
+                <a:highlight>
+                  <a:srgbClr val="FFFFFF"/>
+                </a:highlight>
+                <a:latin typeface="+mn-lt"/>
+                <a:ea typeface="나눔고딕" pitchFamily="2" charset="-127"/>
+              </a:rPr>
+              <a:t>의 폭을 </a:t>
+            </a:r>
+            <a:r>
+              <a:rPr lang="en-US" altLang="ko-KR" b="0" i="0" dirty="0">
+                <a:solidFill>
+                  <a:srgbClr val="000000"/>
+                </a:solidFill>
+                <a:effectLst/>
+                <a:highlight>
+                  <a:srgbClr val="FFFFFF"/>
+                </a:highlight>
+                <a:latin typeface="+mn-lt"/>
+                <a:ea typeface="나눔고딕" pitchFamily="2" charset="-127"/>
+              </a:rPr>
+              <a:t>25%, 50%, 75% </a:t>
+            </a:r>
+            <a:r>
+              <a:rPr lang="ko-KR" altLang="en-US" b="0" i="0" dirty="0">
+                <a:solidFill>
+                  <a:srgbClr val="000000"/>
+                </a:solidFill>
+                <a:effectLst/>
+                <a:highlight>
+                  <a:srgbClr val="FFFFFF"/>
+                </a:highlight>
+                <a:latin typeface="+mn-lt"/>
+                <a:ea typeface="나눔고딕" pitchFamily="2" charset="-127"/>
+              </a:rPr>
+              <a:t>등으로 다양하게 바꾸어 아날로그 신호를 나타냅니다</a:t>
+            </a:r>
+            <a:r>
+              <a:rPr lang="en-US" altLang="ko-KR" b="0" i="0" dirty="0">
+                <a:solidFill>
+                  <a:srgbClr val="000000"/>
+                </a:solidFill>
+                <a:effectLst/>
+                <a:highlight>
+                  <a:srgbClr val="FFFFFF"/>
+                </a:highlight>
+                <a:latin typeface="+mn-lt"/>
+                <a:ea typeface="나눔고딕" pitchFamily="2" charset="-127"/>
+              </a:rPr>
+              <a:t>. </a:t>
+            </a:r>
+            <a:r>
+              <a:rPr lang="ko-KR" altLang="en-US" b="0" i="0" dirty="0">
+                <a:solidFill>
+                  <a:srgbClr val="000000"/>
+                </a:solidFill>
+                <a:effectLst/>
+                <a:highlight>
+                  <a:srgbClr val="FFFFFF"/>
+                </a:highlight>
+                <a:latin typeface="+mn-lt"/>
+                <a:ea typeface="나눔고딕" pitchFamily="2" charset="-127"/>
+              </a:rPr>
+              <a:t>즉 </a:t>
+            </a:r>
+            <a:r>
+              <a:rPr lang="en-US" altLang="ko-KR" b="0" i="0" dirty="0">
+                <a:solidFill>
+                  <a:srgbClr val="000000"/>
+                </a:solidFill>
+                <a:effectLst/>
+                <a:highlight>
+                  <a:srgbClr val="FFFFFF"/>
+                </a:highlight>
+                <a:latin typeface="+mn-lt"/>
+                <a:ea typeface="나눔고딕" pitchFamily="2" charset="-127"/>
+              </a:rPr>
+              <a:t>0</a:t>
+            </a:r>
+            <a:r>
+              <a:rPr lang="ko-KR" altLang="en-US" b="0" i="0" dirty="0">
+                <a:solidFill>
+                  <a:srgbClr val="000000"/>
+                </a:solidFill>
+                <a:effectLst/>
+                <a:highlight>
+                  <a:srgbClr val="FFFFFF"/>
+                </a:highlight>
+                <a:latin typeface="+mn-lt"/>
+                <a:ea typeface="나눔고딕" pitchFamily="2" charset="-127"/>
+              </a:rPr>
+              <a:t>부터 </a:t>
+            </a:r>
+            <a:r>
+              <a:rPr lang="en-US" altLang="ko-KR" b="0" i="0" dirty="0">
+                <a:solidFill>
+                  <a:srgbClr val="000000"/>
+                </a:solidFill>
+                <a:effectLst/>
+                <a:highlight>
+                  <a:srgbClr val="FFFFFF"/>
+                </a:highlight>
+                <a:latin typeface="+mn-lt"/>
+                <a:ea typeface="나눔고딕" pitchFamily="2" charset="-127"/>
+              </a:rPr>
+              <a:t>255</a:t>
+            </a:r>
+            <a:r>
+              <a:rPr lang="ko-KR" altLang="en-US" b="0" i="0" dirty="0">
+                <a:solidFill>
+                  <a:srgbClr val="000000"/>
+                </a:solidFill>
+                <a:effectLst/>
+                <a:highlight>
+                  <a:srgbClr val="FFFFFF"/>
+                </a:highlight>
+                <a:latin typeface="+mn-lt"/>
+                <a:ea typeface="나눔고딕" pitchFamily="2" charset="-127"/>
+              </a:rPr>
+              <a:t>까지의 숫자를 표현할 수 있게 되는 것입니다</a:t>
+            </a:r>
+            <a:r>
+              <a:rPr lang="en-US" altLang="ko-KR" b="0" i="0" dirty="0">
+                <a:solidFill>
+                  <a:srgbClr val="000000"/>
+                </a:solidFill>
+                <a:effectLst/>
+                <a:highlight>
+                  <a:srgbClr val="FFFFFF"/>
+                </a:highlight>
+                <a:latin typeface="+mn-lt"/>
+                <a:ea typeface="나눔고딕" pitchFamily="2" charset="-127"/>
+              </a:rPr>
+              <a:t>.</a:t>
+            </a:r>
+            <a:br>
+              <a:rPr lang="ko-KR" altLang="en-US" b="0" i="0" dirty="0">
+                <a:solidFill>
+                  <a:srgbClr val="000000"/>
+                </a:solidFill>
+                <a:effectLst/>
+                <a:highlight>
+                  <a:srgbClr val="FFFFFF"/>
+                </a:highlight>
+                <a:latin typeface="+mn-lt"/>
+                <a:ea typeface="나눔고딕" pitchFamily="2" charset="-127"/>
+              </a:rPr>
+            </a:br>
+            <a:r>
+              <a:rPr lang="ko-KR" altLang="en-US" b="0" i="0" dirty="0">
+                <a:solidFill>
+                  <a:srgbClr val="000000"/>
+                </a:solidFill>
+                <a:effectLst/>
+                <a:highlight>
+                  <a:srgbClr val="FFFFFF"/>
+                </a:highlight>
+                <a:latin typeface="+mn-lt"/>
+                <a:ea typeface="나눔고딕" pitchFamily="2" charset="-127"/>
+              </a:rPr>
+              <a:t>폭이 </a:t>
+            </a:r>
+            <a:r>
+              <a:rPr lang="en-US" altLang="ko-KR" b="0" i="0" dirty="0">
+                <a:solidFill>
+                  <a:srgbClr val="000000"/>
+                </a:solidFill>
+                <a:effectLst/>
+                <a:highlight>
+                  <a:srgbClr val="FFFFFF"/>
+                </a:highlight>
+                <a:latin typeface="+mn-lt"/>
+                <a:ea typeface="나눔고딕" pitchFamily="2" charset="-127"/>
+              </a:rPr>
+              <a:t>25%</a:t>
+            </a:r>
+            <a:r>
+              <a:rPr lang="ko-KR" altLang="en-US" b="0" i="0" dirty="0">
+                <a:solidFill>
+                  <a:srgbClr val="000000"/>
+                </a:solidFill>
+                <a:effectLst/>
+                <a:highlight>
+                  <a:srgbClr val="FFFFFF"/>
+                </a:highlight>
+                <a:latin typeface="+mn-lt"/>
+                <a:ea typeface="나눔고딕" pitchFamily="2" charset="-127"/>
+              </a:rPr>
+              <a:t>일 때는 </a:t>
+            </a:r>
+            <a:r>
+              <a:rPr lang="en-US" altLang="ko-KR" b="0" i="0" dirty="0">
+                <a:solidFill>
+                  <a:srgbClr val="000000"/>
+                </a:solidFill>
+                <a:effectLst/>
+                <a:highlight>
+                  <a:srgbClr val="FFFFFF"/>
+                </a:highlight>
+                <a:latin typeface="+mn-lt"/>
+                <a:ea typeface="나눔고딕" pitchFamily="2" charset="-127"/>
+              </a:rPr>
+              <a:t>64</a:t>
+            </a:r>
+            <a:r>
+              <a:rPr lang="ko-KR" altLang="en-US" b="0" i="0" dirty="0">
+                <a:solidFill>
+                  <a:srgbClr val="000000"/>
+                </a:solidFill>
+                <a:effectLst/>
+                <a:highlight>
+                  <a:srgbClr val="FFFFFF"/>
+                </a:highlight>
+                <a:latin typeface="+mn-lt"/>
+                <a:ea typeface="나눔고딕" pitchFamily="2" charset="-127"/>
+              </a:rPr>
+              <a:t>라는 값을 나타내고</a:t>
+            </a:r>
+            <a:r>
+              <a:rPr lang="en-US" altLang="ko-KR" b="0" i="0" dirty="0">
+                <a:solidFill>
+                  <a:srgbClr val="000000"/>
+                </a:solidFill>
+                <a:effectLst/>
+                <a:highlight>
+                  <a:srgbClr val="FFFFFF"/>
+                </a:highlight>
+                <a:latin typeface="+mn-lt"/>
+                <a:ea typeface="나눔고딕" pitchFamily="2" charset="-127"/>
+              </a:rPr>
+              <a:t>, </a:t>
+            </a:r>
+            <a:r>
+              <a:rPr lang="ko-KR" altLang="en-US" b="0" i="0" dirty="0">
+                <a:solidFill>
+                  <a:srgbClr val="000000"/>
+                </a:solidFill>
+                <a:effectLst/>
+                <a:highlight>
+                  <a:srgbClr val="FFFFFF"/>
+                </a:highlight>
+                <a:latin typeface="+mn-lt"/>
+                <a:ea typeface="나눔고딕" pitchFamily="2" charset="-127"/>
+              </a:rPr>
+              <a:t>폭이 </a:t>
+            </a:r>
+            <a:r>
+              <a:rPr lang="en-US" altLang="ko-KR" b="0" i="0" dirty="0">
+                <a:solidFill>
+                  <a:srgbClr val="000000"/>
+                </a:solidFill>
+                <a:effectLst/>
+                <a:highlight>
+                  <a:srgbClr val="FFFFFF"/>
+                </a:highlight>
+                <a:latin typeface="+mn-lt"/>
+                <a:ea typeface="나눔고딕" pitchFamily="2" charset="-127"/>
+              </a:rPr>
+              <a:t>50%</a:t>
+            </a:r>
+            <a:r>
+              <a:rPr lang="ko-KR" altLang="en-US" b="0" i="0" dirty="0">
+                <a:solidFill>
+                  <a:srgbClr val="000000"/>
+                </a:solidFill>
+                <a:effectLst/>
+                <a:highlight>
+                  <a:srgbClr val="FFFFFF"/>
+                </a:highlight>
+                <a:latin typeface="+mn-lt"/>
+                <a:ea typeface="나눔고딕" pitchFamily="2" charset="-127"/>
+              </a:rPr>
+              <a:t>일 때는 </a:t>
+            </a:r>
+            <a:r>
+              <a:rPr lang="en-US" altLang="ko-KR" b="0" i="0" dirty="0">
+                <a:solidFill>
+                  <a:srgbClr val="000000"/>
+                </a:solidFill>
+                <a:effectLst/>
+                <a:highlight>
+                  <a:srgbClr val="FFFFFF"/>
+                </a:highlight>
+                <a:latin typeface="+mn-lt"/>
+                <a:ea typeface="나눔고딕" pitchFamily="2" charset="-127"/>
+              </a:rPr>
+              <a:t>127</a:t>
+            </a:r>
+            <a:r>
+              <a:rPr lang="ko-KR" altLang="en-US" b="0" i="0" dirty="0">
+                <a:solidFill>
+                  <a:srgbClr val="000000"/>
+                </a:solidFill>
+                <a:effectLst/>
+                <a:highlight>
+                  <a:srgbClr val="FFFFFF"/>
+                </a:highlight>
+                <a:latin typeface="+mn-lt"/>
+                <a:ea typeface="나눔고딕" pitchFamily="2" charset="-127"/>
+              </a:rPr>
+              <a:t>이라는 값을 나타내는 방식입니다</a:t>
+            </a:r>
+            <a:r>
+              <a:rPr lang="en-US" altLang="ko-KR" b="0" i="0" dirty="0">
+                <a:solidFill>
+                  <a:srgbClr val="000000"/>
+                </a:solidFill>
+                <a:effectLst/>
+                <a:highlight>
+                  <a:srgbClr val="FFFFFF"/>
+                </a:highlight>
+                <a:latin typeface="+mn-lt"/>
+                <a:ea typeface="나눔고딕" pitchFamily="2" charset="-127"/>
+              </a:rPr>
+              <a:t>.</a:t>
+            </a:r>
+            <a:r>
+              <a:rPr lang="en-US" altLang="ko-KR" b="1" i="0" dirty="0">
+                <a:solidFill>
+                  <a:srgbClr val="000000"/>
+                </a:solidFill>
+                <a:effectLst/>
+                <a:highlight>
+                  <a:srgbClr val="FFFFFF"/>
+                </a:highlight>
+                <a:latin typeface="+mn-lt"/>
+                <a:ea typeface="나눔고딕" pitchFamily="2" charset="-127"/>
+              </a:rPr>
+              <a:t>[</a:t>
+            </a:r>
+            <a:r>
+              <a:rPr lang="ko-KR" altLang="en-US" b="1" i="0" dirty="0">
+                <a:solidFill>
+                  <a:srgbClr val="000000"/>
+                </a:solidFill>
+                <a:effectLst/>
+                <a:highlight>
+                  <a:srgbClr val="FFFFFF"/>
+                </a:highlight>
+                <a:latin typeface="+mn-lt"/>
+                <a:ea typeface="나눔고딕" pitchFamily="2" charset="-127"/>
+              </a:rPr>
+              <a:t>출처</a:t>
+            </a:r>
+            <a:r>
+              <a:rPr lang="en-US" altLang="ko-KR" b="1" i="0" dirty="0">
+                <a:solidFill>
+                  <a:srgbClr val="000000"/>
+                </a:solidFill>
+                <a:effectLst/>
+                <a:highlight>
+                  <a:srgbClr val="FFFFFF"/>
+                </a:highlight>
+                <a:latin typeface="+mn-lt"/>
+                <a:ea typeface="나눔고딕" pitchFamily="2" charset="-127"/>
+              </a:rPr>
+              <a:t>]</a:t>
+            </a:r>
+            <a:r>
+              <a:rPr lang="ko-KR" altLang="en-US" b="0" i="0" dirty="0">
+                <a:solidFill>
+                  <a:srgbClr val="000000"/>
+                </a:solidFill>
+                <a:effectLst/>
+                <a:highlight>
+                  <a:srgbClr val="FFFFFF"/>
+                </a:highlight>
+                <a:latin typeface="+mn-lt"/>
+                <a:ea typeface="나눔고딕" pitchFamily="2" charset="-127"/>
+              </a:rPr>
+              <a:t> </a:t>
+            </a:r>
+            <a:r>
+              <a:rPr lang="en-US" altLang="ko-KR" b="0" i="0" u="sng" dirty="0">
+                <a:solidFill>
+                  <a:srgbClr val="608CBA"/>
+                </a:solidFill>
+                <a:effectLst/>
+                <a:highlight>
+                  <a:srgbClr val="FFFFFF"/>
+                </a:highlight>
+                <a:latin typeface="+mn-lt"/>
+                <a:ea typeface="나눔고딕" pitchFamily="2" charset="-127"/>
+                <a:hlinkClick r:id="rId5"/>
+              </a:rPr>
+              <a:t>[</a:t>
+            </a:r>
+            <a:r>
+              <a:rPr lang="ko-KR" altLang="en-US" b="0" i="0" u="sng" dirty="0">
+                <a:solidFill>
+                  <a:srgbClr val="608CBA"/>
+                </a:solidFill>
+                <a:effectLst/>
+                <a:highlight>
+                  <a:srgbClr val="FFFFFF"/>
+                </a:highlight>
+                <a:latin typeface="+mn-lt"/>
+                <a:ea typeface="나눔고딕" pitchFamily="2" charset="-127"/>
+                <a:hlinkClick r:id="rId5"/>
+              </a:rPr>
+              <a:t>가장 쉬운 </a:t>
+            </a:r>
+            <a:r>
+              <a:rPr lang="ko-KR" altLang="en-US" b="0" i="0" u="sng" dirty="0" err="1">
+                <a:solidFill>
+                  <a:srgbClr val="608CBA"/>
+                </a:solidFill>
+                <a:effectLst/>
+                <a:highlight>
+                  <a:srgbClr val="FFFFFF"/>
+                </a:highlight>
+                <a:latin typeface="+mn-lt"/>
+                <a:ea typeface="나눔고딕" pitchFamily="2" charset="-127"/>
+                <a:hlinkClick r:id="rId5"/>
+              </a:rPr>
+              <a:t>아두이노</a:t>
+            </a:r>
+            <a:r>
+              <a:rPr lang="ko-KR" altLang="en-US" b="0" i="0" u="sng" dirty="0">
+                <a:solidFill>
+                  <a:srgbClr val="608CBA"/>
+                </a:solidFill>
+                <a:effectLst/>
+                <a:highlight>
+                  <a:srgbClr val="FFFFFF"/>
+                </a:highlight>
+                <a:latin typeface="+mn-lt"/>
+                <a:ea typeface="나눔고딕" pitchFamily="2" charset="-127"/>
+                <a:hlinkClick r:id="rId5"/>
+              </a:rPr>
+              <a:t> 강의</a:t>
+            </a:r>
+            <a:r>
+              <a:rPr lang="en-US" altLang="ko-KR" b="0" i="0" u="sng" dirty="0">
+                <a:solidFill>
+                  <a:srgbClr val="608CBA"/>
+                </a:solidFill>
+                <a:effectLst/>
+                <a:highlight>
+                  <a:srgbClr val="FFFFFF"/>
+                </a:highlight>
+                <a:latin typeface="+mn-lt"/>
+                <a:ea typeface="나눔고딕" pitchFamily="2" charset="-127"/>
+                <a:hlinkClick r:id="rId5"/>
+              </a:rPr>
+              <a:t>] (33) PWM</a:t>
+            </a:r>
+            <a:r>
+              <a:rPr lang="en-US" altLang="ko-KR" b="0" i="0" dirty="0">
+                <a:solidFill>
+                  <a:srgbClr val="000000"/>
+                </a:solidFill>
+                <a:effectLst/>
+                <a:highlight>
+                  <a:srgbClr val="FFFFFF"/>
+                </a:highlight>
+                <a:latin typeface="+mn-lt"/>
+                <a:ea typeface="나눔고딕" pitchFamily="2" charset="-127"/>
+              </a:rPr>
+              <a:t>|</a:t>
+            </a:r>
+            <a:r>
+              <a:rPr lang="ko-KR" altLang="en-US" b="1" i="0" dirty="0">
+                <a:solidFill>
+                  <a:srgbClr val="000000"/>
+                </a:solidFill>
+                <a:effectLst/>
+                <a:highlight>
+                  <a:srgbClr val="FFFFFF"/>
+                </a:highlight>
+                <a:latin typeface="+mn-lt"/>
+                <a:ea typeface="나눔고딕" pitchFamily="2" charset="-127"/>
+              </a:rPr>
+              <a:t>작성자</a:t>
+            </a:r>
+            <a:r>
+              <a:rPr lang="ko-KR" altLang="en-US" b="0" i="0" dirty="0">
+                <a:solidFill>
+                  <a:srgbClr val="000000"/>
+                </a:solidFill>
+                <a:effectLst/>
+                <a:highlight>
+                  <a:srgbClr val="FFFFFF"/>
+                </a:highlight>
+                <a:latin typeface="+mn-lt"/>
+                <a:ea typeface="나눔고딕" pitchFamily="2" charset="-127"/>
+              </a:rPr>
+              <a:t> </a:t>
+            </a:r>
+            <a:r>
+              <a:rPr lang="ko-KR" altLang="en-US" b="0" i="0" u="sng" dirty="0">
+                <a:solidFill>
+                  <a:srgbClr val="608CBA"/>
+                </a:solidFill>
+                <a:effectLst/>
+                <a:highlight>
+                  <a:srgbClr val="FFFFFF"/>
+                </a:highlight>
+                <a:latin typeface="+mn-lt"/>
+                <a:ea typeface="나눔고딕" pitchFamily="2" charset="-127"/>
+                <a:hlinkClick r:id="rId6"/>
+              </a:rPr>
+              <a:t>코딩타임</a:t>
+            </a:r>
+            <a:endParaRPr lang="ko-KR" altLang="en-US" b="0" i="0" dirty="0">
+              <a:solidFill>
+                <a:srgbClr val="000000"/>
+              </a:solidFill>
+              <a:effectLst/>
+              <a:highlight>
+                <a:srgbClr val="FFFFFF"/>
+              </a:highlight>
+              <a:latin typeface="+mn-lt"/>
+              <a:ea typeface="나눔고딕" pitchFamily="2" charset="-127"/>
+            </a:endParaRPr>
+          </a:p>
+          <a:p>
+            <a:br>
+              <a:rPr lang="ko-KR" altLang="en-US" dirty="0">
+                <a:latin typeface="+mn-lt"/>
+              </a:rPr>
+            </a:br>
+            <a:endParaRPr lang="en-US" altLang="ko-KR" dirty="0">
+              <a:latin typeface="+mn-lt"/>
+            </a:endParaRPr>
+          </a:p>
+        </p:txBody>
+      </p:sp>
+      <p:sp>
+        <p:nvSpPr>
+          <p:cNvPr id="4" name="슬라이드 번호 개체 틀 3">
+            <a:extLst>
+              <a:ext uri="{FF2B5EF4-FFF2-40B4-BE49-F238E27FC236}">
+                <a16:creationId xmlns:a16="http://schemas.microsoft.com/office/drawing/2014/main" id="{B587AB6C-F21A-D8AC-6B63-C78ACA698764}"/>
+              </a:ext>
+            </a:extLst>
+          </p:cNvPr>
+          <p:cNvSpPr>
+            <a:spLocks noGrp="1"/>
+          </p:cNvSpPr>
+          <p:nvPr>
+            <p:ph type="sldNum" sz="quarter" idx="5"/>
+          </p:nvPr>
+        </p:nvSpPr>
+        <p:spPr/>
+        <p:txBody>
+          <a:bodyPr/>
+          <a:lstStyle/>
+          <a:p>
+            <a:fld id="{3599D024-DE68-44ED-822F-D827F84FBD4A}" type="slidenum">
+              <a:rPr lang="ko-KR" altLang="en-US" smtClean="0"/>
+              <a:t>2</a:t>
+            </a:fld>
+            <a:endParaRPr lang="ko-KR" altLang="en-US"/>
+          </a:p>
+        </p:txBody>
+      </p:sp>
+    </p:spTree>
+    <p:extLst>
+      <p:ext uri="{BB962C8B-B14F-4D97-AF65-F5344CB8AC3E}">
+        <p14:creationId xmlns:p14="http://schemas.microsoft.com/office/powerpoint/2010/main" val="2240714740"/>
+      </p:ext>
+    </p:extLst>
+  </p:cSld>
+  <p:clrMapOvr>
+    <a:masterClrMapping/>
+  </p:clrMapOvr>
+</p:notes>
+</file>
+
+<file path=ppt/notesSlides/notesSlide3.xml><?xml version="1.0" encoding="utf-8"?>
+<p:notes xmlns:a="http://schemas.openxmlformats.org/drawingml/2006/main" xmlns:r="http://schemas.openxmlformats.org/officeDocument/2006/relationships" xmlns:p="http://schemas.openxmlformats.org/presentationml/2006/main">
+  <p:cSld>
+    <p:spTree>
+      <p:nvGrpSpPr>
+        <p:cNvPr id="1" name="">
+          <a:extLst>
+            <a:ext uri="{FF2B5EF4-FFF2-40B4-BE49-F238E27FC236}">
               <a16:creationId xmlns:a16="http://schemas.microsoft.com/office/drawing/2014/main" id="{C56F8277-0718-E14B-8080-F17438423F31}"/>
             </a:ext>
           </a:extLst>
@@ -1522,7 +2506,7 @@
           <a:p>
             <a:fld id="{3599D024-DE68-44ED-822F-D827F84FBD4A}" type="slidenum">
               <a:rPr lang="ko-KR" altLang="en-US" smtClean="0"/>
-              <a:t>3</a:t>
+              <a:t>5</a:t>
             </a:fld>
             <a:endParaRPr lang="ko-KR" altLang="en-US"/>
           </a:p>
@@ -1541,7 +2525,7 @@
 </p:notes>
 </file>
 
-<file path=ppt/notesSlides/notesSlide3.xml><?xml version="1.0" encoding="utf-8"?>
+<file path=ppt/notesSlides/notesSlide4.xml><?xml version="1.0" encoding="utf-8"?>
 <p:notes xmlns:a="http://schemas.openxmlformats.org/drawingml/2006/main" xmlns:r="http://schemas.openxmlformats.org/officeDocument/2006/relationships" xmlns:p="http://schemas.openxmlformats.org/presentationml/2006/main">
   <p:cSld>
     <p:spTree>
@@ -1633,7 +2617,7 @@
           <a:p>
             <a:fld id="{3599D024-DE68-44ED-822F-D827F84FBD4A}" type="slidenum">
               <a:rPr lang="ko-KR" altLang="en-US" smtClean="0"/>
-              <a:t>4</a:t>
+              <a:t>6</a:t>
             </a:fld>
             <a:endParaRPr lang="ko-KR" altLang="en-US"/>
           </a:p>
@@ -1652,7 +2636,7 @@
 </p:notes>
 </file>
 
-<file path=ppt/notesSlides/notesSlide4.xml><?xml version="1.0" encoding="utf-8"?>
+<file path=ppt/notesSlides/notesSlide5.xml><?xml version="1.0" encoding="utf-8"?>
 <p:notes xmlns:a="http://schemas.openxmlformats.org/drawingml/2006/main" xmlns:r="http://schemas.openxmlformats.org/officeDocument/2006/relationships" xmlns:p="http://schemas.openxmlformats.org/presentationml/2006/main">
   <p:cSld>
     <p:spTree>
@@ -1744,7 +2728,7 @@
           <a:p>
             <a:fld id="{3599D024-DE68-44ED-822F-D827F84FBD4A}" type="slidenum">
               <a:rPr lang="ko-KR" altLang="en-US" smtClean="0"/>
-              <a:t>5</a:t>
+              <a:t>7</a:t>
             </a:fld>
             <a:endParaRPr lang="ko-KR" altLang="en-US"/>
           </a:p>
@@ -1763,7 +2747,7 @@
 </p:notes>
 </file>
 
-<file path=ppt/notesSlides/notesSlide5.xml><?xml version="1.0" encoding="utf-8"?>
+<file path=ppt/notesSlides/notesSlide6.xml><?xml version="1.0" encoding="utf-8"?>
 <p:notes xmlns:a="http://schemas.openxmlformats.org/drawingml/2006/main" xmlns:r="http://schemas.openxmlformats.org/officeDocument/2006/relationships" xmlns:p="http://schemas.openxmlformats.org/presentationml/2006/main">
   <p:cSld>
     <p:spTree>
@@ -1855,7 +2839,7 @@
           <a:p>
             <a:fld id="{3599D024-DE68-44ED-822F-D827F84FBD4A}" type="slidenum">
               <a:rPr lang="ko-KR" altLang="en-US" smtClean="0"/>
-              <a:t>6</a:t>
+              <a:t>8</a:t>
             </a:fld>
             <a:endParaRPr lang="ko-KR" altLang="en-US"/>
           </a:p>
@@ -1874,7 +2858,7 @@
 </p:notes>
 </file>
 
-<file path=ppt/notesSlides/notesSlide6.xml><?xml version="1.0" encoding="utf-8"?>
+<file path=ppt/notesSlides/notesSlide7.xml><?xml version="1.0" encoding="utf-8"?>
 <p:notes xmlns:a="http://schemas.openxmlformats.org/drawingml/2006/main" xmlns:r="http://schemas.openxmlformats.org/officeDocument/2006/relationships" xmlns:p="http://schemas.openxmlformats.org/presentationml/2006/main">
   <p:cSld>
     <p:spTree>
@@ -1966,7 +2950,7 @@
           <a:p>
             <a:fld id="{3599D024-DE68-44ED-822F-D827F84FBD4A}" type="slidenum">
               <a:rPr lang="ko-KR" altLang="en-US" smtClean="0"/>
-              <a:t>7</a:t>
+              <a:t>9</a:t>
             </a:fld>
             <a:endParaRPr lang="ko-KR" altLang="en-US"/>
           </a:p>
@@ -1985,7 +2969,7 @@
 </p:notes>
 </file>
 
-<file path=ppt/notesSlides/notesSlide7.xml><?xml version="1.0" encoding="utf-8"?>
+<file path=ppt/notesSlides/notesSlide8.xml><?xml version="1.0" encoding="utf-8"?>
 <p:notes xmlns:a="http://schemas.openxmlformats.org/drawingml/2006/main" xmlns:r="http://schemas.openxmlformats.org/officeDocument/2006/relationships" xmlns:p="http://schemas.openxmlformats.org/presentationml/2006/main">
   <p:cSld>
     <p:spTree>
@@ -2077,7 +3061,7 @@
           <a:p>
             <a:fld id="{3599D024-DE68-44ED-822F-D827F84FBD4A}" type="slidenum">
               <a:rPr lang="ko-KR" altLang="en-US" smtClean="0"/>
-              <a:t>8</a:t>
+              <a:t>10</a:t>
             </a:fld>
             <a:endParaRPr lang="ko-KR" altLang="en-US"/>
           </a:p>
@@ -3577,1629 +4561,7 @@
 </p:sld>
 </file>
 
-<file path=ppt/slides/slide2.xml><?xml version="1.0" encoding="utf-8"?>
-<p:sld xmlns:a="http://schemas.openxmlformats.org/drawingml/2006/main" xmlns:r="http://schemas.openxmlformats.org/officeDocument/2006/relationships" xmlns:p="http://schemas.openxmlformats.org/presentationml/2006/main">
-  <p:cSld>
-    <p:spTree>
-      <p:nvGrpSpPr>
-        <p:cNvPr id="1" name=""/>
-        <p:cNvGrpSpPr/>
-        <p:nvPr/>
-      </p:nvGrpSpPr>
-      <p:grpSpPr>
-        <a:xfrm>
-          <a:off x="0" y="0"/>
-          <a:ext cx="0" cy="0"/>
-          <a:chOff x="0" y="0"/>
-          <a:chExt cx="0" cy="0"/>
-        </a:xfrm>
-      </p:grpSpPr>
-      <p:sp>
-        <p:nvSpPr>
-          <p:cNvPr id="2" name="제목 1">
-            <a:extLst>
-              <a:ext uri="{FF2B5EF4-FFF2-40B4-BE49-F238E27FC236}">
-                <a16:creationId xmlns:a16="http://schemas.microsoft.com/office/drawing/2014/main" id="{452CA950-7C15-8757-9706-C37D4E431C47}"/>
-              </a:ext>
-            </a:extLst>
-          </p:cNvPr>
-          <p:cNvSpPr>
-            <a:spLocks noGrp="1"/>
-          </p:cNvSpPr>
-          <p:nvPr>
-            <p:ph type="title"/>
-          </p:nvPr>
-        </p:nvSpPr>
-        <p:spPr/>
-        <p:txBody>
-          <a:bodyPr/>
-          <a:lstStyle/>
-          <a:p>
-            <a:endParaRPr lang="ko-KR" altLang="en-US"/>
-          </a:p>
-        </p:txBody>
-      </p:sp>
-      <p:sp>
-        <p:nvSpPr>
-          <p:cNvPr id="3" name="내용 개체 틀 2">
-            <a:extLst>
-              <a:ext uri="{FF2B5EF4-FFF2-40B4-BE49-F238E27FC236}">
-                <a16:creationId xmlns:a16="http://schemas.microsoft.com/office/drawing/2014/main" id="{CDF40A6C-655C-8074-8582-0781B4CBD5BF}"/>
-              </a:ext>
-            </a:extLst>
-          </p:cNvPr>
-          <p:cNvSpPr>
-            <a:spLocks noGrp="1"/>
-          </p:cNvSpPr>
-          <p:nvPr>
-            <p:ph idx="1"/>
-          </p:nvPr>
-        </p:nvSpPr>
-        <p:spPr/>
-        <p:txBody>
-          <a:bodyPr/>
-          <a:lstStyle/>
-          <a:p>
-            <a:endParaRPr lang="ko-KR" altLang="en-US"/>
-          </a:p>
-        </p:txBody>
-      </p:sp>
-      <p:sp>
-        <p:nvSpPr>
-          <p:cNvPr id="4" name="슬라이드 번호 개체 틀 3">
-            <a:extLst>
-              <a:ext uri="{FF2B5EF4-FFF2-40B4-BE49-F238E27FC236}">
-                <a16:creationId xmlns:a16="http://schemas.microsoft.com/office/drawing/2014/main" id="{A6705646-5EB3-CECB-110A-29B75A0DA982}"/>
-              </a:ext>
-            </a:extLst>
-          </p:cNvPr>
-          <p:cNvSpPr>
-            <a:spLocks noGrp="1"/>
-          </p:cNvSpPr>
-          <p:nvPr>
-            <p:ph type="sldNum" sz="quarter" idx="12"/>
-          </p:nvPr>
-        </p:nvSpPr>
-        <p:spPr/>
-        <p:txBody>
-          <a:bodyPr/>
-          <a:lstStyle/>
-          <a:p>
-            <a:fld id="{083A2CE0-18CD-4102-B738-4ACFF9E68BA4}" type="slidenum">
-              <a:rPr lang="ko-KR" altLang="en-US" smtClean="0"/>
-              <a:pPr/>
-              <a:t>2</a:t>
-            </a:fld>
-            <a:endParaRPr lang="ko-KR" altLang="en-US" dirty="0"/>
-          </a:p>
-        </p:txBody>
-      </p:sp>
-    </p:spTree>
-    <p:extLst>
-      <p:ext uri="{BB962C8B-B14F-4D97-AF65-F5344CB8AC3E}">
-        <p14:creationId xmlns:p14="http://schemas.microsoft.com/office/powerpoint/2010/main" val="1676128470"/>
-      </p:ext>
-    </p:extLst>
-  </p:cSld>
-  <p:clrMapOvr>
-    <a:masterClrMapping/>
-  </p:clrMapOvr>
-</p:sld>
-</file>
-
-<file path=ppt/slides/slide3.xml><?xml version="1.0" encoding="utf-8"?>
-<p:sld xmlns:a="http://schemas.openxmlformats.org/drawingml/2006/main" xmlns:r="http://schemas.openxmlformats.org/officeDocument/2006/relationships" xmlns:p="http://schemas.openxmlformats.org/presentationml/2006/main">
-  <p:cSld>
-    <p:spTree>
-      <p:nvGrpSpPr>
-        <p:cNvPr id="1" name="">
-          <a:extLst>
-            <a:ext uri="{FF2B5EF4-FFF2-40B4-BE49-F238E27FC236}">
-              <a16:creationId xmlns:a16="http://schemas.microsoft.com/office/drawing/2014/main" id="{8EC17157-F89F-3863-BDEC-EEAC44D1543B}"/>
-            </a:ext>
-          </a:extLst>
-        </p:cNvPr>
-        <p:cNvGrpSpPr/>
-        <p:nvPr/>
-      </p:nvGrpSpPr>
-      <p:grpSpPr>
-        <a:xfrm>
-          <a:off x="0" y="0"/>
-          <a:ext cx="0" cy="0"/>
-          <a:chOff x="0" y="0"/>
-          <a:chExt cx="0" cy="0"/>
-        </a:xfrm>
-      </p:grpSpPr>
-      <p:sp>
-        <p:nvSpPr>
-          <p:cNvPr id="2" name="제목 1">
-            <a:extLst>
-              <a:ext uri="{FF2B5EF4-FFF2-40B4-BE49-F238E27FC236}">
-                <a16:creationId xmlns:a16="http://schemas.microsoft.com/office/drawing/2014/main" id="{5C3F7929-03E1-AE29-D141-5B75C22D8B83}"/>
-              </a:ext>
-            </a:extLst>
-          </p:cNvPr>
-          <p:cNvSpPr>
-            <a:spLocks noGrp="1"/>
-          </p:cNvSpPr>
-          <p:nvPr>
-            <p:ph type="title"/>
-          </p:nvPr>
-        </p:nvSpPr>
-        <p:spPr/>
-        <p:txBody>
-          <a:bodyPr/>
-          <a:lstStyle/>
-          <a:p>
-            <a:r>
-              <a:rPr lang="ko-KR" altLang="en-US" dirty="0" err="1"/>
-              <a:t>온습도</a:t>
-            </a:r>
-            <a:r>
-              <a:rPr lang="ko-KR" altLang="en-US" dirty="0"/>
-              <a:t> 센서</a:t>
-            </a:r>
-          </a:p>
-        </p:txBody>
-      </p:sp>
-      <p:sp>
-        <p:nvSpPr>
-          <p:cNvPr id="8" name="TextBox 7">
-            <a:extLst>
-              <a:ext uri="{FF2B5EF4-FFF2-40B4-BE49-F238E27FC236}">
-                <a16:creationId xmlns:a16="http://schemas.microsoft.com/office/drawing/2014/main" id="{0709B2ED-95B9-BC22-1DC5-C2ED1FCCABC3}"/>
-              </a:ext>
-            </a:extLst>
-          </p:cNvPr>
-          <p:cNvSpPr txBox="1"/>
-          <p:nvPr/>
-        </p:nvSpPr>
-        <p:spPr>
-          <a:xfrm>
-            <a:off x="6096000" y="1730405"/>
-            <a:ext cx="4216474" cy="369332"/>
-          </a:xfrm>
-          <a:prstGeom prst="rect">
-            <a:avLst/>
-          </a:prstGeom>
-          <a:noFill/>
-        </p:spPr>
-        <p:txBody>
-          <a:bodyPr wrap="square" rtlCol="0">
-            <a:spAutoFit/>
-          </a:bodyPr>
-          <a:lstStyle/>
-          <a:p>
-            <a:endParaRPr lang="en-US" altLang="ko-KR" dirty="0">
-              <a:latin typeface="G마켓 산스 TTF Medium" panose="02000000000000000000" pitchFamily="2" charset="-127"/>
-              <a:ea typeface="G마켓 산스 TTF Medium" panose="02000000000000000000" pitchFamily="2" charset="-127"/>
-            </a:endParaRPr>
-          </a:p>
-        </p:txBody>
-      </p:sp>
-      <p:sp>
-        <p:nvSpPr>
-          <p:cNvPr id="10" name="내용 개체 틀 2">
-            <a:extLst>
-              <a:ext uri="{FF2B5EF4-FFF2-40B4-BE49-F238E27FC236}">
-                <a16:creationId xmlns:a16="http://schemas.microsoft.com/office/drawing/2014/main" id="{C3ED7274-2594-9B74-39C9-09E22BA1969D}"/>
-              </a:ext>
-            </a:extLst>
-          </p:cNvPr>
-          <p:cNvSpPr>
-            <a:spLocks noGrp="1"/>
-          </p:cNvSpPr>
-          <p:nvPr>
-            <p:ph idx="1"/>
-          </p:nvPr>
-        </p:nvSpPr>
-        <p:spPr>
-          <a:xfrm>
-            <a:off x="5603760" y="1884556"/>
-            <a:ext cx="5861280" cy="4292406"/>
-          </a:xfrm>
-        </p:spPr>
-        <p:txBody>
-          <a:bodyPr>
-            <a:normAutofit/>
-          </a:bodyPr>
-          <a:lstStyle/>
-          <a:p>
-            <a:r>
-              <a:rPr lang="ko-KR" altLang="en-US" sz="2000" dirty="0"/>
-              <a:t>온도 센서와 습도 센서가 하나의 전자 부품으로 구성된 장치</a:t>
-            </a:r>
-            <a:endParaRPr lang="en-US" altLang="ko-KR" sz="2000" dirty="0"/>
-          </a:p>
-          <a:p>
-            <a:r>
-              <a:rPr lang="ko-KR" altLang="en-US" sz="2000" dirty="0" err="1"/>
-              <a:t>온습도</a:t>
-            </a:r>
-            <a:r>
-              <a:rPr lang="ko-KR" altLang="en-US" sz="2000" dirty="0"/>
-              <a:t> 측정 범위와 정확도에 따라 </a:t>
-            </a:r>
-            <a:r>
-              <a:rPr lang="en-US" altLang="ko-KR" sz="2000" dirty="0"/>
-              <a:t>DHT11 </a:t>
-            </a:r>
-            <a:r>
-              <a:rPr lang="ko-KR" altLang="en-US" sz="2000" dirty="0"/>
-              <a:t>모델과 </a:t>
-            </a:r>
-            <a:r>
-              <a:rPr lang="en-US" altLang="ko-KR" sz="2000" dirty="0"/>
-              <a:t>DHT22 </a:t>
-            </a:r>
-            <a:r>
-              <a:rPr lang="ko-KR" altLang="en-US" sz="2000" dirty="0"/>
-              <a:t>모델로 나뉘며</a:t>
-            </a:r>
-            <a:r>
-              <a:rPr lang="en-US" altLang="ko-KR" sz="2000" dirty="0"/>
-              <a:t>, </a:t>
-            </a:r>
-            <a:r>
-              <a:rPr lang="ko-KR" altLang="en-US" sz="2000" dirty="0"/>
-              <a:t>두 모델은 동작 전압과 소비 전류가 동일하지만 온도와 습도 측정 범위와 샘플링 주기가 다르다</a:t>
-            </a:r>
-            <a:r>
-              <a:rPr lang="en-US" altLang="ko-KR" sz="2000" dirty="0"/>
-              <a:t>.</a:t>
-            </a:r>
-          </a:p>
-        </p:txBody>
-      </p:sp>
-      <p:pic>
-        <p:nvPicPr>
-          <p:cNvPr id="63492" name="Picture 4" descr="Grove - Temperature &amp; Humidity Sensor Pro (DHT22/AM2302) - The Pi Hut">
-            <a:extLst>
-              <a:ext uri="{FF2B5EF4-FFF2-40B4-BE49-F238E27FC236}">
-                <a16:creationId xmlns:a16="http://schemas.microsoft.com/office/drawing/2014/main" id="{97A7A104-B75B-B88E-9DF4-8E0A95DFBF67}"/>
-              </a:ext>
-            </a:extLst>
-          </p:cNvPr>
-          <p:cNvPicPr>
-            <a:picLocks noChangeAspect="1" noChangeArrowheads="1"/>
-          </p:cNvPicPr>
-          <p:nvPr/>
-        </p:nvPicPr>
-        <p:blipFill rotWithShape="1">
-          <a:blip r:embed="rId3">
-            <a:extLst>
-              <a:ext uri="{28A0092B-C50C-407E-A947-70E740481C1C}">
-                <a14:useLocalDpi xmlns:a14="http://schemas.microsoft.com/office/drawing/2010/main" val="0"/>
-              </a:ext>
-            </a:extLst>
-          </a:blip>
-          <a:srcRect l="4445" t="9931" b="9931"/>
-          <a:stretch>
-            <a:fillRect/>
-          </a:stretch>
-        </p:blipFill>
-        <p:spPr bwMode="auto">
-          <a:xfrm>
-            <a:off x="2058683" y="3248434"/>
-            <a:ext cx="3155455" cy="2646362"/>
-          </a:xfrm>
-          <a:prstGeom prst="rect">
-            <a:avLst/>
-          </a:prstGeom>
-          <a:noFill/>
-          <a:extLst>
-            <a:ext uri="{909E8E84-426E-40DD-AFC4-6F175D3DCCD1}">
-              <a14:hiddenFill xmlns:a14="http://schemas.microsoft.com/office/drawing/2010/main">
-                <a:solidFill>
-                  <a:srgbClr val="FFFFFF"/>
-                </a:solidFill>
-              </a14:hiddenFill>
-            </a:ext>
-          </a:extLst>
-        </p:spPr>
-      </p:pic>
-      <p:pic>
-        <p:nvPicPr>
-          <p:cNvPr id="63490" name="Picture 2" descr="아두이노 온습도 센서(DHT11) - 주식회사 씽크타운">
-            <a:extLst>
-              <a:ext uri="{FF2B5EF4-FFF2-40B4-BE49-F238E27FC236}">
-                <a16:creationId xmlns:a16="http://schemas.microsoft.com/office/drawing/2014/main" id="{37D90426-86AE-04A6-7530-D80E9E20459B}"/>
-              </a:ext>
-            </a:extLst>
-          </p:cNvPr>
-          <p:cNvPicPr>
-            <a:picLocks noChangeAspect="1" noChangeArrowheads="1"/>
-          </p:cNvPicPr>
-          <p:nvPr/>
-        </p:nvPicPr>
-        <p:blipFill rotWithShape="1">
-          <a:blip r:embed="rId4">
-            <a:extLst>
-              <a:ext uri="{28A0092B-C50C-407E-A947-70E740481C1C}">
-                <a14:useLocalDpi xmlns:a14="http://schemas.microsoft.com/office/drawing/2010/main" val="0"/>
-              </a:ext>
-            </a:extLst>
-          </a:blip>
-          <a:srcRect l="12107" t="10670" r="13255" b="9581"/>
-          <a:stretch>
-            <a:fillRect/>
-          </a:stretch>
-        </p:blipFill>
-        <p:spPr bwMode="auto">
-          <a:xfrm>
-            <a:off x="726960" y="1549839"/>
-            <a:ext cx="2270240" cy="2425700"/>
-          </a:xfrm>
-          <a:prstGeom prst="rect">
-            <a:avLst/>
-          </a:prstGeom>
-          <a:noFill/>
-          <a:extLst>
-            <a:ext uri="{909E8E84-426E-40DD-AFC4-6F175D3DCCD1}">
-              <a14:hiddenFill xmlns:a14="http://schemas.microsoft.com/office/drawing/2010/main">
-                <a:solidFill>
-                  <a:srgbClr val="FFFFFF"/>
-                </a:solidFill>
-              </a14:hiddenFill>
-            </a:ext>
-          </a:extLst>
-        </p:spPr>
-      </p:pic>
-    </p:spTree>
-    <p:extLst>
-      <p:ext uri="{BB962C8B-B14F-4D97-AF65-F5344CB8AC3E}">
-        <p14:creationId xmlns:p14="http://schemas.microsoft.com/office/powerpoint/2010/main" val="3251832631"/>
-      </p:ext>
-    </p:extLst>
-  </p:cSld>
-  <p:clrMapOvr>
-    <a:masterClrMapping/>
-  </p:clrMapOvr>
-</p:sld>
-</file>
-
-<file path=ppt/slides/slide4.xml><?xml version="1.0" encoding="utf-8"?>
-<p:sld xmlns:a="http://schemas.openxmlformats.org/drawingml/2006/main" xmlns:r="http://schemas.openxmlformats.org/officeDocument/2006/relationships" xmlns:p="http://schemas.openxmlformats.org/presentationml/2006/main">
-  <p:cSld>
-    <p:spTree>
-      <p:nvGrpSpPr>
-        <p:cNvPr id="1" name="">
-          <a:extLst>
-            <a:ext uri="{FF2B5EF4-FFF2-40B4-BE49-F238E27FC236}">
-              <a16:creationId xmlns:a16="http://schemas.microsoft.com/office/drawing/2014/main" id="{2216A3AE-3384-15DF-2897-C5C78126B6FD}"/>
-            </a:ext>
-          </a:extLst>
-        </p:cNvPr>
-        <p:cNvGrpSpPr/>
-        <p:nvPr/>
-      </p:nvGrpSpPr>
-      <p:grpSpPr>
-        <a:xfrm>
-          <a:off x="0" y="0"/>
-          <a:ext cx="0" cy="0"/>
-          <a:chOff x="0" y="0"/>
-          <a:chExt cx="0" cy="0"/>
-        </a:xfrm>
-      </p:grpSpPr>
-      <p:sp>
-        <p:nvSpPr>
-          <p:cNvPr id="2" name="제목 1">
-            <a:extLst>
-              <a:ext uri="{FF2B5EF4-FFF2-40B4-BE49-F238E27FC236}">
-                <a16:creationId xmlns:a16="http://schemas.microsoft.com/office/drawing/2014/main" id="{45973D3B-82B6-E618-761D-DF4F0EE4745B}"/>
-              </a:ext>
-            </a:extLst>
-          </p:cNvPr>
-          <p:cNvSpPr>
-            <a:spLocks noGrp="1"/>
-          </p:cNvSpPr>
-          <p:nvPr>
-            <p:ph type="title"/>
-          </p:nvPr>
-        </p:nvSpPr>
-        <p:spPr/>
-        <p:txBody>
-          <a:bodyPr/>
-          <a:lstStyle/>
-          <a:p>
-            <a:r>
-              <a:rPr lang="en-US" altLang="ko-KR" dirty="0"/>
-              <a:t>DHT11 </a:t>
-            </a:r>
-            <a:r>
-              <a:rPr lang="ko-KR" altLang="en-US" dirty="0"/>
-              <a:t>실습</a:t>
-            </a:r>
-          </a:p>
-        </p:txBody>
-      </p:sp>
-      <p:sp>
-        <p:nvSpPr>
-          <p:cNvPr id="8" name="TextBox 7">
-            <a:extLst>
-              <a:ext uri="{FF2B5EF4-FFF2-40B4-BE49-F238E27FC236}">
-                <a16:creationId xmlns:a16="http://schemas.microsoft.com/office/drawing/2014/main" id="{8B2BEA64-87BD-E1B9-E598-36CAC7E0D937}"/>
-              </a:ext>
-            </a:extLst>
-          </p:cNvPr>
-          <p:cNvSpPr txBox="1"/>
-          <p:nvPr/>
-        </p:nvSpPr>
-        <p:spPr>
-          <a:xfrm>
-            <a:off x="6096000" y="1730405"/>
-            <a:ext cx="4216474" cy="369332"/>
-          </a:xfrm>
-          <a:prstGeom prst="rect">
-            <a:avLst/>
-          </a:prstGeom>
-          <a:noFill/>
-        </p:spPr>
-        <p:txBody>
-          <a:bodyPr wrap="square" rtlCol="0">
-            <a:spAutoFit/>
-          </a:bodyPr>
-          <a:lstStyle/>
-          <a:p>
-            <a:endParaRPr lang="en-US" altLang="ko-KR" dirty="0">
-              <a:latin typeface="G마켓 산스 TTF Medium" panose="02000000000000000000" pitchFamily="2" charset="-127"/>
-              <a:ea typeface="G마켓 산스 TTF Medium" panose="02000000000000000000" pitchFamily="2" charset="-127"/>
-            </a:endParaRPr>
-          </a:p>
-        </p:txBody>
-      </p:sp>
-      <p:sp>
-        <p:nvSpPr>
-          <p:cNvPr id="5" name="내용 개체 틀 5">
-            <a:extLst>
-              <a:ext uri="{FF2B5EF4-FFF2-40B4-BE49-F238E27FC236}">
-                <a16:creationId xmlns:a16="http://schemas.microsoft.com/office/drawing/2014/main" id="{566C8DD8-A5DC-72EA-96B3-B7E5C52C4662}"/>
-              </a:ext>
-            </a:extLst>
-          </p:cNvPr>
-          <p:cNvSpPr>
-            <a:spLocks noGrp="1"/>
-          </p:cNvSpPr>
-          <p:nvPr>
-            <p:ph idx="1"/>
-          </p:nvPr>
-        </p:nvSpPr>
-        <p:spPr>
-          <a:xfrm>
-            <a:off x="838200" y="1549839"/>
-            <a:ext cx="10515600" cy="4627124"/>
-          </a:xfrm>
-        </p:spPr>
-        <p:txBody>
-          <a:bodyPr/>
-          <a:lstStyle/>
-          <a:p>
-            <a:pPr marL="457200" indent="-457200">
-              <a:buAutoNum type="arabicPeriod"/>
-            </a:pPr>
-            <a:r>
-              <a:rPr lang="en-US" altLang="ko-KR" dirty="0"/>
-              <a:t>DHT11 </a:t>
-            </a:r>
-            <a:r>
-              <a:rPr lang="ko-KR" altLang="en-US" dirty="0"/>
-              <a:t>라이브러리 다운로드</a:t>
-            </a:r>
-            <a:endParaRPr lang="en-US" altLang="ko-KR" dirty="0"/>
-          </a:p>
-          <a:p>
-            <a:pPr lvl="1"/>
-            <a:r>
-              <a:rPr lang="en-US" altLang="ko-KR" dirty="0">
-                <a:hlinkClick r:id="rId3"/>
-              </a:rPr>
-              <a:t>https://github.com/adafruit/DHT-sensor-library</a:t>
-            </a:r>
-            <a:r>
-              <a:rPr lang="en-US" altLang="ko-KR" dirty="0"/>
-              <a:t> </a:t>
-            </a:r>
-            <a:r>
-              <a:rPr lang="ko-KR" altLang="en-US" dirty="0"/>
-              <a:t>접속 또는 구글에 </a:t>
-            </a:r>
-            <a:r>
-              <a:rPr lang="en-US" altLang="ko-KR" dirty="0"/>
-              <a:t>‘DHT sensor library by Adafruit’ </a:t>
-            </a:r>
-            <a:r>
-              <a:rPr lang="ko-KR" altLang="en-US" dirty="0"/>
-              <a:t>검색</a:t>
-            </a:r>
-            <a:endParaRPr lang="en-US" altLang="ko-KR" dirty="0"/>
-          </a:p>
-          <a:p>
-            <a:pPr lvl="1"/>
-            <a:r>
-              <a:rPr lang="en-US" altLang="ko-KR" dirty="0"/>
-              <a:t>Zip </a:t>
-            </a:r>
-            <a:r>
-              <a:rPr lang="ko-KR" altLang="en-US" dirty="0"/>
-              <a:t>파일 다운로드</a:t>
-            </a:r>
-            <a:endParaRPr lang="en-US" altLang="ko-KR" dirty="0"/>
-          </a:p>
-          <a:p>
-            <a:pPr marL="0" indent="0">
-              <a:buNone/>
-            </a:pPr>
-            <a:endParaRPr lang="en-US" altLang="ko-KR" dirty="0"/>
-          </a:p>
-        </p:txBody>
-      </p:sp>
-      <p:pic>
-        <p:nvPicPr>
-          <p:cNvPr id="14" name="그림 13">
-            <a:extLst>
-              <a:ext uri="{FF2B5EF4-FFF2-40B4-BE49-F238E27FC236}">
-                <a16:creationId xmlns:a16="http://schemas.microsoft.com/office/drawing/2014/main" id="{167C93E2-A59A-E7BA-0EB5-2E32EBF595DB}"/>
-              </a:ext>
-            </a:extLst>
-          </p:cNvPr>
-          <p:cNvPicPr>
-            <a:picLocks noChangeAspect="1"/>
-          </p:cNvPicPr>
-          <p:nvPr/>
-        </p:nvPicPr>
-        <p:blipFill>
-          <a:blip r:embed="rId4"/>
-          <a:stretch>
-            <a:fillRect/>
-          </a:stretch>
-        </p:blipFill>
-        <p:spPr>
-          <a:xfrm>
-            <a:off x="4203700" y="2981465"/>
-            <a:ext cx="6726237" cy="3195498"/>
-          </a:xfrm>
-          <a:prstGeom prst="rect">
-            <a:avLst/>
-          </a:prstGeom>
-        </p:spPr>
-      </p:pic>
-      <p:pic>
-        <p:nvPicPr>
-          <p:cNvPr id="3074" name="Picture 2" descr="QR">
-            <a:extLst>
-              <a:ext uri="{FF2B5EF4-FFF2-40B4-BE49-F238E27FC236}">
-                <a16:creationId xmlns:a16="http://schemas.microsoft.com/office/drawing/2014/main" id="{3FE2C69C-3896-FE41-12EF-6F9DDC661CA8}"/>
-              </a:ext>
-            </a:extLst>
-          </p:cNvPr>
-          <p:cNvPicPr>
-            <a:picLocks noChangeAspect="1" noChangeArrowheads="1"/>
-          </p:cNvPicPr>
-          <p:nvPr/>
-        </p:nvPicPr>
-        <p:blipFill>
-          <a:blip r:embed="rId5">
-            <a:extLst>
-              <a:ext uri="{28A0092B-C50C-407E-A947-70E740481C1C}">
-                <a14:useLocalDpi xmlns:a14="http://schemas.microsoft.com/office/drawing/2010/main" val="0"/>
-              </a:ext>
-            </a:extLst>
-          </a:blip>
-          <a:srcRect/>
-          <a:stretch>
-            <a:fillRect/>
-          </a:stretch>
-        </p:blipFill>
-        <p:spPr bwMode="auto">
-          <a:xfrm>
-            <a:off x="682831" y="4369129"/>
-            <a:ext cx="2133600" cy="2133600"/>
-          </a:xfrm>
-          <a:prstGeom prst="rect">
-            <a:avLst/>
-          </a:prstGeom>
-          <a:noFill/>
-          <a:extLst>
-            <a:ext uri="{909E8E84-426E-40DD-AFC4-6F175D3DCCD1}">
-              <a14:hiddenFill xmlns:a14="http://schemas.microsoft.com/office/drawing/2010/main">
-                <a:solidFill>
-                  <a:srgbClr val="FFFFFF"/>
-                </a:solidFill>
-              </a14:hiddenFill>
-            </a:ext>
-          </a:extLst>
-        </p:spPr>
-      </p:pic>
-    </p:spTree>
-    <p:extLst>
-      <p:ext uri="{BB962C8B-B14F-4D97-AF65-F5344CB8AC3E}">
-        <p14:creationId xmlns:p14="http://schemas.microsoft.com/office/powerpoint/2010/main" val="1080240830"/>
-      </p:ext>
-    </p:extLst>
-  </p:cSld>
-  <p:clrMapOvr>
-    <a:masterClrMapping/>
-  </p:clrMapOvr>
-</p:sld>
-</file>
-
-<file path=ppt/slides/slide5.xml><?xml version="1.0" encoding="utf-8"?>
-<p:sld xmlns:a="http://schemas.openxmlformats.org/drawingml/2006/main" xmlns:r="http://schemas.openxmlformats.org/officeDocument/2006/relationships" xmlns:p="http://schemas.openxmlformats.org/presentationml/2006/main">
-  <p:cSld>
-    <p:spTree>
-      <p:nvGrpSpPr>
-        <p:cNvPr id="1" name="">
-          <a:extLst>
-            <a:ext uri="{FF2B5EF4-FFF2-40B4-BE49-F238E27FC236}">
-              <a16:creationId xmlns:a16="http://schemas.microsoft.com/office/drawing/2014/main" id="{979AC403-510B-BE9C-B1F3-EE4F24345F78}"/>
-            </a:ext>
-          </a:extLst>
-        </p:cNvPr>
-        <p:cNvGrpSpPr/>
-        <p:nvPr/>
-      </p:nvGrpSpPr>
-      <p:grpSpPr>
-        <a:xfrm>
-          <a:off x="0" y="0"/>
-          <a:ext cx="0" cy="0"/>
-          <a:chOff x="0" y="0"/>
-          <a:chExt cx="0" cy="0"/>
-        </a:xfrm>
-      </p:grpSpPr>
-      <p:sp>
-        <p:nvSpPr>
-          <p:cNvPr id="2" name="제목 1">
-            <a:extLst>
-              <a:ext uri="{FF2B5EF4-FFF2-40B4-BE49-F238E27FC236}">
-                <a16:creationId xmlns:a16="http://schemas.microsoft.com/office/drawing/2014/main" id="{B081F832-041A-DA3A-5A26-F7B4A23D1BF6}"/>
-              </a:ext>
-            </a:extLst>
-          </p:cNvPr>
-          <p:cNvSpPr>
-            <a:spLocks noGrp="1"/>
-          </p:cNvSpPr>
-          <p:nvPr>
-            <p:ph type="title"/>
-          </p:nvPr>
-        </p:nvSpPr>
-        <p:spPr/>
-        <p:txBody>
-          <a:bodyPr/>
-          <a:lstStyle/>
-          <a:p>
-            <a:r>
-              <a:rPr lang="ko-KR" altLang="en-US" dirty="0"/>
-              <a:t>초음파 센서</a:t>
-            </a:r>
-            <a:r>
-              <a:rPr lang="en-US" altLang="ko-KR" dirty="0"/>
-              <a:t> </a:t>
-            </a:r>
-            <a:r>
-              <a:rPr lang="ko-KR" altLang="en-US" dirty="0"/>
-              <a:t>실습 </a:t>
-            </a:r>
-            <a:r>
-              <a:rPr lang="en-US" altLang="ko-KR" dirty="0"/>
-              <a:t>Quiz</a:t>
-            </a:r>
-            <a:endParaRPr lang="ko-KR" altLang="en-US" dirty="0"/>
-          </a:p>
-        </p:txBody>
-      </p:sp>
-      <p:sp>
-        <p:nvSpPr>
-          <p:cNvPr id="5" name="내용 개체 틀 5">
-            <a:extLst>
-              <a:ext uri="{FF2B5EF4-FFF2-40B4-BE49-F238E27FC236}">
-                <a16:creationId xmlns:a16="http://schemas.microsoft.com/office/drawing/2014/main" id="{4538F2DD-2840-B570-FA70-BE07ED48FFFA}"/>
-              </a:ext>
-            </a:extLst>
-          </p:cNvPr>
-          <p:cNvSpPr>
-            <a:spLocks noGrp="1"/>
-          </p:cNvSpPr>
-          <p:nvPr>
-            <p:ph idx="1"/>
-          </p:nvPr>
-        </p:nvSpPr>
-        <p:spPr>
-          <a:xfrm>
-            <a:off x="838200" y="1549839"/>
-            <a:ext cx="10515600" cy="4627124"/>
-          </a:xfrm>
-        </p:spPr>
-        <p:txBody>
-          <a:bodyPr/>
-          <a:lstStyle/>
-          <a:p>
-            <a:pPr marL="0" indent="0">
-              <a:buNone/>
-            </a:pPr>
-            <a:r>
-              <a:rPr lang="ko-KR" altLang="en-US" dirty="0"/>
-              <a:t>초음파 센서를 통해 가까운 물체가 감지될 시</a:t>
-            </a:r>
-            <a:r>
-              <a:rPr lang="en-US" altLang="ko-KR" dirty="0"/>
-              <a:t>, </a:t>
-            </a:r>
-            <a:r>
-              <a:rPr lang="ko-KR" altLang="en-US" dirty="0"/>
-              <a:t>빨간 </a:t>
-            </a:r>
-            <a:r>
-              <a:rPr lang="en-US" altLang="ko-KR" dirty="0"/>
-              <a:t>LED</a:t>
-            </a:r>
-            <a:r>
-              <a:rPr lang="ko-KR" altLang="en-US" dirty="0"/>
-              <a:t>의 불을 켜고 </a:t>
-            </a:r>
-            <a:r>
-              <a:rPr lang="ko-KR" altLang="en-US" dirty="0" err="1"/>
-              <a:t>피에조</a:t>
-            </a:r>
-            <a:r>
-              <a:rPr lang="ko-KR" altLang="en-US" dirty="0"/>
-              <a:t> </a:t>
-            </a:r>
-            <a:r>
-              <a:rPr lang="ko-KR" altLang="en-US" dirty="0" err="1"/>
-              <a:t>부저를</a:t>
-            </a:r>
-            <a:r>
-              <a:rPr lang="ko-KR" altLang="en-US" dirty="0"/>
-              <a:t> 통해 경고음을 </a:t>
-            </a:r>
-            <a:r>
-              <a:rPr lang="ko-KR" altLang="en-US" dirty="0" err="1"/>
-              <a:t>울리시오</a:t>
-            </a:r>
-            <a:r>
-              <a:rPr lang="en-US" altLang="ko-KR" dirty="0"/>
-              <a:t>.</a:t>
-            </a:r>
-          </a:p>
-        </p:txBody>
-      </p:sp>
-      <p:pic>
-        <p:nvPicPr>
-          <p:cNvPr id="4" name="Picture 2" descr="아두이노]Breadboard Jumper Cables(20P-SET) 점퍼 케이블 (M1000006992)">
-            <a:extLst>
-              <a:ext uri="{FF2B5EF4-FFF2-40B4-BE49-F238E27FC236}">
-                <a16:creationId xmlns:a16="http://schemas.microsoft.com/office/drawing/2014/main" id="{7C334408-BC2C-74DD-0A9B-848CA5407049}"/>
-              </a:ext>
-            </a:extLst>
-          </p:cNvPr>
-          <p:cNvPicPr>
-            <a:picLocks noChangeAspect="1" noChangeArrowheads="1"/>
-          </p:cNvPicPr>
-          <p:nvPr/>
-        </p:nvPicPr>
-        <p:blipFill>
-          <a:blip r:embed="rId3">
-            <a:extLst>
-              <a:ext uri="{28A0092B-C50C-407E-A947-70E740481C1C}">
-                <a14:useLocalDpi xmlns:a14="http://schemas.microsoft.com/office/drawing/2010/main" val="0"/>
-              </a:ext>
-            </a:extLst>
-          </a:blip>
-          <a:srcRect/>
-          <a:stretch>
-            <a:fillRect/>
-          </a:stretch>
-        </p:blipFill>
-        <p:spPr bwMode="auto">
-          <a:xfrm>
-            <a:off x="4798165" y="4324888"/>
-            <a:ext cx="1940813" cy="1940813"/>
-          </a:xfrm>
-          <a:prstGeom prst="rect">
-            <a:avLst/>
-          </a:prstGeom>
-          <a:noFill/>
-          <a:extLst>
-            <a:ext uri="{909E8E84-426E-40DD-AFC4-6F175D3DCCD1}">
-              <a14:hiddenFill xmlns:a14="http://schemas.microsoft.com/office/drawing/2010/main">
-                <a:solidFill>
-                  <a:srgbClr val="FFFFFF"/>
-                </a:solidFill>
-              </a14:hiddenFill>
-            </a:ext>
-          </a:extLst>
-        </p:spPr>
-      </p:pic>
-      <p:pic>
-        <p:nvPicPr>
-          <p:cNvPr id="6" name="그림 5">
-            <a:extLst>
-              <a:ext uri="{FF2B5EF4-FFF2-40B4-BE49-F238E27FC236}">
-                <a16:creationId xmlns:a16="http://schemas.microsoft.com/office/drawing/2014/main" id="{9ED54D7F-F36C-2708-957C-49E139DB916B}"/>
-              </a:ext>
-            </a:extLst>
-          </p:cNvPr>
-          <p:cNvPicPr>
-            <a:picLocks noChangeAspect="1"/>
-          </p:cNvPicPr>
-          <p:nvPr/>
-        </p:nvPicPr>
-        <p:blipFill>
-          <a:blip r:embed="rId4"/>
-          <a:stretch>
-            <a:fillRect/>
-          </a:stretch>
-        </p:blipFill>
-        <p:spPr>
-          <a:xfrm>
-            <a:off x="2361902" y="2704225"/>
-            <a:ext cx="1619476" cy="1095528"/>
-          </a:xfrm>
-          <a:prstGeom prst="rect">
-            <a:avLst/>
-          </a:prstGeom>
-        </p:spPr>
-      </p:pic>
-      <p:pic>
-        <p:nvPicPr>
-          <p:cNvPr id="7" name="그림 6">
-            <a:extLst>
-              <a:ext uri="{FF2B5EF4-FFF2-40B4-BE49-F238E27FC236}">
-                <a16:creationId xmlns:a16="http://schemas.microsoft.com/office/drawing/2014/main" id="{672F320F-B20D-258F-6BA0-60B157243CFD}"/>
-              </a:ext>
-            </a:extLst>
-          </p:cNvPr>
-          <p:cNvPicPr>
-            <a:picLocks noChangeAspect="1"/>
-          </p:cNvPicPr>
-          <p:nvPr/>
-        </p:nvPicPr>
-        <p:blipFill>
-          <a:blip r:embed="rId5"/>
-          <a:stretch>
-            <a:fillRect/>
-          </a:stretch>
-        </p:blipFill>
-        <p:spPr>
-          <a:xfrm>
-            <a:off x="7415578" y="2672215"/>
-            <a:ext cx="2522922" cy="959005"/>
-          </a:xfrm>
-          <a:prstGeom prst="rect">
-            <a:avLst/>
-          </a:prstGeom>
-        </p:spPr>
-      </p:pic>
-      <p:sp>
-        <p:nvSpPr>
-          <p:cNvPr id="9" name="TextBox 8">
-            <a:extLst>
-              <a:ext uri="{FF2B5EF4-FFF2-40B4-BE49-F238E27FC236}">
-                <a16:creationId xmlns:a16="http://schemas.microsoft.com/office/drawing/2014/main" id="{C7E3A299-C3E7-DF93-563E-5F69B3576D1C}"/>
-              </a:ext>
-            </a:extLst>
-          </p:cNvPr>
-          <p:cNvSpPr txBox="1"/>
-          <p:nvPr/>
-        </p:nvSpPr>
-        <p:spPr>
-          <a:xfrm>
-            <a:off x="7846273" y="3955556"/>
-            <a:ext cx="1661532" cy="369332"/>
-          </a:xfrm>
-          <a:prstGeom prst="rect">
-            <a:avLst/>
-          </a:prstGeom>
-          <a:noFill/>
-        </p:spPr>
-        <p:txBody>
-          <a:bodyPr wrap="square" rtlCol="0">
-            <a:spAutoFit/>
-          </a:bodyPr>
-          <a:lstStyle/>
-          <a:p>
-            <a:pPr algn="ctr"/>
-            <a:r>
-              <a:rPr lang="ko-KR" altLang="en-US" dirty="0" err="1"/>
-              <a:t>브레드</a:t>
-            </a:r>
-            <a:r>
-              <a:rPr lang="ko-KR" altLang="en-US" dirty="0"/>
-              <a:t> 보드</a:t>
-            </a:r>
-          </a:p>
-        </p:txBody>
-      </p:sp>
-      <p:sp>
-        <p:nvSpPr>
-          <p:cNvPr id="10" name="TextBox 9">
-            <a:extLst>
-              <a:ext uri="{FF2B5EF4-FFF2-40B4-BE49-F238E27FC236}">
-                <a16:creationId xmlns:a16="http://schemas.microsoft.com/office/drawing/2014/main" id="{C21962C1-EB2E-14E9-C60A-A5A480E3B2E2}"/>
-              </a:ext>
-            </a:extLst>
-          </p:cNvPr>
-          <p:cNvSpPr txBox="1"/>
-          <p:nvPr/>
-        </p:nvSpPr>
-        <p:spPr>
-          <a:xfrm>
-            <a:off x="4937805" y="6092354"/>
-            <a:ext cx="1661532" cy="369332"/>
-          </a:xfrm>
-          <a:prstGeom prst="rect">
-            <a:avLst/>
-          </a:prstGeom>
-          <a:noFill/>
-        </p:spPr>
-        <p:txBody>
-          <a:bodyPr wrap="square" rtlCol="0">
-            <a:spAutoFit/>
-          </a:bodyPr>
-          <a:lstStyle/>
-          <a:p>
-            <a:pPr algn="ctr"/>
-            <a:r>
-              <a:rPr lang="ko-KR" altLang="en-US" dirty="0"/>
-              <a:t>점퍼 케이블</a:t>
-            </a:r>
-          </a:p>
-        </p:txBody>
-      </p:sp>
-      <p:sp>
-        <p:nvSpPr>
-          <p:cNvPr id="12" name="TextBox 11">
-            <a:extLst>
-              <a:ext uri="{FF2B5EF4-FFF2-40B4-BE49-F238E27FC236}">
-                <a16:creationId xmlns:a16="http://schemas.microsoft.com/office/drawing/2014/main" id="{777703DE-5A17-3BD5-0288-73243A0F4066}"/>
-              </a:ext>
-            </a:extLst>
-          </p:cNvPr>
-          <p:cNvSpPr txBox="1"/>
-          <p:nvPr/>
-        </p:nvSpPr>
-        <p:spPr>
-          <a:xfrm>
-            <a:off x="2042044" y="3959685"/>
-            <a:ext cx="2222492" cy="369332"/>
-          </a:xfrm>
-          <a:prstGeom prst="rect">
-            <a:avLst/>
-          </a:prstGeom>
-          <a:noFill/>
-        </p:spPr>
-        <p:txBody>
-          <a:bodyPr wrap="square" rtlCol="0">
-            <a:spAutoFit/>
-          </a:bodyPr>
-          <a:lstStyle/>
-          <a:p>
-            <a:pPr algn="ctr"/>
-            <a:r>
-              <a:rPr lang="ko-KR" altLang="en-US" dirty="0" err="1"/>
-              <a:t>아두이노</a:t>
-            </a:r>
-            <a:r>
-              <a:rPr lang="ko-KR" altLang="en-US" dirty="0"/>
-              <a:t> 호환보드</a:t>
-            </a:r>
-          </a:p>
-        </p:txBody>
-      </p:sp>
-      <p:sp>
-        <p:nvSpPr>
-          <p:cNvPr id="13" name="TextBox 12">
-            <a:extLst>
-              <a:ext uri="{FF2B5EF4-FFF2-40B4-BE49-F238E27FC236}">
-                <a16:creationId xmlns:a16="http://schemas.microsoft.com/office/drawing/2014/main" id="{5B893316-F962-F9E4-AD21-8A32405D0025}"/>
-              </a:ext>
-            </a:extLst>
-          </p:cNvPr>
-          <p:cNvSpPr txBox="1"/>
-          <p:nvPr/>
-        </p:nvSpPr>
-        <p:spPr>
-          <a:xfrm>
-            <a:off x="2218081" y="6088580"/>
-            <a:ext cx="1619476" cy="369332"/>
-          </a:xfrm>
-          <a:prstGeom prst="rect">
-            <a:avLst/>
-          </a:prstGeom>
-          <a:noFill/>
-        </p:spPr>
-        <p:txBody>
-          <a:bodyPr wrap="square" rtlCol="0">
-            <a:spAutoFit/>
-          </a:bodyPr>
-          <a:lstStyle/>
-          <a:p>
-            <a:pPr algn="ctr"/>
-            <a:r>
-              <a:rPr lang="en-US" altLang="ko-KR" dirty="0"/>
-              <a:t>LED</a:t>
-            </a:r>
-            <a:endParaRPr lang="ko-KR" altLang="en-US" dirty="0"/>
-          </a:p>
-        </p:txBody>
-      </p:sp>
-      <p:pic>
-        <p:nvPicPr>
-          <p:cNvPr id="16" name="Picture 2" descr="4 LED 5개 색상랜덤 아두이노 베스트 부품">
-            <a:extLst>
-              <a:ext uri="{FF2B5EF4-FFF2-40B4-BE49-F238E27FC236}">
-                <a16:creationId xmlns:a16="http://schemas.microsoft.com/office/drawing/2014/main" id="{3A866A88-898D-FE34-877A-4C53B71A2021}"/>
-              </a:ext>
-            </a:extLst>
-          </p:cNvPr>
-          <p:cNvPicPr>
-            <a:picLocks noChangeAspect="1" noChangeArrowheads="1"/>
-          </p:cNvPicPr>
-          <p:nvPr/>
-        </p:nvPicPr>
-        <p:blipFill rotWithShape="1">
-          <a:blip r:embed="rId6">
-            <a:extLst>
-              <a:ext uri="{28A0092B-C50C-407E-A947-70E740481C1C}">
-                <a14:useLocalDpi xmlns:a14="http://schemas.microsoft.com/office/drawing/2010/main" val="0"/>
-              </a:ext>
-            </a:extLst>
-          </a:blip>
-          <a:srcRect l="9673" t="25571" r="71768" b="12666"/>
-          <a:stretch>
-            <a:fillRect/>
-          </a:stretch>
-        </p:blipFill>
-        <p:spPr bwMode="auto">
-          <a:xfrm>
-            <a:off x="2775492" y="4644051"/>
-            <a:ext cx="431534" cy="1436122"/>
-          </a:xfrm>
-          <a:prstGeom prst="rect">
-            <a:avLst/>
-          </a:prstGeom>
-          <a:noFill/>
-          <a:extLst>
-            <a:ext uri="{909E8E84-426E-40DD-AFC4-6F175D3DCCD1}">
-              <a14:hiddenFill xmlns:a14="http://schemas.microsoft.com/office/drawing/2010/main">
-                <a:solidFill>
-                  <a:srgbClr val="FFFFFF"/>
-                </a:solidFill>
-              </a14:hiddenFill>
-            </a:ext>
-          </a:extLst>
-        </p:spPr>
-      </p:pic>
-      <p:pic>
-        <p:nvPicPr>
-          <p:cNvPr id="17" name="Picture 2" descr="아두이노 중급] 16. 초음파 센서(거리 측정 센서) : 네이버 블로그">
-            <a:extLst>
-              <a:ext uri="{FF2B5EF4-FFF2-40B4-BE49-F238E27FC236}">
-                <a16:creationId xmlns:a16="http://schemas.microsoft.com/office/drawing/2014/main" id="{2BF2A8C8-EC91-FEE4-653A-BDD05AFABF5C}"/>
-              </a:ext>
-            </a:extLst>
-          </p:cNvPr>
-          <p:cNvPicPr>
-            <a:picLocks noChangeAspect="1" noChangeArrowheads="1"/>
-          </p:cNvPicPr>
-          <p:nvPr/>
-        </p:nvPicPr>
-        <p:blipFill>
-          <a:blip r:embed="rId7">
-            <a:extLst>
-              <a:ext uri="{28A0092B-C50C-407E-A947-70E740481C1C}">
-                <a14:useLocalDpi xmlns:a14="http://schemas.microsoft.com/office/drawing/2010/main" val="0"/>
-              </a:ext>
-            </a:extLst>
-          </a:blip>
-          <a:srcRect/>
-          <a:stretch>
-            <a:fillRect/>
-          </a:stretch>
-        </p:blipFill>
-        <p:spPr bwMode="auto">
-          <a:xfrm>
-            <a:off x="5146148" y="2772486"/>
-            <a:ext cx="1592830" cy="959005"/>
-          </a:xfrm>
-          <a:prstGeom prst="rect">
-            <a:avLst/>
-          </a:prstGeom>
-          <a:noFill/>
-          <a:extLst>
-            <a:ext uri="{909E8E84-426E-40DD-AFC4-6F175D3DCCD1}">
-              <a14:hiddenFill xmlns:a14="http://schemas.microsoft.com/office/drawing/2010/main">
-                <a:solidFill>
-                  <a:srgbClr val="FFFFFF"/>
-                </a:solidFill>
-              </a14:hiddenFill>
-            </a:ext>
-          </a:extLst>
-        </p:spPr>
-      </p:pic>
-      <p:sp>
-        <p:nvSpPr>
-          <p:cNvPr id="18" name="TextBox 17">
-            <a:extLst>
-              <a:ext uri="{FF2B5EF4-FFF2-40B4-BE49-F238E27FC236}">
-                <a16:creationId xmlns:a16="http://schemas.microsoft.com/office/drawing/2014/main" id="{8F71DDB0-BB1A-F7C6-C213-3E63FE4EA180}"/>
-              </a:ext>
-            </a:extLst>
-          </p:cNvPr>
-          <p:cNvSpPr txBox="1"/>
-          <p:nvPr/>
-        </p:nvSpPr>
-        <p:spPr>
-          <a:xfrm>
-            <a:off x="4798165" y="3951278"/>
-            <a:ext cx="2222492" cy="369332"/>
-          </a:xfrm>
-          <a:prstGeom prst="rect">
-            <a:avLst/>
-          </a:prstGeom>
-          <a:noFill/>
-        </p:spPr>
-        <p:txBody>
-          <a:bodyPr wrap="square" rtlCol="0">
-            <a:spAutoFit/>
-          </a:bodyPr>
-          <a:lstStyle/>
-          <a:p>
-            <a:pPr algn="ctr"/>
-            <a:r>
-              <a:rPr lang="ko-KR" altLang="en-US" dirty="0"/>
-              <a:t>초음파 센서</a:t>
-            </a:r>
-          </a:p>
-        </p:txBody>
-      </p:sp>
-      <p:sp>
-        <p:nvSpPr>
-          <p:cNvPr id="19" name="TextBox 18">
-            <a:extLst>
-              <a:ext uri="{FF2B5EF4-FFF2-40B4-BE49-F238E27FC236}">
-                <a16:creationId xmlns:a16="http://schemas.microsoft.com/office/drawing/2014/main" id="{FB7865C0-384E-7A0C-E611-FB74F0171928}"/>
-              </a:ext>
-            </a:extLst>
-          </p:cNvPr>
-          <p:cNvSpPr txBox="1"/>
-          <p:nvPr/>
-        </p:nvSpPr>
-        <p:spPr>
-          <a:xfrm>
-            <a:off x="7699585" y="6088580"/>
-            <a:ext cx="1619476" cy="369332"/>
-          </a:xfrm>
-          <a:prstGeom prst="rect">
-            <a:avLst/>
-          </a:prstGeom>
-          <a:noFill/>
-        </p:spPr>
-        <p:txBody>
-          <a:bodyPr wrap="square" rtlCol="0">
-            <a:spAutoFit/>
-          </a:bodyPr>
-          <a:lstStyle/>
-          <a:p>
-            <a:pPr algn="ctr"/>
-            <a:r>
-              <a:rPr lang="ko-KR" altLang="en-US" dirty="0"/>
-              <a:t>능동 </a:t>
-            </a:r>
-            <a:r>
-              <a:rPr lang="ko-KR" altLang="en-US" dirty="0" err="1"/>
-              <a:t>부저</a:t>
-            </a:r>
-            <a:endParaRPr lang="ko-KR" altLang="en-US" dirty="0"/>
-          </a:p>
-        </p:txBody>
-      </p:sp>
-      <p:pic>
-        <p:nvPicPr>
-          <p:cNvPr id="20" name="Picture 4" descr="5V 능동 부저 [FQ-011] / 디바이스마트">
-            <a:extLst>
-              <a:ext uri="{FF2B5EF4-FFF2-40B4-BE49-F238E27FC236}">
-                <a16:creationId xmlns:a16="http://schemas.microsoft.com/office/drawing/2014/main" id="{8E2EF01C-AE31-6E4F-4697-7E84B77676F0}"/>
-              </a:ext>
-            </a:extLst>
-          </p:cNvPr>
-          <p:cNvPicPr>
-            <a:picLocks noChangeAspect="1" noChangeArrowheads="1"/>
-          </p:cNvPicPr>
-          <p:nvPr/>
-        </p:nvPicPr>
-        <p:blipFill rotWithShape="1">
-          <a:blip r:embed="rId8">
-            <a:extLst>
-              <a:ext uri="{BEBA8EAE-BF5A-486C-A8C5-ECC9F3942E4B}">
-                <a14:imgProps xmlns:a14="http://schemas.microsoft.com/office/drawing/2010/main">
-                  <a14:imgLayer r:embed="rId9">
-                    <a14:imgEffect>
-                      <a14:backgroundRemoval t="10000" b="90000" l="10000" r="90000"/>
-                    </a14:imgEffect>
-                  </a14:imgLayer>
-                </a14:imgProps>
-              </a:ext>
-              <a:ext uri="{28A0092B-C50C-407E-A947-70E740481C1C}">
-                <a14:useLocalDpi xmlns:a14="http://schemas.microsoft.com/office/drawing/2010/main" val="0"/>
-              </a:ext>
-            </a:extLst>
-          </a:blip>
-          <a:srcRect l="29064" t="17235" r="24650" b="20598"/>
-          <a:stretch/>
-        </p:blipFill>
-        <p:spPr bwMode="auto">
-          <a:xfrm>
-            <a:off x="7891848" y="4521069"/>
-            <a:ext cx="1318124" cy="1327776"/>
-          </a:xfrm>
-          <a:prstGeom prst="rect">
-            <a:avLst/>
-          </a:prstGeom>
-          <a:noFill/>
-          <a:extLst>
-            <a:ext uri="{909E8E84-426E-40DD-AFC4-6F175D3DCCD1}">
-              <a14:hiddenFill xmlns:a14="http://schemas.microsoft.com/office/drawing/2010/main">
-                <a:solidFill>
-                  <a:srgbClr val="FFFFFF"/>
-                </a:solidFill>
-              </a14:hiddenFill>
-            </a:ext>
-          </a:extLst>
-        </p:spPr>
-      </p:pic>
-    </p:spTree>
-    <p:extLst>
-      <p:ext uri="{BB962C8B-B14F-4D97-AF65-F5344CB8AC3E}">
-        <p14:creationId xmlns:p14="http://schemas.microsoft.com/office/powerpoint/2010/main" val="3423217440"/>
-      </p:ext>
-    </p:extLst>
-  </p:cSld>
-  <p:clrMapOvr>
-    <a:masterClrMapping/>
-  </p:clrMapOvr>
-</p:sld>
-</file>
-
-<file path=ppt/slides/slide6.xml><?xml version="1.0" encoding="utf-8"?>
-<p:sld xmlns:a="http://schemas.openxmlformats.org/drawingml/2006/main" xmlns:r="http://schemas.openxmlformats.org/officeDocument/2006/relationships" xmlns:p="http://schemas.openxmlformats.org/presentationml/2006/main">
-  <p:cSld>
-    <p:spTree>
-      <p:nvGrpSpPr>
-        <p:cNvPr id="1" name="">
-          <a:extLst>
-            <a:ext uri="{FF2B5EF4-FFF2-40B4-BE49-F238E27FC236}">
-              <a16:creationId xmlns:a16="http://schemas.microsoft.com/office/drawing/2014/main" id="{C7BB0736-3A39-AE75-39E4-8408EDB4BDC0}"/>
-            </a:ext>
-          </a:extLst>
-        </p:cNvPr>
-        <p:cNvGrpSpPr/>
-        <p:nvPr/>
-      </p:nvGrpSpPr>
-      <p:grpSpPr>
-        <a:xfrm>
-          <a:off x="0" y="0"/>
-          <a:ext cx="0" cy="0"/>
-          <a:chOff x="0" y="0"/>
-          <a:chExt cx="0" cy="0"/>
-        </a:xfrm>
-      </p:grpSpPr>
-      <p:sp>
-        <p:nvSpPr>
-          <p:cNvPr id="2" name="제목 1">
-            <a:extLst>
-              <a:ext uri="{FF2B5EF4-FFF2-40B4-BE49-F238E27FC236}">
-                <a16:creationId xmlns:a16="http://schemas.microsoft.com/office/drawing/2014/main" id="{7A06332D-49D3-02F8-A177-0E811BF53555}"/>
-              </a:ext>
-            </a:extLst>
-          </p:cNvPr>
-          <p:cNvSpPr>
-            <a:spLocks noGrp="1"/>
-          </p:cNvSpPr>
-          <p:nvPr>
-            <p:ph type="title"/>
-          </p:nvPr>
-        </p:nvSpPr>
-        <p:spPr/>
-        <p:txBody>
-          <a:bodyPr/>
-          <a:lstStyle/>
-          <a:p>
-            <a:r>
-              <a:rPr lang="ko-KR" altLang="en-US" dirty="0"/>
-              <a:t>초음파 센서</a:t>
-            </a:r>
-            <a:r>
-              <a:rPr lang="en-US" altLang="ko-KR" dirty="0"/>
-              <a:t> </a:t>
-            </a:r>
-            <a:r>
-              <a:rPr lang="ko-KR" altLang="en-US" dirty="0"/>
-              <a:t>실습 </a:t>
-            </a:r>
-            <a:r>
-              <a:rPr lang="en-US" altLang="ko-KR" dirty="0"/>
-              <a:t>Quiz</a:t>
-            </a:r>
-            <a:endParaRPr lang="ko-KR" altLang="en-US" dirty="0"/>
-          </a:p>
-        </p:txBody>
-      </p:sp>
-      <p:pic>
-        <p:nvPicPr>
-          <p:cNvPr id="11" name="그림 10">
-            <a:extLst>
-              <a:ext uri="{FF2B5EF4-FFF2-40B4-BE49-F238E27FC236}">
-                <a16:creationId xmlns:a16="http://schemas.microsoft.com/office/drawing/2014/main" id="{5450EAB8-9911-3459-181E-97D28F9200A8}"/>
-              </a:ext>
-            </a:extLst>
-          </p:cNvPr>
-          <p:cNvPicPr>
-            <a:picLocks noChangeAspect="1"/>
-          </p:cNvPicPr>
-          <p:nvPr/>
-        </p:nvPicPr>
-        <p:blipFill>
-          <a:blip r:embed="rId3"/>
-          <a:stretch>
-            <a:fillRect/>
-          </a:stretch>
-        </p:blipFill>
-        <p:spPr>
-          <a:xfrm>
-            <a:off x="5415979" y="1325563"/>
-            <a:ext cx="5384289" cy="5308161"/>
-          </a:xfrm>
-          <a:prstGeom prst="rect">
-            <a:avLst/>
-          </a:prstGeom>
-        </p:spPr>
-      </p:pic>
-      <p:sp>
-        <p:nvSpPr>
-          <p:cNvPr id="14" name="내용 개체 틀 5">
-            <a:extLst>
-              <a:ext uri="{FF2B5EF4-FFF2-40B4-BE49-F238E27FC236}">
-                <a16:creationId xmlns:a16="http://schemas.microsoft.com/office/drawing/2014/main" id="{BA9AB3DC-7D5E-A350-1677-1988E3B77614}"/>
-              </a:ext>
-            </a:extLst>
-          </p:cNvPr>
-          <p:cNvSpPr>
-            <a:spLocks noGrp="1"/>
-          </p:cNvSpPr>
-          <p:nvPr>
-            <p:ph idx="1"/>
-          </p:nvPr>
-        </p:nvSpPr>
-        <p:spPr>
-          <a:xfrm>
-            <a:off x="838200" y="1549839"/>
-            <a:ext cx="10515600" cy="4627124"/>
-          </a:xfrm>
-        </p:spPr>
-        <p:txBody>
-          <a:bodyPr>
-            <a:normAutofit/>
-          </a:bodyPr>
-          <a:lstStyle/>
-          <a:p>
-            <a:pPr marL="0" indent="0">
-              <a:buNone/>
-            </a:pPr>
-            <a:r>
-              <a:rPr lang="ko-KR" altLang="en-US" sz="4000" b="1" dirty="0">
-                <a:solidFill>
-                  <a:srgbClr val="FF0000"/>
-                </a:solidFill>
-              </a:rPr>
-              <a:t>정답</a:t>
-            </a:r>
-            <a:endParaRPr lang="en-US" altLang="ko-KR" sz="4000" b="1" dirty="0">
-              <a:solidFill>
-                <a:srgbClr val="FF0000"/>
-              </a:solidFill>
-            </a:endParaRPr>
-          </a:p>
-        </p:txBody>
-      </p:sp>
-    </p:spTree>
-    <p:extLst>
-      <p:ext uri="{BB962C8B-B14F-4D97-AF65-F5344CB8AC3E}">
-        <p14:creationId xmlns:p14="http://schemas.microsoft.com/office/powerpoint/2010/main" val="2869353870"/>
-      </p:ext>
-    </p:extLst>
-  </p:cSld>
-  <p:clrMapOvr>
-    <a:masterClrMapping/>
-  </p:clrMapOvr>
-</p:sld>
-</file>
-
-<file path=ppt/slides/slide7.xml><?xml version="1.0" encoding="utf-8"?>
-<p:sld xmlns:a="http://schemas.openxmlformats.org/drawingml/2006/main" xmlns:r="http://schemas.openxmlformats.org/officeDocument/2006/relationships" xmlns:p="http://schemas.openxmlformats.org/presentationml/2006/main">
-  <p:cSld>
-    <p:spTree>
-      <p:nvGrpSpPr>
-        <p:cNvPr id="1" name="">
-          <a:extLst>
-            <a:ext uri="{FF2B5EF4-FFF2-40B4-BE49-F238E27FC236}">
-              <a16:creationId xmlns:a16="http://schemas.microsoft.com/office/drawing/2014/main" id="{058E95EE-189E-424D-3543-269651CDF7FD}"/>
-            </a:ext>
-          </a:extLst>
-        </p:cNvPr>
-        <p:cNvGrpSpPr/>
-        <p:nvPr/>
-      </p:nvGrpSpPr>
-      <p:grpSpPr>
-        <a:xfrm>
-          <a:off x="0" y="0"/>
-          <a:ext cx="0" cy="0"/>
-          <a:chOff x="0" y="0"/>
-          <a:chExt cx="0" cy="0"/>
-        </a:xfrm>
-      </p:grpSpPr>
-      <p:sp>
-        <p:nvSpPr>
-          <p:cNvPr id="2" name="제목 1">
-            <a:extLst>
-              <a:ext uri="{FF2B5EF4-FFF2-40B4-BE49-F238E27FC236}">
-                <a16:creationId xmlns:a16="http://schemas.microsoft.com/office/drawing/2014/main" id="{57403870-1342-522F-3739-18B439FA87AE}"/>
-              </a:ext>
-            </a:extLst>
-          </p:cNvPr>
-          <p:cNvSpPr>
-            <a:spLocks noGrp="1"/>
-          </p:cNvSpPr>
-          <p:nvPr>
-            <p:ph type="title"/>
-          </p:nvPr>
-        </p:nvSpPr>
-        <p:spPr/>
-        <p:txBody>
-          <a:bodyPr/>
-          <a:lstStyle/>
-          <a:p>
-            <a:r>
-              <a:rPr lang="ko-KR" altLang="en-US" dirty="0"/>
-              <a:t>초음파 센서</a:t>
-            </a:r>
-            <a:r>
-              <a:rPr lang="en-US" altLang="ko-KR" dirty="0"/>
-              <a:t> </a:t>
-            </a:r>
-            <a:r>
-              <a:rPr lang="ko-KR" altLang="en-US" dirty="0"/>
-              <a:t>실습 </a:t>
-            </a:r>
-            <a:r>
-              <a:rPr lang="en-US" altLang="ko-KR" dirty="0"/>
-              <a:t>Quiz</a:t>
-            </a:r>
-            <a:endParaRPr lang="ko-KR" altLang="en-US" dirty="0"/>
-          </a:p>
-        </p:txBody>
-      </p:sp>
-      <p:sp>
-        <p:nvSpPr>
-          <p:cNvPr id="14" name="내용 개체 틀 5">
-            <a:extLst>
-              <a:ext uri="{FF2B5EF4-FFF2-40B4-BE49-F238E27FC236}">
-                <a16:creationId xmlns:a16="http://schemas.microsoft.com/office/drawing/2014/main" id="{9A868864-A509-C3E9-5A7C-C55344671AC7}"/>
-              </a:ext>
-            </a:extLst>
-          </p:cNvPr>
-          <p:cNvSpPr>
-            <a:spLocks noGrp="1"/>
-          </p:cNvSpPr>
-          <p:nvPr>
-            <p:ph idx="1"/>
-          </p:nvPr>
-        </p:nvSpPr>
-        <p:spPr>
-          <a:xfrm>
-            <a:off x="838200" y="1549839"/>
-            <a:ext cx="10515600" cy="4627124"/>
-          </a:xfrm>
-        </p:spPr>
-        <p:txBody>
-          <a:bodyPr>
-            <a:normAutofit/>
-          </a:bodyPr>
-          <a:lstStyle/>
-          <a:p>
-            <a:pPr marL="0" indent="0">
-              <a:buNone/>
-            </a:pPr>
-            <a:r>
-              <a:rPr lang="ko-KR" altLang="en-US" sz="4000" b="1" dirty="0">
-                <a:solidFill>
-                  <a:srgbClr val="FF0000"/>
-                </a:solidFill>
-              </a:rPr>
-              <a:t>정답</a:t>
-            </a:r>
-            <a:endParaRPr lang="en-US" altLang="ko-KR" sz="4000" b="1" dirty="0">
-              <a:solidFill>
-                <a:srgbClr val="FF0000"/>
-              </a:solidFill>
-            </a:endParaRPr>
-          </a:p>
-        </p:txBody>
-      </p:sp>
-      <p:pic>
-        <p:nvPicPr>
-          <p:cNvPr id="4" name="그림 3">
-            <a:extLst>
-              <a:ext uri="{FF2B5EF4-FFF2-40B4-BE49-F238E27FC236}">
-                <a16:creationId xmlns:a16="http://schemas.microsoft.com/office/drawing/2014/main" id="{CC5F3326-0AF3-038C-04EF-A78B0E233D97}"/>
-              </a:ext>
-            </a:extLst>
-          </p:cNvPr>
-          <p:cNvPicPr>
-            <a:picLocks noChangeAspect="1"/>
-          </p:cNvPicPr>
-          <p:nvPr/>
-        </p:nvPicPr>
-        <p:blipFill>
-          <a:blip r:embed="rId3"/>
-          <a:stretch>
-            <a:fillRect/>
-          </a:stretch>
-        </p:blipFill>
-        <p:spPr>
-          <a:xfrm>
-            <a:off x="838200" y="2595563"/>
-            <a:ext cx="5086350" cy="3581400"/>
-          </a:xfrm>
-          <a:prstGeom prst="rect">
-            <a:avLst/>
-          </a:prstGeom>
-        </p:spPr>
-      </p:pic>
-      <p:pic>
-        <p:nvPicPr>
-          <p:cNvPr id="6" name="그림 5">
-            <a:extLst>
-              <a:ext uri="{FF2B5EF4-FFF2-40B4-BE49-F238E27FC236}">
-                <a16:creationId xmlns:a16="http://schemas.microsoft.com/office/drawing/2014/main" id="{EF066CB9-1291-242C-12A3-57EF6BBA64F9}"/>
-              </a:ext>
-            </a:extLst>
-          </p:cNvPr>
-          <p:cNvPicPr>
-            <a:picLocks noChangeAspect="1"/>
-          </p:cNvPicPr>
-          <p:nvPr/>
-        </p:nvPicPr>
-        <p:blipFill>
-          <a:blip r:embed="rId4"/>
-          <a:stretch>
-            <a:fillRect/>
-          </a:stretch>
-        </p:blipFill>
-        <p:spPr>
-          <a:xfrm>
-            <a:off x="5590872" y="1284818"/>
-            <a:ext cx="5762928" cy="5157166"/>
-          </a:xfrm>
-          <a:prstGeom prst="rect">
-            <a:avLst/>
-          </a:prstGeom>
-        </p:spPr>
-      </p:pic>
-    </p:spTree>
-    <p:extLst>
-      <p:ext uri="{BB962C8B-B14F-4D97-AF65-F5344CB8AC3E}">
-        <p14:creationId xmlns:p14="http://schemas.microsoft.com/office/powerpoint/2010/main" val="202577839"/>
-      </p:ext>
-    </p:extLst>
-  </p:cSld>
-  <p:clrMapOvr>
-    <a:masterClrMapping/>
-  </p:clrMapOvr>
-</p:sld>
-</file>
-
-<file path=ppt/slides/slide8.xml><?xml version="1.0" encoding="utf-8"?>
+<file path=ppt/slides/slide10.xml><?xml version="1.0" encoding="utf-8"?>
 <p:sld xmlns:a="http://schemas.openxmlformats.org/drawingml/2006/main" xmlns:r="http://schemas.openxmlformats.org/officeDocument/2006/relationships" xmlns:p="http://schemas.openxmlformats.org/presentationml/2006/main">
   <p:cSld>
     <p:spTree>
@@ -6315,6 +5677,3156 @@
 </p:sld>
 </file>
 
+<file path=ppt/slides/slide2.xml><?xml version="1.0" encoding="utf-8"?>
+<p:sld xmlns:a="http://schemas.openxmlformats.org/drawingml/2006/main" xmlns:r="http://schemas.openxmlformats.org/officeDocument/2006/relationships" xmlns:p="http://schemas.openxmlformats.org/presentationml/2006/main">
+  <p:cSld>
+    <p:spTree>
+      <p:nvGrpSpPr>
+        <p:cNvPr id="1" name="">
+          <a:extLst>
+            <a:ext uri="{FF2B5EF4-FFF2-40B4-BE49-F238E27FC236}">
+              <a16:creationId xmlns:a16="http://schemas.microsoft.com/office/drawing/2014/main" id="{DFE64918-0770-70C9-77E4-1DC637E6A401}"/>
+            </a:ext>
+          </a:extLst>
+        </p:cNvPr>
+        <p:cNvGrpSpPr/>
+        <p:nvPr/>
+      </p:nvGrpSpPr>
+      <p:grpSpPr>
+        <a:xfrm>
+          <a:off x="0" y="0"/>
+          <a:ext cx="0" cy="0"/>
+          <a:chOff x="0" y="0"/>
+          <a:chExt cx="0" cy="0"/>
+        </a:xfrm>
+      </p:grpSpPr>
+      <p:sp>
+        <p:nvSpPr>
+          <p:cNvPr id="2" name="제목 1">
+            <a:extLst>
+              <a:ext uri="{FF2B5EF4-FFF2-40B4-BE49-F238E27FC236}">
+                <a16:creationId xmlns:a16="http://schemas.microsoft.com/office/drawing/2014/main" id="{7F882005-66EF-CFFC-AE74-BB96987C6AB8}"/>
+              </a:ext>
+            </a:extLst>
+          </p:cNvPr>
+          <p:cNvSpPr>
+            <a:spLocks noGrp="1"/>
+          </p:cNvSpPr>
+          <p:nvPr>
+            <p:ph type="title"/>
+          </p:nvPr>
+        </p:nvSpPr>
+        <p:spPr/>
+        <p:txBody>
+          <a:bodyPr/>
+          <a:lstStyle/>
+          <a:p>
+            <a:r>
+              <a:rPr lang="ko-KR" altLang="en-US" dirty="0"/>
+              <a:t>태양광 패널</a:t>
+            </a:r>
+          </a:p>
+        </p:txBody>
+      </p:sp>
+      <p:sp>
+        <p:nvSpPr>
+          <p:cNvPr id="8" name="TextBox 7">
+            <a:extLst>
+              <a:ext uri="{FF2B5EF4-FFF2-40B4-BE49-F238E27FC236}">
+                <a16:creationId xmlns:a16="http://schemas.microsoft.com/office/drawing/2014/main" id="{A765F5FF-BA61-4715-5439-EFE2A97979B6}"/>
+              </a:ext>
+            </a:extLst>
+          </p:cNvPr>
+          <p:cNvSpPr txBox="1"/>
+          <p:nvPr/>
+        </p:nvSpPr>
+        <p:spPr>
+          <a:xfrm>
+            <a:off x="6096000" y="1730405"/>
+            <a:ext cx="4216474" cy="369332"/>
+          </a:xfrm>
+          <a:prstGeom prst="rect">
+            <a:avLst/>
+          </a:prstGeom>
+          <a:noFill/>
+        </p:spPr>
+        <p:txBody>
+          <a:bodyPr wrap="square" rtlCol="0">
+            <a:spAutoFit/>
+          </a:bodyPr>
+          <a:lstStyle/>
+          <a:p>
+            <a:endParaRPr lang="en-US" altLang="ko-KR" dirty="0">
+              <a:latin typeface="G마켓 산스 TTF Medium" panose="02000000000000000000" pitchFamily="2" charset="-127"/>
+              <a:ea typeface="G마켓 산스 TTF Medium" panose="02000000000000000000" pitchFamily="2" charset="-127"/>
+            </a:endParaRPr>
+          </a:p>
+        </p:txBody>
+      </p:sp>
+      <p:sp>
+        <p:nvSpPr>
+          <p:cNvPr id="10" name="내용 개체 틀 2">
+            <a:extLst>
+              <a:ext uri="{FF2B5EF4-FFF2-40B4-BE49-F238E27FC236}">
+                <a16:creationId xmlns:a16="http://schemas.microsoft.com/office/drawing/2014/main" id="{FE00FF03-7862-5E1C-8F96-8762AB6CB938}"/>
+              </a:ext>
+            </a:extLst>
+          </p:cNvPr>
+          <p:cNvSpPr>
+            <a:spLocks noGrp="1"/>
+          </p:cNvSpPr>
+          <p:nvPr>
+            <p:ph idx="1"/>
+          </p:nvPr>
+        </p:nvSpPr>
+        <p:spPr>
+          <a:xfrm>
+            <a:off x="5603760" y="1884556"/>
+            <a:ext cx="5861280" cy="4292406"/>
+          </a:xfrm>
+        </p:spPr>
+        <p:txBody>
+          <a:bodyPr>
+            <a:normAutofit/>
+          </a:bodyPr>
+          <a:lstStyle/>
+          <a:p>
+            <a:r>
+              <a:rPr lang="ko-KR" altLang="en-US" sz="2000" dirty="0"/>
+              <a:t>햇빛을 받아 직류</a:t>
+            </a:r>
+            <a:r>
+              <a:rPr lang="en-US" altLang="ko-KR" sz="2000" dirty="0"/>
+              <a:t>(DC) </a:t>
+            </a:r>
+            <a:r>
+              <a:rPr lang="ko-KR" altLang="en-US" sz="2000" dirty="0"/>
+              <a:t>전기로 변환하는 부품</a:t>
+            </a:r>
+            <a:endParaRPr lang="en-US" altLang="ko-KR" sz="2000" dirty="0"/>
+          </a:p>
+          <a:p>
+            <a:r>
+              <a:rPr lang="ko-KR" altLang="en-US" sz="2000" dirty="0" err="1"/>
+              <a:t>광전</a:t>
+            </a:r>
+            <a:r>
+              <a:rPr lang="ko-KR" altLang="en-US" sz="2000" dirty="0"/>
+              <a:t> 효과를 이용하며</a:t>
+            </a:r>
+            <a:r>
+              <a:rPr lang="en-US" altLang="ko-KR" sz="2000" dirty="0"/>
+              <a:t>, </a:t>
+            </a:r>
+            <a:r>
+              <a:rPr lang="ko-KR" altLang="en-US" sz="2000" dirty="0"/>
+              <a:t>여러 개의 태양 전지로 이루어져 있다</a:t>
+            </a:r>
+            <a:r>
+              <a:rPr lang="en-US" altLang="ko-KR" sz="2000" dirty="0"/>
+              <a:t>.</a:t>
+            </a:r>
+          </a:p>
+        </p:txBody>
+      </p:sp>
+      <p:pic>
+        <p:nvPicPr>
+          <p:cNvPr id="1026" name="Picture 2" descr="G52 5V 200mA 1W 태양전지판 아두이노 실험 교재 키트 - 싸이피아">
+            <a:extLst>
+              <a:ext uri="{FF2B5EF4-FFF2-40B4-BE49-F238E27FC236}">
+                <a16:creationId xmlns:a16="http://schemas.microsoft.com/office/drawing/2014/main" id="{A0EEEF27-C872-102B-48A3-FD6DE5230F76}"/>
+              </a:ext>
+            </a:extLst>
+          </p:cNvPr>
+          <p:cNvPicPr>
+            <a:picLocks noChangeAspect="1" noChangeArrowheads="1"/>
+          </p:cNvPicPr>
+          <p:nvPr/>
+        </p:nvPicPr>
+        <p:blipFill rotWithShape="1">
+          <a:blip r:embed="rId3">
+            <a:extLst>
+              <a:ext uri="{28A0092B-C50C-407E-A947-70E740481C1C}">
+                <a14:useLocalDpi xmlns:a14="http://schemas.microsoft.com/office/drawing/2010/main" val="0"/>
+              </a:ext>
+            </a:extLst>
+          </a:blip>
+          <a:srcRect b="16525"/>
+          <a:stretch>
+            <a:fillRect/>
+          </a:stretch>
+        </p:blipFill>
+        <p:spPr bwMode="auto">
+          <a:xfrm>
+            <a:off x="536460" y="1549839"/>
+            <a:ext cx="4762500" cy="3975512"/>
+          </a:xfrm>
+          <a:prstGeom prst="rect">
+            <a:avLst/>
+          </a:prstGeom>
+          <a:noFill/>
+          <a:extLst>
+            <a:ext uri="{909E8E84-426E-40DD-AFC4-6F175D3DCCD1}">
+              <a14:hiddenFill xmlns:a14="http://schemas.microsoft.com/office/drawing/2010/main">
+                <a:solidFill>
+                  <a:srgbClr val="FFFFFF"/>
+                </a:solidFill>
+              </a14:hiddenFill>
+            </a:ext>
+          </a:extLst>
+        </p:spPr>
+      </p:pic>
+      <p:sp>
+        <p:nvSpPr>
+          <p:cNvPr id="3" name="내용 개체 틀 2">
+            <a:extLst>
+              <a:ext uri="{FF2B5EF4-FFF2-40B4-BE49-F238E27FC236}">
+                <a16:creationId xmlns:a16="http://schemas.microsoft.com/office/drawing/2014/main" id="{22375660-9DED-4AEC-4149-83315C59C421}"/>
+              </a:ext>
+            </a:extLst>
+          </p:cNvPr>
+          <p:cNvSpPr txBox="1">
+            <a:spLocks/>
+          </p:cNvSpPr>
+          <p:nvPr/>
+        </p:nvSpPr>
+        <p:spPr>
+          <a:xfrm>
+            <a:off x="7364681" y="3628754"/>
+            <a:ext cx="4100359" cy="804010"/>
+          </a:xfrm>
+          <a:prstGeom prst="rect">
+            <a:avLst/>
+          </a:prstGeom>
+        </p:spPr>
+        <p:txBody>
+          <a:bodyPr vert="horz" lIns="91440" tIns="45720" rIns="91440" bIns="45720" rtlCol="0">
+            <a:normAutofit/>
+          </a:bodyPr>
+          <a:lstStyle>
+            <a:lvl1pPr marL="228600" indent="-228600" algn="l" defTabSz="914400" rtl="0" eaLnBrk="1" latinLnBrk="1" hangingPunct="1">
+              <a:lnSpc>
+                <a:spcPct val="120000"/>
+              </a:lnSpc>
+              <a:spcBef>
+                <a:spcPts val="1000"/>
+              </a:spcBef>
+              <a:buFont typeface="Arial" panose="020B0604020202020204" pitchFamily="34" charset="0"/>
+              <a:buChar char="•"/>
+              <a:defRPr sz="2400" kern="1200">
+                <a:solidFill>
+                  <a:schemeClr val="tx1"/>
+                </a:solidFill>
+                <a:latin typeface="G마켓 산스 TTF Medium" panose="02000000000000000000" pitchFamily="2" charset="-127"/>
+                <a:ea typeface="G마켓 산스 TTF Medium" panose="02000000000000000000" pitchFamily="2" charset="-127"/>
+                <a:cs typeface="+mn-cs"/>
+              </a:defRPr>
+            </a:lvl1pPr>
+            <a:lvl2pPr marL="685800" indent="-228600" algn="l" defTabSz="914400" rtl="0" eaLnBrk="1" latinLnBrk="1" hangingPunct="1">
+              <a:lnSpc>
+                <a:spcPct val="120000"/>
+              </a:lnSpc>
+              <a:spcBef>
+                <a:spcPts val="500"/>
+              </a:spcBef>
+              <a:buFont typeface="Arial" panose="020B0604020202020204" pitchFamily="34" charset="0"/>
+              <a:buChar char="•"/>
+              <a:defRPr sz="2000" kern="1200">
+                <a:solidFill>
+                  <a:schemeClr val="tx1"/>
+                </a:solidFill>
+                <a:latin typeface="G마켓 산스 TTF Medium" panose="02000000000000000000" pitchFamily="2" charset="-127"/>
+                <a:ea typeface="G마켓 산스 TTF Medium" panose="02000000000000000000" pitchFamily="2" charset="-127"/>
+                <a:cs typeface="+mn-cs"/>
+              </a:defRPr>
+            </a:lvl2pPr>
+            <a:lvl3pPr marL="1143000" indent="-228600" algn="l" defTabSz="914400" rtl="0" eaLnBrk="1" latinLnBrk="1" hangingPunct="1">
+              <a:lnSpc>
+                <a:spcPct val="120000"/>
+              </a:lnSpc>
+              <a:spcBef>
+                <a:spcPts val="500"/>
+              </a:spcBef>
+              <a:buFont typeface="Arial" panose="020B0604020202020204" pitchFamily="34" charset="0"/>
+              <a:buChar char="•"/>
+              <a:defRPr sz="1800" kern="1200">
+                <a:solidFill>
+                  <a:schemeClr val="tx1"/>
+                </a:solidFill>
+                <a:latin typeface="G마켓 산스 TTF Medium" panose="02000000000000000000" pitchFamily="2" charset="-127"/>
+                <a:ea typeface="G마켓 산스 TTF Medium" panose="02000000000000000000" pitchFamily="2" charset="-127"/>
+                <a:cs typeface="+mn-cs"/>
+              </a:defRPr>
+            </a:lvl3pPr>
+            <a:lvl4pPr marL="1600200" indent="-228600" algn="l" defTabSz="914400" rtl="0" eaLnBrk="1" latinLnBrk="1" hangingPunct="1">
+              <a:lnSpc>
+                <a:spcPct val="120000"/>
+              </a:lnSpc>
+              <a:spcBef>
+                <a:spcPts val="500"/>
+              </a:spcBef>
+              <a:buFont typeface="Arial" panose="020B0604020202020204" pitchFamily="34" charset="0"/>
+              <a:buChar char="•"/>
+              <a:defRPr sz="1600" kern="1200">
+                <a:solidFill>
+                  <a:schemeClr val="tx1"/>
+                </a:solidFill>
+                <a:latin typeface="G마켓 산스 TTF Medium" panose="02000000000000000000" pitchFamily="2" charset="-127"/>
+                <a:ea typeface="G마켓 산스 TTF Medium" panose="02000000000000000000" pitchFamily="2" charset="-127"/>
+                <a:cs typeface="+mn-cs"/>
+              </a:defRPr>
+            </a:lvl4pPr>
+            <a:lvl5pPr marL="2057400" indent="-228600" algn="l" defTabSz="914400" rtl="0" eaLnBrk="1" latinLnBrk="1" hangingPunct="1">
+              <a:lnSpc>
+                <a:spcPct val="120000"/>
+              </a:lnSpc>
+              <a:spcBef>
+                <a:spcPts val="500"/>
+              </a:spcBef>
+              <a:buFont typeface="Arial" panose="020B0604020202020204" pitchFamily="34" charset="0"/>
+              <a:buChar char="•"/>
+              <a:defRPr sz="1600" kern="1200">
+                <a:solidFill>
+                  <a:schemeClr val="tx1"/>
+                </a:solidFill>
+                <a:latin typeface="G마켓 산스 TTF Medium" panose="02000000000000000000" pitchFamily="2" charset="-127"/>
+                <a:ea typeface="G마켓 산스 TTF Medium" panose="02000000000000000000" pitchFamily="2" charset="-127"/>
+                <a:cs typeface="+mn-cs"/>
+              </a:defRPr>
+            </a:lvl5pPr>
+            <a:lvl6pPr marL="2514600" indent="-228600" algn="l" defTabSz="914400" rtl="0" eaLnBrk="1" latinLnBrk="1" hangingPunct="1">
+              <a:lnSpc>
+                <a:spcPct val="90000"/>
+              </a:lnSpc>
+              <a:spcBef>
+                <a:spcPts val="500"/>
+              </a:spcBef>
+              <a:buFont typeface="Arial" panose="020B0604020202020204" pitchFamily="34" charset="0"/>
+              <a:buChar char="•"/>
+              <a:defRPr sz="1800" kern="1200">
+                <a:solidFill>
+                  <a:schemeClr val="tx1"/>
+                </a:solidFill>
+                <a:latin typeface="+mn-lt"/>
+                <a:ea typeface="+mn-ea"/>
+                <a:cs typeface="+mn-cs"/>
+              </a:defRPr>
+            </a:lvl6pPr>
+            <a:lvl7pPr marL="2971800" indent="-228600" algn="l" defTabSz="914400" rtl="0" eaLnBrk="1" latinLnBrk="1" hangingPunct="1">
+              <a:lnSpc>
+                <a:spcPct val="90000"/>
+              </a:lnSpc>
+              <a:spcBef>
+                <a:spcPts val="500"/>
+              </a:spcBef>
+              <a:buFont typeface="Arial" panose="020B0604020202020204" pitchFamily="34" charset="0"/>
+              <a:buChar char="•"/>
+              <a:defRPr sz="1800" kern="1200">
+                <a:solidFill>
+                  <a:schemeClr val="tx1"/>
+                </a:solidFill>
+                <a:latin typeface="+mn-lt"/>
+                <a:ea typeface="+mn-ea"/>
+                <a:cs typeface="+mn-cs"/>
+              </a:defRPr>
+            </a:lvl7pPr>
+            <a:lvl8pPr marL="3429000" indent="-228600" algn="l" defTabSz="914400" rtl="0" eaLnBrk="1" latinLnBrk="1" hangingPunct="1">
+              <a:lnSpc>
+                <a:spcPct val="90000"/>
+              </a:lnSpc>
+              <a:spcBef>
+                <a:spcPts val="500"/>
+              </a:spcBef>
+              <a:buFont typeface="Arial" panose="020B0604020202020204" pitchFamily="34" charset="0"/>
+              <a:buChar char="•"/>
+              <a:defRPr sz="1800" kern="1200">
+                <a:solidFill>
+                  <a:schemeClr val="tx1"/>
+                </a:solidFill>
+                <a:latin typeface="+mn-lt"/>
+                <a:ea typeface="+mn-ea"/>
+                <a:cs typeface="+mn-cs"/>
+              </a:defRPr>
+            </a:lvl8pPr>
+            <a:lvl9pPr marL="3886200" indent="-228600" algn="l" defTabSz="914400" rtl="0" eaLnBrk="1" latinLnBrk="1" hangingPunct="1">
+              <a:lnSpc>
+                <a:spcPct val="90000"/>
+              </a:lnSpc>
+              <a:spcBef>
+                <a:spcPts val="500"/>
+              </a:spcBef>
+              <a:buFont typeface="Arial" panose="020B0604020202020204" pitchFamily="34" charset="0"/>
+              <a:buChar char="•"/>
+              <a:defRPr sz="1800" kern="1200">
+                <a:solidFill>
+                  <a:schemeClr val="tx1"/>
+                </a:solidFill>
+                <a:latin typeface="+mn-lt"/>
+                <a:ea typeface="+mn-ea"/>
+                <a:cs typeface="+mn-cs"/>
+              </a:defRPr>
+            </a:lvl9pPr>
+          </a:lstStyle>
+          <a:p>
+            <a:pPr marL="0" indent="0">
+              <a:buNone/>
+            </a:pPr>
+            <a:r>
+              <a:rPr lang="en-US" altLang="ko-KR" sz="1400" dirty="0"/>
+              <a:t>※ </a:t>
+            </a:r>
+            <a:r>
+              <a:rPr lang="ko-KR" altLang="en-US" sz="1400" dirty="0" err="1"/>
+              <a:t>광전</a:t>
+            </a:r>
+            <a:r>
+              <a:rPr lang="ko-KR" altLang="en-US" sz="1400" dirty="0"/>
+              <a:t> </a:t>
+            </a:r>
+            <a:r>
+              <a:rPr lang="ko-KR" altLang="en-US" sz="1400" dirty="0" err="1"/>
+              <a:t>효과란</a:t>
+            </a:r>
+            <a:r>
+              <a:rPr lang="en-US" altLang="ko-KR" sz="1400" dirty="0"/>
+              <a:t>?</a:t>
+            </a:r>
+          </a:p>
+          <a:p>
+            <a:pPr marL="0" indent="0">
+              <a:buNone/>
+            </a:pPr>
+            <a:r>
+              <a:rPr lang="ko-KR" altLang="en-US" sz="1400" dirty="0"/>
+              <a:t>금속 등의 물질이 빛에 쪼이면 전자를 내놓는 현상</a:t>
+            </a:r>
+            <a:endParaRPr lang="en-US" altLang="ko-KR" sz="1400" dirty="0"/>
+          </a:p>
+        </p:txBody>
+      </p:sp>
+    </p:spTree>
+    <p:extLst>
+      <p:ext uri="{BB962C8B-B14F-4D97-AF65-F5344CB8AC3E}">
+        <p14:creationId xmlns:p14="http://schemas.microsoft.com/office/powerpoint/2010/main" val="2372132594"/>
+      </p:ext>
+    </p:extLst>
+  </p:cSld>
+  <p:clrMapOvr>
+    <a:masterClrMapping/>
+  </p:clrMapOvr>
+</p:sld>
+</file>
+
+<file path=ppt/slides/slide3.xml><?xml version="1.0" encoding="utf-8"?>
+<p:sld xmlns:a="http://schemas.openxmlformats.org/drawingml/2006/main" xmlns:r="http://schemas.openxmlformats.org/officeDocument/2006/relationships" xmlns:p="http://schemas.openxmlformats.org/presentationml/2006/main">
+  <p:cSld>
+    <p:spTree>
+      <p:nvGrpSpPr>
+        <p:cNvPr id="1" name=""/>
+        <p:cNvGrpSpPr/>
+        <p:nvPr/>
+      </p:nvGrpSpPr>
+      <p:grpSpPr>
+        <a:xfrm>
+          <a:off x="0" y="0"/>
+          <a:ext cx="0" cy="0"/>
+          <a:chOff x="0" y="0"/>
+          <a:chExt cx="0" cy="0"/>
+        </a:xfrm>
+      </p:grpSpPr>
+      <p:sp>
+        <p:nvSpPr>
+          <p:cNvPr id="4" name="슬라이드 번호 개체 틀 3">
+            <a:extLst>
+              <a:ext uri="{FF2B5EF4-FFF2-40B4-BE49-F238E27FC236}">
+                <a16:creationId xmlns:a16="http://schemas.microsoft.com/office/drawing/2014/main" id="{A6705646-5EB3-CECB-110A-29B75A0DA982}"/>
+              </a:ext>
+            </a:extLst>
+          </p:cNvPr>
+          <p:cNvSpPr>
+            <a:spLocks noGrp="1"/>
+          </p:cNvSpPr>
+          <p:nvPr>
+            <p:ph type="sldNum" sz="quarter" idx="12"/>
+          </p:nvPr>
+        </p:nvSpPr>
+        <p:spPr/>
+        <p:txBody>
+          <a:bodyPr/>
+          <a:lstStyle/>
+          <a:p>
+            <a:fld id="{083A2CE0-18CD-4102-B738-4ACFF9E68BA4}" type="slidenum">
+              <a:rPr lang="ko-KR" altLang="en-US" smtClean="0"/>
+              <a:pPr/>
+              <a:t>3</a:t>
+            </a:fld>
+            <a:endParaRPr lang="ko-KR" altLang="en-US" dirty="0"/>
+          </a:p>
+        </p:txBody>
+      </p:sp>
+      <p:pic>
+        <p:nvPicPr>
+          <p:cNvPr id="7" name="Picture 2" descr="G52 5V 200mA 1W 태양전지판 아두이노 실험 교재 키트 - 싸이피아">
+            <a:extLst>
+              <a:ext uri="{FF2B5EF4-FFF2-40B4-BE49-F238E27FC236}">
+                <a16:creationId xmlns:a16="http://schemas.microsoft.com/office/drawing/2014/main" id="{7463FFB5-D7F2-9152-0361-5EDEC8C86397}"/>
+              </a:ext>
+            </a:extLst>
+          </p:cNvPr>
+          <p:cNvPicPr>
+            <a:picLocks noChangeAspect="1" noChangeArrowheads="1"/>
+          </p:cNvPicPr>
+          <p:nvPr/>
+        </p:nvPicPr>
+        <p:blipFill rotWithShape="1">
+          <a:blip r:embed="rId2">
+            <a:extLst>
+              <a:ext uri="{28A0092B-C50C-407E-A947-70E740481C1C}">
+                <a14:useLocalDpi xmlns:a14="http://schemas.microsoft.com/office/drawing/2010/main" val="0"/>
+              </a:ext>
+            </a:extLst>
+          </a:blip>
+          <a:srcRect b="16525"/>
+          <a:stretch>
+            <a:fillRect/>
+          </a:stretch>
+        </p:blipFill>
+        <p:spPr bwMode="auto">
+          <a:xfrm>
+            <a:off x="1261489" y="2730526"/>
+            <a:ext cx="3612113" cy="3015223"/>
+          </a:xfrm>
+          <a:prstGeom prst="rect">
+            <a:avLst/>
+          </a:prstGeom>
+          <a:noFill/>
+          <a:extLst>
+            <a:ext uri="{909E8E84-426E-40DD-AFC4-6F175D3DCCD1}">
+              <a14:hiddenFill xmlns:a14="http://schemas.microsoft.com/office/drawing/2010/main">
+                <a:solidFill>
+                  <a:srgbClr val="FFFFFF"/>
+                </a:solidFill>
+              </a14:hiddenFill>
+            </a:ext>
+          </a:extLst>
+        </p:spPr>
+      </p:pic>
+      <p:pic>
+        <p:nvPicPr>
+          <p:cNvPr id="8" name="그림 7">
+            <a:extLst>
+              <a:ext uri="{FF2B5EF4-FFF2-40B4-BE49-F238E27FC236}">
+                <a16:creationId xmlns:a16="http://schemas.microsoft.com/office/drawing/2014/main" id="{82D6111F-6F19-424C-A224-6B8965F7C633}"/>
+              </a:ext>
+            </a:extLst>
+          </p:cNvPr>
+          <p:cNvPicPr>
+            <a:picLocks noChangeAspect="1"/>
+          </p:cNvPicPr>
+          <p:nvPr/>
+        </p:nvPicPr>
+        <p:blipFill>
+          <a:blip r:embed="rId3"/>
+          <a:stretch>
+            <a:fillRect/>
+          </a:stretch>
+        </p:blipFill>
+        <p:spPr>
+          <a:xfrm rot="19497749">
+            <a:off x="4189217" y="3900420"/>
+            <a:ext cx="3029495" cy="2049364"/>
+          </a:xfrm>
+          <a:prstGeom prst="rect">
+            <a:avLst/>
+          </a:prstGeom>
+        </p:spPr>
+      </p:pic>
+      <p:pic>
+        <p:nvPicPr>
+          <p:cNvPr id="1026" name="Picture 2" descr="해 - 무료 날씨개 아이콘">
+            <a:extLst>
+              <a:ext uri="{FF2B5EF4-FFF2-40B4-BE49-F238E27FC236}">
+                <a16:creationId xmlns:a16="http://schemas.microsoft.com/office/drawing/2014/main" id="{48B0AD7F-00EC-9C1E-2D39-632C1037E4B4}"/>
+              </a:ext>
+            </a:extLst>
+          </p:cNvPr>
+          <p:cNvPicPr>
+            <a:picLocks noChangeAspect="1" noChangeArrowheads="1"/>
+          </p:cNvPicPr>
+          <p:nvPr/>
+        </p:nvPicPr>
+        <p:blipFill>
+          <a:blip r:embed="rId4">
+            <a:extLst>
+              <a:ext uri="{28A0092B-C50C-407E-A947-70E740481C1C}">
+                <a14:useLocalDpi xmlns:a14="http://schemas.microsoft.com/office/drawing/2010/main" val="0"/>
+              </a:ext>
+            </a:extLst>
+          </a:blip>
+          <a:srcRect/>
+          <a:stretch>
+            <a:fillRect/>
+          </a:stretch>
+        </p:blipFill>
+        <p:spPr bwMode="auto">
+          <a:xfrm>
+            <a:off x="4873602" y="1386444"/>
+            <a:ext cx="2042556" cy="2042556"/>
+          </a:xfrm>
+          <a:prstGeom prst="rect">
+            <a:avLst/>
+          </a:prstGeom>
+          <a:noFill/>
+          <a:extLst>
+            <a:ext uri="{909E8E84-426E-40DD-AFC4-6F175D3DCCD1}">
+              <a14:hiddenFill xmlns:a14="http://schemas.microsoft.com/office/drawing/2010/main">
+                <a:solidFill>
+                  <a:srgbClr val="FFFFFF"/>
+                </a:solidFill>
+              </a14:hiddenFill>
+            </a:ext>
+          </a:extLst>
+        </p:spPr>
+      </p:pic>
+      <p:sp>
+        <p:nvSpPr>
+          <p:cNvPr id="9" name="화살표: 아래쪽 8">
+            <a:extLst>
+              <a:ext uri="{FF2B5EF4-FFF2-40B4-BE49-F238E27FC236}">
+                <a16:creationId xmlns:a16="http://schemas.microsoft.com/office/drawing/2014/main" id="{BF797560-9384-D8EC-9BA1-95A325EC5817}"/>
+              </a:ext>
+            </a:extLst>
+          </p:cNvPr>
+          <p:cNvSpPr/>
+          <p:nvPr/>
+        </p:nvSpPr>
+        <p:spPr>
+          <a:xfrm rot="4347590">
+            <a:off x="3450119" y="2064685"/>
+            <a:ext cx="585597" cy="2210963"/>
+          </a:xfrm>
+          <a:prstGeom prst="downArrow">
+            <a:avLst/>
+          </a:prstGeom>
+          <a:solidFill>
+            <a:srgbClr val="FFAE35"/>
+          </a:solidFill>
+          <a:ln>
+            <a:noFill/>
+          </a:ln>
+        </p:spPr>
+        <p:style>
+          <a:lnRef idx="3">
+            <a:schemeClr val="lt1"/>
+          </a:lnRef>
+          <a:fillRef idx="1">
+            <a:schemeClr val="accent2"/>
+          </a:fillRef>
+          <a:effectRef idx="1">
+            <a:schemeClr val="accent2"/>
+          </a:effectRef>
+          <a:fontRef idx="minor">
+            <a:schemeClr val="lt1"/>
+          </a:fontRef>
+        </p:style>
+        <p:txBody>
+          <a:bodyPr rtlCol="0" anchor="ctr"/>
+          <a:lstStyle/>
+          <a:p>
+            <a:pPr algn="ctr"/>
+            <a:endParaRPr lang="ko-KR" altLang="en-US"/>
+          </a:p>
+        </p:txBody>
+      </p:sp>
+      <p:pic>
+        <p:nvPicPr>
+          <p:cNvPr id="6" name="그림 5">
+            <a:extLst>
+              <a:ext uri="{FF2B5EF4-FFF2-40B4-BE49-F238E27FC236}">
+                <a16:creationId xmlns:a16="http://schemas.microsoft.com/office/drawing/2014/main" id="{E81EAF56-F1DC-E66E-B422-CB892528A26F}"/>
+              </a:ext>
+            </a:extLst>
+          </p:cNvPr>
+          <p:cNvPicPr>
+            <a:picLocks noChangeAspect="1"/>
+          </p:cNvPicPr>
+          <p:nvPr/>
+        </p:nvPicPr>
+        <p:blipFill>
+          <a:blip r:embed="rId5"/>
+          <a:stretch>
+            <a:fillRect/>
+          </a:stretch>
+        </p:blipFill>
+        <p:spPr>
+          <a:xfrm>
+            <a:off x="7353106" y="1928275"/>
+            <a:ext cx="3672123" cy="3708481"/>
+          </a:xfrm>
+          <a:prstGeom prst="rect">
+            <a:avLst/>
+          </a:prstGeom>
+        </p:spPr>
+      </p:pic>
+      <p:sp>
+        <p:nvSpPr>
+          <p:cNvPr id="10" name="제목 1">
+            <a:extLst>
+              <a:ext uri="{FF2B5EF4-FFF2-40B4-BE49-F238E27FC236}">
+                <a16:creationId xmlns:a16="http://schemas.microsoft.com/office/drawing/2014/main" id="{AF6C8C08-4D42-3E83-B11A-BBEF1108FFFA}"/>
+              </a:ext>
+            </a:extLst>
+          </p:cNvPr>
+          <p:cNvSpPr>
+            <a:spLocks noGrp="1"/>
+          </p:cNvSpPr>
+          <p:nvPr>
+            <p:ph type="title"/>
+          </p:nvPr>
+        </p:nvSpPr>
+        <p:spPr>
+          <a:xfrm>
+            <a:off x="536460" y="224276"/>
+            <a:ext cx="10515600" cy="1325563"/>
+          </a:xfrm>
+        </p:spPr>
+        <p:txBody>
+          <a:bodyPr/>
+          <a:lstStyle/>
+          <a:p>
+            <a:r>
+              <a:rPr lang="ko-KR" altLang="en-US" dirty="0"/>
+              <a:t>태양광 패널 실습</a:t>
+            </a:r>
+          </a:p>
+        </p:txBody>
+      </p:sp>
+    </p:spTree>
+    <p:extLst>
+      <p:ext uri="{BB962C8B-B14F-4D97-AF65-F5344CB8AC3E}">
+        <p14:creationId xmlns:p14="http://schemas.microsoft.com/office/powerpoint/2010/main" val="1676128470"/>
+      </p:ext>
+    </p:extLst>
+  </p:cSld>
+  <p:clrMapOvr>
+    <a:masterClrMapping/>
+  </p:clrMapOvr>
+</p:sld>
+</file>
+
+<file path=ppt/slides/slide4.xml><?xml version="1.0" encoding="utf-8"?>
+<p:sld xmlns:a="http://schemas.openxmlformats.org/drawingml/2006/main" xmlns:r="http://schemas.openxmlformats.org/officeDocument/2006/relationships" xmlns:p="http://schemas.openxmlformats.org/presentationml/2006/main">
+  <p:cSld>
+    <p:spTree>
+      <p:nvGrpSpPr>
+        <p:cNvPr id="1" name="">
+          <a:extLst>
+            <a:ext uri="{FF2B5EF4-FFF2-40B4-BE49-F238E27FC236}">
+              <a16:creationId xmlns:a16="http://schemas.microsoft.com/office/drawing/2014/main" id="{73323048-0E7C-81F4-EDB2-C26A68B694F7}"/>
+            </a:ext>
+          </a:extLst>
+        </p:cNvPr>
+        <p:cNvGrpSpPr/>
+        <p:nvPr/>
+      </p:nvGrpSpPr>
+      <p:grpSpPr>
+        <a:xfrm>
+          <a:off x="0" y="0"/>
+          <a:ext cx="0" cy="0"/>
+          <a:chOff x="0" y="0"/>
+          <a:chExt cx="0" cy="0"/>
+        </a:xfrm>
+      </p:grpSpPr>
+      <p:sp>
+        <p:nvSpPr>
+          <p:cNvPr id="2" name="제목 1">
+            <a:extLst>
+              <a:ext uri="{FF2B5EF4-FFF2-40B4-BE49-F238E27FC236}">
+                <a16:creationId xmlns:a16="http://schemas.microsoft.com/office/drawing/2014/main" id="{8C1CA3F3-BC8A-9ED6-91C7-E8F88E103210}"/>
+              </a:ext>
+            </a:extLst>
+          </p:cNvPr>
+          <p:cNvSpPr>
+            <a:spLocks noGrp="1"/>
+          </p:cNvSpPr>
+          <p:nvPr>
+            <p:ph type="title"/>
+          </p:nvPr>
+        </p:nvSpPr>
+        <p:spPr>
+          <a:xfrm>
+            <a:off x="548279" y="195305"/>
+            <a:ext cx="10515600" cy="1325563"/>
+          </a:xfrm>
+        </p:spPr>
+        <p:txBody>
+          <a:bodyPr/>
+          <a:lstStyle/>
+          <a:p>
+            <a:r>
+              <a:rPr lang="ko-KR" altLang="en-US" dirty="0"/>
+              <a:t>태양광 패널로 베터리 충전하기</a:t>
+            </a:r>
+          </a:p>
+        </p:txBody>
+      </p:sp>
+      <p:sp>
+        <p:nvSpPr>
+          <p:cNvPr id="4" name="슬라이드 번호 개체 틀 3">
+            <a:extLst>
+              <a:ext uri="{FF2B5EF4-FFF2-40B4-BE49-F238E27FC236}">
+                <a16:creationId xmlns:a16="http://schemas.microsoft.com/office/drawing/2014/main" id="{B8CD53B4-2E10-EFC9-242E-AE22A0A91EEA}"/>
+              </a:ext>
+            </a:extLst>
+          </p:cNvPr>
+          <p:cNvSpPr>
+            <a:spLocks noGrp="1"/>
+          </p:cNvSpPr>
+          <p:nvPr>
+            <p:ph type="sldNum" sz="quarter" idx="12"/>
+          </p:nvPr>
+        </p:nvSpPr>
+        <p:spPr/>
+        <p:txBody>
+          <a:bodyPr/>
+          <a:lstStyle/>
+          <a:p>
+            <a:fld id="{083A2CE0-18CD-4102-B738-4ACFF9E68BA4}" type="slidenum">
+              <a:rPr lang="ko-KR" altLang="en-US" smtClean="0"/>
+              <a:pPr/>
+              <a:t>4</a:t>
+            </a:fld>
+            <a:endParaRPr lang="ko-KR" altLang="en-US" dirty="0"/>
+          </a:p>
+        </p:txBody>
+      </p:sp>
+      <p:sp>
+        <p:nvSpPr>
+          <p:cNvPr id="7" name="내용 개체 틀 5">
+            <a:extLst>
+              <a:ext uri="{FF2B5EF4-FFF2-40B4-BE49-F238E27FC236}">
+                <a16:creationId xmlns:a16="http://schemas.microsoft.com/office/drawing/2014/main" id="{6F5F1D67-538B-EC24-96FC-E3C038EE0911}"/>
+              </a:ext>
+            </a:extLst>
+          </p:cNvPr>
+          <p:cNvSpPr txBox="1">
+            <a:spLocks/>
+          </p:cNvSpPr>
+          <p:nvPr/>
+        </p:nvSpPr>
+        <p:spPr>
+          <a:xfrm>
+            <a:off x="838200" y="5448299"/>
+            <a:ext cx="10515600" cy="728663"/>
+          </a:xfrm>
+          <a:prstGeom prst="rect">
+            <a:avLst/>
+          </a:prstGeom>
+        </p:spPr>
+        <p:txBody>
+          <a:bodyPr vert="horz" lIns="91440" tIns="45720" rIns="91440" bIns="45720" rtlCol="0">
+            <a:normAutofit/>
+          </a:bodyPr>
+          <a:lstStyle>
+            <a:lvl1pPr marL="228600" indent="-228600" algn="l" defTabSz="914400" rtl="0" eaLnBrk="1" latinLnBrk="1" hangingPunct="1">
+              <a:lnSpc>
+                <a:spcPct val="120000"/>
+              </a:lnSpc>
+              <a:spcBef>
+                <a:spcPts val="1000"/>
+              </a:spcBef>
+              <a:buFont typeface="Arial" panose="020B0604020202020204" pitchFamily="34" charset="0"/>
+              <a:buChar char="•"/>
+              <a:defRPr sz="2400" kern="1200">
+                <a:solidFill>
+                  <a:schemeClr val="tx1"/>
+                </a:solidFill>
+                <a:latin typeface="G마켓 산스 TTF Medium" panose="02000000000000000000" pitchFamily="2" charset="-127"/>
+                <a:ea typeface="G마켓 산스 TTF Medium" panose="02000000000000000000" pitchFamily="2" charset="-127"/>
+                <a:cs typeface="+mn-cs"/>
+              </a:defRPr>
+            </a:lvl1pPr>
+            <a:lvl2pPr marL="685800" indent="-228600" algn="l" defTabSz="914400" rtl="0" eaLnBrk="1" latinLnBrk="1" hangingPunct="1">
+              <a:lnSpc>
+                <a:spcPct val="120000"/>
+              </a:lnSpc>
+              <a:spcBef>
+                <a:spcPts val="500"/>
+              </a:spcBef>
+              <a:buFont typeface="Arial" panose="020B0604020202020204" pitchFamily="34" charset="0"/>
+              <a:buChar char="•"/>
+              <a:defRPr sz="2000" kern="1200">
+                <a:solidFill>
+                  <a:schemeClr val="tx1"/>
+                </a:solidFill>
+                <a:latin typeface="G마켓 산스 TTF Medium" panose="02000000000000000000" pitchFamily="2" charset="-127"/>
+                <a:ea typeface="G마켓 산스 TTF Medium" panose="02000000000000000000" pitchFamily="2" charset="-127"/>
+                <a:cs typeface="+mn-cs"/>
+              </a:defRPr>
+            </a:lvl2pPr>
+            <a:lvl3pPr marL="1143000" indent="-228600" algn="l" defTabSz="914400" rtl="0" eaLnBrk="1" latinLnBrk="1" hangingPunct="1">
+              <a:lnSpc>
+                <a:spcPct val="120000"/>
+              </a:lnSpc>
+              <a:spcBef>
+                <a:spcPts val="500"/>
+              </a:spcBef>
+              <a:buFont typeface="Arial" panose="020B0604020202020204" pitchFamily="34" charset="0"/>
+              <a:buChar char="•"/>
+              <a:defRPr sz="1800" kern="1200">
+                <a:solidFill>
+                  <a:schemeClr val="tx1"/>
+                </a:solidFill>
+                <a:latin typeface="G마켓 산스 TTF Medium" panose="02000000000000000000" pitchFamily="2" charset="-127"/>
+                <a:ea typeface="G마켓 산스 TTF Medium" panose="02000000000000000000" pitchFamily="2" charset="-127"/>
+                <a:cs typeface="+mn-cs"/>
+              </a:defRPr>
+            </a:lvl3pPr>
+            <a:lvl4pPr marL="1600200" indent="-228600" algn="l" defTabSz="914400" rtl="0" eaLnBrk="1" latinLnBrk="1" hangingPunct="1">
+              <a:lnSpc>
+                <a:spcPct val="120000"/>
+              </a:lnSpc>
+              <a:spcBef>
+                <a:spcPts val="500"/>
+              </a:spcBef>
+              <a:buFont typeface="Arial" panose="020B0604020202020204" pitchFamily="34" charset="0"/>
+              <a:buChar char="•"/>
+              <a:defRPr sz="1600" kern="1200">
+                <a:solidFill>
+                  <a:schemeClr val="tx1"/>
+                </a:solidFill>
+                <a:latin typeface="G마켓 산스 TTF Medium" panose="02000000000000000000" pitchFamily="2" charset="-127"/>
+                <a:ea typeface="G마켓 산스 TTF Medium" panose="02000000000000000000" pitchFamily="2" charset="-127"/>
+                <a:cs typeface="+mn-cs"/>
+              </a:defRPr>
+            </a:lvl4pPr>
+            <a:lvl5pPr marL="2057400" indent="-228600" algn="l" defTabSz="914400" rtl="0" eaLnBrk="1" latinLnBrk="1" hangingPunct="1">
+              <a:lnSpc>
+                <a:spcPct val="120000"/>
+              </a:lnSpc>
+              <a:spcBef>
+                <a:spcPts val="500"/>
+              </a:spcBef>
+              <a:buFont typeface="Arial" panose="020B0604020202020204" pitchFamily="34" charset="0"/>
+              <a:buChar char="•"/>
+              <a:defRPr sz="1600" kern="1200">
+                <a:solidFill>
+                  <a:schemeClr val="tx1"/>
+                </a:solidFill>
+                <a:latin typeface="G마켓 산스 TTF Medium" panose="02000000000000000000" pitchFamily="2" charset="-127"/>
+                <a:ea typeface="G마켓 산스 TTF Medium" panose="02000000000000000000" pitchFamily="2" charset="-127"/>
+                <a:cs typeface="+mn-cs"/>
+              </a:defRPr>
+            </a:lvl5pPr>
+            <a:lvl6pPr marL="2514600" indent="-228600" algn="l" defTabSz="914400" rtl="0" eaLnBrk="1" latinLnBrk="1" hangingPunct="1">
+              <a:lnSpc>
+                <a:spcPct val="90000"/>
+              </a:lnSpc>
+              <a:spcBef>
+                <a:spcPts val="500"/>
+              </a:spcBef>
+              <a:buFont typeface="Arial" panose="020B0604020202020204" pitchFamily="34" charset="0"/>
+              <a:buChar char="•"/>
+              <a:defRPr sz="1800" kern="1200">
+                <a:solidFill>
+                  <a:schemeClr val="tx1"/>
+                </a:solidFill>
+                <a:latin typeface="+mn-lt"/>
+                <a:ea typeface="+mn-ea"/>
+                <a:cs typeface="+mn-cs"/>
+              </a:defRPr>
+            </a:lvl6pPr>
+            <a:lvl7pPr marL="2971800" indent="-228600" algn="l" defTabSz="914400" rtl="0" eaLnBrk="1" latinLnBrk="1" hangingPunct="1">
+              <a:lnSpc>
+                <a:spcPct val="90000"/>
+              </a:lnSpc>
+              <a:spcBef>
+                <a:spcPts val="500"/>
+              </a:spcBef>
+              <a:buFont typeface="Arial" panose="020B0604020202020204" pitchFamily="34" charset="0"/>
+              <a:buChar char="•"/>
+              <a:defRPr sz="1800" kern="1200">
+                <a:solidFill>
+                  <a:schemeClr val="tx1"/>
+                </a:solidFill>
+                <a:latin typeface="+mn-lt"/>
+                <a:ea typeface="+mn-ea"/>
+                <a:cs typeface="+mn-cs"/>
+              </a:defRPr>
+            </a:lvl7pPr>
+            <a:lvl8pPr marL="3429000" indent="-228600" algn="l" defTabSz="914400" rtl="0" eaLnBrk="1" latinLnBrk="1" hangingPunct="1">
+              <a:lnSpc>
+                <a:spcPct val="90000"/>
+              </a:lnSpc>
+              <a:spcBef>
+                <a:spcPts val="500"/>
+              </a:spcBef>
+              <a:buFont typeface="Arial" panose="020B0604020202020204" pitchFamily="34" charset="0"/>
+              <a:buChar char="•"/>
+              <a:defRPr sz="1800" kern="1200">
+                <a:solidFill>
+                  <a:schemeClr val="tx1"/>
+                </a:solidFill>
+                <a:latin typeface="+mn-lt"/>
+                <a:ea typeface="+mn-ea"/>
+                <a:cs typeface="+mn-cs"/>
+              </a:defRPr>
+            </a:lvl8pPr>
+            <a:lvl9pPr marL="3886200" indent="-228600" algn="l" defTabSz="914400" rtl="0" eaLnBrk="1" latinLnBrk="1" hangingPunct="1">
+              <a:lnSpc>
+                <a:spcPct val="90000"/>
+              </a:lnSpc>
+              <a:spcBef>
+                <a:spcPts val="500"/>
+              </a:spcBef>
+              <a:buFont typeface="Arial" panose="020B0604020202020204" pitchFamily="34" charset="0"/>
+              <a:buChar char="•"/>
+              <a:defRPr sz="1800" kern="1200">
+                <a:solidFill>
+                  <a:schemeClr val="tx1"/>
+                </a:solidFill>
+                <a:latin typeface="+mn-lt"/>
+                <a:ea typeface="+mn-ea"/>
+                <a:cs typeface="+mn-cs"/>
+              </a:defRPr>
+            </a:lvl9pPr>
+          </a:lstStyle>
+          <a:p>
+            <a:pPr marL="0" indent="0" algn="ctr">
+              <a:buFont typeface="Arial" panose="020B0604020202020204" pitchFamily="34" charset="0"/>
+              <a:buNone/>
+            </a:pPr>
+            <a:endParaRPr lang="ko-KR" altLang="en-US" dirty="0"/>
+          </a:p>
+        </p:txBody>
+      </p:sp>
+      <p:pic>
+        <p:nvPicPr>
+          <p:cNvPr id="2054" name="Picture 6" descr="아두이노 태양광패널 (5.5V 160mA)-모바일 11번가">
+            <a:extLst>
+              <a:ext uri="{FF2B5EF4-FFF2-40B4-BE49-F238E27FC236}">
+                <a16:creationId xmlns:a16="http://schemas.microsoft.com/office/drawing/2014/main" id="{A28B7158-23FD-9FC4-0296-6863DE13D3B0}"/>
+              </a:ext>
+            </a:extLst>
+          </p:cNvPr>
+          <p:cNvPicPr>
+            <a:picLocks noChangeAspect="1" noChangeArrowheads="1"/>
+          </p:cNvPicPr>
+          <p:nvPr/>
+        </p:nvPicPr>
+        <p:blipFill>
+          <a:blip r:embed="rId2">
+            <a:extLst>
+              <a:ext uri="{28A0092B-C50C-407E-A947-70E740481C1C}">
+                <a14:useLocalDpi xmlns:a14="http://schemas.microsoft.com/office/drawing/2010/main" val="0"/>
+              </a:ext>
+            </a:extLst>
+          </a:blip>
+          <a:srcRect/>
+          <a:stretch>
+            <a:fillRect/>
+          </a:stretch>
+        </p:blipFill>
+        <p:spPr bwMode="auto">
+          <a:xfrm rot="16200000">
+            <a:off x="536460" y="1345847"/>
+            <a:ext cx="3960681" cy="3960681"/>
+          </a:xfrm>
+          <a:prstGeom prst="rect">
+            <a:avLst/>
+          </a:prstGeom>
+          <a:noFill/>
+          <a:extLst>
+            <a:ext uri="{909E8E84-426E-40DD-AFC4-6F175D3DCCD1}">
+              <a14:hiddenFill xmlns:a14="http://schemas.microsoft.com/office/drawing/2010/main">
+                <a:solidFill>
+                  <a:srgbClr val="FFFFFF"/>
+                </a:solidFill>
+              </a14:hiddenFill>
+            </a:ext>
+          </a:extLst>
+        </p:spPr>
+      </p:pic>
+      <p:pic>
+        <p:nvPicPr>
+          <p:cNvPr id="8" name="그림 7">
+            <a:extLst>
+              <a:ext uri="{FF2B5EF4-FFF2-40B4-BE49-F238E27FC236}">
+                <a16:creationId xmlns:a16="http://schemas.microsoft.com/office/drawing/2014/main" id="{03A65235-A4DB-15B3-AD4D-DB1F243968EC}"/>
+              </a:ext>
+            </a:extLst>
+          </p:cNvPr>
+          <p:cNvPicPr>
+            <a:picLocks noChangeAspect="1"/>
+          </p:cNvPicPr>
+          <p:nvPr/>
+        </p:nvPicPr>
+        <p:blipFill>
+          <a:blip r:embed="rId3"/>
+          <a:stretch>
+            <a:fillRect/>
+          </a:stretch>
+        </p:blipFill>
+        <p:spPr>
+          <a:xfrm rot="10800000">
+            <a:off x="5100403" y="2476739"/>
+            <a:ext cx="2204949" cy="1698895"/>
+          </a:xfrm>
+          <a:prstGeom prst="rect">
+            <a:avLst/>
+          </a:prstGeom>
+        </p:spPr>
+      </p:pic>
+      <p:pic>
+        <p:nvPicPr>
+          <p:cNvPr id="2056" name="Picture 8" descr="리튬폴리머 배터리 3.7V, 3000mAh, KC인증 : 리튬전지 &gt; 파워/전원">
+            <a:extLst>
+              <a:ext uri="{FF2B5EF4-FFF2-40B4-BE49-F238E27FC236}">
+                <a16:creationId xmlns:a16="http://schemas.microsoft.com/office/drawing/2014/main" id="{960413FD-9749-A63D-91F0-AD839FA8CEF1}"/>
+              </a:ext>
+            </a:extLst>
+          </p:cNvPr>
+          <p:cNvPicPr>
+            <a:picLocks noChangeAspect="1" noChangeArrowheads="1"/>
+          </p:cNvPicPr>
+          <p:nvPr/>
+        </p:nvPicPr>
+        <p:blipFill>
+          <a:blip r:embed="rId4">
+            <a:extLst>
+              <a:ext uri="{28A0092B-C50C-407E-A947-70E740481C1C}">
+                <a14:useLocalDpi xmlns:a14="http://schemas.microsoft.com/office/drawing/2010/main" val="0"/>
+              </a:ext>
+            </a:extLst>
+          </a:blip>
+          <a:srcRect/>
+          <a:stretch>
+            <a:fillRect/>
+          </a:stretch>
+        </p:blipFill>
+        <p:spPr bwMode="auto">
+          <a:xfrm>
+            <a:off x="8109794" y="2036922"/>
+            <a:ext cx="2395137" cy="2395137"/>
+          </a:xfrm>
+          <a:prstGeom prst="rect">
+            <a:avLst/>
+          </a:prstGeom>
+          <a:noFill/>
+          <a:extLst>
+            <a:ext uri="{909E8E84-426E-40DD-AFC4-6F175D3DCCD1}">
+              <a14:hiddenFill xmlns:a14="http://schemas.microsoft.com/office/drawing/2010/main">
+                <a:solidFill>
+                  <a:srgbClr val="FFFFFF"/>
+                </a:solidFill>
+              </a14:hiddenFill>
+            </a:ext>
+          </a:extLst>
+        </p:spPr>
+      </p:pic>
+      <p:cxnSp>
+        <p:nvCxnSpPr>
+          <p:cNvPr id="10" name="직선 연결선 9">
+            <a:extLst>
+              <a:ext uri="{FF2B5EF4-FFF2-40B4-BE49-F238E27FC236}">
+                <a16:creationId xmlns:a16="http://schemas.microsoft.com/office/drawing/2014/main" id="{68638A65-4463-3CB1-CAAC-DBEA4E867FA2}"/>
+              </a:ext>
+            </a:extLst>
+          </p:cNvPr>
+          <p:cNvCxnSpPr>
+            <a:cxnSpLocks/>
+          </p:cNvCxnSpPr>
+          <p:nvPr/>
+        </p:nvCxnSpPr>
+        <p:spPr>
+          <a:xfrm>
+            <a:off x="3650620" y="2819982"/>
+            <a:ext cx="1619395" cy="2522"/>
+          </a:xfrm>
+          <a:prstGeom prst="line">
+            <a:avLst/>
+          </a:prstGeom>
+          <a:ln w="38100">
+            <a:solidFill>
+              <a:srgbClr val="FF0000"/>
+            </a:solidFill>
+          </a:ln>
+        </p:spPr>
+        <p:style>
+          <a:lnRef idx="1">
+            <a:schemeClr val="accent1"/>
+          </a:lnRef>
+          <a:fillRef idx="0">
+            <a:schemeClr val="accent1"/>
+          </a:fillRef>
+          <a:effectRef idx="0">
+            <a:schemeClr val="accent1"/>
+          </a:effectRef>
+          <a:fontRef idx="minor">
+            <a:schemeClr val="tx1"/>
+          </a:fontRef>
+        </p:style>
+      </p:cxnSp>
+      <p:cxnSp>
+        <p:nvCxnSpPr>
+          <p:cNvPr id="12" name="직선 연결선 11">
+            <a:extLst>
+              <a:ext uri="{FF2B5EF4-FFF2-40B4-BE49-F238E27FC236}">
+                <a16:creationId xmlns:a16="http://schemas.microsoft.com/office/drawing/2014/main" id="{064B1D86-6C1B-D1F4-D722-1B5156B3E732}"/>
+              </a:ext>
+            </a:extLst>
+          </p:cNvPr>
+          <p:cNvCxnSpPr>
+            <a:cxnSpLocks/>
+          </p:cNvCxnSpPr>
+          <p:nvPr/>
+        </p:nvCxnSpPr>
+        <p:spPr>
+          <a:xfrm>
+            <a:off x="7029014" y="2819982"/>
+            <a:ext cx="1717117" cy="110855"/>
+          </a:xfrm>
+          <a:prstGeom prst="line">
+            <a:avLst/>
+          </a:prstGeom>
+          <a:ln w="38100">
+            <a:solidFill>
+              <a:srgbClr val="FF0000"/>
+            </a:solidFill>
+          </a:ln>
+        </p:spPr>
+        <p:style>
+          <a:lnRef idx="1">
+            <a:schemeClr val="accent1"/>
+          </a:lnRef>
+          <a:fillRef idx="0">
+            <a:schemeClr val="accent1"/>
+          </a:fillRef>
+          <a:effectRef idx="0">
+            <a:schemeClr val="accent1"/>
+          </a:effectRef>
+          <a:fontRef idx="minor">
+            <a:schemeClr val="tx1"/>
+          </a:fontRef>
+        </p:style>
+      </p:cxnSp>
+      <p:cxnSp>
+        <p:nvCxnSpPr>
+          <p:cNvPr id="14" name="직선 연결선 13">
+            <a:extLst>
+              <a:ext uri="{FF2B5EF4-FFF2-40B4-BE49-F238E27FC236}">
+                <a16:creationId xmlns:a16="http://schemas.microsoft.com/office/drawing/2014/main" id="{04C36E5C-41C7-641F-3809-127B67DFAB2A}"/>
+              </a:ext>
+            </a:extLst>
+          </p:cNvPr>
+          <p:cNvCxnSpPr/>
+          <p:nvPr/>
+        </p:nvCxnSpPr>
+        <p:spPr>
+          <a:xfrm flipV="1">
+            <a:off x="3601203" y="3797203"/>
+            <a:ext cx="1857276" cy="83762"/>
+          </a:xfrm>
+          <a:prstGeom prst="line">
+            <a:avLst/>
+          </a:prstGeom>
+          <a:ln w="38100">
+            <a:solidFill>
+              <a:schemeClr val="tx1"/>
+            </a:solidFill>
+          </a:ln>
+        </p:spPr>
+        <p:style>
+          <a:lnRef idx="1">
+            <a:schemeClr val="accent1"/>
+          </a:lnRef>
+          <a:fillRef idx="0">
+            <a:schemeClr val="accent1"/>
+          </a:fillRef>
+          <a:effectRef idx="0">
+            <a:schemeClr val="accent1"/>
+          </a:effectRef>
+          <a:fontRef idx="minor">
+            <a:schemeClr val="tx1"/>
+          </a:fontRef>
+        </p:style>
+      </p:cxnSp>
+      <p:cxnSp>
+        <p:nvCxnSpPr>
+          <p:cNvPr id="16" name="직선 연결선 15">
+            <a:extLst>
+              <a:ext uri="{FF2B5EF4-FFF2-40B4-BE49-F238E27FC236}">
+                <a16:creationId xmlns:a16="http://schemas.microsoft.com/office/drawing/2014/main" id="{1E972B3D-1A34-421A-1E93-CCDE31B6EF8C}"/>
+              </a:ext>
+            </a:extLst>
+          </p:cNvPr>
+          <p:cNvCxnSpPr>
+            <a:cxnSpLocks/>
+          </p:cNvCxnSpPr>
+          <p:nvPr/>
+        </p:nvCxnSpPr>
+        <p:spPr>
+          <a:xfrm flipV="1">
+            <a:off x="6973173" y="3749404"/>
+            <a:ext cx="1717117" cy="131561"/>
+          </a:xfrm>
+          <a:prstGeom prst="line">
+            <a:avLst/>
+          </a:prstGeom>
+          <a:ln w="38100">
+            <a:solidFill>
+              <a:schemeClr val="tx1"/>
+            </a:solidFill>
+          </a:ln>
+        </p:spPr>
+        <p:style>
+          <a:lnRef idx="1">
+            <a:schemeClr val="accent1"/>
+          </a:lnRef>
+          <a:fillRef idx="0">
+            <a:schemeClr val="accent1"/>
+          </a:fillRef>
+          <a:effectRef idx="0">
+            <a:schemeClr val="accent1"/>
+          </a:effectRef>
+          <a:fontRef idx="minor">
+            <a:schemeClr val="tx1"/>
+          </a:fontRef>
+        </p:style>
+      </p:cxnSp>
+      <p:sp>
+        <p:nvSpPr>
+          <p:cNvPr id="20" name="TextBox 19">
+            <a:extLst>
+              <a:ext uri="{FF2B5EF4-FFF2-40B4-BE49-F238E27FC236}">
+                <a16:creationId xmlns:a16="http://schemas.microsoft.com/office/drawing/2014/main" id="{CE1D25B0-94D5-C998-4DDA-FC691C0B650A}"/>
+              </a:ext>
+            </a:extLst>
+          </p:cNvPr>
+          <p:cNvSpPr txBox="1"/>
+          <p:nvPr/>
+        </p:nvSpPr>
+        <p:spPr>
+          <a:xfrm>
+            <a:off x="4322893" y="2255768"/>
+            <a:ext cx="413896" cy="646331"/>
+          </a:xfrm>
+          <a:prstGeom prst="rect">
+            <a:avLst/>
+          </a:prstGeom>
+          <a:noFill/>
+        </p:spPr>
+        <p:txBody>
+          <a:bodyPr wrap="none" rtlCol="0">
+            <a:spAutoFit/>
+          </a:bodyPr>
+          <a:lstStyle/>
+          <a:p>
+            <a:r>
+              <a:rPr lang="en-US" altLang="ko-KR" sz="3600" dirty="0">
+                <a:solidFill>
+                  <a:srgbClr val="FF0000"/>
+                </a:solidFill>
+              </a:rPr>
+              <a:t>+</a:t>
+            </a:r>
+            <a:endParaRPr lang="ko-KR" altLang="en-US" sz="3600" dirty="0">
+              <a:solidFill>
+                <a:srgbClr val="FF0000"/>
+              </a:solidFill>
+            </a:endParaRPr>
+          </a:p>
+        </p:txBody>
+      </p:sp>
+      <p:sp>
+        <p:nvSpPr>
+          <p:cNvPr id="21" name="TextBox 20">
+            <a:extLst>
+              <a:ext uri="{FF2B5EF4-FFF2-40B4-BE49-F238E27FC236}">
+                <a16:creationId xmlns:a16="http://schemas.microsoft.com/office/drawing/2014/main" id="{03EFD14A-73E6-7520-CB2A-8A8DE0B3950F}"/>
+              </a:ext>
+            </a:extLst>
+          </p:cNvPr>
+          <p:cNvSpPr txBox="1"/>
+          <p:nvPr/>
+        </p:nvSpPr>
+        <p:spPr>
+          <a:xfrm>
+            <a:off x="4395928" y="3245343"/>
+            <a:ext cx="572373" cy="646331"/>
+          </a:xfrm>
+          <a:prstGeom prst="rect">
+            <a:avLst/>
+          </a:prstGeom>
+          <a:noFill/>
+        </p:spPr>
+        <p:txBody>
+          <a:bodyPr wrap="square" rtlCol="0">
+            <a:spAutoFit/>
+          </a:bodyPr>
+          <a:lstStyle/>
+          <a:p>
+            <a:r>
+              <a:rPr lang="en-US" altLang="ko-KR" sz="3600" dirty="0"/>
+              <a:t>-</a:t>
+            </a:r>
+            <a:endParaRPr lang="ko-KR" altLang="en-US" sz="3600" dirty="0"/>
+          </a:p>
+        </p:txBody>
+      </p:sp>
+      <p:sp>
+        <p:nvSpPr>
+          <p:cNvPr id="22" name="내용 개체 틀 5">
+            <a:extLst>
+              <a:ext uri="{FF2B5EF4-FFF2-40B4-BE49-F238E27FC236}">
+                <a16:creationId xmlns:a16="http://schemas.microsoft.com/office/drawing/2014/main" id="{D020AE58-9AC1-7326-1424-C8D492329294}"/>
+              </a:ext>
+            </a:extLst>
+          </p:cNvPr>
+          <p:cNvSpPr txBox="1">
+            <a:spLocks/>
+          </p:cNvSpPr>
+          <p:nvPr/>
+        </p:nvSpPr>
+        <p:spPr>
+          <a:xfrm>
+            <a:off x="990600" y="5600699"/>
+            <a:ext cx="10515600" cy="728663"/>
+          </a:xfrm>
+          <a:prstGeom prst="rect">
+            <a:avLst/>
+          </a:prstGeom>
+        </p:spPr>
+        <p:txBody>
+          <a:bodyPr vert="horz" lIns="91440" tIns="45720" rIns="91440" bIns="45720" rtlCol="0">
+            <a:normAutofit/>
+          </a:bodyPr>
+          <a:lstStyle>
+            <a:lvl1pPr marL="228600" indent="-228600" algn="l" defTabSz="914400" rtl="0" eaLnBrk="1" latinLnBrk="1" hangingPunct="1">
+              <a:lnSpc>
+                <a:spcPct val="120000"/>
+              </a:lnSpc>
+              <a:spcBef>
+                <a:spcPts val="1000"/>
+              </a:spcBef>
+              <a:buFont typeface="Arial" panose="020B0604020202020204" pitchFamily="34" charset="0"/>
+              <a:buChar char="•"/>
+              <a:defRPr sz="2400" kern="1200">
+                <a:solidFill>
+                  <a:schemeClr val="tx1"/>
+                </a:solidFill>
+                <a:latin typeface="G마켓 산스 TTF Medium" panose="02000000000000000000" pitchFamily="2" charset="-127"/>
+                <a:ea typeface="G마켓 산스 TTF Medium" panose="02000000000000000000" pitchFamily="2" charset="-127"/>
+                <a:cs typeface="+mn-cs"/>
+              </a:defRPr>
+            </a:lvl1pPr>
+            <a:lvl2pPr marL="685800" indent="-228600" algn="l" defTabSz="914400" rtl="0" eaLnBrk="1" latinLnBrk="1" hangingPunct="1">
+              <a:lnSpc>
+                <a:spcPct val="120000"/>
+              </a:lnSpc>
+              <a:spcBef>
+                <a:spcPts val="500"/>
+              </a:spcBef>
+              <a:buFont typeface="Arial" panose="020B0604020202020204" pitchFamily="34" charset="0"/>
+              <a:buChar char="•"/>
+              <a:defRPr sz="2000" kern="1200">
+                <a:solidFill>
+                  <a:schemeClr val="tx1"/>
+                </a:solidFill>
+                <a:latin typeface="G마켓 산스 TTF Medium" panose="02000000000000000000" pitchFamily="2" charset="-127"/>
+                <a:ea typeface="G마켓 산스 TTF Medium" panose="02000000000000000000" pitchFamily="2" charset="-127"/>
+                <a:cs typeface="+mn-cs"/>
+              </a:defRPr>
+            </a:lvl2pPr>
+            <a:lvl3pPr marL="1143000" indent="-228600" algn="l" defTabSz="914400" rtl="0" eaLnBrk="1" latinLnBrk="1" hangingPunct="1">
+              <a:lnSpc>
+                <a:spcPct val="120000"/>
+              </a:lnSpc>
+              <a:spcBef>
+                <a:spcPts val="500"/>
+              </a:spcBef>
+              <a:buFont typeface="Arial" panose="020B0604020202020204" pitchFamily="34" charset="0"/>
+              <a:buChar char="•"/>
+              <a:defRPr sz="1800" kern="1200">
+                <a:solidFill>
+                  <a:schemeClr val="tx1"/>
+                </a:solidFill>
+                <a:latin typeface="G마켓 산스 TTF Medium" panose="02000000000000000000" pitchFamily="2" charset="-127"/>
+                <a:ea typeface="G마켓 산스 TTF Medium" panose="02000000000000000000" pitchFamily="2" charset="-127"/>
+                <a:cs typeface="+mn-cs"/>
+              </a:defRPr>
+            </a:lvl3pPr>
+            <a:lvl4pPr marL="1600200" indent="-228600" algn="l" defTabSz="914400" rtl="0" eaLnBrk="1" latinLnBrk="1" hangingPunct="1">
+              <a:lnSpc>
+                <a:spcPct val="120000"/>
+              </a:lnSpc>
+              <a:spcBef>
+                <a:spcPts val="500"/>
+              </a:spcBef>
+              <a:buFont typeface="Arial" panose="020B0604020202020204" pitchFamily="34" charset="0"/>
+              <a:buChar char="•"/>
+              <a:defRPr sz="1600" kern="1200">
+                <a:solidFill>
+                  <a:schemeClr val="tx1"/>
+                </a:solidFill>
+                <a:latin typeface="G마켓 산스 TTF Medium" panose="02000000000000000000" pitchFamily="2" charset="-127"/>
+                <a:ea typeface="G마켓 산스 TTF Medium" panose="02000000000000000000" pitchFamily="2" charset="-127"/>
+                <a:cs typeface="+mn-cs"/>
+              </a:defRPr>
+            </a:lvl4pPr>
+            <a:lvl5pPr marL="2057400" indent="-228600" algn="l" defTabSz="914400" rtl="0" eaLnBrk="1" latinLnBrk="1" hangingPunct="1">
+              <a:lnSpc>
+                <a:spcPct val="120000"/>
+              </a:lnSpc>
+              <a:spcBef>
+                <a:spcPts val="500"/>
+              </a:spcBef>
+              <a:buFont typeface="Arial" panose="020B0604020202020204" pitchFamily="34" charset="0"/>
+              <a:buChar char="•"/>
+              <a:defRPr sz="1600" kern="1200">
+                <a:solidFill>
+                  <a:schemeClr val="tx1"/>
+                </a:solidFill>
+                <a:latin typeface="G마켓 산스 TTF Medium" panose="02000000000000000000" pitchFamily="2" charset="-127"/>
+                <a:ea typeface="G마켓 산스 TTF Medium" panose="02000000000000000000" pitchFamily="2" charset="-127"/>
+                <a:cs typeface="+mn-cs"/>
+              </a:defRPr>
+            </a:lvl5pPr>
+            <a:lvl6pPr marL="2514600" indent="-228600" algn="l" defTabSz="914400" rtl="0" eaLnBrk="1" latinLnBrk="1" hangingPunct="1">
+              <a:lnSpc>
+                <a:spcPct val="90000"/>
+              </a:lnSpc>
+              <a:spcBef>
+                <a:spcPts val="500"/>
+              </a:spcBef>
+              <a:buFont typeface="Arial" panose="020B0604020202020204" pitchFamily="34" charset="0"/>
+              <a:buChar char="•"/>
+              <a:defRPr sz="1800" kern="1200">
+                <a:solidFill>
+                  <a:schemeClr val="tx1"/>
+                </a:solidFill>
+                <a:latin typeface="+mn-lt"/>
+                <a:ea typeface="+mn-ea"/>
+                <a:cs typeface="+mn-cs"/>
+              </a:defRPr>
+            </a:lvl6pPr>
+            <a:lvl7pPr marL="2971800" indent="-228600" algn="l" defTabSz="914400" rtl="0" eaLnBrk="1" latinLnBrk="1" hangingPunct="1">
+              <a:lnSpc>
+                <a:spcPct val="90000"/>
+              </a:lnSpc>
+              <a:spcBef>
+                <a:spcPts val="500"/>
+              </a:spcBef>
+              <a:buFont typeface="Arial" panose="020B0604020202020204" pitchFamily="34" charset="0"/>
+              <a:buChar char="•"/>
+              <a:defRPr sz="1800" kern="1200">
+                <a:solidFill>
+                  <a:schemeClr val="tx1"/>
+                </a:solidFill>
+                <a:latin typeface="+mn-lt"/>
+                <a:ea typeface="+mn-ea"/>
+                <a:cs typeface="+mn-cs"/>
+              </a:defRPr>
+            </a:lvl7pPr>
+            <a:lvl8pPr marL="3429000" indent="-228600" algn="l" defTabSz="914400" rtl="0" eaLnBrk="1" latinLnBrk="1" hangingPunct="1">
+              <a:lnSpc>
+                <a:spcPct val="90000"/>
+              </a:lnSpc>
+              <a:spcBef>
+                <a:spcPts val="500"/>
+              </a:spcBef>
+              <a:buFont typeface="Arial" panose="020B0604020202020204" pitchFamily="34" charset="0"/>
+              <a:buChar char="•"/>
+              <a:defRPr sz="1800" kern="1200">
+                <a:solidFill>
+                  <a:schemeClr val="tx1"/>
+                </a:solidFill>
+                <a:latin typeface="+mn-lt"/>
+                <a:ea typeface="+mn-ea"/>
+                <a:cs typeface="+mn-cs"/>
+              </a:defRPr>
+            </a:lvl8pPr>
+            <a:lvl9pPr marL="3886200" indent="-228600" algn="l" defTabSz="914400" rtl="0" eaLnBrk="1" latinLnBrk="1" hangingPunct="1">
+              <a:lnSpc>
+                <a:spcPct val="90000"/>
+              </a:lnSpc>
+              <a:spcBef>
+                <a:spcPts val="500"/>
+              </a:spcBef>
+              <a:buFont typeface="Arial" panose="020B0604020202020204" pitchFamily="34" charset="0"/>
+              <a:buChar char="•"/>
+              <a:defRPr sz="1800" kern="1200">
+                <a:solidFill>
+                  <a:schemeClr val="tx1"/>
+                </a:solidFill>
+                <a:latin typeface="+mn-lt"/>
+                <a:ea typeface="+mn-ea"/>
+                <a:cs typeface="+mn-cs"/>
+              </a:defRPr>
+            </a:lvl9pPr>
+          </a:lstStyle>
+          <a:p>
+            <a:pPr marL="0" indent="0" algn="ctr">
+              <a:buFont typeface="Arial" panose="020B0604020202020204" pitchFamily="34" charset="0"/>
+              <a:buNone/>
+            </a:pPr>
+            <a:r>
+              <a:rPr lang="ko-KR" altLang="en-US" dirty="0" err="1"/>
+              <a:t>납뗌</a:t>
+            </a:r>
+            <a:r>
+              <a:rPr lang="ko-KR" altLang="en-US" dirty="0"/>
+              <a:t> 후 결선</a:t>
+            </a:r>
+            <a:r>
+              <a:rPr lang="en-US" altLang="ko-KR" dirty="0"/>
+              <a:t>(+, - </a:t>
+            </a:r>
+            <a:r>
+              <a:rPr lang="ko-KR" altLang="en-US" dirty="0"/>
+              <a:t>극성 주의</a:t>
+            </a:r>
+            <a:r>
+              <a:rPr lang="en-US" altLang="ko-KR" dirty="0"/>
+              <a:t>, </a:t>
+            </a:r>
+            <a:r>
+              <a:rPr lang="ko-KR" altLang="en-US" dirty="0"/>
+              <a:t>전압 확인</a:t>
+            </a:r>
+            <a:r>
+              <a:rPr lang="en-US" altLang="ko-KR" dirty="0"/>
+              <a:t>!!)</a:t>
+            </a:r>
+            <a:endParaRPr lang="ko-KR" altLang="en-US" dirty="0"/>
+          </a:p>
+        </p:txBody>
+      </p:sp>
+    </p:spTree>
+    <p:extLst>
+      <p:ext uri="{BB962C8B-B14F-4D97-AF65-F5344CB8AC3E}">
+        <p14:creationId xmlns:p14="http://schemas.microsoft.com/office/powerpoint/2010/main" val="4170481394"/>
+      </p:ext>
+    </p:extLst>
+  </p:cSld>
+  <p:clrMapOvr>
+    <a:masterClrMapping/>
+  </p:clrMapOvr>
+</p:sld>
+</file>
+
+<file path=ppt/slides/slide5.xml><?xml version="1.0" encoding="utf-8"?>
+<p:sld xmlns:a="http://schemas.openxmlformats.org/drawingml/2006/main" xmlns:r="http://schemas.openxmlformats.org/officeDocument/2006/relationships" xmlns:p="http://schemas.openxmlformats.org/presentationml/2006/main">
+  <p:cSld>
+    <p:spTree>
+      <p:nvGrpSpPr>
+        <p:cNvPr id="1" name="">
+          <a:extLst>
+            <a:ext uri="{FF2B5EF4-FFF2-40B4-BE49-F238E27FC236}">
+              <a16:creationId xmlns:a16="http://schemas.microsoft.com/office/drawing/2014/main" id="{8EC17157-F89F-3863-BDEC-EEAC44D1543B}"/>
+            </a:ext>
+          </a:extLst>
+        </p:cNvPr>
+        <p:cNvGrpSpPr/>
+        <p:nvPr/>
+      </p:nvGrpSpPr>
+      <p:grpSpPr>
+        <a:xfrm>
+          <a:off x="0" y="0"/>
+          <a:ext cx="0" cy="0"/>
+          <a:chOff x="0" y="0"/>
+          <a:chExt cx="0" cy="0"/>
+        </a:xfrm>
+      </p:grpSpPr>
+      <p:sp>
+        <p:nvSpPr>
+          <p:cNvPr id="2" name="제목 1">
+            <a:extLst>
+              <a:ext uri="{FF2B5EF4-FFF2-40B4-BE49-F238E27FC236}">
+                <a16:creationId xmlns:a16="http://schemas.microsoft.com/office/drawing/2014/main" id="{5C3F7929-03E1-AE29-D141-5B75C22D8B83}"/>
+              </a:ext>
+            </a:extLst>
+          </p:cNvPr>
+          <p:cNvSpPr>
+            <a:spLocks noGrp="1"/>
+          </p:cNvSpPr>
+          <p:nvPr>
+            <p:ph type="title"/>
+          </p:nvPr>
+        </p:nvSpPr>
+        <p:spPr/>
+        <p:txBody>
+          <a:bodyPr/>
+          <a:lstStyle/>
+          <a:p>
+            <a:r>
+              <a:rPr lang="ko-KR" altLang="en-US" dirty="0" err="1"/>
+              <a:t>온습도</a:t>
+            </a:r>
+            <a:r>
+              <a:rPr lang="ko-KR" altLang="en-US" dirty="0"/>
+              <a:t> 센서</a:t>
+            </a:r>
+          </a:p>
+        </p:txBody>
+      </p:sp>
+      <p:sp>
+        <p:nvSpPr>
+          <p:cNvPr id="8" name="TextBox 7">
+            <a:extLst>
+              <a:ext uri="{FF2B5EF4-FFF2-40B4-BE49-F238E27FC236}">
+                <a16:creationId xmlns:a16="http://schemas.microsoft.com/office/drawing/2014/main" id="{0709B2ED-95B9-BC22-1DC5-C2ED1FCCABC3}"/>
+              </a:ext>
+            </a:extLst>
+          </p:cNvPr>
+          <p:cNvSpPr txBox="1"/>
+          <p:nvPr/>
+        </p:nvSpPr>
+        <p:spPr>
+          <a:xfrm>
+            <a:off x="6096000" y="1730405"/>
+            <a:ext cx="4216474" cy="369332"/>
+          </a:xfrm>
+          <a:prstGeom prst="rect">
+            <a:avLst/>
+          </a:prstGeom>
+          <a:noFill/>
+        </p:spPr>
+        <p:txBody>
+          <a:bodyPr wrap="square" rtlCol="0">
+            <a:spAutoFit/>
+          </a:bodyPr>
+          <a:lstStyle/>
+          <a:p>
+            <a:endParaRPr lang="en-US" altLang="ko-KR" dirty="0">
+              <a:latin typeface="G마켓 산스 TTF Medium" panose="02000000000000000000" pitchFamily="2" charset="-127"/>
+              <a:ea typeface="G마켓 산스 TTF Medium" panose="02000000000000000000" pitchFamily="2" charset="-127"/>
+            </a:endParaRPr>
+          </a:p>
+        </p:txBody>
+      </p:sp>
+      <p:sp>
+        <p:nvSpPr>
+          <p:cNvPr id="10" name="내용 개체 틀 2">
+            <a:extLst>
+              <a:ext uri="{FF2B5EF4-FFF2-40B4-BE49-F238E27FC236}">
+                <a16:creationId xmlns:a16="http://schemas.microsoft.com/office/drawing/2014/main" id="{C3ED7274-2594-9B74-39C9-09E22BA1969D}"/>
+              </a:ext>
+            </a:extLst>
+          </p:cNvPr>
+          <p:cNvSpPr>
+            <a:spLocks noGrp="1"/>
+          </p:cNvSpPr>
+          <p:nvPr>
+            <p:ph idx="1"/>
+          </p:nvPr>
+        </p:nvSpPr>
+        <p:spPr>
+          <a:xfrm>
+            <a:off x="5603760" y="1884556"/>
+            <a:ext cx="5861280" cy="4292406"/>
+          </a:xfrm>
+        </p:spPr>
+        <p:txBody>
+          <a:bodyPr>
+            <a:normAutofit/>
+          </a:bodyPr>
+          <a:lstStyle/>
+          <a:p>
+            <a:r>
+              <a:rPr lang="ko-KR" altLang="en-US" sz="2000" dirty="0"/>
+              <a:t>온도 센서와 습도 센서가 하나의 전자 부품으로 구성된 장치</a:t>
+            </a:r>
+            <a:endParaRPr lang="en-US" altLang="ko-KR" sz="2000" dirty="0"/>
+          </a:p>
+          <a:p>
+            <a:r>
+              <a:rPr lang="ko-KR" altLang="en-US" sz="2000" dirty="0" err="1"/>
+              <a:t>온습도</a:t>
+            </a:r>
+            <a:r>
+              <a:rPr lang="ko-KR" altLang="en-US" sz="2000" dirty="0"/>
+              <a:t> 측정 범위와 정확도에 따라 </a:t>
+            </a:r>
+            <a:r>
+              <a:rPr lang="en-US" altLang="ko-KR" sz="2000" dirty="0"/>
+              <a:t>DHT11 </a:t>
+            </a:r>
+            <a:r>
+              <a:rPr lang="ko-KR" altLang="en-US" sz="2000" dirty="0"/>
+              <a:t>모델과 </a:t>
+            </a:r>
+            <a:r>
+              <a:rPr lang="en-US" altLang="ko-KR" sz="2000" dirty="0"/>
+              <a:t>DHT22 </a:t>
+            </a:r>
+            <a:r>
+              <a:rPr lang="ko-KR" altLang="en-US" sz="2000" dirty="0"/>
+              <a:t>모델로 나뉘며</a:t>
+            </a:r>
+            <a:r>
+              <a:rPr lang="en-US" altLang="ko-KR" sz="2000" dirty="0"/>
+              <a:t>, </a:t>
+            </a:r>
+            <a:r>
+              <a:rPr lang="ko-KR" altLang="en-US" sz="2000" dirty="0"/>
+              <a:t>두 모델은 동작 전압과 소비 전류가 동일하지만 온도와 습도 측정 범위와 샘플링 주기가 다르다</a:t>
+            </a:r>
+            <a:r>
+              <a:rPr lang="en-US" altLang="ko-KR" sz="2000" dirty="0"/>
+              <a:t>.</a:t>
+            </a:r>
+          </a:p>
+        </p:txBody>
+      </p:sp>
+      <p:pic>
+        <p:nvPicPr>
+          <p:cNvPr id="63492" name="Picture 4" descr="Grove - Temperature &amp; Humidity Sensor Pro (DHT22/AM2302) - The Pi Hut">
+            <a:extLst>
+              <a:ext uri="{FF2B5EF4-FFF2-40B4-BE49-F238E27FC236}">
+                <a16:creationId xmlns:a16="http://schemas.microsoft.com/office/drawing/2014/main" id="{97A7A104-B75B-B88E-9DF4-8E0A95DFBF67}"/>
+              </a:ext>
+            </a:extLst>
+          </p:cNvPr>
+          <p:cNvPicPr>
+            <a:picLocks noChangeAspect="1" noChangeArrowheads="1"/>
+          </p:cNvPicPr>
+          <p:nvPr/>
+        </p:nvPicPr>
+        <p:blipFill rotWithShape="1">
+          <a:blip r:embed="rId3">
+            <a:extLst>
+              <a:ext uri="{28A0092B-C50C-407E-A947-70E740481C1C}">
+                <a14:useLocalDpi xmlns:a14="http://schemas.microsoft.com/office/drawing/2010/main" val="0"/>
+              </a:ext>
+            </a:extLst>
+          </a:blip>
+          <a:srcRect l="4445" t="9931" b="9931"/>
+          <a:stretch>
+            <a:fillRect/>
+          </a:stretch>
+        </p:blipFill>
+        <p:spPr bwMode="auto">
+          <a:xfrm>
+            <a:off x="2058683" y="3248434"/>
+            <a:ext cx="3155455" cy="2646362"/>
+          </a:xfrm>
+          <a:prstGeom prst="rect">
+            <a:avLst/>
+          </a:prstGeom>
+          <a:noFill/>
+          <a:extLst>
+            <a:ext uri="{909E8E84-426E-40DD-AFC4-6F175D3DCCD1}">
+              <a14:hiddenFill xmlns:a14="http://schemas.microsoft.com/office/drawing/2010/main">
+                <a:solidFill>
+                  <a:srgbClr val="FFFFFF"/>
+                </a:solidFill>
+              </a14:hiddenFill>
+            </a:ext>
+          </a:extLst>
+        </p:spPr>
+      </p:pic>
+      <p:pic>
+        <p:nvPicPr>
+          <p:cNvPr id="63490" name="Picture 2" descr="아두이노 온습도 센서(DHT11) - 주식회사 씽크타운">
+            <a:extLst>
+              <a:ext uri="{FF2B5EF4-FFF2-40B4-BE49-F238E27FC236}">
+                <a16:creationId xmlns:a16="http://schemas.microsoft.com/office/drawing/2014/main" id="{37D90426-86AE-04A6-7530-D80E9E20459B}"/>
+              </a:ext>
+            </a:extLst>
+          </p:cNvPr>
+          <p:cNvPicPr>
+            <a:picLocks noChangeAspect="1" noChangeArrowheads="1"/>
+          </p:cNvPicPr>
+          <p:nvPr/>
+        </p:nvPicPr>
+        <p:blipFill rotWithShape="1">
+          <a:blip r:embed="rId4">
+            <a:extLst>
+              <a:ext uri="{28A0092B-C50C-407E-A947-70E740481C1C}">
+                <a14:useLocalDpi xmlns:a14="http://schemas.microsoft.com/office/drawing/2010/main" val="0"/>
+              </a:ext>
+            </a:extLst>
+          </a:blip>
+          <a:srcRect l="12107" t="10670" r="13255" b="9581"/>
+          <a:stretch>
+            <a:fillRect/>
+          </a:stretch>
+        </p:blipFill>
+        <p:spPr bwMode="auto">
+          <a:xfrm>
+            <a:off x="726960" y="1549839"/>
+            <a:ext cx="2270240" cy="2425700"/>
+          </a:xfrm>
+          <a:prstGeom prst="rect">
+            <a:avLst/>
+          </a:prstGeom>
+          <a:noFill/>
+          <a:extLst>
+            <a:ext uri="{909E8E84-426E-40DD-AFC4-6F175D3DCCD1}">
+              <a14:hiddenFill xmlns:a14="http://schemas.microsoft.com/office/drawing/2010/main">
+                <a:solidFill>
+                  <a:srgbClr val="FFFFFF"/>
+                </a:solidFill>
+              </a14:hiddenFill>
+            </a:ext>
+          </a:extLst>
+        </p:spPr>
+      </p:pic>
+    </p:spTree>
+    <p:extLst>
+      <p:ext uri="{BB962C8B-B14F-4D97-AF65-F5344CB8AC3E}">
+        <p14:creationId xmlns:p14="http://schemas.microsoft.com/office/powerpoint/2010/main" val="3251832631"/>
+      </p:ext>
+    </p:extLst>
+  </p:cSld>
+  <p:clrMapOvr>
+    <a:masterClrMapping/>
+  </p:clrMapOvr>
+</p:sld>
+</file>
+
+<file path=ppt/slides/slide6.xml><?xml version="1.0" encoding="utf-8"?>
+<p:sld xmlns:a="http://schemas.openxmlformats.org/drawingml/2006/main" xmlns:r="http://schemas.openxmlformats.org/officeDocument/2006/relationships" xmlns:p="http://schemas.openxmlformats.org/presentationml/2006/main">
+  <p:cSld>
+    <p:spTree>
+      <p:nvGrpSpPr>
+        <p:cNvPr id="1" name="">
+          <a:extLst>
+            <a:ext uri="{FF2B5EF4-FFF2-40B4-BE49-F238E27FC236}">
+              <a16:creationId xmlns:a16="http://schemas.microsoft.com/office/drawing/2014/main" id="{2216A3AE-3384-15DF-2897-C5C78126B6FD}"/>
+            </a:ext>
+          </a:extLst>
+        </p:cNvPr>
+        <p:cNvGrpSpPr/>
+        <p:nvPr/>
+      </p:nvGrpSpPr>
+      <p:grpSpPr>
+        <a:xfrm>
+          <a:off x="0" y="0"/>
+          <a:ext cx="0" cy="0"/>
+          <a:chOff x="0" y="0"/>
+          <a:chExt cx="0" cy="0"/>
+        </a:xfrm>
+      </p:grpSpPr>
+      <p:sp>
+        <p:nvSpPr>
+          <p:cNvPr id="2" name="제목 1">
+            <a:extLst>
+              <a:ext uri="{FF2B5EF4-FFF2-40B4-BE49-F238E27FC236}">
+                <a16:creationId xmlns:a16="http://schemas.microsoft.com/office/drawing/2014/main" id="{45973D3B-82B6-E618-761D-DF4F0EE4745B}"/>
+              </a:ext>
+            </a:extLst>
+          </p:cNvPr>
+          <p:cNvSpPr>
+            <a:spLocks noGrp="1"/>
+          </p:cNvSpPr>
+          <p:nvPr>
+            <p:ph type="title"/>
+          </p:nvPr>
+        </p:nvSpPr>
+        <p:spPr/>
+        <p:txBody>
+          <a:bodyPr/>
+          <a:lstStyle/>
+          <a:p>
+            <a:r>
+              <a:rPr lang="en-US" altLang="ko-KR" dirty="0"/>
+              <a:t>DHT11 </a:t>
+            </a:r>
+            <a:r>
+              <a:rPr lang="ko-KR" altLang="en-US" dirty="0"/>
+              <a:t>실습</a:t>
+            </a:r>
+          </a:p>
+        </p:txBody>
+      </p:sp>
+      <p:sp>
+        <p:nvSpPr>
+          <p:cNvPr id="8" name="TextBox 7">
+            <a:extLst>
+              <a:ext uri="{FF2B5EF4-FFF2-40B4-BE49-F238E27FC236}">
+                <a16:creationId xmlns:a16="http://schemas.microsoft.com/office/drawing/2014/main" id="{8B2BEA64-87BD-E1B9-E598-36CAC7E0D937}"/>
+              </a:ext>
+            </a:extLst>
+          </p:cNvPr>
+          <p:cNvSpPr txBox="1"/>
+          <p:nvPr/>
+        </p:nvSpPr>
+        <p:spPr>
+          <a:xfrm>
+            <a:off x="6096000" y="1730405"/>
+            <a:ext cx="4216474" cy="369332"/>
+          </a:xfrm>
+          <a:prstGeom prst="rect">
+            <a:avLst/>
+          </a:prstGeom>
+          <a:noFill/>
+        </p:spPr>
+        <p:txBody>
+          <a:bodyPr wrap="square" rtlCol="0">
+            <a:spAutoFit/>
+          </a:bodyPr>
+          <a:lstStyle/>
+          <a:p>
+            <a:endParaRPr lang="en-US" altLang="ko-KR" dirty="0">
+              <a:latin typeface="G마켓 산스 TTF Medium" panose="02000000000000000000" pitchFamily="2" charset="-127"/>
+              <a:ea typeface="G마켓 산스 TTF Medium" panose="02000000000000000000" pitchFamily="2" charset="-127"/>
+            </a:endParaRPr>
+          </a:p>
+        </p:txBody>
+      </p:sp>
+      <p:sp>
+        <p:nvSpPr>
+          <p:cNvPr id="5" name="내용 개체 틀 5">
+            <a:extLst>
+              <a:ext uri="{FF2B5EF4-FFF2-40B4-BE49-F238E27FC236}">
+                <a16:creationId xmlns:a16="http://schemas.microsoft.com/office/drawing/2014/main" id="{566C8DD8-A5DC-72EA-96B3-B7E5C52C4662}"/>
+              </a:ext>
+            </a:extLst>
+          </p:cNvPr>
+          <p:cNvSpPr>
+            <a:spLocks noGrp="1"/>
+          </p:cNvSpPr>
+          <p:nvPr>
+            <p:ph idx="1"/>
+          </p:nvPr>
+        </p:nvSpPr>
+        <p:spPr>
+          <a:xfrm>
+            <a:off x="838200" y="1549839"/>
+            <a:ext cx="10515600" cy="4627124"/>
+          </a:xfrm>
+        </p:spPr>
+        <p:txBody>
+          <a:bodyPr/>
+          <a:lstStyle/>
+          <a:p>
+            <a:pPr marL="457200" indent="-457200">
+              <a:buAutoNum type="arabicPeriod"/>
+            </a:pPr>
+            <a:r>
+              <a:rPr lang="en-US" altLang="ko-KR" dirty="0"/>
+              <a:t>DHT11 </a:t>
+            </a:r>
+            <a:r>
+              <a:rPr lang="ko-KR" altLang="en-US" dirty="0"/>
+              <a:t>라이브러리 다운로드</a:t>
+            </a:r>
+            <a:endParaRPr lang="en-US" altLang="ko-KR" dirty="0"/>
+          </a:p>
+          <a:p>
+            <a:pPr lvl="1"/>
+            <a:r>
+              <a:rPr lang="en-US" altLang="ko-KR" dirty="0">
+                <a:hlinkClick r:id="rId3"/>
+              </a:rPr>
+              <a:t>https://github.com/adafruit/DHT-sensor-library</a:t>
+            </a:r>
+            <a:r>
+              <a:rPr lang="en-US" altLang="ko-KR" dirty="0"/>
+              <a:t> </a:t>
+            </a:r>
+            <a:r>
+              <a:rPr lang="ko-KR" altLang="en-US" dirty="0"/>
+              <a:t>접속 또는 구글에 </a:t>
+            </a:r>
+            <a:r>
+              <a:rPr lang="en-US" altLang="ko-KR" dirty="0"/>
+              <a:t>‘DHT sensor library by Adafruit’ </a:t>
+            </a:r>
+            <a:r>
+              <a:rPr lang="ko-KR" altLang="en-US" dirty="0"/>
+              <a:t>검색</a:t>
+            </a:r>
+            <a:endParaRPr lang="en-US" altLang="ko-KR" dirty="0"/>
+          </a:p>
+          <a:p>
+            <a:pPr lvl="1"/>
+            <a:r>
+              <a:rPr lang="en-US" altLang="ko-KR" dirty="0"/>
+              <a:t>Zip </a:t>
+            </a:r>
+            <a:r>
+              <a:rPr lang="ko-KR" altLang="en-US" dirty="0"/>
+              <a:t>파일 다운로드</a:t>
+            </a:r>
+            <a:endParaRPr lang="en-US" altLang="ko-KR" dirty="0"/>
+          </a:p>
+          <a:p>
+            <a:pPr marL="0" indent="0">
+              <a:buNone/>
+            </a:pPr>
+            <a:endParaRPr lang="en-US" altLang="ko-KR" dirty="0"/>
+          </a:p>
+        </p:txBody>
+      </p:sp>
+      <p:pic>
+        <p:nvPicPr>
+          <p:cNvPr id="14" name="그림 13">
+            <a:extLst>
+              <a:ext uri="{FF2B5EF4-FFF2-40B4-BE49-F238E27FC236}">
+                <a16:creationId xmlns:a16="http://schemas.microsoft.com/office/drawing/2014/main" id="{167C93E2-A59A-E7BA-0EB5-2E32EBF595DB}"/>
+              </a:ext>
+            </a:extLst>
+          </p:cNvPr>
+          <p:cNvPicPr>
+            <a:picLocks noChangeAspect="1"/>
+          </p:cNvPicPr>
+          <p:nvPr/>
+        </p:nvPicPr>
+        <p:blipFill>
+          <a:blip r:embed="rId4"/>
+          <a:stretch>
+            <a:fillRect/>
+          </a:stretch>
+        </p:blipFill>
+        <p:spPr>
+          <a:xfrm>
+            <a:off x="4203700" y="2981465"/>
+            <a:ext cx="6726237" cy="3195498"/>
+          </a:xfrm>
+          <a:prstGeom prst="rect">
+            <a:avLst/>
+          </a:prstGeom>
+        </p:spPr>
+      </p:pic>
+      <p:pic>
+        <p:nvPicPr>
+          <p:cNvPr id="3074" name="Picture 2" descr="QR">
+            <a:extLst>
+              <a:ext uri="{FF2B5EF4-FFF2-40B4-BE49-F238E27FC236}">
+                <a16:creationId xmlns:a16="http://schemas.microsoft.com/office/drawing/2014/main" id="{3FE2C69C-3896-FE41-12EF-6F9DDC661CA8}"/>
+              </a:ext>
+            </a:extLst>
+          </p:cNvPr>
+          <p:cNvPicPr>
+            <a:picLocks noChangeAspect="1" noChangeArrowheads="1"/>
+          </p:cNvPicPr>
+          <p:nvPr/>
+        </p:nvPicPr>
+        <p:blipFill>
+          <a:blip r:embed="rId5">
+            <a:extLst>
+              <a:ext uri="{28A0092B-C50C-407E-A947-70E740481C1C}">
+                <a14:useLocalDpi xmlns:a14="http://schemas.microsoft.com/office/drawing/2010/main" val="0"/>
+              </a:ext>
+            </a:extLst>
+          </a:blip>
+          <a:srcRect/>
+          <a:stretch>
+            <a:fillRect/>
+          </a:stretch>
+        </p:blipFill>
+        <p:spPr bwMode="auto">
+          <a:xfrm>
+            <a:off x="682831" y="4369129"/>
+            <a:ext cx="2133600" cy="2133600"/>
+          </a:xfrm>
+          <a:prstGeom prst="rect">
+            <a:avLst/>
+          </a:prstGeom>
+          <a:noFill/>
+          <a:extLst>
+            <a:ext uri="{909E8E84-426E-40DD-AFC4-6F175D3DCCD1}">
+              <a14:hiddenFill xmlns:a14="http://schemas.microsoft.com/office/drawing/2010/main">
+                <a:solidFill>
+                  <a:srgbClr val="FFFFFF"/>
+                </a:solidFill>
+              </a14:hiddenFill>
+            </a:ext>
+          </a:extLst>
+        </p:spPr>
+      </p:pic>
+    </p:spTree>
+    <p:extLst>
+      <p:ext uri="{BB962C8B-B14F-4D97-AF65-F5344CB8AC3E}">
+        <p14:creationId xmlns:p14="http://schemas.microsoft.com/office/powerpoint/2010/main" val="1080240830"/>
+      </p:ext>
+    </p:extLst>
+  </p:cSld>
+  <p:clrMapOvr>
+    <a:masterClrMapping/>
+  </p:clrMapOvr>
+</p:sld>
+</file>
+
+<file path=ppt/slides/slide7.xml><?xml version="1.0" encoding="utf-8"?>
+<p:sld xmlns:a="http://schemas.openxmlformats.org/drawingml/2006/main" xmlns:r="http://schemas.openxmlformats.org/officeDocument/2006/relationships" xmlns:p="http://schemas.openxmlformats.org/presentationml/2006/main">
+  <p:cSld>
+    <p:spTree>
+      <p:nvGrpSpPr>
+        <p:cNvPr id="1" name="">
+          <a:extLst>
+            <a:ext uri="{FF2B5EF4-FFF2-40B4-BE49-F238E27FC236}">
+              <a16:creationId xmlns:a16="http://schemas.microsoft.com/office/drawing/2014/main" id="{979AC403-510B-BE9C-B1F3-EE4F24345F78}"/>
+            </a:ext>
+          </a:extLst>
+        </p:cNvPr>
+        <p:cNvGrpSpPr/>
+        <p:nvPr/>
+      </p:nvGrpSpPr>
+      <p:grpSpPr>
+        <a:xfrm>
+          <a:off x="0" y="0"/>
+          <a:ext cx="0" cy="0"/>
+          <a:chOff x="0" y="0"/>
+          <a:chExt cx="0" cy="0"/>
+        </a:xfrm>
+      </p:grpSpPr>
+      <p:sp>
+        <p:nvSpPr>
+          <p:cNvPr id="2" name="제목 1">
+            <a:extLst>
+              <a:ext uri="{FF2B5EF4-FFF2-40B4-BE49-F238E27FC236}">
+                <a16:creationId xmlns:a16="http://schemas.microsoft.com/office/drawing/2014/main" id="{B081F832-041A-DA3A-5A26-F7B4A23D1BF6}"/>
+              </a:ext>
+            </a:extLst>
+          </p:cNvPr>
+          <p:cNvSpPr>
+            <a:spLocks noGrp="1"/>
+          </p:cNvSpPr>
+          <p:nvPr>
+            <p:ph type="title"/>
+          </p:nvPr>
+        </p:nvSpPr>
+        <p:spPr/>
+        <p:txBody>
+          <a:bodyPr/>
+          <a:lstStyle/>
+          <a:p>
+            <a:r>
+              <a:rPr lang="ko-KR" altLang="en-US" dirty="0"/>
+              <a:t>초음파 센서</a:t>
+            </a:r>
+            <a:r>
+              <a:rPr lang="en-US" altLang="ko-KR" dirty="0"/>
+              <a:t> </a:t>
+            </a:r>
+            <a:r>
+              <a:rPr lang="ko-KR" altLang="en-US" dirty="0"/>
+              <a:t>실습 </a:t>
+            </a:r>
+            <a:r>
+              <a:rPr lang="en-US" altLang="ko-KR" dirty="0"/>
+              <a:t>Quiz</a:t>
+            </a:r>
+            <a:endParaRPr lang="ko-KR" altLang="en-US" dirty="0"/>
+          </a:p>
+        </p:txBody>
+      </p:sp>
+      <p:sp>
+        <p:nvSpPr>
+          <p:cNvPr id="5" name="내용 개체 틀 5">
+            <a:extLst>
+              <a:ext uri="{FF2B5EF4-FFF2-40B4-BE49-F238E27FC236}">
+                <a16:creationId xmlns:a16="http://schemas.microsoft.com/office/drawing/2014/main" id="{4538F2DD-2840-B570-FA70-BE07ED48FFFA}"/>
+              </a:ext>
+            </a:extLst>
+          </p:cNvPr>
+          <p:cNvSpPr>
+            <a:spLocks noGrp="1"/>
+          </p:cNvSpPr>
+          <p:nvPr>
+            <p:ph idx="1"/>
+          </p:nvPr>
+        </p:nvSpPr>
+        <p:spPr>
+          <a:xfrm>
+            <a:off x="838200" y="1549839"/>
+            <a:ext cx="10515600" cy="4627124"/>
+          </a:xfrm>
+        </p:spPr>
+        <p:txBody>
+          <a:bodyPr/>
+          <a:lstStyle/>
+          <a:p>
+            <a:pPr marL="0" indent="0">
+              <a:buNone/>
+            </a:pPr>
+            <a:r>
+              <a:rPr lang="ko-KR" altLang="en-US" dirty="0"/>
+              <a:t>초음파 센서를 통해 가까운 물체가 감지될 시</a:t>
+            </a:r>
+            <a:r>
+              <a:rPr lang="en-US" altLang="ko-KR" dirty="0"/>
+              <a:t>, </a:t>
+            </a:r>
+            <a:r>
+              <a:rPr lang="ko-KR" altLang="en-US" dirty="0"/>
+              <a:t>빨간 </a:t>
+            </a:r>
+            <a:r>
+              <a:rPr lang="en-US" altLang="ko-KR" dirty="0"/>
+              <a:t>LED</a:t>
+            </a:r>
+            <a:r>
+              <a:rPr lang="ko-KR" altLang="en-US" dirty="0"/>
+              <a:t>의 불을 켜고 </a:t>
+            </a:r>
+            <a:r>
+              <a:rPr lang="ko-KR" altLang="en-US" dirty="0" err="1"/>
+              <a:t>피에조</a:t>
+            </a:r>
+            <a:r>
+              <a:rPr lang="ko-KR" altLang="en-US" dirty="0"/>
+              <a:t> </a:t>
+            </a:r>
+            <a:r>
+              <a:rPr lang="ko-KR" altLang="en-US" dirty="0" err="1"/>
+              <a:t>부저를</a:t>
+            </a:r>
+            <a:r>
+              <a:rPr lang="ko-KR" altLang="en-US" dirty="0"/>
+              <a:t> 통해 경고음을 </a:t>
+            </a:r>
+            <a:r>
+              <a:rPr lang="ko-KR" altLang="en-US" dirty="0" err="1"/>
+              <a:t>울리시오</a:t>
+            </a:r>
+            <a:r>
+              <a:rPr lang="en-US" altLang="ko-KR" dirty="0"/>
+              <a:t>.</a:t>
+            </a:r>
+          </a:p>
+        </p:txBody>
+      </p:sp>
+      <p:pic>
+        <p:nvPicPr>
+          <p:cNvPr id="4" name="Picture 2" descr="아두이노]Breadboard Jumper Cables(20P-SET) 점퍼 케이블 (M1000006992)">
+            <a:extLst>
+              <a:ext uri="{FF2B5EF4-FFF2-40B4-BE49-F238E27FC236}">
+                <a16:creationId xmlns:a16="http://schemas.microsoft.com/office/drawing/2014/main" id="{7C334408-BC2C-74DD-0A9B-848CA5407049}"/>
+              </a:ext>
+            </a:extLst>
+          </p:cNvPr>
+          <p:cNvPicPr>
+            <a:picLocks noChangeAspect="1" noChangeArrowheads="1"/>
+          </p:cNvPicPr>
+          <p:nvPr/>
+        </p:nvPicPr>
+        <p:blipFill>
+          <a:blip r:embed="rId3">
+            <a:extLst>
+              <a:ext uri="{28A0092B-C50C-407E-A947-70E740481C1C}">
+                <a14:useLocalDpi xmlns:a14="http://schemas.microsoft.com/office/drawing/2010/main" val="0"/>
+              </a:ext>
+            </a:extLst>
+          </a:blip>
+          <a:srcRect/>
+          <a:stretch>
+            <a:fillRect/>
+          </a:stretch>
+        </p:blipFill>
+        <p:spPr bwMode="auto">
+          <a:xfrm>
+            <a:off x="4798165" y="4324888"/>
+            <a:ext cx="1940813" cy="1940813"/>
+          </a:xfrm>
+          <a:prstGeom prst="rect">
+            <a:avLst/>
+          </a:prstGeom>
+          <a:noFill/>
+          <a:extLst>
+            <a:ext uri="{909E8E84-426E-40DD-AFC4-6F175D3DCCD1}">
+              <a14:hiddenFill xmlns:a14="http://schemas.microsoft.com/office/drawing/2010/main">
+                <a:solidFill>
+                  <a:srgbClr val="FFFFFF"/>
+                </a:solidFill>
+              </a14:hiddenFill>
+            </a:ext>
+          </a:extLst>
+        </p:spPr>
+      </p:pic>
+      <p:pic>
+        <p:nvPicPr>
+          <p:cNvPr id="6" name="그림 5">
+            <a:extLst>
+              <a:ext uri="{FF2B5EF4-FFF2-40B4-BE49-F238E27FC236}">
+                <a16:creationId xmlns:a16="http://schemas.microsoft.com/office/drawing/2014/main" id="{9ED54D7F-F36C-2708-957C-49E139DB916B}"/>
+              </a:ext>
+            </a:extLst>
+          </p:cNvPr>
+          <p:cNvPicPr>
+            <a:picLocks noChangeAspect="1"/>
+          </p:cNvPicPr>
+          <p:nvPr/>
+        </p:nvPicPr>
+        <p:blipFill>
+          <a:blip r:embed="rId4"/>
+          <a:stretch>
+            <a:fillRect/>
+          </a:stretch>
+        </p:blipFill>
+        <p:spPr>
+          <a:xfrm>
+            <a:off x="2361902" y="2704225"/>
+            <a:ext cx="1619476" cy="1095528"/>
+          </a:xfrm>
+          <a:prstGeom prst="rect">
+            <a:avLst/>
+          </a:prstGeom>
+        </p:spPr>
+      </p:pic>
+      <p:pic>
+        <p:nvPicPr>
+          <p:cNvPr id="7" name="그림 6">
+            <a:extLst>
+              <a:ext uri="{FF2B5EF4-FFF2-40B4-BE49-F238E27FC236}">
+                <a16:creationId xmlns:a16="http://schemas.microsoft.com/office/drawing/2014/main" id="{672F320F-B20D-258F-6BA0-60B157243CFD}"/>
+              </a:ext>
+            </a:extLst>
+          </p:cNvPr>
+          <p:cNvPicPr>
+            <a:picLocks noChangeAspect="1"/>
+          </p:cNvPicPr>
+          <p:nvPr/>
+        </p:nvPicPr>
+        <p:blipFill>
+          <a:blip r:embed="rId5"/>
+          <a:stretch>
+            <a:fillRect/>
+          </a:stretch>
+        </p:blipFill>
+        <p:spPr>
+          <a:xfrm>
+            <a:off x="7415578" y="2672215"/>
+            <a:ext cx="2522922" cy="959005"/>
+          </a:xfrm>
+          <a:prstGeom prst="rect">
+            <a:avLst/>
+          </a:prstGeom>
+        </p:spPr>
+      </p:pic>
+      <p:sp>
+        <p:nvSpPr>
+          <p:cNvPr id="9" name="TextBox 8">
+            <a:extLst>
+              <a:ext uri="{FF2B5EF4-FFF2-40B4-BE49-F238E27FC236}">
+                <a16:creationId xmlns:a16="http://schemas.microsoft.com/office/drawing/2014/main" id="{C7E3A299-C3E7-DF93-563E-5F69B3576D1C}"/>
+              </a:ext>
+            </a:extLst>
+          </p:cNvPr>
+          <p:cNvSpPr txBox="1"/>
+          <p:nvPr/>
+        </p:nvSpPr>
+        <p:spPr>
+          <a:xfrm>
+            <a:off x="7846273" y="3955556"/>
+            <a:ext cx="1661532" cy="369332"/>
+          </a:xfrm>
+          <a:prstGeom prst="rect">
+            <a:avLst/>
+          </a:prstGeom>
+          <a:noFill/>
+        </p:spPr>
+        <p:txBody>
+          <a:bodyPr wrap="square" rtlCol="0">
+            <a:spAutoFit/>
+          </a:bodyPr>
+          <a:lstStyle/>
+          <a:p>
+            <a:pPr algn="ctr"/>
+            <a:r>
+              <a:rPr lang="ko-KR" altLang="en-US" dirty="0" err="1"/>
+              <a:t>브레드</a:t>
+            </a:r>
+            <a:r>
+              <a:rPr lang="ko-KR" altLang="en-US" dirty="0"/>
+              <a:t> 보드</a:t>
+            </a:r>
+          </a:p>
+        </p:txBody>
+      </p:sp>
+      <p:sp>
+        <p:nvSpPr>
+          <p:cNvPr id="10" name="TextBox 9">
+            <a:extLst>
+              <a:ext uri="{FF2B5EF4-FFF2-40B4-BE49-F238E27FC236}">
+                <a16:creationId xmlns:a16="http://schemas.microsoft.com/office/drawing/2014/main" id="{C21962C1-EB2E-14E9-C60A-A5A480E3B2E2}"/>
+              </a:ext>
+            </a:extLst>
+          </p:cNvPr>
+          <p:cNvSpPr txBox="1"/>
+          <p:nvPr/>
+        </p:nvSpPr>
+        <p:spPr>
+          <a:xfrm>
+            <a:off x="4937805" y="6092354"/>
+            <a:ext cx="1661532" cy="369332"/>
+          </a:xfrm>
+          <a:prstGeom prst="rect">
+            <a:avLst/>
+          </a:prstGeom>
+          <a:noFill/>
+        </p:spPr>
+        <p:txBody>
+          <a:bodyPr wrap="square" rtlCol="0">
+            <a:spAutoFit/>
+          </a:bodyPr>
+          <a:lstStyle/>
+          <a:p>
+            <a:pPr algn="ctr"/>
+            <a:r>
+              <a:rPr lang="ko-KR" altLang="en-US" dirty="0"/>
+              <a:t>점퍼 케이블</a:t>
+            </a:r>
+          </a:p>
+        </p:txBody>
+      </p:sp>
+      <p:sp>
+        <p:nvSpPr>
+          <p:cNvPr id="12" name="TextBox 11">
+            <a:extLst>
+              <a:ext uri="{FF2B5EF4-FFF2-40B4-BE49-F238E27FC236}">
+                <a16:creationId xmlns:a16="http://schemas.microsoft.com/office/drawing/2014/main" id="{777703DE-5A17-3BD5-0288-73243A0F4066}"/>
+              </a:ext>
+            </a:extLst>
+          </p:cNvPr>
+          <p:cNvSpPr txBox="1"/>
+          <p:nvPr/>
+        </p:nvSpPr>
+        <p:spPr>
+          <a:xfrm>
+            <a:off x="2042044" y="3959685"/>
+            <a:ext cx="2222492" cy="369332"/>
+          </a:xfrm>
+          <a:prstGeom prst="rect">
+            <a:avLst/>
+          </a:prstGeom>
+          <a:noFill/>
+        </p:spPr>
+        <p:txBody>
+          <a:bodyPr wrap="square" rtlCol="0">
+            <a:spAutoFit/>
+          </a:bodyPr>
+          <a:lstStyle/>
+          <a:p>
+            <a:pPr algn="ctr"/>
+            <a:r>
+              <a:rPr lang="ko-KR" altLang="en-US" dirty="0" err="1"/>
+              <a:t>아두이노</a:t>
+            </a:r>
+            <a:r>
+              <a:rPr lang="ko-KR" altLang="en-US" dirty="0"/>
+              <a:t> 호환보드</a:t>
+            </a:r>
+          </a:p>
+        </p:txBody>
+      </p:sp>
+      <p:sp>
+        <p:nvSpPr>
+          <p:cNvPr id="13" name="TextBox 12">
+            <a:extLst>
+              <a:ext uri="{FF2B5EF4-FFF2-40B4-BE49-F238E27FC236}">
+                <a16:creationId xmlns:a16="http://schemas.microsoft.com/office/drawing/2014/main" id="{5B893316-F962-F9E4-AD21-8A32405D0025}"/>
+              </a:ext>
+            </a:extLst>
+          </p:cNvPr>
+          <p:cNvSpPr txBox="1"/>
+          <p:nvPr/>
+        </p:nvSpPr>
+        <p:spPr>
+          <a:xfrm>
+            <a:off x="2218081" y="6088580"/>
+            <a:ext cx="1619476" cy="369332"/>
+          </a:xfrm>
+          <a:prstGeom prst="rect">
+            <a:avLst/>
+          </a:prstGeom>
+          <a:noFill/>
+        </p:spPr>
+        <p:txBody>
+          <a:bodyPr wrap="square" rtlCol="0">
+            <a:spAutoFit/>
+          </a:bodyPr>
+          <a:lstStyle/>
+          <a:p>
+            <a:pPr algn="ctr"/>
+            <a:r>
+              <a:rPr lang="en-US" altLang="ko-KR" dirty="0"/>
+              <a:t>LED</a:t>
+            </a:r>
+            <a:endParaRPr lang="ko-KR" altLang="en-US" dirty="0"/>
+          </a:p>
+        </p:txBody>
+      </p:sp>
+      <p:pic>
+        <p:nvPicPr>
+          <p:cNvPr id="16" name="Picture 2" descr="4 LED 5개 색상랜덤 아두이노 베스트 부품">
+            <a:extLst>
+              <a:ext uri="{FF2B5EF4-FFF2-40B4-BE49-F238E27FC236}">
+                <a16:creationId xmlns:a16="http://schemas.microsoft.com/office/drawing/2014/main" id="{3A866A88-898D-FE34-877A-4C53B71A2021}"/>
+              </a:ext>
+            </a:extLst>
+          </p:cNvPr>
+          <p:cNvPicPr>
+            <a:picLocks noChangeAspect="1" noChangeArrowheads="1"/>
+          </p:cNvPicPr>
+          <p:nvPr/>
+        </p:nvPicPr>
+        <p:blipFill rotWithShape="1">
+          <a:blip r:embed="rId6">
+            <a:extLst>
+              <a:ext uri="{28A0092B-C50C-407E-A947-70E740481C1C}">
+                <a14:useLocalDpi xmlns:a14="http://schemas.microsoft.com/office/drawing/2010/main" val="0"/>
+              </a:ext>
+            </a:extLst>
+          </a:blip>
+          <a:srcRect l="9673" t="25571" r="71768" b="12666"/>
+          <a:stretch>
+            <a:fillRect/>
+          </a:stretch>
+        </p:blipFill>
+        <p:spPr bwMode="auto">
+          <a:xfrm>
+            <a:off x="2775492" y="4644051"/>
+            <a:ext cx="431534" cy="1436122"/>
+          </a:xfrm>
+          <a:prstGeom prst="rect">
+            <a:avLst/>
+          </a:prstGeom>
+          <a:noFill/>
+          <a:extLst>
+            <a:ext uri="{909E8E84-426E-40DD-AFC4-6F175D3DCCD1}">
+              <a14:hiddenFill xmlns:a14="http://schemas.microsoft.com/office/drawing/2010/main">
+                <a:solidFill>
+                  <a:srgbClr val="FFFFFF"/>
+                </a:solidFill>
+              </a14:hiddenFill>
+            </a:ext>
+          </a:extLst>
+        </p:spPr>
+      </p:pic>
+      <p:pic>
+        <p:nvPicPr>
+          <p:cNvPr id="17" name="Picture 2" descr="아두이노 중급] 16. 초음파 센서(거리 측정 센서) : 네이버 블로그">
+            <a:extLst>
+              <a:ext uri="{FF2B5EF4-FFF2-40B4-BE49-F238E27FC236}">
+                <a16:creationId xmlns:a16="http://schemas.microsoft.com/office/drawing/2014/main" id="{2BF2A8C8-EC91-FEE4-653A-BDD05AFABF5C}"/>
+              </a:ext>
+            </a:extLst>
+          </p:cNvPr>
+          <p:cNvPicPr>
+            <a:picLocks noChangeAspect="1" noChangeArrowheads="1"/>
+          </p:cNvPicPr>
+          <p:nvPr/>
+        </p:nvPicPr>
+        <p:blipFill>
+          <a:blip r:embed="rId7">
+            <a:extLst>
+              <a:ext uri="{28A0092B-C50C-407E-A947-70E740481C1C}">
+                <a14:useLocalDpi xmlns:a14="http://schemas.microsoft.com/office/drawing/2010/main" val="0"/>
+              </a:ext>
+            </a:extLst>
+          </a:blip>
+          <a:srcRect/>
+          <a:stretch>
+            <a:fillRect/>
+          </a:stretch>
+        </p:blipFill>
+        <p:spPr bwMode="auto">
+          <a:xfrm>
+            <a:off x="5146148" y="2772486"/>
+            <a:ext cx="1592830" cy="959005"/>
+          </a:xfrm>
+          <a:prstGeom prst="rect">
+            <a:avLst/>
+          </a:prstGeom>
+          <a:noFill/>
+          <a:extLst>
+            <a:ext uri="{909E8E84-426E-40DD-AFC4-6F175D3DCCD1}">
+              <a14:hiddenFill xmlns:a14="http://schemas.microsoft.com/office/drawing/2010/main">
+                <a:solidFill>
+                  <a:srgbClr val="FFFFFF"/>
+                </a:solidFill>
+              </a14:hiddenFill>
+            </a:ext>
+          </a:extLst>
+        </p:spPr>
+      </p:pic>
+      <p:sp>
+        <p:nvSpPr>
+          <p:cNvPr id="18" name="TextBox 17">
+            <a:extLst>
+              <a:ext uri="{FF2B5EF4-FFF2-40B4-BE49-F238E27FC236}">
+                <a16:creationId xmlns:a16="http://schemas.microsoft.com/office/drawing/2014/main" id="{8F71DDB0-BB1A-F7C6-C213-3E63FE4EA180}"/>
+              </a:ext>
+            </a:extLst>
+          </p:cNvPr>
+          <p:cNvSpPr txBox="1"/>
+          <p:nvPr/>
+        </p:nvSpPr>
+        <p:spPr>
+          <a:xfrm>
+            <a:off x="4798165" y="3951278"/>
+            <a:ext cx="2222492" cy="369332"/>
+          </a:xfrm>
+          <a:prstGeom prst="rect">
+            <a:avLst/>
+          </a:prstGeom>
+          <a:noFill/>
+        </p:spPr>
+        <p:txBody>
+          <a:bodyPr wrap="square" rtlCol="0">
+            <a:spAutoFit/>
+          </a:bodyPr>
+          <a:lstStyle/>
+          <a:p>
+            <a:pPr algn="ctr"/>
+            <a:r>
+              <a:rPr lang="ko-KR" altLang="en-US" dirty="0"/>
+              <a:t>초음파 센서</a:t>
+            </a:r>
+          </a:p>
+        </p:txBody>
+      </p:sp>
+      <p:sp>
+        <p:nvSpPr>
+          <p:cNvPr id="19" name="TextBox 18">
+            <a:extLst>
+              <a:ext uri="{FF2B5EF4-FFF2-40B4-BE49-F238E27FC236}">
+                <a16:creationId xmlns:a16="http://schemas.microsoft.com/office/drawing/2014/main" id="{FB7865C0-384E-7A0C-E611-FB74F0171928}"/>
+              </a:ext>
+            </a:extLst>
+          </p:cNvPr>
+          <p:cNvSpPr txBox="1"/>
+          <p:nvPr/>
+        </p:nvSpPr>
+        <p:spPr>
+          <a:xfrm>
+            <a:off x="7699585" y="6088580"/>
+            <a:ext cx="1619476" cy="369332"/>
+          </a:xfrm>
+          <a:prstGeom prst="rect">
+            <a:avLst/>
+          </a:prstGeom>
+          <a:noFill/>
+        </p:spPr>
+        <p:txBody>
+          <a:bodyPr wrap="square" rtlCol="0">
+            <a:spAutoFit/>
+          </a:bodyPr>
+          <a:lstStyle/>
+          <a:p>
+            <a:pPr algn="ctr"/>
+            <a:r>
+              <a:rPr lang="ko-KR" altLang="en-US" dirty="0"/>
+              <a:t>능동 </a:t>
+            </a:r>
+            <a:r>
+              <a:rPr lang="ko-KR" altLang="en-US" dirty="0" err="1"/>
+              <a:t>부저</a:t>
+            </a:r>
+            <a:endParaRPr lang="ko-KR" altLang="en-US" dirty="0"/>
+          </a:p>
+        </p:txBody>
+      </p:sp>
+      <p:pic>
+        <p:nvPicPr>
+          <p:cNvPr id="20" name="Picture 4" descr="5V 능동 부저 [FQ-011] / 디바이스마트">
+            <a:extLst>
+              <a:ext uri="{FF2B5EF4-FFF2-40B4-BE49-F238E27FC236}">
+                <a16:creationId xmlns:a16="http://schemas.microsoft.com/office/drawing/2014/main" id="{8E2EF01C-AE31-6E4F-4697-7E84B77676F0}"/>
+              </a:ext>
+            </a:extLst>
+          </p:cNvPr>
+          <p:cNvPicPr>
+            <a:picLocks noChangeAspect="1" noChangeArrowheads="1"/>
+          </p:cNvPicPr>
+          <p:nvPr/>
+        </p:nvPicPr>
+        <p:blipFill rotWithShape="1">
+          <a:blip r:embed="rId8">
+            <a:extLst>
+              <a:ext uri="{BEBA8EAE-BF5A-486C-A8C5-ECC9F3942E4B}">
+                <a14:imgProps xmlns:a14="http://schemas.microsoft.com/office/drawing/2010/main">
+                  <a14:imgLayer r:embed="rId9">
+                    <a14:imgEffect>
+                      <a14:backgroundRemoval t="10000" b="90000" l="10000" r="90000"/>
+                    </a14:imgEffect>
+                  </a14:imgLayer>
+                </a14:imgProps>
+              </a:ext>
+              <a:ext uri="{28A0092B-C50C-407E-A947-70E740481C1C}">
+                <a14:useLocalDpi xmlns:a14="http://schemas.microsoft.com/office/drawing/2010/main" val="0"/>
+              </a:ext>
+            </a:extLst>
+          </a:blip>
+          <a:srcRect l="29064" t="17235" r="24650" b="20598"/>
+          <a:stretch/>
+        </p:blipFill>
+        <p:spPr bwMode="auto">
+          <a:xfrm>
+            <a:off x="7891848" y="4521069"/>
+            <a:ext cx="1318124" cy="1327776"/>
+          </a:xfrm>
+          <a:prstGeom prst="rect">
+            <a:avLst/>
+          </a:prstGeom>
+          <a:noFill/>
+          <a:extLst>
+            <a:ext uri="{909E8E84-426E-40DD-AFC4-6F175D3DCCD1}">
+              <a14:hiddenFill xmlns:a14="http://schemas.microsoft.com/office/drawing/2010/main">
+                <a:solidFill>
+                  <a:srgbClr val="FFFFFF"/>
+                </a:solidFill>
+              </a14:hiddenFill>
+            </a:ext>
+          </a:extLst>
+        </p:spPr>
+      </p:pic>
+    </p:spTree>
+    <p:extLst>
+      <p:ext uri="{BB962C8B-B14F-4D97-AF65-F5344CB8AC3E}">
+        <p14:creationId xmlns:p14="http://schemas.microsoft.com/office/powerpoint/2010/main" val="3423217440"/>
+      </p:ext>
+    </p:extLst>
+  </p:cSld>
+  <p:clrMapOvr>
+    <a:masterClrMapping/>
+  </p:clrMapOvr>
+</p:sld>
+</file>
+
+<file path=ppt/slides/slide8.xml><?xml version="1.0" encoding="utf-8"?>
+<p:sld xmlns:a="http://schemas.openxmlformats.org/drawingml/2006/main" xmlns:r="http://schemas.openxmlformats.org/officeDocument/2006/relationships" xmlns:p="http://schemas.openxmlformats.org/presentationml/2006/main">
+  <p:cSld>
+    <p:spTree>
+      <p:nvGrpSpPr>
+        <p:cNvPr id="1" name="">
+          <a:extLst>
+            <a:ext uri="{FF2B5EF4-FFF2-40B4-BE49-F238E27FC236}">
+              <a16:creationId xmlns:a16="http://schemas.microsoft.com/office/drawing/2014/main" id="{C7BB0736-3A39-AE75-39E4-8408EDB4BDC0}"/>
+            </a:ext>
+          </a:extLst>
+        </p:cNvPr>
+        <p:cNvGrpSpPr/>
+        <p:nvPr/>
+      </p:nvGrpSpPr>
+      <p:grpSpPr>
+        <a:xfrm>
+          <a:off x="0" y="0"/>
+          <a:ext cx="0" cy="0"/>
+          <a:chOff x="0" y="0"/>
+          <a:chExt cx="0" cy="0"/>
+        </a:xfrm>
+      </p:grpSpPr>
+      <p:sp>
+        <p:nvSpPr>
+          <p:cNvPr id="2" name="제목 1">
+            <a:extLst>
+              <a:ext uri="{FF2B5EF4-FFF2-40B4-BE49-F238E27FC236}">
+                <a16:creationId xmlns:a16="http://schemas.microsoft.com/office/drawing/2014/main" id="{7A06332D-49D3-02F8-A177-0E811BF53555}"/>
+              </a:ext>
+            </a:extLst>
+          </p:cNvPr>
+          <p:cNvSpPr>
+            <a:spLocks noGrp="1"/>
+          </p:cNvSpPr>
+          <p:nvPr>
+            <p:ph type="title"/>
+          </p:nvPr>
+        </p:nvSpPr>
+        <p:spPr/>
+        <p:txBody>
+          <a:bodyPr/>
+          <a:lstStyle/>
+          <a:p>
+            <a:r>
+              <a:rPr lang="ko-KR" altLang="en-US" dirty="0"/>
+              <a:t>초음파 센서</a:t>
+            </a:r>
+            <a:r>
+              <a:rPr lang="en-US" altLang="ko-KR" dirty="0"/>
+              <a:t> </a:t>
+            </a:r>
+            <a:r>
+              <a:rPr lang="ko-KR" altLang="en-US" dirty="0"/>
+              <a:t>실습 </a:t>
+            </a:r>
+            <a:r>
+              <a:rPr lang="en-US" altLang="ko-KR" dirty="0"/>
+              <a:t>Quiz</a:t>
+            </a:r>
+            <a:endParaRPr lang="ko-KR" altLang="en-US" dirty="0"/>
+          </a:p>
+        </p:txBody>
+      </p:sp>
+      <p:pic>
+        <p:nvPicPr>
+          <p:cNvPr id="11" name="그림 10">
+            <a:extLst>
+              <a:ext uri="{FF2B5EF4-FFF2-40B4-BE49-F238E27FC236}">
+                <a16:creationId xmlns:a16="http://schemas.microsoft.com/office/drawing/2014/main" id="{5450EAB8-9911-3459-181E-97D28F9200A8}"/>
+              </a:ext>
+            </a:extLst>
+          </p:cNvPr>
+          <p:cNvPicPr>
+            <a:picLocks noChangeAspect="1"/>
+          </p:cNvPicPr>
+          <p:nvPr/>
+        </p:nvPicPr>
+        <p:blipFill>
+          <a:blip r:embed="rId3"/>
+          <a:stretch>
+            <a:fillRect/>
+          </a:stretch>
+        </p:blipFill>
+        <p:spPr>
+          <a:xfrm>
+            <a:off x="5415979" y="1325563"/>
+            <a:ext cx="5384289" cy="5308161"/>
+          </a:xfrm>
+          <a:prstGeom prst="rect">
+            <a:avLst/>
+          </a:prstGeom>
+        </p:spPr>
+      </p:pic>
+      <p:sp>
+        <p:nvSpPr>
+          <p:cNvPr id="14" name="내용 개체 틀 5">
+            <a:extLst>
+              <a:ext uri="{FF2B5EF4-FFF2-40B4-BE49-F238E27FC236}">
+                <a16:creationId xmlns:a16="http://schemas.microsoft.com/office/drawing/2014/main" id="{BA9AB3DC-7D5E-A350-1677-1988E3B77614}"/>
+              </a:ext>
+            </a:extLst>
+          </p:cNvPr>
+          <p:cNvSpPr>
+            <a:spLocks noGrp="1"/>
+          </p:cNvSpPr>
+          <p:nvPr>
+            <p:ph idx="1"/>
+          </p:nvPr>
+        </p:nvSpPr>
+        <p:spPr>
+          <a:xfrm>
+            <a:off x="838200" y="1549839"/>
+            <a:ext cx="10515600" cy="4627124"/>
+          </a:xfrm>
+        </p:spPr>
+        <p:txBody>
+          <a:bodyPr>
+            <a:normAutofit/>
+          </a:bodyPr>
+          <a:lstStyle/>
+          <a:p>
+            <a:pPr marL="0" indent="0">
+              <a:buNone/>
+            </a:pPr>
+            <a:r>
+              <a:rPr lang="ko-KR" altLang="en-US" sz="4000" b="1" dirty="0">
+                <a:solidFill>
+                  <a:srgbClr val="FF0000"/>
+                </a:solidFill>
+              </a:rPr>
+              <a:t>정답</a:t>
+            </a:r>
+            <a:endParaRPr lang="en-US" altLang="ko-KR" sz="4000" b="1" dirty="0">
+              <a:solidFill>
+                <a:srgbClr val="FF0000"/>
+              </a:solidFill>
+            </a:endParaRPr>
+          </a:p>
+        </p:txBody>
+      </p:sp>
+    </p:spTree>
+    <p:extLst>
+      <p:ext uri="{BB962C8B-B14F-4D97-AF65-F5344CB8AC3E}">
+        <p14:creationId xmlns:p14="http://schemas.microsoft.com/office/powerpoint/2010/main" val="2869353870"/>
+      </p:ext>
+    </p:extLst>
+  </p:cSld>
+  <p:clrMapOvr>
+    <a:masterClrMapping/>
+  </p:clrMapOvr>
+</p:sld>
+</file>
+
+<file path=ppt/slides/slide9.xml><?xml version="1.0" encoding="utf-8"?>
+<p:sld xmlns:a="http://schemas.openxmlformats.org/drawingml/2006/main" xmlns:r="http://schemas.openxmlformats.org/officeDocument/2006/relationships" xmlns:p="http://schemas.openxmlformats.org/presentationml/2006/main">
+  <p:cSld>
+    <p:spTree>
+      <p:nvGrpSpPr>
+        <p:cNvPr id="1" name="">
+          <a:extLst>
+            <a:ext uri="{FF2B5EF4-FFF2-40B4-BE49-F238E27FC236}">
+              <a16:creationId xmlns:a16="http://schemas.microsoft.com/office/drawing/2014/main" id="{058E95EE-189E-424D-3543-269651CDF7FD}"/>
+            </a:ext>
+          </a:extLst>
+        </p:cNvPr>
+        <p:cNvGrpSpPr/>
+        <p:nvPr/>
+      </p:nvGrpSpPr>
+      <p:grpSpPr>
+        <a:xfrm>
+          <a:off x="0" y="0"/>
+          <a:ext cx="0" cy="0"/>
+          <a:chOff x="0" y="0"/>
+          <a:chExt cx="0" cy="0"/>
+        </a:xfrm>
+      </p:grpSpPr>
+      <p:sp>
+        <p:nvSpPr>
+          <p:cNvPr id="2" name="제목 1">
+            <a:extLst>
+              <a:ext uri="{FF2B5EF4-FFF2-40B4-BE49-F238E27FC236}">
+                <a16:creationId xmlns:a16="http://schemas.microsoft.com/office/drawing/2014/main" id="{57403870-1342-522F-3739-18B439FA87AE}"/>
+              </a:ext>
+            </a:extLst>
+          </p:cNvPr>
+          <p:cNvSpPr>
+            <a:spLocks noGrp="1"/>
+          </p:cNvSpPr>
+          <p:nvPr>
+            <p:ph type="title"/>
+          </p:nvPr>
+        </p:nvSpPr>
+        <p:spPr/>
+        <p:txBody>
+          <a:bodyPr/>
+          <a:lstStyle/>
+          <a:p>
+            <a:r>
+              <a:rPr lang="ko-KR" altLang="en-US" dirty="0"/>
+              <a:t>초음파 센서</a:t>
+            </a:r>
+            <a:r>
+              <a:rPr lang="en-US" altLang="ko-KR" dirty="0"/>
+              <a:t> </a:t>
+            </a:r>
+            <a:r>
+              <a:rPr lang="ko-KR" altLang="en-US" dirty="0"/>
+              <a:t>실습 </a:t>
+            </a:r>
+            <a:r>
+              <a:rPr lang="en-US" altLang="ko-KR" dirty="0"/>
+              <a:t>Quiz</a:t>
+            </a:r>
+            <a:endParaRPr lang="ko-KR" altLang="en-US" dirty="0"/>
+          </a:p>
+        </p:txBody>
+      </p:sp>
+      <p:sp>
+        <p:nvSpPr>
+          <p:cNvPr id="14" name="내용 개체 틀 5">
+            <a:extLst>
+              <a:ext uri="{FF2B5EF4-FFF2-40B4-BE49-F238E27FC236}">
+                <a16:creationId xmlns:a16="http://schemas.microsoft.com/office/drawing/2014/main" id="{9A868864-A509-C3E9-5A7C-C55344671AC7}"/>
+              </a:ext>
+            </a:extLst>
+          </p:cNvPr>
+          <p:cNvSpPr>
+            <a:spLocks noGrp="1"/>
+          </p:cNvSpPr>
+          <p:nvPr>
+            <p:ph idx="1"/>
+          </p:nvPr>
+        </p:nvSpPr>
+        <p:spPr>
+          <a:xfrm>
+            <a:off x="838200" y="1549839"/>
+            <a:ext cx="10515600" cy="4627124"/>
+          </a:xfrm>
+        </p:spPr>
+        <p:txBody>
+          <a:bodyPr>
+            <a:normAutofit/>
+          </a:bodyPr>
+          <a:lstStyle/>
+          <a:p>
+            <a:pPr marL="0" indent="0">
+              <a:buNone/>
+            </a:pPr>
+            <a:r>
+              <a:rPr lang="ko-KR" altLang="en-US" sz="4000" b="1" dirty="0">
+                <a:solidFill>
+                  <a:srgbClr val="FF0000"/>
+                </a:solidFill>
+              </a:rPr>
+              <a:t>정답</a:t>
+            </a:r>
+            <a:endParaRPr lang="en-US" altLang="ko-KR" sz="4000" b="1" dirty="0">
+              <a:solidFill>
+                <a:srgbClr val="FF0000"/>
+              </a:solidFill>
+            </a:endParaRPr>
+          </a:p>
+        </p:txBody>
+      </p:sp>
+      <p:pic>
+        <p:nvPicPr>
+          <p:cNvPr id="4" name="그림 3">
+            <a:extLst>
+              <a:ext uri="{FF2B5EF4-FFF2-40B4-BE49-F238E27FC236}">
+                <a16:creationId xmlns:a16="http://schemas.microsoft.com/office/drawing/2014/main" id="{CC5F3326-0AF3-038C-04EF-A78B0E233D97}"/>
+              </a:ext>
+            </a:extLst>
+          </p:cNvPr>
+          <p:cNvPicPr>
+            <a:picLocks noChangeAspect="1"/>
+          </p:cNvPicPr>
+          <p:nvPr/>
+        </p:nvPicPr>
+        <p:blipFill>
+          <a:blip r:embed="rId3"/>
+          <a:stretch>
+            <a:fillRect/>
+          </a:stretch>
+        </p:blipFill>
+        <p:spPr>
+          <a:xfrm>
+            <a:off x="838200" y="2595563"/>
+            <a:ext cx="5086350" cy="3581400"/>
+          </a:xfrm>
+          <a:prstGeom prst="rect">
+            <a:avLst/>
+          </a:prstGeom>
+        </p:spPr>
+      </p:pic>
+      <p:pic>
+        <p:nvPicPr>
+          <p:cNvPr id="6" name="그림 5">
+            <a:extLst>
+              <a:ext uri="{FF2B5EF4-FFF2-40B4-BE49-F238E27FC236}">
+                <a16:creationId xmlns:a16="http://schemas.microsoft.com/office/drawing/2014/main" id="{EF066CB9-1291-242C-12A3-57EF6BBA64F9}"/>
+              </a:ext>
+            </a:extLst>
+          </p:cNvPr>
+          <p:cNvPicPr>
+            <a:picLocks noChangeAspect="1"/>
+          </p:cNvPicPr>
+          <p:nvPr/>
+        </p:nvPicPr>
+        <p:blipFill>
+          <a:blip r:embed="rId4"/>
+          <a:stretch>
+            <a:fillRect/>
+          </a:stretch>
+        </p:blipFill>
+        <p:spPr>
+          <a:xfrm>
+            <a:off x="5590872" y="1284818"/>
+            <a:ext cx="5762928" cy="5157166"/>
+          </a:xfrm>
+          <a:prstGeom prst="rect">
+            <a:avLst/>
+          </a:prstGeom>
+        </p:spPr>
+      </p:pic>
+    </p:spTree>
+    <p:extLst>
+      <p:ext uri="{BB962C8B-B14F-4D97-AF65-F5344CB8AC3E}">
+        <p14:creationId xmlns:p14="http://schemas.microsoft.com/office/powerpoint/2010/main" val="202577839"/>
+      </p:ext>
+    </p:extLst>
+  </p:cSld>
+  <p:clrMapOvr>
+    <a:masterClrMapping/>
+  </p:clrMapOvr>
+</p:sld>
+</file>
+
 <file path=ppt/theme/theme1.xml><?xml version="1.0" encoding="utf-8"?>
 <a:theme xmlns:a="http://schemas.openxmlformats.org/drawingml/2006/main" name="1_Office 테마">
   <a:themeElements>

--- a/material/Arduino/05_태양광패널.pptx
+++ b/material/Arduino/05_태양광패널.pptx
@@ -5,19 +5,22 @@
     <p:sldMasterId id="2147483661" r:id="rId1"/>
   </p:sldMasterIdLst>
   <p:notesMasterIdLst>
-    <p:notesMasterId r:id="rId12"/>
+    <p:notesMasterId r:id="rId15"/>
   </p:notesMasterIdLst>
   <p:sldIdLst>
     <p:sldId id="1004" r:id="rId2"/>
     <p:sldId id="1103" r:id="rId3"/>
     <p:sldId id="1102" r:id="rId4"/>
-    <p:sldId id="996" r:id="rId5"/>
-    <p:sldId id="1060" r:id="rId6"/>
-    <p:sldId id="1066" r:id="rId7"/>
-    <p:sldId id="1080" r:id="rId8"/>
-    <p:sldId id="1085" r:id="rId9"/>
-    <p:sldId id="1086" r:id="rId10"/>
-    <p:sldId id="1101" r:id="rId11"/>
+    <p:sldId id="1106" r:id="rId5"/>
+    <p:sldId id="996" r:id="rId6"/>
+    <p:sldId id="1104" r:id="rId7"/>
+    <p:sldId id="1107" r:id="rId8"/>
+    <p:sldId id="1060" r:id="rId9"/>
+    <p:sldId id="1066" r:id="rId10"/>
+    <p:sldId id="1080" r:id="rId11"/>
+    <p:sldId id="1085" r:id="rId12"/>
+    <p:sldId id="1086" r:id="rId13"/>
+    <p:sldId id="1101" r:id="rId14"/>
   </p:sldIdLst>
   <p:sldSz cx="12192000" cy="6858000"/>
   <p:notesSz cx="6858000" cy="9144000"/>
@@ -209,7 +212,7 @@
           <a:p>
             <a:fld id="{31A4D7BB-9D09-4DB4-979A-1857C46342D6}" type="datetimeFigureOut">
               <a:rPr lang="ko-KR" altLang="en-US" smtClean="0"/>
-              <a:t>2025-10-28</a:t>
+              <a:t>2025-10-29</a:t>
             </a:fld>
             <a:endParaRPr lang="ko-KR" altLang="en-US"/>
           </a:p>
@@ -561,6 +564,228 @@
 </p:notes>
 </file>
 
+<file path=ppt/notesSlides/notesSlide10.xml><?xml version="1.0" encoding="utf-8"?>
+<p:notes xmlns:a="http://schemas.openxmlformats.org/drawingml/2006/main" xmlns:r="http://schemas.openxmlformats.org/officeDocument/2006/relationships" xmlns:p="http://schemas.openxmlformats.org/presentationml/2006/main">
+  <p:cSld>
+    <p:spTree>
+      <p:nvGrpSpPr>
+        <p:cNvPr id="1" name="">
+          <a:extLst>
+            <a:ext uri="{FF2B5EF4-FFF2-40B4-BE49-F238E27FC236}">
+              <a16:creationId xmlns:a16="http://schemas.microsoft.com/office/drawing/2014/main" id="{0EB7673E-74C7-AFDE-69D1-1F9A80E1C968}"/>
+            </a:ext>
+          </a:extLst>
+        </p:cNvPr>
+        <p:cNvGrpSpPr/>
+        <p:nvPr/>
+      </p:nvGrpSpPr>
+      <p:grpSpPr>
+        <a:xfrm>
+          <a:off x="0" y="0"/>
+          <a:ext cx="0" cy="0"/>
+          <a:chOff x="0" y="0"/>
+          <a:chExt cx="0" cy="0"/>
+        </a:xfrm>
+      </p:grpSpPr>
+      <p:sp>
+        <p:nvSpPr>
+          <p:cNvPr id="2" name="슬라이드 이미지 개체 틀 1">
+            <a:extLst>
+              <a:ext uri="{FF2B5EF4-FFF2-40B4-BE49-F238E27FC236}">
+                <a16:creationId xmlns:a16="http://schemas.microsoft.com/office/drawing/2014/main" id="{B3B32E6E-43F8-8BD2-C8C2-6B6F2FAE9877}"/>
+              </a:ext>
+            </a:extLst>
+          </p:cNvPr>
+          <p:cNvSpPr>
+            <a:spLocks noGrp="1" noRot="1" noChangeAspect="1"/>
+          </p:cNvSpPr>
+          <p:nvPr>
+            <p:ph type="sldImg"/>
+          </p:nvPr>
+        </p:nvSpPr>
+        <p:spPr/>
+      </p:sp>
+      <p:sp>
+        <p:nvSpPr>
+          <p:cNvPr id="3" name="슬라이드 노트 개체 틀 2">
+            <a:extLst>
+              <a:ext uri="{FF2B5EF4-FFF2-40B4-BE49-F238E27FC236}">
+                <a16:creationId xmlns:a16="http://schemas.microsoft.com/office/drawing/2014/main" id="{AA1C0786-4D55-0285-6958-E7763FEBEB82}"/>
+              </a:ext>
+            </a:extLst>
+          </p:cNvPr>
+          <p:cNvSpPr>
+            <a:spLocks noGrp="1"/>
+          </p:cNvSpPr>
+          <p:nvPr>
+            <p:ph type="body" idx="1"/>
+          </p:nvPr>
+        </p:nvSpPr>
+        <p:spPr/>
+        <p:txBody>
+          <a:bodyPr/>
+          <a:lstStyle/>
+          <a:p>
+            <a:pPr algn="l" fontAlgn="base"/>
+            <a:endParaRPr lang="en-US" altLang="ko-KR" dirty="0">
+              <a:latin typeface="+mn-lt"/>
+            </a:endParaRPr>
+          </a:p>
+        </p:txBody>
+      </p:sp>
+      <p:sp>
+        <p:nvSpPr>
+          <p:cNvPr id="4" name="슬라이드 번호 개체 틀 3">
+            <a:extLst>
+              <a:ext uri="{FF2B5EF4-FFF2-40B4-BE49-F238E27FC236}">
+                <a16:creationId xmlns:a16="http://schemas.microsoft.com/office/drawing/2014/main" id="{8EC69716-A6AE-AAB7-8211-8994FAAD6264}"/>
+              </a:ext>
+            </a:extLst>
+          </p:cNvPr>
+          <p:cNvSpPr>
+            <a:spLocks noGrp="1"/>
+          </p:cNvSpPr>
+          <p:nvPr>
+            <p:ph type="sldNum" sz="quarter" idx="5"/>
+          </p:nvPr>
+        </p:nvSpPr>
+        <p:spPr/>
+        <p:txBody>
+          <a:bodyPr/>
+          <a:lstStyle/>
+          <a:p>
+            <a:fld id="{3599D024-DE68-44ED-822F-D827F84FBD4A}" type="slidenum">
+              <a:rPr lang="ko-KR" altLang="en-US" smtClean="0"/>
+              <a:t>12</a:t>
+            </a:fld>
+            <a:endParaRPr lang="ko-KR" altLang="en-US"/>
+          </a:p>
+        </p:txBody>
+      </p:sp>
+    </p:spTree>
+    <p:extLst>
+      <p:ext uri="{BB962C8B-B14F-4D97-AF65-F5344CB8AC3E}">
+        <p14:creationId xmlns:p14="http://schemas.microsoft.com/office/powerpoint/2010/main" val="2774634390"/>
+      </p:ext>
+    </p:extLst>
+  </p:cSld>
+  <p:clrMapOvr>
+    <a:masterClrMapping/>
+  </p:clrMapOvr>
+</p:notes>
+</file>
+
+<file path=ppt/notesSlides/notesSlide11.xml><?xml version="1.0" encoding="utf-8"?>
+<p:notes xmlns:a="http://schemas.openxmlformats.org/drawingml/2006/main" xmlns:r="http://schemas.openxmlformats.org/officeDocument/2006/relationships" xmlns:p="http://schemas.openxmlformats.org/presentationml/2006/main">
+  <p:cSld>
+    <p:spTree>
+      <p:nvGrpSpPr>
+        <p:cNvPr id="1" name="">
+          <a:extLst>
+            <a:ext uri="{FF2B5EF4-FFF2-40B4-BE49-F238E27FC236}">
+              <a16:creationId xmlns:a16="http://schemas.microsoft.com/office/drawing/2014/main" id="{4525F50A-47EC-D589-2C0F-BBED56284535}"/>
+            </a:ext>
+          </a:extLst>
+        </p:cNvPr>
+        <p:cNvGrpSpPr/>
+        <p:nvPr/>
+      </p:nvGrpSpPr>
+      <p:grpSpPr>
+        <a:xfrm>
+          <a:off x="0" y="0"/>
+          <a:ext cx="0" cy="0"/>
+          <a:chOff x="0" y="0"/>
+          <a:chExt cx="0" cy="0"/>
+        </a:xfrm>
+      </p:grpSpPr>
+      <p:sp>
+        <p:nvSpPr>
+          <p:cNvPr id="2" name="슬라이드 이미지 개체 틀 1">
+            <a:extLst>
+              <a:ext uri="{FF2B5EF4-FFF2-40B4-BE49-F238E27FC236}">
+                <a16:creationId xmlns:a16="http://schemas.microsoft.com/office/drawing/2014/main" id="{1DF1374C-FB94-51A8-47BA-15418AD7B8C0}"/>
+              </a:ext>
+            </a:extLst>
+          </p:cNvPr>
+          <p:cNvSpPr>
+            <a:spLocks noGrp="1" noRot="1" noChangeAspect="1"/>
+          </p:cNvSpPr>
+          <p:nvPr>
+            <p:ph type="sldImg"/>
+          </p:nvPr>
+        </p:nvSpPr>
+        <p:spPr/>
+      </p:sp>
+      <p:sp>
+        <p:nvSpPr>
+          <p:cNvPr id="3" name="슬라이드 노트 개체 틀 2">
+            <a:extLst>
+              <a:ext uri="{FF2B5EF4-FFF2-40B4-BE49-F238E27FC236}">
+                <a16:creationId xmlns:a16="http://schemas.microsoft.com/office/drawing/2014/main" id="{B1AAB358-4486-D0D2-1363-794A407F4BA1}"/>
+              </a:ext>
+            </a:extLst>
+          </p:cNvPr>
+          <p:cNvSpPr>
+            <a:spLocks noGrp="1"/>
+          </p:cNvSpPr>
+          <p:nvPr>
+            <p:ph type="body" idx="1"/>
+          </p:nvPr>
+        </p:nvSpPr>
+        <p:spPr/>
+        <p:txBody>
+          <a:bodyPr/>
+          <a:lstStyle/>
+          <a:p>
+            <a:pPr algn="l" fontAlgn="base"/>
+            <a:endParaRPr lang="en-US" altLang="ko-KR" dirty="0">
+              <a:latin typeface="+mn-lt"/>
+            </a:endParaRPr>
+          </a:p>
+        </p:txBody>
+      </p:sp>
+      <p:sp>
+        <p:nvSpPr>
+          <p:cNvPr id="4" name="슬라이드 번호 개체 틀 3">
+            <a:extLst>
+              <a:ext uri="{FF2B5EF4-FFF2-40B4-BE49-F238E27FC236}">
+                <a16:creationId xmlns:a16="http://schemas.microsoft.com/office/drawing/2014/main" id="{7DCA441B-8868-8B8C-ACA6-C5B3ADAB3E72}"/>
+              </a:ext>
+            </a:extLst>
+          </p:cNvPr>
+          <p:cNvSpPr>
+            <a:spLocks noGrp="1"/>
+          </p:cNvSpPr>
+          <p:nvPr>
+            <p:ph type="sldNum" sz="quarter" idx="5"/>
+          </p:nvPr>
+        </p:nvSpPr>
+        <p:spPr/>
+        <p:txBody>
+          <a:bodyPr/>
+          <a:lstStyle/>
+          <a:p>
+            <a:fld id="{3599D024-DE68-44ED-822F-D827F84FBD4A}" type="slidenum">
+              <a:rPr lang="ko-KR" altLang="en-US" smtClean="0"/>
+              <a:t>13</a:t>
+            </a:fld>
+            <a:endParaRPr lang="ko-KR" altLang="en-US"/>
+          </a:p>
+        </p:txBody>
+      </p:sp>
+    </p:spTree>
+    <p:extLst>
+      <p:ext uri="{BB962C8B-B14F-4D97-AF65-F5344CB8AC3E}">
+        <p14:creationId xmlns:p14="http://schemas.microsoft.com/office/powerpoint/2010/main" val="1071527173"/>
+      </p:ext>
+    </p:extLst>
+  </p:cSld>
+  <p:clrMapOvr>
+    <a:masterClrMapping/>
+  </p:clrMapOvr>
+</p:notes>
+</file>
+
 <file path=ppt/notesSlides/notesSlide2.xml><?xml version="1.0" encoding="utf-8"?>
 <p:notes xmlns:a="http://schemas.openxmlformats.org/drawingml/2006/main" xmlns:r="http://schemas.openxmlformats.org/officeDocument/2006/relationships" xmlns:p="http://schemas.openxmlformats.org/presentationml/2006/main">
   <p:cSld>
@@ -624,877 +849,6 @@
           <a:lstStyle/>
           <a:p>
             <a:pPr algn="l" fontAlgn="base"/>
-            <a:r>
-              <a:rPr lang="en-US" altLang="ko-KR" b="1" i="0" dirty="0">
-                <a:solidFill>
-                  <a:srgbClr val="000000"/>
-                </a:solidFill>
-                <a:effectLst/>
-                <a:highlight>
-                  <a:srgbClr val="FFFFFF"/>
-                </a:highlight>
-                <a:latin typeface="+mn-lt"/>
-              </a:rPr>
-              <a:t>Pulse : </a:t>
-            </a:r>
-            <a:r>
-              <a:rPr lang="ko-KR" altLang="en-US" b="1" i="0" dirty="0" err="1">
-                <a:solidFill>
-                  <a:srgbClr val="000000"/>
-                </a:solidFill>
-                <a:effectLst/>
-                <a:highlight>
-                  <a:srgbClr val="FFFFFF"/>
-                </a:highlight>
-                <a:latin typeface="+mn-lt"/>
-              </a:rPr>
-              <a:t>사각파</a:t>
-            </a:r>
-            <a:endParaRPr lang="ko-KR" altLang="en-US" b="0" i="0" dirty="0">
-              <a:solidFill>
-                <a:srgbClr val="666666"/>
-              </a:solidFill>
-              <a:effectLst/>
-              <a:highlight>
-                <a:srgbClr val="FFFFFF"/>
-              </a:highlight>
-              <a:latin typeface="+mn-lt"/>
-            </a:endParaRPr>
-          </a:p>
-          <a:p>
-            <a:pPr algn="l" fontAlgn="base"/>
-            <a:r>
-              <a:rPr lang="en-US" altLang="ko-KR" b="1" i="0" dirty="0">
-                <a:solidFill>
-                  <a:srgbClr val="000000"/>
-                </a:solidFill>
-                <a:effectLst/>
-                <a:highlight>
-                  <a:srgbClr val="FFFFFF"/>
-                </a:highlight>
-                <a:latin typeface="+mn-lt"/>
-              </a:rPr>
-              <a:t>Width : </a:t>
-            </a:r>
-            <a:r>
-              <a:rPr lang="ko-KR" altLang="en-US" b="1" i="0" dirty="0">
-                <a:solidFill>
-                  <a:srgbClr val="000000"/>
-                </a:solidFill>
-                <a:effectLst/>
-                <a:highlight>
-                  <a:srgbClr val="FFFFFF"/>
-                </a:highlight>
-                <a:latin typeface="+mn-lt"/>
-              </a:rPr>
-              <a:t>폭</a:t>
-            </a:r>
-            <a:endParaRPr lang="ko-KR" altLang="en-US" b="0" i="0" dirty="0">
-              <a:solidFill>
-                <a:srgbClr val="666666"/>
-              </a:solidFill>
-              <a:effectLst/>
-              <a:highlight>
-                <a:srgbClr val="FFFFFF"/>
-              </a:highlight>
-              <a:latin typeface="+mn-lt"/>
-            </a:endParaRPr>
-          </a:p>
-          <a:p>
-            <a:pPr algn="l" fontAlgn="base"/>
-            <a:r>
-              <a:rPr lang="en-US" altLang="ko-KR" b="1" i="0" dirty="0">
-                <a:solidFill>
-                  <a:srgbClr val="000000"/>
-                </a:solidFill>
-                <a:effectLst/>
-                <a:highlight>
-                  <a:srgbClr val="FFFFFF"/>
-                </a:highlight>
-                <a:latin typeface="+mn-lt"/>
-              </a:rPr>
-              <a:t>Modulation : </a:t>
-            </a:r>
-            <a:r>
-              <a:rPr lang="ko-KR" altLang="en-US" b="1" i="0" dirty="0">
-                <a:solidFill>
-                  <a:srgbClr val="000000"/>
-                </a:solidFill>
-                <a:effectLst/>
-                <a:highlight>
-                  <a:srgbClr val="FFFFFF"/>
-                </a:highlight>
-                <a:latin typeface="+mn-lt"/>
-              </a:rPr>
-              <a:t>변조</a:t>
-            </a:r>
-            <a:r>
-              <a:rPr lang="en-US" altLang="ko-KR" b="1" i="0" dirty="0">
-                <a:solidFill>
-                  <a:srgbClr val="000000"/>
-                </a:solidFill>
-                <a:effectLst/>
-                <a:highlight>
-                  <a:srgbClr val="FFFFFF"/>
-                </a:highlight>
-                <a:latin typeface="+mn-lt"/>
-                <a:ea typeface="Dotum" panose="020B0600000101010101" pitchFamily="50" charset="-127"/>
-              </a:rPr>
-              <a:t>[</a:t>
-            </a:r>
-            <a:r>
-              <a:rPr lang="ko-KR" altLang="en-US" b="1" i="0" dirty="0">
-                <a:solidFill>
-                  <a:srgbClr val="000000"/>
-                </a:solidFill>
-                <a:effectLst/>
-                <a:highlight>
-                  <a:srgbClr val="FFFFFF"/>
-                </a:highlight>
-                <a:latin typeface="+mn-lt"/>
-                <a:ea typeface="Dotum" panose="020B0600000101010101" pitchFamily="50" charset="-127"/>
-              </a:rPr>
-              <a:t>출처</a:t>
-            </a:r>
-            <a:r>
-              <a:rPr lang="en-US" altLang="ko-KR" b="1" i="0" dirty="0">
-                <a:solidFill>
-                  <a:srgbClr val="000000"/>
-                </a:solidFill>
-                <a:effectLst/>
-                <a:highlight>
-                  <a:srgbClr val="FFFFFF"/>
-                </a:highlight>
-                <a:latin typeface="+mn-lt"/>
-                <a:ea typeface="Dotum" panose="020B0600000101010101" pitchFamily="50" charset="-127"/>
-              </a:rPr>
-              <a:t>]</a:t>
-            </a:r>
-            <a:r>
-              <a:rPr lang="ko-KR" altLang="en-US" b="0" i="0" dirty="0">
-                <a:solidFill>
-                  <a:srgbClr val="000000"/>
-                </a:solidFill>
-                <a:effectLst/>
-                <a:highlight>
-                  <a:srgbClr val="FFFFFF"/>
-                </a:highlight>
-                <a:latin typeface="+mn-lt"/>
-                <a:ea typeface="Dotum" panose="020B0600000101010101" pitchFamily="50" charset="-127"/>
-              </a:rPr>
-              <a:t> </a:t>
-            </a:r>
-            <a:r>
-              <a:rPr lang="en-US" altLang="ko-KR" b="0" i="0" u="none" strike="noStrike" dirty="0">
-                <a:solidFill>
-                  <a:srgbClr val="000000"/>
-                </a:solidFill>
-                <a:effectLst/>
-                <a:highlight>
-                  <a:srgbClr val="FFFFFF"/>
-                </a:highlight>
-                <a:latin typeface="+mn-lt"/>
-                <a:ea typeface="Dotum" panose="020B0600000101010101" pitchFamily="50" charset="-127"/>
-                <a:hlinkClick r:id="rId3"/>
-              </a:rPr>
-              <a:t>PWM </a:t>
-            </a:r>
-            <a:r>
-              <a:rPr lang="ko-KR" altLang="en-US" b="0" i="0" u="none" strike="noStrike" dirty="0" err="1">
-                <a:solidFill>
-                  <a:srgbClr val="000000"/>
-                </a:solidFill>
-                <a:effectLst/>
-                <a:highlight>
-                  <a:srgbClr val="FFFFFF"/>
-                </a:highlight>
-                <a:latin typeface="+mn-lt"/>
-                <a:ea typeface="Dotum" panose="020B0600000101010101" pitchFamily="50" charset="-127"/>
-                <a:hlinkClick r:id="rId3"/>
-              </a:rPr>
-              <a:t>제어란</a:t>
-            </a:r>
-            <a:r>
-              <a:rPr lang="en-US" altLang="ko-KR" b="0" i="0" u="none" strike="noStrike" dirty="0">
-                <a:solidFill>
-                  <a:srgbClr val="000000"/>
-                </a:solidFill>
-                <a:effectLst/>
-                <a:highlight>
-                  <a:srgbClr val="FFFFFF"/>
-                </a:highlight>
-                <a:latin typeface="+mn-lt"/>
-                <a:ea typeface="Dotum" panose="020B0600000101010101" pitchFamily="50" charset="-127"/>
-                <a:hlinkClick r:id="rId3"/>
-              </a:rPr>
-              <a:t>? (Pulse Width Modulation)</a:t>
-            </a:r>
-            <a:r>
-              <a:rPr lang="en-US" altLang="ko-KR" b="0" i="0" dirty="0">
-                <a:solidFill>
-                  <a:srgbClr val="000000"/>
-                </a:solidFill>
-                <a:effectLst/>
-                <a:highlight>
-                  <a:srgbClr val="FFFFFF"/>
-                </a:highlight>
-                <a:latin typeface="+mn-lt"/>
-                <a:ea typeface="Dotum" panose="020B0600000101010101" pitchFamily="50" charset="-127"/>
-              </a:rPr>
-              <a:t>|</a:t>
-            </a:r>
-            <a:r>
-              <a:rPr lang="ko-KR" altLang="en-US" b="1" i="0" dirty="0">
-                <a:solidFill>
-                  <a:srgbClr val="000000"/>
-                </a:solidFill>
-                <a:effectLst/>
-                <a:highlight>
-                  <a:srgbClr val="FFFFFF"/>
-                </a:highlight>
-                <a:latin typeface="+mn-lt"/>
-                <a:ea typeface="Dotum" panose="020B0600000101010101" pitchFamily="50" charset="-127"/>
-              </a:rPr>
-              <a:t>작성자</a:t>
-            </a:r>
-            <a:r>
-              <a:rPr lang="ko-KR" altLang="en-US" b="0" i="0" dirty="0">
-                <a:solidFill>
-                  <a:srgbClr val="000000"/>
-                </a:solidFill>
-                <a:effectLst/>
-                <a:highlight>
-                  <a:srgbClr val="FFFFFF"/>
-                </a:highlight>
-                <a:latin typeface="+mn-lt"/>
-                <a:ea typeface="Dotum" panose="020B0600000101010101" pitchFamily="50" charset="-127"/>
-              </a:rPr>
-              <a:t> </a:t>
-            </a:r>
-            <a:r>
-              <a:rPr lang="ko-KR" altLang="en-US" b="0" i="0" u="none" strike="noStrike" dirty="0" err="1">
-                <a:solidFill>
-                  <a:srgbClr val="000000"/>
-                </a:solidFill>
-                <a:effectLst/>
-                <a:highlight>
-                  <a:srgbClr val="FFFFFF"/>
-                </a:highlight>
-                <a:latin typeface="+mn-lt"/>
-                <a:ea typeface="Dotum" panose="020B0600000101010101" pitchFamily="50" charset="-127"/>
-                <a:hlinkClick r:id="rId4"/>
-              </a:rPr>
-              <a:t>엠에스리</a:t>
-            </a:r>
-            <a:endParaRPr lang="ko-KR" altLang="en-US" b="0" i="0" dirty="0">
-              <a:solidFill>
-                <a:srgbClr val="000000"/>
-              </a:solidFill>
-              <a:effectLst/>
-              <a:highlight>
-                <a:srgbClr val="FFFFFF"/>
-              </a:highlight>
-              <a:latin typeface="+mn-lt"/>
-              <a:ea typeface="Dotum" panose="020B0600000101010101" pitchFamily="50" charset="-127"/>
-            </a:endParaRPr>
-          </a:p>
-          <a:p>
-            <a:pPr algn="l"/>
-            <a:endParaRPr lang="en-US" altLang="ko-KR" b="0" i="0" dirty="0">
-              <a:solidFill>
-                <a:srgbClr val="000000"/>
-              </a:solidFill>
-              <a:effectLst/>
-              <a:highlight>
-                <a:srgbClr val="FFFFFF"/>
-              </a:highlight>
-              <a:latin typeface="+mn-lt"/>
-              <a:ea typeface="나눔고딕" pitchFamily="2" charset="-127"/>
-            </a:endParaRPr>
-          </a:p>
-          <a:p>
-            <a:pPr algn="l"/>
-            <a:r>
-              <a:rPr lang="ko-KR" altLang="en-US" dirty="0"/>
-              <a:t>디지털 신호 </a:t>
-            </a:r>
-            <a:r>
-              <a:rPr lang="en-US" altLang="ko-KR" dirty="0"/>
-              <a:t>0,1</a:t>
-            </a:r>
-            <a:r>
-              <a:rPr lang="ko-KR" altLang="en-US" dirty="0"/>
-              <a:t>을 빠르게 반복해서 평균값을 내는 것처럼 보이게 하는 것</a:t>
-            </a:r>
-            <a:endParaRPr lang="en-US" altLang="ko-KR" b="0" i="0" dirty="0">
-              <a:solidFill>
-                <a:srgbClr val="000000"/>
-              </a:solidFill>
-              <a:effectLst/>
-              <a:highlight>
-                <a:srgbClr val="FFFFFF"/>
-              </a:highlight>
-              <a:latin typeface="+mn-lt"/>
-              <a:ea typeface="나눔고딕" pitchFamily="2" charset="-127"/>
-            </a:endParaRPr>
-          </a:p>
-          <a:p>
-            <a:pPr algn="l"/>
-            <a:r>
-              <a:rPr lang="ko-KR" altLang="en-US" b="0" i="0" dirty="0">
-                <a:solidFill>
-                  <a:srgbClr val="000000"/>
-                </a:solidFill>
-                <a:effectLst/>
-                <a:highlight>
-                  <a:srgbClr val="FFFFFF"/>
-                </a:highlight>
-                <a:latin typeface="+mn-lt"/>
-                <a:ea typeface="나눔고딕" pitchFamily="2" charset="-127"/>
-              </a:rPr>
-              <a:t>아래 그림과 같이 </a:t>
-            </a:r>
-            <a:r>
-              <a:rPr lang="en-US" altLang="ko-KR" b="0" i="0" dirty="0">
-                <a:solidFill>
-                  <a:srgbClr val="000000"/>
-                </a:solidFill>
-                <a:effectLst/>
-                <a:highlight>
-                  <a:srgbClr val="FFFFFF"/>
-                </a:highlight>
-                <a:latin typeface="+mn-lt"/>
-                <a:ea typeface="나눔고딕" pitchFamily="2" charset="-127"/>
-              </a:rPr>
-              <a:t>5v</a:t>
-            </a:r>
-            <a:r>
-              <a:rPr lang="ko-KR" altLang="en-US" b="0" i="0" dirty="0">
-                <a:solidFill>
-                  <a:srgbClr val="000000"/>
-                </a:solidFill>
-                <a:effectLst/>
-                <a:highlight>
-                  <a:srgbClr val="FFFFFF"/>
-                </a:highlight>
-                <a:latin typeface="+mn-lt"/>
-                <a:ea typeface="나눔고딕" pitchFamily="2" charset="-127"/>
-              </a:rPr>
-              <a:t>의 폭을 </a:t>
-            </a:r>
-            <a:r>
-              <a:rPr lang="en-US" altLang="ko-KR" b="0" i="0" dirty="0">
-                <a:solidFill>
-                  <a:srgbClr val="000000"/>
-                </a:solidFill>
-                <a:effectLst/>
-                <a:highlight>
-                  <a:srgbClr val="FFFFFF"/>
-                </a:highlight>
-                <a:latin typeface="+mn-lt"/>
-                <a:ea typeface="나눔고딕" pitchFamily="2" charset="-127"/>
-              </a:rPr>
-              <a:t>25%, 50%, 75% </a:t>
-            </a:r>
-            <a:r>
-              <a:rPr lang="ko-KR" altLang="en-US" b="0" i="0" dirty="0">
-                <a:solidFill>
-                  <a:srgbClr val="000000"/>
-                </a:solidFill>
-                <a:effectLst/>
-                <a:highlight>
-                  <a:srgbClr val="FFFFFF"/>
-                </a:highlight>
-                <a:latin typeface="+mn-lt"/>
-                <a:ea typeface="나눔고딕" pitchFamily="2" charset="-127"/>
-              </a:rPr>
-              <a:t>등으로 다양하게 바꾸어 아날로그 신호를 나타냅니다</a:t>
-            </a:r>
-            <a:r>
-              <a:rPr lang="en-US" altLang="ko-KR" b="0" i="0" dirty="0">
-                <a:solidFill>
-                  <a:srgbClr val="000000"/>
-                </a:solidFill>
-                <a:effectLst/>
-                <a:highlight>
-                  <a:srgbClr val="FFFFFF"/>
-                </a:highlight>
-                <a:latin typeface="+mn-lt"/>
-                <a:ea typeface="나눔고딕" pitchFamily="2" charset="-127"/>
-              </a:rPr>
-              <a:t>. </a:t>
-            </a:r>
-            <a:r>
-              <a:rPr lang="ko-KR" altLang="en-US" b="0" i="0" dirty="0">
-                <a:solidFill>
-                  <a:srgbClr val="000000"/>
-                </a:solidFill>
-                <a:effectLst/>
-                <a:highlight>
-                  <a:srgbClr val="FFFFFF"/>
-                </a:highlight>
-                <a:latin typeface="+mn-lt"/>
-                <a:ea typeface="나눔고딕" pitchFamily="2" charset="-127"/>
-              </a:rPr>
-              <a:t>즉 </a:t>
-            </a:r>
-            <a:r>
-              <a:rPr lang="en-US" altLang="ko-KR" b="0" i="0" dirty="0">
-                <a:solidFill>
-                  <a:srgbClr val="000000"/>
-                </a:solidFill>
-                <a:effectLst/>
-                <a:highlight>
-                  <a:srgbClr val="FFFFFF"/>
-                </a:highlight>
-                <a:latin typeface="+mn-lt"/>
-                <a:ea typeface="나눔고딕" pitchFamily="2" charset="-127"/>
-              </a:rPr>
-              <a:t>0</a:t>
-            </a:r>
-            <a:r>
-              <a:rPr lang="ko-KR" altLang="en-US" b="0" i="0" dirty="0">
-                <a:solidFill>
-                  <a:srgbClr val="000000"/>
-                </a:solidFill>
-                <a:effectLst/>
-                <a:highlight>
-                  <a:srgbClr val="FFFFFF"/>
-                </a:highlight>
-                <a:latin typeface="+mn-lt"/>
-                <a:ea typeface="나눔고딕" pitchFamily="2" charset="-127"/>
-              </a:rPr>
-              <a:t>부터 </a:t>
-            </a:r>
-            <a:r>
-              <a:rPr lang="en-US" altLang="ko-KR" b="0" i="0" dirty="0">
-                <a:solidFill>
-                  <a:srgbClr val="000000"/>
-                </a:solidFill>
-                <a:effectLst/>
-                <a:highlight>
-                  <a:srgbClr val="FFFFFF"/>
-                </a:highlight>
-                <a:latin typeface="+mn-lt"/>
-                <a:ea typeface="나눔고딕" pitchFamily="2" charset="-127"/>
-              </a:rPr>
-              <a:t>255</a:t>
-            </a:r>
-            <a:r>
-              <a:rPr lang="ko-KR" altLang="en-US" b="0" i="0" dirty="0">
-                <a:solidFill>
-                  <a:srgbClr val="000000"/>
-                </a:solidFill>
-                <a:effectLst/>
-                <a:highlight>
-                  <a:srgbClr val="FFFFFF"/>
-                </a:highlight>
-                <a:latin typeface="+mn-lt"/>
-                <a:ea typeface="나눔고딕" pitchFamily="2" charset="-127"/>
-              </a:rPr>
-              <a:t>까지의 숫자를 표현할 수 있게 되는 것입니다</a:t>
-            </a:r>
-            <a:r>
-              <a:rPr lang="en-US" altLang="ko-KR" b="0" i="0" dirty="0">
-                <a:solidFill>
-                  <a:srgbClr val="000000"/>
-                </a:solidFill>
-                <a:effectLst/>
-                <a:highlight>
-                  <a:srgbClr val="FFFFFF"/>
-                </a:highlight>
-                <a:latin typeface="+mn-lt"/>
-                <a:ea typeface="나눔고딕" pitchFamily="2" charset="-127"/>
-              </a:rPr>
-              <a:t>.</a:t>
-            </a:r>
-            <a:br>
-              <a:rPr lang="ko-KR" altLang="en-US" b="0" i="0" dirty="0">
-                <a:solidFill>
-                  <a:srgbClr val="000000"/>
-                </a:solidFill>
-                <a:effectLst/>
-                <a:highlight>
-                  <a:srgbClr val="FFFFFF"/>
-                </a:highlight>
-                <a:latin typeface="+mn-lt"/>
-                <a:ea typeface="나눔고딕" pitchFamily="2" charset="-127"/>
-              </a:rPr>
-            </a:br>
-            <a:r>
-              <a:rPr lang="ko-KR" altLang="en-US" b="0" i="0" dirty="0">
-                <a:solidFill>
-                  <a:srgbClr val="000000"/>
-                </a:solidFill>
-                <a:effectLst/>
-                <a:highlight>
-                  <a:srgbClr val="FFFFFF"/>
-                </a:highlight>
-                <a:latin typeface="+mn-lt"/>
-                <a:ea typeface="나눔고딕" pitchFamily="2" charset="-127"/>
-              </a:rPr>
-              <a:t>폭이 </a:t>
-            </a:r>
-            <a:r>
-              <a:rPr lang="en-US" altLang="ko-KR" b="0" i="0" dirty="0">
-                <a:solidFill>
-                  <a:srgbClr val="000000"/>
-                </a:solidFill>
-                <a:effectLst/>
-                <a:highlight>
-                  <a:srgbClr val="FFFFFF"/>
-                </a:highlight>
-                <a:latin typeface="+mn-lt"/>
-                <a:ea typeface="나눔고딕" pitchFamily="2" charset="-127"/>
-              </a:rPr>
-              <a:t>25%</a:t>
-            </a:r>
-            <a:r>
-              <a:rPr lang="ko-KR" altLang="en-US" b="0" i="0" dirty="0">
-                <a:solidFill>
-                  <a:srgbClr val="000000"/>
-                </a:solidFill>
-                <a:effectLst/>
-                <a:highlight>
-                  <a:srgbClr val="FFFFFF"/>
-                </a:highlight>
-                <a:latin typeface="+mn-lt"/>
-                <a:ea typeface="나눔고딕" pitchFamily="2" charset="-127"/>
-              </a:rPr>
-              <a:t>일 때는 </a:t>
-            </a:r>
-            <a:r>
-              <a:rPr lang="en-US" altLang="ko-KR" b="0" i="0" dirty="0">
-                <a:solidFill>
-                  <a:srgbClr val="000000"/>
-                </a:solidFill>
-                <a:effectLst/>
-                <a:highlight>
-                  <a:srgbClr val="FFFFFF"/>
-                </a:highlight>
-                <a:latin typeface="+mn-lt"/>
-                <a:ea typeface="나눔고딕" pitchFamily="2" charset="-127"/>
-              </a:rPr>
-              <a:t>64</a:t>
-            </a:r>
-            <a:r>
-              <a:rPr lang="ko-KR" altLang="en-US" b="0" i="0" dirty="0">
-                <a:solidFill>
-                  <a:srgbClr val="000000"/>
-                </a:solidFill>
-                <a:effectLst/>
-                <a:highlight>
-                  <a:srgbClr val="FFFFFF"/>
-                </a:highlight>
-                <a:latin typeface="+mn-lt"/>
-                <a:ea typeface="나눔고딕" pitchFamily="2" charset="-127"/>
-              </a:rPr>
-              <a:t>라는 값을 나타내고</a:t>
-            </a:r>
-            <a:r>
-              <a:rPr lang="en-US" altLang="ko-KR" b="0" i="0" dirty="0">
-                <a:solidFill>
-                  <a:srgbClr val="000000"/>
-                </a:solidFill>
-                <a:effectLst/>
-                <a:highlight>
-                  <a:srgbClr val="FFFFFF"/>
-                </a:highlight>
-                <a:latin typeface="+mn-lt"/>
-                <a:ea typeface="나눔고딕" pitchFamily="2" charset="-127"/>
-              </a:rPr>
-              <a:t>, </a:t>
-            </a:r>
-            <a:r>
-              <a:rPr lang="ko-KR" altLang="en-US" b="0" i="0" dirty="0">
-                <a:solidFill>
-                  <a:srgbClr val="000000"/>
-                </a:solidFill>
-                <a:effectLst/>
-                <a:highlight>
-                  <a:srgbClr val="FFFFFF"/>
-                </a:highlight>
-                <a:latin typeface="+mn-lt"/>
-                <a:ea typeface="나눔고딕" pitchFamily="2" charset="-127"/>
-              </a:rPr>
-              <a:t>폭이 </a:t>
-            </a:r>
-            <a:r>
-              <a:rPr lang="en-US" altLang="ko-KR" b="0" i="0" dirty="0">
-                <a:solidFill>
-                  <a:srgbClr val="000000"/>
-                </a:solidFill>
-                <a:effectLst/>
-                <a:highlight>
-                  <a:srgbClr val="FFFFFF"/>
-                </a:highlight>
-                <a:latin typeface="+mn-lt"/>
-                <a:ea typeface="나눔고딕" pitchFamily="2" charset="-127"/>
-              </a:rPr>
-              <a:t>50%</a:t>
-            </a:r>
-            <a:r>
-              <a:rPr lang="ko-KR" altLang="en-US" b="0" i="0" dirty="0">
-                <a:solidFill>
-                  <a:srgbClr val="000000"/>
-                </a:solidFill>
-                <a:effectLst/>
-                <a:highlight>
-                  <a:srgbClr val="FFFFFF"/>
-                </a:highlight>
-                <a:latin typeface="+mn-lt"/>
-                <a:ea typeface="나눔고딕" pitchFamily="2" charset="-127"/>
-              </a:rPr>
-              <a:t>일 때는 </a:t>
-            </a:r>
-            <a:r>
-              <a:rPr lang="en-US" altLang="ko-KR" b="0" i="0" dirty="0">
-                <a:solidFill>
-                  <a:srgbClr val="000000"/>
-                </a:solidFill>
-                <a:effectLst/>
-                <a:highlight>
-                  <a:srgbClr val="FFFFFF"/>
-                </a:highlight>
-                <a:latin typeface="+mn-lt"/>
-                <a:ea typeface="나눔고딕" pitchFamily="2" charset="-127"/>
-              </a:rPr>
-              <a:t>127</a:t>
-            </a:r>
-            <a:r>
-              <a:rPr lang="ko-KR" altLang="en-US" b="0" i="0" dirty="0">
-                <a:solidFill>
-                  <a:srgbClr val="000000"/>
-                </a:solidFill>
-                <a:effectLst/>
-                <a:highlight>
-                  <a:srgbClr val="FFFFFF"/>
-                </a:highlight>
-                <a:latin typeface="+mn-lt"/>
-                <a:ea typeface="나눔고딕" pitchFamily="2" charset="-127"/>
-              </a:rPr>
-              <a:t>이라는 값을 나타내는 방식입니다</a:t>
-            </a:r>
-            <a:r>
-              <a:rPr lang="en-US" altLang="ko-KR" b="0" i="0" dirty="0">
-                <a:solidFill>
-                  <a:srgbClr val="000000"/>
-                </a:solidFill>
-                <a:effectLst/>
-                <a:highlight>
-                  <a:srgbClr val="FFFFFF"/>
-                </a:highlight>
-                <a:latin typeface="+mn-lt"/>
-                <a:ea typeface="나눔고딕" pitchFamily="2" charset="-127"/>
-              </a:rPr>
-              <a:t>.</a:t>
-            </a:r>
-            <a:r>
-              <a:rPr lang="en-US" altLang="ko-KR" b="1" i="0" dirty="0">
-                <a:solidFill>
-                  <a:srgbClr val="000000"/>
-                </a:solidFill>
-                <a:effectLst/>
-                <a:highlight>
-                  <a:srgbClr val="FFFFFF"/>
-                </a:highlight>
-                <a:latin typeface="+mn-lt"/>
-                <a:ea typeface="나눔고딕" pitchFamily="2" charset="-127"/>
-              </a:rPr>
-              <a:t>[</a:t>
-            </a:r>
-            <a:r>
-              <a:rPr lang="ko-KR" altLang="en-US" b="1" i="0" dirty="0">
-                <a:solidFill>
-                  <a:srgbClr val="000000"/>
-                </a:solidFill>
-                <a:effectLst/>
-                <a:highlight>
-                  <a:srgbClr val="FFFFFF"/>
-                </a:highlight>
-                <a:latin typeface="+mn-lt"/>
-                <a:ea typeface="나눔고딕" pitchFamily="2" charset="-127"/>
-              </a:rPr>
-              <a:t>출처</a:t>
-            </a:r>
-            <a:r>
-              <a:rPr lang="en-US" altLang="ko-KR" b="1" i="0" dirty="0">
-                <a:solidFill>
-                  <a:srgbClr val="000000"/>
-                </a:solidFill>
-                <a:effectLst/>
-                <a:highlight>
-                  <a:srgbClr val="FFFFFF"/>
-                </a:highlight>
-                <a:latin typeface="+mn-lt"/>
-                <a:ea typeface="나눔고딕" pitchFamily="2" charset="-127"/>
-              </a:rPr>
-              <a:t>]</a:t>
-            </a:r>
-            <a:r>
-              <a:rPr lang="ko-KR" altLang="en-US" b="0" i="0" dirty="0">
-                <a:solidFill>
-                  <a:srgbClr val="000000"/>
-                </a:solidFill>
-                <a:effectLst/>
-                <a:highlight>
-                  <a:srgbClr val="FFFFFF"/>
-                </a:highlight>
-                <a:latin typeface="+mn-lt"/>
-                <a:ea typeface="나눔고딕" pitchFamily="2" charset="-127"/>
-              </a:rPr>
-              <a:t> </a:t>
-            </a:r>
-            <a:r>
-              <a:rPr lang="en-US" altLang="ko-KR" b="0" i="0" u="sng" dirty="0">
-                <a:solidFill>
-                  <a:srgbClr val="608CBA"/>
-                </a:solidFill>
-                <a:effectLst/>
-                <a:highlight>
-                  <a:srgbClr val="FFFFFF"/>
-                </a:highlight>
-                <a:latin typeface="+mn-lt"/>
-                <a:ea typeface="나눔고딕" pitchFamily="2" charset="-127"/>
-                <a:hlinkClick r:id="rId5"/>
-              </a:rPr>
-              <a:t>[</a:t>
-            </a:r>
-            <a:r>
-              <a:rPr lang="ko-KR" altLang="en-US" b="0" i="0" u="sng" dirty="0">
-                <a:solidFill>
-                  <a:srgbClr val="608CBA"/>
-                </a:solidFill>
-                <a:effectLst/>
-                <a:highlight>
-                  <a:srgbClr val="FFFFFF"/>
-                </a:highlight>
-                <a:latin typeface="+mn-lt"/>
-                <a:ea typeface="나눔고딕" pitchFamily="2" charset="-127"/>
-                <a:hlinkClick r:id="rId5"/>
-              </a:rPr>
-              <a:t>가장 쉬운 </a:t>
-            </a:r>
-            <a:r>
-              <a:rPr lang="ko-KR" altLang="en-US" b="0" i="0" u="sng" dirty="0" err="1">
-                <a:solidFill>
-                  <a:srgbClr val="608CBA"/>
-                </a:solidFill>
-                <a:effectLst/>
-                <a:highlight>
-                  <a:srgbClr val="FFFFFF"/>
-                </a:highlight>
-                <a:latin typeface="+mn-lt"/>
-                <a:ea typeface="나눔고딕" pitchFamily="2" charset="-127"/>
-                <a:hlinkClick r:id="rId5"/>
-              </a:rPr>
-              <a:t>아두이노</a:t>
-            </a:r>
-            <a:r>
-              <a:rPr lang="ko-KR" altLang="en-US" b="0" i="0" u="sng" dirty="0">
-                <a:solidFill>
-                  <a:srgbClr val="608CBA"/>
-                </a:solidFill>
-                <a:effectLst/>
-                <a:highlight>
-                  <a:srgbClr val="FFFFFF"/>
-                </a:highlight>
-                <a:latin typeface="+mn-lt"/>
-                <a:ea typeface="나눔고딕" pitchFamily="2" charset="-127"/>
-                <a:hlinkClick r:id="rId5"/>
-              </a:rPr>
-              <a:t> 강의</a:t>
-            </a:r>
-            <a:r>
-              <a:rPr lang="en-US" altLang="ko-KR" b="0" i="0" u="sng" dirty="0">
-                <a:solidFill>
-                  <a:srgbClr val="608CBA"/>
-                </a:solidFill>
-                <a:effectLst/>
-                <a:highlight>
-                  <a:srgbClr val="FFFFFF"/>
-                </a:highlight>
-                <a:latin typeface="+mn-lt"/>
-                <a:ea typeface="나눔고딕" pitchFamily="2" charset="-127"/>
-                <a:hlinkClick r:id="rId5"/>
-              </a:rPr>
-              <a:t>] (33) PWM</a:t>
-            </a:r>
-            <a:r>
-              <a:rPr lang="en-US" altLang="ko-KR" b="0" i="0" dirty="0">
-                <a:solidFill>
-                  <a:srgbClr val="000000"/>
-                </a:solidFill>
-                <a:effectLst/>
-                <a:highlight>
-                  <a:srgbClr val="FFFFFF"/>
-                </a:highlight>
-                <a:latin typeface="+mn-lt"/>
-                <a:ea typeface="나눔고딕" pitchFamily="2" charset="-127"/>
-              </a:rPr>
-              <a:t>|</a:t>
-            </a:r>
-            <a:r>
-              <a:rPr lang="ko-KR" altLang="en-US" b="1" i="0" dirty="0">
-                <a:solidFill>
-                  <a:srgbClr val="000000"/>
-                </a:solidFill>
-                <a:effectLst/>
-                <a:highlight>
-                  <a:srgbClr val="FFFFFF"/>
-                </a:highlight>
-                <a:latin typeface="+mn-lt"/>
-                <a:ea typeface="나눔고딕" pitchFamily="2" charset="-127"/>
-              </a:rPr>
-              <a:t>작성자</a:t>
-            </a:r>
-            <a:r>
-              <a:rPr lang="ko-KR" altLang="en-US" b="0" i="0" dirty="0">
-                <a:solidFill>
-                  <a:srgbClr val="000000"/>
-                </a:solidFill>
-                <a:effectLst/>
-                <a:highlight>
-                  <a:srgbClr val="FFFFFF"/>
-                </a:highlight>
-                <a:latin typeface="+mn-lt"/>
-                <a:ea typeface="나눔고딕" pitchFamily="2" charset="-127"/>
-              </a:rPr>
-              <a:t> </a:t>
-            </a:r>
-            <a:r>
-              <a:rPr lang="ko-KR" altLang="en-US" b="0" i="0" u="sng" dirty="0">
-                <a:solidFill>
-                  <a:srgbClr val="608CBA"/>
-                </a:solidFill>
-                <a:effectLst/>
-                <a:highlight>
-                  <a:srgbClr val="FFFFFF"/>
-                </a:highlight>
-                <a:latin typeface="+mn-lt"/>
-                <a:ea typeface="나눔고딕" pitchFamily="2" charset="-127"/>
-                <a:hlinkClick r:id="rId6"/>
-              </a:rPr>
-              <a:t>코딩타임</a:t>
-            </a:r>
-            <a:endParaRPr lang="ko-KR" altLang="en-US" b="0" i="0" dirty="0">
-              <a:solidFill>
-                <a:srgbClr val="000000"/>
-              </a:solidFill>
-              <a:effectLst/>
-              <a:highlight>
-                <a:srgbClr val="FFFFFF"/>
-              </a:highlight>
-              <a:latin typeface="+mn-lt"/>
-              <a:ea typeface="나눔고딕" pitchFamily="2" charset="-127"/>
-            </a:endParaRPr>
-          </a:p>
-          <a:p>
-            <a:br>
-              <a:rPr lang="ko-KR" altLang="en-US" dirty="0">
-                <a:latin typeface="+mn-lt"/>
-              </a:rPr>
-            </a:br>
             <a:endParaRPr lang="en-US" altLang="ko-KR" dirty="0">
               <a:latin typeface="+mn-lt"/>
             </a:endParaRPr>
@@ -1544,6 +898,476 @@
 </file>
 
 <file path=ppt/notesSlides/notesSlide3.xml><?xml version="1.0" encoding="utf-8"?>
+<p:notes xmlns:a="http://schemas.openxmlformats.org/drawingml/2006/main" xmlns:r="http://schemas.openxmlformats.org/officeDocument/2006/relationships" xmlns:p="http://schemas.openxmlformats.org/presentationml/2006/main">
+  <p:cSld>
+    <p:spTree>
+      <p:nvGrpSpPr>
+        <p:cNvPr id="1" name=""/>
+        <p:cNvGrpSpPr/>
+        <p:nvPr/>
+      </p:nvGrpSpPr>
+      <p:grpSpPr>
+        <a:xfrm>
+          <a:off x="0" y="0"/>
+          <a:ext cx="0" cy="0"/>
+          <a:chOff x="0" y="0"/>
+          <a:chExt cx="0" cy="0"/>
+        </a:xfrm>
+      </p:grpSpPr>
+      <p:sp>
+        <p:nvSpPr>
+          <p:cNvPr id="2" name="슬라이드 이미지 개체 틀 1"/>
+          <p:cNvSpPr>
+            <a:spLocks noGrp="1" noRot="1" noChangeAspect="1"/>
+          </p:cNvSpPr>
+          <p:nvPr>
+            <p:ph type="sldImg"/>
+          </p:nvPr>
+        </p:nvSpPr>
+        <p:spPr/>
+      </p:sp>
+      <p:sp>
+        <p:nvSpPr>
+          <p:cNvPr id="3" name="슬라이드 노트 개체 틀 2"/>
+          <p:cNvSpPr>
+            <a:spLocks noGrp="1"/>
+          </p:cNvSpPr>
+          <p:nvPr>
+            <p:ph type="body" idx="1"/>
+          </p:nvPr>
+        </p:nvSpPr>
+        <p:spPr/>
+        <p:txBody>
+          <a:bodyPr/>
+          <a:lstStyle/>
+          <a:p>
+            <a:r>
+              <a:rPr lang="ko-KR" altLang="en-US" dirty="0" err="1" smtClean="0"/>
+              <a:t>아두이노</a:t>
+            </a:r>
+            <a:r>
+              <a:rPr lang="ko-KR" altLang="en-US" dirty="0" smtClean="0"/>
+              <a:t> </a:t>
+            </a:r>
+            <a:r>
+              <a:rPr lang="ko-KR" altLang="en-US" dirty="0" err="1" smtClean="0"/>
+              <a:t>우노</a:t>
+            </a:r>
+            <a:r>
+              <a:rPr lang="ko-KR" altLang="en-US" dirty="0" smtClean="0"/>
+              <a:t> 보드의 </a:t>
+            </a:r>
+            <a:r>
+              <a:rPr lang="en-US" altLang="ko-KR" dirty="0" smtClean="0"/>
+              <a:t>Vin</a:t>
+            </a:r>
+            <a:r>
+              <a:rPr lang="ko-KR" altLang="en-US" dirty="0" smtClean="0"/>
+              <a:t>은 보드 내부에 있는 </a:t>
+            </a:r>
+            <a:r>
+              <a:rPr lang="en-US" altLang="ko-KR" dirty="0" smtClean="0"/>
+              <a:t>5V </a:t>
+            </a:r>
+            <a:r>
+              <a:rPr lang="ko-KR" altLang="en-US" dirty="0" smtClean="0"/>
+              <a:t>레귤레이터를 거친다</a:t>
+            </a:r>
+            <a:r>
+              <a:rPr lang="en-US" altLang="ko-KR" dirty="0" smtClean="0"/>
+              <a:t>.</a:t>
+            </a:r>
+          </a:p>
+          <a:p>
+            <a:r>
+              <a:rPr lang="ko-KR" altLang="en-US" dirty="0" smtClean="0"/>
+              <a:t>최소 입력 </a:t>
+            </a:r>
+            <a:r>
+              <a:rPr lang="en-US" altLang="ko-KR" dirty="0" smtClean="0"/>
+              <a:t>7V </a:t>
+            </a:r>
+            <a:r>
+              <a:rPr lang="ko-KR" altLang="en-US" dirty="0" smtClean="0"/>
+              <a:t>이상</a:t>
+            </a:r>
+            <a:r>
+              <a:rPr lang="en-US" altLang="ko-KR" dirty="0" smtClean="0"/>
+              <a:t>, </a:t>
+            </a:r>
+            <a:r>
+              <a:rPr lang="ko-KR" altLang="en-US" dirty="0" smtClean="0"/>
+              <a:t>출력은 </a:t>
+            </a:r>
+            <a:r>
+              <a:rPr lang="en-US" altLang="ko-KR" dirty="0" smtClean="0"/>
+              <a:t>5V</a:t>
+            </a:r>
+            <a:r>
+              <a:rPr lang="ko-KR" altLang="en-US" dirty="0" smtClean="0"/>
+              <a:t>로 고정된다</a:t>
+            </a:r>
+            <a:r>
+              <a:rPr lang="en-US" altLang="ko-KR" dirty="0" smtClean="0"/>
+              <a:t>.</a:t>
+            </a:r>
+          </a:p>
+          <a:p>
+            <a:endParaRPr lang="en-US" altLang="ko-KR" dirty="0" smtClean="0"/>
+          </a:p>
+          <a:p>
+            <a:r>
+              <a:rPr lang="en-US" altLang="ko-KR" dirty="0" smtClean="0"/>
+              <a:t>3.3~3.7V </a:t>
+            </a:r>
+            <a:r>
+              <a:rPr lang="ko-KR" altLang="en-US" dirty="0" smtClean="0"/>
+              <a:t>배터리를 </a:t>
+            </a:r>
+            <a:r>
+              <a:rPr lang="en-US" altLang="ko-KR" dirty="0" smtClean="0"/>
+              <a:t>Vin</a:t>
+            </a:r>
+            <a:r>
+              <a:rPr lang="ko-KR" altLang="en-US" dirty="0" smtClean="0"/>
+              <a:t>에 넣으면</a:t>
+            </a:r>
+            <a:r>
+              <a:rPr lang="en-US" altLang="ko-KR" dirty="0" smtClean="0"/>
+              <a:t>, </a:t>
+            </a:r>
+            <a:r>
+              <a:rPr lang="ko-KR" altLang="en-US" dirty="0" smtClean="0"/>
+              <a:t>전압이 너무 낮아서 보드가 켜지지 않거나 불안정하게 작동된다</a:t>
+            </a:r>
+            <a:r>
+              <a:rPr lang="en-US" altLang="ko-KR" dirty="0" smtClean="0"/>
+              <a:t>.</a:t>
+            </a:r>
+            <a:endParaRPr lang="ko-KR" altLang="en-US" dirty="0"/>
+          </a:p>
+        </p:txBody>
+      </p:sp>
+      <p:sp>
+        <p:nvSpPr>
+          <p:cNvPr id="4" name="슬라이드 번호 개체 틀 3"/>
+          <p:cNvSpPr>
+            <a:spLocks noGrp="1"/>
+          </p:cNvSpPr>
+          <p:nvPr>
+            <p:ph type="sldNum" sz="quarter" idx="10"/>
+          </p:nvPr>
+        </p:nvSpPr>
+        <p:spPr/>
+        <p:txBody>
+          <a:bodyPr/>
+          <a:lstStyle/>
+          <a:p>
+            <a:fld id="{3599D024-DE68-44ED-822F-D827F84FBD4A}" type="slidenum">
+              <a:rPr lang="ko-KR" altLang="en-US" smtClean="0"/>
+              <a:t>3</a:t>
+            </a:fld>
+            <a:endParaRPr lang="ko-KR" altLang="en-US"/>
+          </a:p>
+        </p:txBody>
+      </p:sp>
+    </p:spTree>
+    <p:extLst>
+      <p:ext uri="{BB962C8B-B14F-4D97-AF65-F5344CB8AC3E}">
+        <p14:creationId xmlns:p14="http://schemas.microsoft.com/office/powerpoint/2010/main" val="3322765224"/>
+      </p:ext>
+    </p:extLst>
+  </p:cSld>
+  <p:clrMapOvr>
+    <a:masterClrMapping/>
+  </p:clrMapOvr>
+</p:notes>
+</file>
+
+<file path=ppt/notesSlides/notesSlide4.xml><?xml version="1.0" encoding="utf-8"?>
+<p:notes xmlns:a="http://schemas.openxmlformats.org/drawingml/2006/main" xmlns:r="http://schemas.openxmlformats.org/officeDocument/2006/relationships" xmlns:p="http://schemas.openxmlformats.org/presentationml/2006/main">
+  <p:cSld>
+    <p:spTree>
+      <p:nvGrpSpPr>
+        <p:cNvPr id="1" name="">
+          <a:extLst>
+            <a:ext uri="{FF2B5EF4-FFF2-40B4-BE49-F238E27FC236}">
+              <a16:creationId xmlns:a16="http://schemas.microsoft.com/office/drawing/2014/main" id="{2873FE1A-B652-42C3-13FA-70CBE90EDF31}"/>
+            </a:ext>
+          </a:extLst>
+        </p:cNvPr>
+        <p:cNvGrpSpPr/>
+        <p:nvPr/>
+      </p:nvGrpSpPr>
+      <p:grpSpPr>
+        <a:xfrm>
+          <a:off x="0" y="0"/>
+          <a:ext cx="0" cy="0"/>
+          <a:chOff x="0" y="0"/>
+          <a:chExt cx="0" cy="0"/>
+        </a:xfrm>
+      </p:grpSpPr>
+      <p:sp>
+        <p:nvSpPr>
+          <p:cNvPr id="2" name="슬라이드 이미지 개체 틀 1">
+            <a:extLst>
+              <a:ext uri="{FF2B5EF4-FFF2-40B4-BE49-F238E27FC236}">
+                <a16:creationId xmlns:a16="http://schemas.microsoft.com/office/drawing/2014/main" id="{C4BCDDD0-A29F-8C3E-145B-9F4CFA3319FA}"/>
+              </a:ext>
+            </a:extLst>
+          </p:cNvPr>
+          <p:cNvSpPr>
+            <a:spLocks noGrp="1" noRot="1" noChangeAspect="1"/>
+          </p:cNvSpPr>
+          <p:nvPr>
+            <p:ph type="sldImg"/>
+          </p:nvPr>
+        </p:nvSpPr>
+        <p:spPr/>
+      </p:sp>
+      <p:sp>
+        <p:nvSpPr>
+          <p:cNvPr id="3" name="슬라이드 노트 개체 틀 2">
+            <a:extLst>
+              <a:ext uri="{FF2B5EF4-FFF2-40B4-BE49-F238E27FC236}">
+                <a16:creationId xmlns:a16="http://schemas.microsoft.com/office/drawing/2014/main" id="{294F55AC-C71F-B317-5EFD-E3E8AE182100}"/>
+              </a:ext>
+            </a:extLst>
+          </p:cNvPr>
+          <p:cNvSpPr>
+            <a:spLocks noGrp="1"/>
+          </p:cNvSpPr>
+          <p:nvPr>
+            <p:ph type="body" idx="1"/>
+          </p:nvPr>
+        </p:nvSpPr>
+        <p:spPr/>
+        <p:txBody>
+          <a:bodyPr/>
+          <a:lstStyle/>
+          <a:p>
+            <a:pPr algn="l" fontAlgn="base"/>
+            <a:endParaRPr lang="en-US" altLang="ko-KR" dirty="0">
+              <a:latin typeface="+mn-lt"/>
+            </a:endParaRPr>
+          </a:p>
+        </p:txBody>
+      </p:sp>
+      <p:sp>
+        <p:nvSpPr>
+          <p:cNvPr id="4" name="슬라이드 번호 개체 틀 3">
+            <a:extLst>
+              <a:ext uri="{FF2B5EF4-FFF2-40B4-BE49-F238E27FC236}">
+                <a16:creationId xmlns:a16="http://schemas.microsoft.com/office/drawing/2014/main" id="{A03A01C6-497B-67F6-1476-628008B43899}"/>
+              </a:ext>
+            </a:extLst>
+          </p:cNvPr>
+          <p:cNvSpPr>
+            <a:spLocks noGrp="1"/>
+          </p:cNvSpPr>
+          <p:nvPr>
+            <p:ph type="sldNum" sz="quarter" idx="5"/>
+          </p:nvPr>
+        </p:nvSpPr>
+        <p:spPr/>
+        <p:txBody>
+          <a:bodyPr/>
+          <a:lstStyle/>
+          <a:p>
+            <a:fld id="{3599D024-DE68-44ED-822F-D827F84FBD4A}" type="slidenum">
+              <a:rPr lang="ko-KR" altLang="en-US" smtClean="0"/>
+              <a:t>4</a:t>
+            </a:fld>
+            <a:endParaRPr lang="ko-KR" altLang="en-US"/>
+          </a:p>
+        </p:txBody>
+      </p:sp>
+    </p:spTree>
+    <p:extLst>
+      <p:ext uri="{BB962C8B-B14F-4D97-AF65-F5344CB8AC3E}">
+        <p14:creationId xmlns:p14="http://schemas.microsoft.com/office/powerpoint/2010/main" val="786597593"/>
+      </p:ext>
+    </p:extLst>
+  </p:cSld>
+  <p:clrMapOvr>
+    <a:masterClrMapping/>
+  </p:clrMapOvr>
+</p:notes>
+</file>
+
+<file path=ppt/notesSlides/notesSlide5.xml><?xml version="1.0" encoding="utf-8"?>
+<p:notes xmlns:a="http://schemas.openxmlformats.org/drawingml/2006/main" xmlns:r="http://schemas.openxmlformats.org/officeDocument/2006/relationships" xmlns:p="http://schemas.openxmlformats.org/presentationml/2006/main">
+  <p:cSld>
+    <p:spTree>
+      <p:nvGrpSpPr>
+        <p:cNvPr id="1" name=""/>
+        <p:cNvGrpSpPr/>
+        <p:nvPr/>
+      </p:nvGrpSpPr>
+      <p:grpSpPr>
+        <a:xfrm>
+          <a:off x="0" y="0"/>
+          <a:ext cx="0" cy="0"/>
+          <a:chOff x="0" y="0"/>
+          <a:chExt cx="0" cy="0"/>
+        </a:xfrm>
+      </p:grpSpPr>
+      <p:sp>
+        <p:nvSpPr>
+          <p:cNvPr id="2" name="슬라이드 이미지 개체 틀 1"/>
+          <p:cNvSpPr>
+            <a:spLocks noGrp="1" noRot="1" noChangeAspect="1"/>
+          </p:cNvSpPr>
+          <p:nvPr>
+            <p:ph type="sldImg"/>
+          </p:nvPr>
+        </p:nvSpPr>
+        <p:spPr/>
+      </p:sp>
+      <p:sp>
+        <p:nvSpPr>
+          <p:cNvPr id="3" name="슬라이드 노트 개체 틀 2"/>
+          <p:cNvSpPr>
+            <a:spLocks noGrp="1"/>
+          </p:cNvSpPr>
+          <p:nvPr>
+            <p:ph type="body" idx="1"/>
+          </p:nvPr>
+        </p:nvSpPr>
+        <p:spPr/>
+        <p:txBody>
+          <a:bodyPr/>
+          <a:lstStyle/>
+          <a:p>
+            <a:r>
+              <a:rPr lang="ko-KR" altLang="en-US" dirty="0" smtClean="0"/>
+              <a:t>중간에 있는 </a:t>
+            </a:r>
+            <a:r>
+              <a:rPr lang="en-US" altLang="ko-KR" dirty="0" smtClean="0"/>
+              <a:t>FC-75</a:t>
+            </a:r>
+            <a:r>
+              <a:rPr lang="ko-KR" altLang="en-US" dirty="0" smtClean="0"/>
+              <a:t>모듈은 </a:t>
+            </a:r>
+            <a:r>
+              <a:rPr lang="en-US" altLang="ko-KR" dirty="0" smtClean="0"/>
+              <a:t>＂</a:t>
+            </a:r>
+            <a:r>
+              <a:rPr lang="ko-KR" altLang="en-US" dirty="0" smtClean="0"/>
+              <a:t>리튬 배터리 충전 모듈</a:t>
+            </a:r>
+            <a:r>
+              <a:rPr lang="en-US" altLang="ko-KR" dirty="0" smtClean="0"/>
+              <a:t>”</a:t>
+            </a:r>
+            <a:r>
+              <a:rPr lang="ko-KR" altLang="en-US" dirty="0" smtClean="0"/>
+              <a:t>로</a:t>
+            </a:r>
+            <a:r>
+              <a:rPr lang="en-US" altLang="ko-KR" dirty="0" smtClean="0"/>
+              <a:t>, </a:t>
+            </a:r>
+            <a:r>
+              <a:rPr lang="ko-KR" altLang="en-US" dirty="0" smtClean="0"/>
+              <a:t>리튬 이온 </a:t>
+            </a:r>
+            <a:r>
+              <a:rPr lang="en-US" altLang="ko-KR" dirty="0" smtClean="0"/>
+              <a:t>/ </a:t>
+            </a:r>
+            <a:r>
+              <a:rPr lang="ko-KR" altLang="en-US" dirty="0" smtClean="0"/>
+              <a:t>리튬 폴리머 배터리를 안전하게 충전해주는 모듈이다</a:t>
+            </a:r>
+            <a:r>
+              <a:rPr lang="en-US" altLang="ko-KR" dirty="0" smtClean="0"/>
+              <a:t>.</a:t>
+            </a:r>
+          </a:p>
+          <a:p>
+            <a:r>
+              <a:rPr lang="en-US" altLang="ko-KR" dirty="0" smtClean="0"/>
+              <a:t>IN+ / IN0 : </a:t>
+            </a:r>
+            <a:r>
+              <a:rPr lang="ko-KR" altLang="en-US" dirty="0" smtClean="0"/>
+              <a:t>입력</a:t>
+            </a:r>
+            <a:r>
+              <a:rPr lang="en-US" altLang="ko-KR" dirty="0" smtClean="0"/>
+              <a:t>(</a:t>
+            </a:r>
+            <a:r>
+              <a:rPr lang="ko-KR" altLang="en-US" dirty="0" smtClean="0"/>
+              <a:t>태양광 패널 또는 </a:t>
+            </a:r>
+            <a:r>
+              <a:rPr lang="en-US" altLang="ko-KR" dirty="0" smtClean="0"/>
+              <a:t>USB)</a:t>
+            </a:r>
+            <a:r>
+              <a:rPr lang="en-US" altLang="ko-KR" baseline="0" dirty="0" smtClean="0"/>
+              <a:t>  -&gt;  </a:t>
+            </a:r>
+            <a:r>
+              <a:rPr lang="ko-KR" altLang="en-US" baseline="0" dirty="0" smtClean="0"/>
+              <a:t>전압 </a:t>
+            </a:r>
+            <a:r>
+              <a:rPr lang="en-US" altLang="ko-KR" baseline="0" dirty="0" smtClean="0"/>
+              <a:t>4.5V ~ 6V</a:t>
+            </a:r>
+          </a:p>
+          <a:p>
+            <a:r>
+              <a:rPr lang="en-US" altLang="ko-KR" baseline="0" dirty="0" smtClean="0"/>
+              <a:t>BAT+ / BAT</a:t>
+            </a:r>
+            <a:endParaRPr lang="ko-KR" altLang="en-US" dirty="0"/>
+          </a:p>
+        </p:txBody>
+      </p:sp>
+      <p:sp>
+        <p:nvSpPr>
+          <p:cNvPr id="4" name="슬라이드 번호 개체 틀 3"/>
+          <p:cNvSpPr>
+            <a:spLocks noGrp="1"/>
+          </p:cNvSpPr>
+          <p:nvPr>
+            <p:ph type="sldNum" sz="quarter" idx="10"/>
+          </p:nvPr>
+        </p:nvSpPr>
+        <p:spPr/>
+        <p:txBody>
+          <a:bodyPr/>
+          <a:lstStyle/>
+          <a:p>
+            <a:fld id="{3599D024-DE68-44ED-822F-D827F84FBD4A}" type="slidenum">
+              <a:rPr lang="ko-KR" altLang="en-US" smtClean="0"/>
+              <a:t>5</a:t>
+            </a:fld>
+            <a:endParaRPr lang="ko-KR" altLang="en-US"/>
+          </a:p>
+        </p:txBody>
+      </p:sp>
+    </p:spTree>
+    <p:extLst>
+      <p:ext uri="{BB962C8B-B14F-4D97-AF65-F5344CB8AC3E}">
+        <p14:creationId xmlns:p14="http://schemas.microsoft.com/office/powerpoint/2010/main" val="1275273721"/>
+      </p:ext>
+    </p:extLst>
+  </p:cSld>
+  <p:clrMapOvr>
+    <a:masterClrMapping/>
+  </p:clrMapOvr>
+</p:notes>
+</file>
+
+<file path=ppt/notesSlides/notesSlide6.xml><?xml version="1.0" encoding="utf-8"?>
 <p:notes xmlns:a="http://schemas.openxmlformats.org/drawingml/2006/main" xmlns:r="http://schemas.openxmlformats.org/officeDocument/2006/relationships" xmlns:p="http://schemas.openxmlformats.org/presentationml/2006/main">
   <p:cSld>
     <p:spTree>
@@ -2090,6 +1914,20 @@
               </a:rPr>
               <a:t>.</a:t>
             </a:r>
+            <a:r>
+              <a:rPr lang="ko-KR" altLang="en-US" b="0" i="0" dirty="0">
+                <a:solidFill>
+                  <a:srgbClr val="000000"/>
+                </a:solidFill>
+                <a:effectLst/>
+                <a:highlight>
+                  <a:srgbClr val="FFFFFF"/>
+                </a:highlight>
+                <a:latin typeface="+mn-lt"/>
+                <a:ea typeface="나눔고딕" pitchFamily="2" charset="-127"/>
+              </a:rPr>
+              <a:t/>
+            </a:r>
             <a:br>
               <a:rPr lang="ko-KR" altLang="en-US" b="0" i="0" dirty="0">
                 <a:solidFill>
@@ -2472,6 +2310,12 @@
             </a:endParaRPr>
           </a:p>
           <a:p>
+            <a:r>
+              <a:rPr lang="ko-KR" altLang="en-US" dirty="0">
+                <a:latin typeface="+mn-lt"/>
+              </a:rPr>
+              <a:t/>
+            </a:r>
             <a:br>
               <a:rPr lang="ko-KR" altLang="en-US" dirty="0">
                 <a:latin typeface="+mn-lt"/>
@@ -2506,7 +2350,7 @@
           <a:p>
             <a:fld id="{3599D024-DE68-44ED-822F-D827F84FBD4A}" type="slidenum">
               <a:rPr lang="ko-KR" altLang="en-US" smtClean="0"/>
-              <a:t>5</a:t>
+              <a:t>8</a:t>
             </a:fld>
             <a:endParaRPr lang="ko-KR" altLang="en-US"/>
           </a:p>
@@ -2525,7 +2369,7 @@
 </p:notes>
 </file>
 
-<file path=ppt/notesSlides/notesSlide4.xml><?xml version="1.0" encoding="utf-8"?>
+<file path=ppt/notesSlides/notesSlide7.xml><?xml version="1.0" encoding="utf-8"?>
 <p:notes xmlns:a="http://schemas.openxmlformats.org/drawingml/2006/main" xmlns:r="http://schemas.openxmlformats.org/officeDocument/2006/relationships" xmlns:p="http://schemas.openxmlformats.org/presentationml/2006/main">
   <p:cSld>
     <p:spTree>
@@ -2617,7 +2461,7 @@
           <a:p>
             <a:fld id="{3599D024-DE68-44ED-822F-D827F84FBD4A}" type="slidenum">
               <a:rPr lang="ko-KR" altLang="en-US" smtClean="0"/>
-              <a:t>6</a:t>
+              <a:t>9</a:t>
             </a:fld>
             <a:endParaRPr lang="ko-KR" altLang="en-US"/>
           </a:p>
@@ -2636,7 +2480,7 @@
 </p:notes>
 </file>
 
-<file path=ppt/notesSlides/notesSlide5.xml><?xml version="1.0" encoding="utf-8"?>
+<file path=ppt/notesSlides/notesSlide8.xml><?xml version="1.0" encoding="utf-8"?>
 <p:notes xmlns:a="http://schemas.openxmlformats.org/drawingml/2006/main" xmlns:r="http://schemas.openxmlformats.org/officeDocument/2006/relationships" xmlns:p="http://schemas.openxmlformats.org/presentationml/2006/main">
   <p:cSld>
     <p:spTree>
@@ -2728,7 +2572,7 @@
           <a:p>
             <a:fld id="{3599D024-DE68-44ED-822F-D827F84FBD4A}" type="slidenum">
               <a:rPr lang="ko-KR" altLang="en-US" smtClean="0"/>
-              <a:t>7</a:t>
+              <a:t>10</a:t>
             </a:fld>
             <a:endParaRPr lang="ko-KR" altLang="en-US"/>
           </a:p>
@@ -2747,7 +2591,7 @@
 </p:notes>
 </file>
 
-<file path=ppt/notesSlides/notesSlide6.xml><?xml version="1.0" encoding="utf-8"?>
+<file path=ppt/notesSlides/notesSlide9.xml><?xml version="1.0" encoding="utf-8"?>
 <p:notes xmlns:a="http://schemas.openxmlformats.org/drawingml/2006/main" xmlns:r="http://schemas.openxmlformats.org/officeDocument/2006/relationships" xmlns:p="http://schemas.openxmlformats.org/presentationml/2006/main">
   <p:cSld>
     <p:spTree>
@@ -2839,7 +2683,7 @@
           <a:p>
             <a:fld id="{3599D024-DE68-44ED-822F-D827F84FBD4A}" type="slidenum">
               <a:rPr lang="ko-KR" altLang="en-US" smtClean="0"/>
-              <a:t>8</a:t>
+              <a:t>11</a:t>
             </a:fld>
             <a:endParaRPr lang="ko-KR" altLang="en-US"/>
           </a:p>
@@ -2849,228 +2693,6 @@
     <p:extLst>
       <p:ext uri="{BB962C8B-B14F-4D97-AF65-F5344CB8AC3E}">
         <p14:creationId xmlns:p14="http://schemas.microsoft.com/office/powerpoint/2010/main" val="3056567083"/>
-      </p:ext>
-    </p:extLst>
-  </p:cSld>
-  <p:clrMapOvr>
-    <a:masterClrMapping/>
-  </p:clrMapOvr>
-</p:notes>
-</file>
-
-<file path=ppt/notesSlides/notesSlide7.xml><?xml version="1.0" encoding="utf-8"?>
-<p:notes xmlns:a="http://schemas.openxmlformats.org/drawingml/2006/main" xmlns:r="http://schemas.openxmlformats.org/officeDocument/2006/relationships" xmlns:p="http://schemas.openxmlformats.org/presentationml/2006/main">
-  <p:cSld>
-    <p:spTree>
-      <p:nvGrpSpPr>
-        <p:cNvPr id="1" name="">
-          <a:extLst>
-            <a:ext uri="{FF2B5EF4-FFF2-40B4-BE49-F238E27FC236}">
-              <a16:creationId xmlns:a16="http://schemas.microsoft.com/office/drawing/2014/main" id="{0EB7673E-74C7-AFDE-69D1-1F9A80E1C968}"/>
-            </a:ext>
-          </a:extLst>
-        </p:cNvPr>
-        <p:cNvGrpSpPr/>
-        <p:nvPr/>
-      </p:nvGrpSpPr>
-      <p:grpSpPr>
-        <a:xfrm>
-          <a:off x="0" y="0"/>
-          <a:ext cx="0" cy="0"/>
-          <a:chOff x="0" y="0"/>
-          <a:chExt cx="0" cy="0"/>
-        </a:xfrm>
-      </p:grpSpPr>
-      <p:sp>
-        <p:nvSpPr>
-          <p:cNvPr id="2" name="슬라이드 이미지 개체 틀 1">
-            <a:extLst>
-              <a:ext uri="{FF2B5EF4-FFF2-40B4-BE49-F238E27FC236}">
-                <a16:creationId xmlns:a16="http://schemas.microsoft.com/office/drawing/2014/main" id="{B3B32E6E-43F8-8BD2-C8C2-6B6F2FAE9877}"/>
-              </a:ext>
-            </a:extLst>
-          </p:cNvPr>
-          <p:cNvSpPr>
-            <a:spLocks noGrp="1" noRot="1" noChangeAspect="1"/>
-          </p:cNvSpPr>
-          <p:nvPr>
-            <p:ph type="sldImg"/>
-          </p:nvPr>
-        </p:nvSpPr>
-        <p:spPr/>
-      </p:sp>
-      <p:sp>
-        <p:nvSpPr>
-          <p:cNvPr id="3" name="슬라이드 노트 개체 틀 2">
-            <a:extLst>
-              <a:ext uri="{FF2B5EF4-FFF2-40B4-BE49-F238E27FC236}">
-                <a16:creationId xmlns:a16="http://schemas.microsoft.com/office/drawing/2014/main" id="{AA1C0786-4D55-0285-6958-E7763FEBEB82}"/>
-              </a:ext>
-            </a:extLst>
-          </p:cNvPr>
-          <p:cNvSpPr>
-            <a:spLocks noGrp="1"/>
-          </p:cNvSpPr>
-          <p:nvPr>
-            <p:ph type="body" idx="1"/>
-          </p:nvPr>
-        </p:nvSpPr>
-        <p:spPr/>
-        <p:txBody>
-          <a:bodyPr/>
-          <a:lstStyle/>
-          <a:p>
-            <a:pPr algn="l" fontAlgn="base"/>
-            <a:endParaRPr lang="en-US" altLang="ko-KR" dirty="0">
-              <a:latin typeface="+mn-lt"/>
-            </a:endParaRPr>
-          </a:p>
-        </p:txBody>
-      </p:sp>
-      <p:sp>
-        <p:nvSpPr>
-          <p:cNvPr id="4" name="슬라이드 번호 개체 틀 3">
-            <a:extLst>
-              <a:ext uri="{FF2B5EF4-FFF2-40B4-BE49-F238E27FC236}">
-                <a16:creationId xmlns:a16="http://schemas.microsoft.com/office/drawing/2014/main" id="{8EC69716-A6AE-AAB7-8211-8994FAAD6264}"/>
-              </a:ext>
-            </a:extLst>
-          </p:cNvPr>
-          <p:cNvSpPr>
-            <a:spLocks noGrp="1"/>
-          </p:cNvSpPr>
-          <p:nvPr>
-            <p:ph type="sldNum" sz="quarter" idx="5"/>
-          </p:nvPr>
-        </p:nvSpPr>
-        <p:spPr/>
-        <p:txBody>
-          <a:bodyPr/>
-          <a:lstStyle/>
-          <a:p>
-            <a:fld id="{3599D024-DE68-44ED-822F-D827F84FBD4A}" type="slidenum">
-              <a:rPr lang="ko-KR" altLang="en-US" smtClean="0"/>
-              <a:t>9</a:t>
-            </a:fld>
-            <a:endParaRPr lang="ko-KR" altLang="en-US"/>
-          </a:p>
-        </p:txBody>
-      </p:sp>
-    </p:spTree>
-    <p:extLst>
-      <p:ext uri="{BB962C8B-B14F-4D97-AF65-F5344CB8AC3E}">
-        <p14:creationId xmlns:p14="http://schemas.microsoft.com/office/powerpoint/2010/main" val="2774634390"/>
-      </p:ext>
-    </p:extLst>
-  </p:cSld>
-  <p:clrMapOvr>
-    <a:masterClrMapping/>
-  </p:clrMapOvr>
-</p:notes>
-</file>
-
-<file path=ppt/notesSlides/notesSlide8.xml><?xml version="1.0" encoding="utf-8"?>
-<p:notes xmlns:a="http://schemas.openxmlformats.org/drawingml/2006/main" xmlns:r="http://schemas.openxmlformats.org/officeDocument/2006/relationships" xmlns:p="http://schemas.openxmlformats.org/presentationml/2006/main">
-  <p:cSld>
-    <p:spTree>
-      <p:nvGrpSpPr>
-        <p:cNvPr id="1" name="">
-          <a:extLst>
-            <a:ext uri="{FF2B5EF4-FFF2-40B4-BE49-F238E27FC236}">
-              <a16:creationId xmlns:a16="http://schemas.microsoft.com/office/drawing/2014/main" id="{4525F50A-47EC-D589-2C0F-BBED56284535}"/>
-            </a:ext>
-          </a:extLst>
-        </p:cNvPr>
-        <p:cNvGrpSpPr/>
-        <p:nvPr/>
-      </p:nvGrpSpPr>
-      <p:grpSpPr>
-        <a:xfrm>
-          <a:off x="0" y="0"/>
-          <a:ext cx="0" cy="0"/>
-          <a:chOff x="0" y="0"/>
-          <a:chExt cx="0" cy="0"/>
-        </a:xfrm>
-      </p:grpSpPr>
-      <p:sp>
-        <p:nvSpPr>
-          <p:cNvPr id="2" name="슬라이드 이미지 개체 틀 1">
-            <a:extLst>
-              <a:ext uri="{FF2B5EF4-FFF2-40B4-BE49-F238E27FC236}">
-                <a16:creationId xmlns:a16="http://schemas.microsoft.com/office/drawing/2014/main" id="{1DF1374C-FB94-51A8-47BA-15418AD7B8C0}"/>
-              </a:ext>
-            </a:extLst>
-          </p:cNvPr>
-          <p:cNvSpPr>
-            <a:spLocks noGrp="1" noRot="1" noChangeAspect="1"/>
-          </p:cNvSpPr>
-          <p:nvPr>
-            <p:ph type="sldImg"/>
-          </p:nvPr>
-        </p:nvSpPr>
-        <p:spPr/>
-      </p:sp>
-      <p:sp>
-        <p:nvSpPr>
-          <p:cNvPr id="3" name="슬라이드 노트 개체 틀 2">
-            <a:extLst>
-              <a:ext uri="{FF2B5EF4-FFF2-40B4-BE49-F238E27FC236}">
-                <a16:creationId xmlns:a16="http://schemas.microsoft.com/office/drawing/2014/main" id="{B1AAB358-4486-D0D2-1363-794A407F4BA1}"/>
-              </a:ext>
-            </a:extLst>
-          </p:cNvPr>
-          <p:cNvSpPr>
-            <a:spLocks noGrp="1"/>
-          </p:cNvSpPr>
-          <p:nvPr>
-            <p:ph type="body" idx="1"/>
-          </p:nvPr>
-        </p:nvSpPr>
-        <p:spPr/>
-        <p:txBody>
-          <a:bodyPr/>
-          <a:lstStyle/>
-          <a:p>
-            <a:pPr algn="l" fontAlgn="base"/>
-            <a:endParaRPr lang="en-US" altLang="ko-KR" dirty="0">
-              <a:latin typeface="+mn-lt"/>
-            </a:endParaRPr>
-          </a:p>
-        </p:txBody>
-      </p:sp>
-      <p:sp>
-        <p:nvSpPr>
-          <p:cNvPr id="4" name="슬라이드 번호 개체 틀 3">
-            <a:extLst>
-              <a:ext uri="{FF2B5EF4-FFF2-40B4-BE49-F238E27FC236}">
-                <a16:creationId xmlns:a16="http://schemas.microsoft.com/office/drawing/2014/main" id="{7DCA441B-8868-8B8C-ACA6-C5B3ADAB3E72}"/>
-              </a:ext>
-            </a:extLst>
-          </p:cNvPr>
-          <p:cNvSpPr>
-            <a:spLocks noGrp="1"/>
-          </p:cNvSpPr>
-          <p:nvPr>
-            <p:ph type="sldNum" sz="quarter" idx="5"/>
-          </p:nvPr>
-        </p:nvSpPr>
-        <p:spPr/>
-        <p:txBody>
-          <a:bodyPr/>
-          <a:lstStyle/>
-          <a:p>
-            <a:fld id="{3599D024-DE68-44ED-822F-D827F84FBD4A}" type="slidenum">
-              <a:rPr lang="ko-KR" altLang="en-US" smtClean="0"/>
-              <a:t>10</a:t>
-            </a:fld>
-            <a:endParaRPr lang="ko-KR" altLang="en-US"/>
-          </a:p>
-        </p:txBody>
-      </p:sp>
-    </p:spTree>
-    <p:extLst>
-      <p:ext uri="{BB962C8B-B14F-4D97-AF65-F5344CB8AC3E}">
-        <p14:creationId xmlns:p14="http://schemas.microsoft.com/office/powerpoint/2010/main" val="1071527173"/>
       </p:ext>
     </p:extLst>
   </p:cSld>
@@ -4065,7 +3687,7 @@
             <p:nvPr/>
           </p:nvPicPr>
           <p:blipFill>
-            <a:blip r:embed="rId6">
+            <a:blip r:embed="rId6" cstate="hqprint">
               <a:extLst>
                 <a:ext uri="{28A0092B-C50C-407E-A947-70E740481C1C}">
                   <a14:useLocalDpi xmlns:a14="http://schemas.microsoft.com/office/drawing/2010/main" val="0"/>
@@ -4101,7 +3723,7 @@
             <p:nvPr/>
           </p:nvPicPr>
           <p:blipFill>
-            <a:blip r:embed="rId7" cstate="print">
+            <a:blip r:embed="rId7" cstate="hqprint">
               <a:extLst>
                 <a:ext uri="{28A0092B-C50C-407E-A947-70E740481C1C}">
                   <a14:useLocalDpi xmlns:a14="http://schemas.microsoft.com/office/drawing/2010/main" val="0"/>
@@ -4562,6 +4184,982 @@
 </file>
 
 <file path=ppt/slides/slide10.xml><?xml version="1.0" encoding="utf-8"?>
+<p:sld xmlns:a="http://schemas.openxmlformats.org/drawingml/2006/main" xmlns:r="http://schemas.openxmlformats.org/officeDocument/2006/relationships" xmlns:p="http://schemas.openxmlformats.org/presentationml/2006/main">
+  <p:cSld>
+    <p:spTree>
+      <p:nvGrpSpPr>
+        <p:cNvPr id="1" name="">
+          <a:extLst>
+            <a:ext uri="{FF2B5EF4-FFF2-40B4-BE49-F238E27FC236}">
+              <a16:creationId xmlns:a16="http://schemas.microsoft.com/office/drawing/2014/main" id="{979AC403-510B-BE9C-B1F3-EE4F24345F78}"/>
+            </a:ext>
+          </a:extLst>
+        </p:cNvPr>
+        <p:cNvGrpSpPr/>
+        <p:nvPr/>
+      </p:nvGrpSpPr>
+      <p:grpSpPr>
+        <a:xfrm>
+          <a:off x="0" y="0"/>
+          <a:ext cx="0" cy="0"/>
+          <a:chOff x="0" y="0"/>
+          <a:chExt cx="0" cy="0"/>
+        </a:xfrm>
+      </p:grpSpPr>
+      <p:sp>
+        <p:nvSpPr>
+          <p:cNvPr id="2" name="제목 1">
+            <a:extLst>
+              <a:ext uri="{FF2B5EF4-FFF2-40B4-BE49-F238E27FC236}">
+                <a16:creationId xmlns:a16="http://schemas.microsoft.com/office/drawing/2014/main" id="{B081F832-041A-DA3A-5A26-F7B4A23D1BF6}"/>
+              </a:ext>
+            </a:extLst>
+          </p:cNvPr>
+          <p:cNvSpPr>
+            <a:spLocks noGrp="1"/>
+          </p:cNvSpPr>
+          <p:nvPr>
+            <p:ph type="title"/>
+          </p:nvPr>
+        </p:nvSpPr>
+        <p:spPr/>
+        <p:txBody>
+          <a:bodyPr/>
+          <a:lstStyle/>
+          <a:p>
+            <a:r>
+              <a:rPr lang="ko-KR" altLang="en-US" dirty="0"/>
+              <a:t>초음파 센서</a:t>
+            </a:r>
+            <a:r>
+              <a:rPr lang="en-US" altLang="ko-KR" dirty="0"/>
+              <a:t> </a:t>
+            </a:r>
+            <a:r>
+              <a:rPr lang="ko-KR" altLang="en-US" dirty="0"/>
+              <a:t>실습 </a:t>
+            </a:r>
+            <a:r>
+              <a:rPr lang="en-US" altLang="ko-KR" dirty="0"/>
+              <a:t>Quiz</a:t>
+            </a:r>
+            <a:endParaRPr lang="ko-KR" altLang="en-US" dirty="0"/>
+          </a:p>
+        </p:txBody>
+      </p:sp>
+      <p:sp>
+        <p:nvSpPr>
+          <p:cNvPr id="5" name="내용 개체 틀 5">
+            <a:extLst>
+              <a:ext uri="{FF2B5EF4-FFF2-40B4-BE49-F238E27FC236}">
+                <a16:creationId xmlns:a16="http://schemas.microsoft.com/office/drawing/2014/main" id="{4538F2DD-2840-B570-FA70-BE07ED48FFFA}"/>
+              </a:ext>
+            </a:extLst>
+          </p:cNvPr>
+          <p:cNvSpPr>
+            <a:spLocks noGrp="1"/>
+          </p:cNvSpPr>
+          <p:nvPr>
+            <p:ph idx="1"/>
+          </p:nvPr>
+        </p:nvSpPr>
+        <p:spPr>
+          <a:xfrm>
+            <a:off x="838200" y="1549839"/>
+            <a:ext cx="10515600" cy="4627124"/>
+          </a:xfrm>
+        </p:spPr>
+        <p:txBody>
+          <a:bodyPr/>
+          <a:lstStyle/>
+          <a:p>
+            <a:pPr marL="0" indent="0">
+              <a:buNone/>
+            </a:pPr>
+            <a:r>
+              <a:rPr lang="ko-KR" altLang="en-US" dirty="0"/>
+              <a:t>초음파 센서를 통해 가까운 물체가 감지될 시</a:t>
+            </a:r>
+            <a:r>
+              <a:rPr lang="en-US" altLang="ko-KR" dirty="0"/>
+              <a:t>, </a:t>
+            </a:r>
+            <a:r>
+              <a:rPr lang="ko-KR" altLang="en-US" dirty="0"/>
+              <a:t>빨간 </a:t>
+            </a:r>
+            <a:r>
+              <a:rPr lang="en-US" altLang="ko-KR" dirty="0"/>
+              <a:t>LED</a:t>
+            </a:r>
+            <a:r>
+              <a:rPr lang="ko-KR" altLang="en-US" dirty="0"/>
+              <a:t>의 불을 켜고 </a:t>
+            </a:r>
+            <a:r>
+              <a:rPr lang="ko-KR" altLang="en-US" dirty="0" err="1"/>
+              <a:t>피에조</a:t>
+            </a:r>
+            <a:r>
+              <a:rPr lang="ko-KR" altLang="en-US" dirty="0"/>
+              <a:t> </a:t>
+            </a:r>
+            <a:r>
+              <a:rPr lang="ko-KR" altLang="en-US" dirty="0" err="1"/>
+              <a:t>부저를</a:t>
+            </a:r>
+            <a:r>
+              <a:rPr lang="ko-KR" altLang="en-US" dirty="0"/>
+              <a:t> 통해 경고음을 </a:t>
+            </a:r>
+            <a:r>
+              <a:rPr lang="ko-KR" altLang="en-US" dirty="0" err="1"/>
+              <a:t>울리시오</a:t>
+            </a:r>
+            <a:r>
+              <a:rPr lang="en-US" altLang="ko-KR" dirty="0"/>
+              <a:t>.</a:t>
+            </a:r>
+          </a:p>
+        </p:txBody>
+      </p:sp>
+      <p:pic>
+        <p:nvPicPr>
+          <p:cNvPr id="4" name="Picture 2" descr="아두이노]Breadboard Jumper Cables(20P-SET) 점퍼 케이블 (M1000006992)">
+            <a:extLst>
+              <a:ext uri="{FF2B5EF4-FFF2-40B4-BE49-F238E27FC236}">
+                <a16:creationId xmlns:a16="http://schemas.microsoft.com/office/drawing/2014/main" id="{7C334408-BC2C-74DD-0A9B-848CA5407049}"/>
+              </a:ext>
+            </a:extLst>
+          </p:cNvPr>
+          <p:cNvPicPr>
+            <a:picLocks noChangeAspect="1" noChangeArrowheads="1"/>
+          </p:cNvPicPr>
+          <p:nvPr/>
+        </p:nvPicPr>
+        <p:blipFill>
+          <a:blip r:embed="rId3" cstate="hqprint">
+            <a:extLst>
+              <a:ext uri="{28A0092B-C50C-407E-A947-70E740481C1C}">
+                <a14:useLocalDpi xmlns:a14="http://schemas.microsoft.com/office/drawing/2010/main" val="0"/>
+              </a:ext>
+            </a:extLst>
+          </a:blip>
+          <a:srcRect/>
+          <a:stretch>
+            <a:fillRect/>
+          </a:stretch>
+        </p:blipFill>
+        <p:spPr bwMode="auto">
+          <a:xfrm>
+            <a:off x="4798165" y="4324888"/>
+            <a:ext cx="1940813" cy="1940813"/>
+          </a:xfrm>
+          <a:prstGeom prst="rect">
+            <a:avLst/>
+          </a:prstGeom>
+          <a:noFill/>
+          <a:extLst>
+            <a:ext uri="{909E8E84-426E-40DD-AFC4-6F175D3DCCD1}">
+              <a14:hiddenFill xmlns:a14="http://schemas.microsoft.com/office/drawing/2010/main">
+                <a:solidFill>
+                  <a:srgbClr val="FFFFFF"/>
+                </a:solidFill>
+              </a14:hiddenFill>
+            </a:ext>
+          </a:extLst>
+        </p:spPr>
+      </p:pic>
+      <p:pic>
+        <p:nvPicPr>
+          <p:cNvPr id="6" name="그림 5">
+            <a:extLst>
+              <a:ext uri="{FF2B5EF4-FFF2-40B4-BE49-F238E27FC236}">
+                <a16:creationId xmlns:a16="http://schemas.microsoft.com/office/drawing/2014/main" id="{9ED54D7F-F36C-2708-957C-49E139DB916B}"/>
+              </a:ext>
+            </a:extLst>
+          </p:cNvPr>
+          <p:cNvPicPr>
+            <a:picLocks noChangeAspect="1"/>
+          </p:cNvPicPr>
+          <p:nvPr/>
+        </p:nvPicPr>
+        <p:blipFill>
+          <a:blip r:embed="rId4"/>
+          <a:stretch>
+            <a:fillRect/>
+          </a:stretch>
+        </p:blipFill>
+        <p:spPr>
+          <a:xfrm>
+            <a:off x="2361902" y="2704225"/>
+            <a:ext cx="1619476" cy="1095528"/>
+          </a:xfrm>
+          <a:prstGeom prst="rect">
+            <a:avLst/>
+          </a:prstGeom>
+        </p:spPr>
+      </p:pic>
+      <p:pic>
+        <p:nvPicPr>
+          <p:cNvPr id="7" name="그림 6">
+            <a:extLst>
+              <a:ext uri="{FF2B5EF4-FFF2-40B4-BE49-F238E27FC236}">
+                <a16:creationId xmlns:a16="http://schemas.microsoft.com/office/drawing/2014/main" id="{672F320F-B20D-258F-6BA0-60B157243CFD}"/>
+              </a:ext>
+            </a:extLst>
+          </p:cNvPr>
+          <p:cNvPicPr>
+            <a:picLocks noChangeAspect="1"/>
+          </p:cNvPicPr>
+          <p:nvPr/>
+        </p:nvPicPr>
+        <p:blipFill>
+          <a:blip r:embed="rId5"/>
+          <a:stretch>
+            <a:fillRect/>
+          </a:stretch>
+        </p:blipFill>
+        <p:spPr>
+          <a:xfrm>
+            <a:off x="7415578" y="2672215"/>
+            <a:ext cx="2522922" cy="959005"/>
+          </a:xfrm>
+          <a:prstGeom prst="rect">
+            <a:avLst/>
+          </a:prstGeom>
+        </p:spPr>
+      </p:pic>
+      <p:sp>
+        <p:nvSpPr>
+          <p:cNvPr id="9" name="TextBox 8">
+            <a:extLst>
+              <a:ext uri="{FF2B5EF4-FFF2-40B4-BE49-F238E27FC236}">
+                <a16:creationId xmlns:a16="http://schemas.microsoft.com/office/drawing/2014/main" id="{C7E3A299-C3E7-DF93-563E-5F69B3576D1C}"/>
+              </a:ext>
+            </a:extLst>
+          </p:cNvPr>
+          <p:cNvSpPr txBox="1"/>
+          <p:nvPr/>
+        </p:nvSpPr>
+        <p:spPr>
+          <a:xfrm>
+            <a:off x="7846273" y="3955556"/>
+            <a:ext cx="1661532" cy="369332"/>
+          </a:xfrm>
+          <a:prstGeom prst="rect">
+            <a:avLst/>
+          </a:prstGeom>
+          <a:noFill/>
+        </p:spPr>
+        <p:txBody>
+          <a:bodyPr wrap="square" rtlCol="0">
+            <a:spAutoFit/>
+          </a:bodyPr>
+          <a:lstStyle/>
+          <a:p>
+            <a:pPr algn="ctr"/>
+            <a:r>
+              <a:rPr lang="ko-KR" altLang="en-US" dirty="0" err="1"/>
+              <a:t>브레드</a:t>
+            </a:r>
+            <a:r>
+              <a:rPr lang="ko-KR" altLang="en-US" dirty="0"/>
+              <a:t> 보드</a:t>
+            </a:r>
+          </a:p>
+        </p:txBody>
+      </p:sp>
+      <p:sp>
+        <p:nvSpPr>
+          <p:cNvPr id="10" name="TextBox 9">
+            <a:extLst>
+              <a:ext uri="{FF2B5EF4-FFF2-40B4-BE49-F238E27FC236}">
+                <a16:creationId xmlns:a16="http://schemas.microsoft.com/office/drawing/2014/main" id="{C21962C1-EB2E-14E9-C60A-A5A480E3B2E2}"/>
+              </a:ext>
+            </a:extLst>
+          </p:cNvPr>
+          <p:cNvSpPr txBox="1"/>
+          <p:nvPr/>
+        </p:nvSpPr>
+        <p:spPr>
+          <a:xfrm>
+            <a:off x="4937805" y="6092354"/>
+            <a:ext cx="1661532" cy="369332"/>
+          </a:xfrm>
+          <a:prstGeom prst="rect">
+            <a:avLst/>
+          </a:prstGeom>
+          <a:noFill/>
+        </p:spPr>
+        <p:txBody>
+          <a:bodyPr wrap="square" rtlCol="0">
+            <a:spAutoFit/>
+          </a:bodyPr>
+          <a:lstStyle/>
+          <a:p>
+            <a:pPr algn="ctr"/>
+            <a:r>
+              <a:rPr lang="ko-KR" altLang="en-US" dirty="0"/>
+              <a:t>점퍼 케이블</a:t>
+            </a:r>
+          </a:p>
+        </p:txBody>
+      </p:sp>
+      <p:sp>
+        <p:nvSpPr>
+          <p:cNvPr id="12" name="TextBox 11">
+            <a:extLst>
+              <a:ext uri="{FF2B5EF4-FFF2-40B4-BE49-F238E27FC236}">
+                <a16:creationId xmlns:a16="http://schemas.microsoft.com/office/drawing/2014/main" id="{777703DE-5A17-3BD5-0288-73243A0F4066}"/>
+              </a:ext>
+            </a:extLst>
+          </p:cNvPr>
+          <p:cNvSpPr txBox="1"/>
+          <p:nvPr/>
+        </p:nvSpPr>
+        <p:spPr>
+          <a:xfrm>
+            <a:off x="2042044" y="3959685"/>
+            <a:ext cx="2222492" cy="369332"/>
+          </a:xfrm>
+          <a:prstGeom prst="rect">
+            <a:avLst/>
+          </a:prstGeom>
+          <a:noFill/>
+        </p:spPr>
+        <p:txBody>
+          <a:bodyPr wrap="square" rtlCol="0">
+            <a:spAutoFit/>
+          </a:bodyPr>
+          <a:lstStyle/>
+          <a:p>
+            <a:pPr algn="ctr"/>
+            <a:r>
+              <a:rPr lang="ko-KR" altLang="en-US" dirty="0" err="1"/>
+              <a:t>아두이노</a:t>
+            </a:r>
+            <a:r>
+              <a:rPr lang="ko-KR" altLang="en-US" dirty="0"/>
+              <a:t> 호환보드</a:t>
+            </a:r>
+          </a:p>
+        </p:txBody>
+      </p:sp>
+      <p:sp>
+        <p:nvSpPr>
+          <p:cNvPr id="13" name="TextBox 12">
+            <a:extLst>
+              <a:ext uri="{FF2B5EF4-FFF2-40B4-BE49-F238E27FC236}">
+                <a16:creationId xmlns:a16="http://schemas.microsoft.com/office/drawing/2014/main" id="{5B893316-F962-F9E4-AD21-8A32405D0025}"/>
+              </a:ext>
+            </a:extLst>
+          </p:cNvPr>
+          <p:cNvSpPr txBox="1"/>
+          <p:nvPr/>
+        </p:nvSpPr>
+        <p:spPr>
+          <a:xfrm>
+            <a:off x="2218081" y="6088580"/>
+            <a:ext cx="1619476" cy="369332"/>
+          </a:xfrm>
+          <a:prstGeom prst="rect">
+            <a:avLst/>
+          </a:prstGeom>
+          <a:noFill/>
+        </p:spPr>
+        <p:txBody>
+          <a:bodyPr wrap="square" rtlCol="0">
+            <a:spAutoFit/>
+          </a:bodyPr>
+          <a:lstStyle/>
+          <a:p>
+            <a:pPr algn="ctr"/>
+            <a:r>
+              <a:rPr lang="en-US" altLang="ko-KR" dirty="0"/>
+              <a:t>LED</a:t>
+            </a:r>
+            <a:endParaRPr lang="ko-KR" altLang="en-US" dirty="0"/>
+          </a:p>
+        </p:txBody>
+      </p:sp>
+      <p:pic>
+        <p:nvPicPr>
+          <p:cNvPr id="16" name="Picture 2" descr="4 LED 5개 색상랜덤 아두이노 베스트 부품">
+            <a:extLst>
+              <a:ext uri="{FF2B5EF4-FFF2-40B4-BE49-F238E27FC236}">
+                <a16:creationId xmlns:a16="http://schemas.microsoft.com/office/drawing/2014/main" id="{3A866A88-898D-FE34-877A-4C53B71A2021}"/>
+              </a:ext>
+            </a:extLst>
+          </p:cNvPr>
+          <p:cNvPicPr>
+            <a:picLocks noChangeAspect="1" noChangeArrowheads="1"/>
+          </p:cNvPicPr>
+          <p:nvPr/>
+        </p:nvPicPr>
+        <p:blipFill rotWithShape="1">
+          <a:blip r:embed="rId6" cstate="hqprint">
+            <a:extLst>
+              <a:ext uri="{28A0092B-C50C-407E-A947-70E740481C1C}">
+                <a14:useLocalDpi xmlns:a14="http://schemas.microsoft.com/office/drawing/2010/main" val="0"/>
+              </a:ext>
+            </a:extLst>
+          </a:blip>
+          <a:srcRect l="9673" t="25571" r="71768" b="12666"/>
+          <a:stretch>
+            <a:fillRect/>
+          </a:stretch>
+        </p:blipFill>
+        <p:spPr bwMode="auto">
+          <a:xfrm>
+            <a:off x="2775492" y="4644051"/>
+            <a:ext cx="431534" cy="1436122"/>
+          </a:xfrm>
+          <a:prstGeom prst="rect">
+            <a:avLst/>
+          </a:prstGeom>
+          <a:noFill/>
+          <a:extLst>
+            <a:ext uri="{909E8E84-426E-40DD-AFC4-6F175D3DCCD1}">
+              <a14:hiddenFill xmlns:a14="http://schemas.microsoft.com/office/drawing/2010/main">
+                <a:solidFill>
+                  <a:srgbClr val="FFFFFF"/>
+                </a:solidFill>
+              </a14:hiddenFill>
+            </a:ext>
+          </a:extLst>
+        </p:spPr>
+      </p:pic>
+      <p:pic>
+        <p:nvPicPr>
+          <p:cNvPr id="17" name="Picture 2" descr="아두이노 중급] 16. 초음파 센서(거리 측정 센서) : 네이버 블로그">
+            <a:extLst>
+              <a:ext uri="{FF2B5EF4-FFF2-40B4-BE49-F238E27FC236}">
+                <a16:creationId xmlns:a16="http://schemas.microsoft.com/office/drawing/2014/main" id="{2BF2A8C8-EC91-FEE4-653A-BDD05AFABF5C}"/>
+              </a:ext>
+            </a:extLst>
+          </p:cNvPr>
+          <p:cNvPicPr>
+            <a:picLocks noChangeAspect="1" noChangeArrowheads="1"/>
+          </p:cNvPicPr>
+          <p:nvPr/>
+        </p:nvPicPr>
+        <p:blipFill>
+          <a:blip r:embed="rId7">
+            <a:extLst>
+              <a:ext uri="{28A0092B-C50C-407E-A947-70E740481C1C}">
+                <a14:useLocalDpi xmlns:a14="http://schemas.microsoft.com/office/drawing/2010/main" val="0"/>
+              </a:ext>
+            </a:extLst>
+          </a:blip>
+          <a:srcRect/>
+          <a:stretch>
+            <a:fillRect/>
+          </a:stretch>
+        </p:blipFill>
+        <p:spPr bwMode="auto">
+          <a:xfrm>
+            <a:off x="5146148" y="2772486"/>
+            <a:ext cx="1592830" cy="959005"/>
+          </a:xfrm>
+          <a:prstGeom prst="rect">
+            <a:avLst/>
+          </a:prstGeom>
+          <a:noFill/>
+          <a:extLst>
+            <a:ext uri="{909E8E84-426E-40DD-AFC4-6F175D3DCCD1}">
+              <a14:hiddenFill xmlns:a14="http://schemas.microsoft.com/office/drawing/2010/main">
+                <a:solidFill>
+                  <a:srgbClr val="FFFFFF"/>
+                </a:solidFill>
+              </a14:hiddenFill>
+            </a:ext>
+          </a:extLst>
+        </p:spPr>
+      </p:pic>
+      <p:sp>
+        <p:nvSpPr>
+          <p:cNvPr id="18" name="TextBox 17">
+            <a:extLst>
+              <a:ext uri="{FF2B5EF4-FFF2-40B4-BE49-F238E27FC236}">
+                <a16:creationId xmlns:a16="http://schemas.microsoft.com/office/drawing/2014/main" id="{8F71DDB0-BB1A-F7C6-C213-3E63FE4EA180}"/>
+              </a:ext>
+            </a:extLst>
+          </p:cNvPr>
+          <p:cNvSpPr txBox="1"/>
+          <p:nvPr/>
+        </p:nvSpPr>
+        <p:spPr>
+          <a:xfrm>
+            <a:off x="4798165" y="3951278"/>
+            <a:ext cx="2222492" cy="369332"/>
+          </a:xfrm>
+          <a:prstGeom prst="rect">
+            <a:avLst/>
+          </a:prstGeom>
+          <a:noFill/>
+        </p:spPr>
+        <p:txBody>
+          <a:bodyPr wrap="square" rtlCol="0">
+            <a:spAutoFit/>
+          </a:bodyPr>
+          <a:lstStyle/>
+          <a:p>
+            <a:pPr algn="ctr"/>
+            <a:r>
+              <a:rPr lang="ko-KR" altLang="en-US" dirty="0"/>
+              <a:t>초음파 센서</a:t>
+            </a:r>
+          </a:p>
+        </p:txBody>
+      </p:sp>
+      <p:sp>
+        <p:nvSpPr>
+          <p:cNvPr id="19" name="TextBox 18">
+            <a:extLst>
+              <a:ext uri="{FF2B5EF4-FFF2-40B4-BE49-F238E27FC236}">
+                <a16:creationId xmlns:a16="http://schemas.microsoft.com/office/drawing/2014/main" id="{FB7865C0-384E-7A0C-E611-FB74F0171928}"/>
+              </a:ext>
+            </a:extLst>
+          </p:cNvPr>
+          <p:cNvSpPr txBox="1"/>
+          <p:nvPr/>
+        </p:nvSpPr>
+        <p:spPr>
+          <a:xfrm>
+            <a:off x="7699585" y="6088580"/>
+            <a:ext cx="1619476" cy="369332"/>
+          </a:xfrm>
+          <a:prstGeom prst="rect">
+            <a:avLst/>
+          </a:prstGeom>
+          <a:noFill/>
+        </p:spPr>
+        <p:txBody>
+          <a:bodyPr wrap="square" rtlCol="0">
+            <a:spAutoFit/>
+          </a:bodyPr>
+          <a:lstStyle/>
+          <a:p>
+            <a:pPr algn="ctr"/>
+            <a:r>
+              <a:rPr lang="ko-KR" altLang="en-US" dirty="0"/>
+              <a:t>능동 </a:t>
+            </a:r>
+            <a:r>
+              <a:rPr lang="ko-KR" altLang="en-US" dirty="0" err="1"/>
+              <a:t>부저</a:t>
+            </a:r>
+            <a:endParaRPr lang="ko-KR" altLang="en-US" dirty="0"/>
+          </a:p>
+        </p:txBody>
+      </p:sp>
+      <p:pic>
+        <p:nvPicPr>
+          <p:cNvPr id="20" name="Picture 4" descr="5V 능동 부저 [FQ-011] / 디바이스마트">
+            <a:extLst>
+              <a:ext uri="{FF2B5EF4-FFF2-40B4-BE49-F238E27FC236}">
+                <a16:creationId xmlns:a16="http://schemas.microsoft.com/office/drawing/2014/main" id="{8E2EF01C-AE31-6E4F-4697-7E84B77676F0}"/>
+              </a:ext>
+            </a:extLst>
+          </p:cNvPr>
+          <p:cNvPicPr>
+            <a:picLocks noChangeAspect="1" noChangeArrowheads="1"/>
+          </p:cNvPicPr>
+          <p:nvPr/>
+        </p:nvPicPr>
+        <p:blipFill rotWithShape="1">
+          <a:blip r:embed="rId8">
+            <a:extLst>
+              <a:ext uri="{BEBA8EAE-BF5A-486C-A8C5-ECC9F3942E4B}">
+                <a14:imgProps xmlns:a14="http://schemas.microsoft.com/office/drawing/2010/main">
+                  <a14:imgLayer r:embed="rId9">
+                    <a14:imgEffect>
+                      <a14:backgroundRemoval t="10000" b="90000" l="10000" r="90000"/>
+                    </a14:imgEffect>
+                  </a14:imgLayer>
+                </a14:imgProps>
+              </a:ext>
+              <a:ext uri="{28A0092B-C50C-407E-A947-70E740481C1C}">
+                <a14:useLocalDpi xmlns:a14="http://schemas.microsoft.com/office/drawing/2010/main" val="0"/>
+              </a:ext>
+            </a:extLst>
+          </a:blip>
+          <a:srcRect l="29064" t="17235" r="24650" b="20598"/>
+          <a:stretch/>
+        </p:blipFill>
+        <p:spPr bwMode="auto">
+          <a:xfrm>
+            <a:off x="7891848" y="4521069"/>
+            <a:ext cx="1318124" cy="1327776"/>
+          </a:xfrm>
+          <a:prstGeom prst="rect">
+            <a:avLst/>
+          </a:prstGeom>
+          <a:noFill/>
+          <a:extLst>
+            <a:ext uri="{909E8E84-426E-40DD-AFC4-6F175D3DCCD1}">
+              <a14:hiddenFill xmlns:a14="http://schemas.microsoft.com/office/drawing/2010/main">
+                <a:solidFill>
+                  <a:srgbClr val="FFFFFF"/>
+                </a:solidFill>
+              </a14:hiddenFill>
+            </a:ext>
+          </a:extLst>
+        </p:spPr>
+      </p:pic>
+    </p:spTree>
+    <p:extLst>
+      <p:ext uri="{BB962C8B-B14F-4D97-AF65-F5344CB8AC3E}">
+        <p14:creationId xmlns:p14="http://schemas.microsoft.com/office/powerpoint/2010/main" val="3423217440"/>
+      </p:ext>
+    </p:extLst>
+  </p:cSld>
+  <p:clrMapOvr>
+    <a:masterClrMapping/>
+  </p:clrMapOvr>
+</p:sld>
+</file>
+
+<file path=ppt/slides/slide11.xml><?xml version="1.0" encoding="utf-8"?>
+<p:sld xmlns:a="http://schemas.openxmlformats.org/drawingml/2006/main" xmlns:r="http://schemas.openxmlformats.org/officeDocument/2006/relationships" xmlns:p="http://schemas.openxmlformats.org/presentationml/2006/main">
+  <p:cSld>
+    <p:spTree>
+      <p:nvGrpSpPr>
+        <p:cNvPr id="1" name="">
+          <a:extLst>
+            <a:ext uri="{FF2B5EF4-FFF2-40B4-BE49-F238E27FC236}">
+              <a16:creationId xmlns:a16="http://schemas.microsoft.com/office/drawing/2014/main" id="{C7BB0736-3A39-AE75-39E4-8408EDB4BDC0}"/>
+            </a:ext>
+          </a:extLst>
+        </p:cNvPr>
+        <p:cNvGrpSpPr/>
+        <p:nvPr/>
+      </p:nvGrpSpPr>
+      <p:grpSpPr>
+        <a:xfrm>
+          <a:off x="0" y="0"/>
+          <a:ext cx="0" cy="0"/>
+          <a:chOff x="0" y="0"/>
+          <a:chExt cx="0" cy="0"/>
+        </a:xfrm>
+      </p:grpSpPr>
+      <p:sp>
+        <p:nvSpPr>
+          <p:cNvPr id="2" name="제목 1">
+            <a:extLst>
+              <a:ext uri="{FF2B5EF4-FFF2-40B4-BE49-F238E27FC236}">
+                <a16:creationId xmlns:a16="http://schemas.microsoft.com/office/drawing/2014/main" id="{7A06332D-49D3-02F8-A177-0E811BF53555}"/>
+              </a:ext>
+            </a:extLst>
+          </p:cNvPr>
+          <p:cNvSpPr>
+            <a:spLocks noGrp="1"/>
+          </p:cNvSpPr>
+          <p:nvPr>
+            <p:ph type="title"/>
+          </p:nvPr>
+        </p:nvSpPr>
+        <p:spPr/>
+        <p:txBody>
+          <a:bodyPr/>
+          <a:lstStyle/>
+          <a:p>
+            <a:r>
+              <a:rPr lang="ko-KR" altLang="en-US" dirty="0"/>
+              <a:t>초음파 센서</a:t>
+            </a:r>
+            <a:r>
+              <a:rPr lang="en-US" altLang="ko-KR" dirty="0"/>
+              <a:t> </a:t>
+            </a:r>
+            <a:r>
+              <a:rPr lang="ko-KR" altLang="en-US" dirty="0"/>
+              <a:t>실습 </a:t>
+            </a:r>
+            <a:r>
+              <a:rPr lang="en-US" altLang="ko-KR" dirty="0"/>
+              <a:t>Quiz</a:t>
+            </a:r>
+            <a:endParaRPr lang="ko-KR" altLang="en-US" dirty="0"/>
+          </a:p>
+        </p:txBody>
+      </p:sp>
+      <p:pic>
+        <p:nvPicPr>
+          <p:cNvPr id="11" name="그림 10">
+            <a:extLst>
+              <a:ext uri="{FF2B5EF4-FFF2-40B4-BE49-F238E27FC236}">
+                <a16:creationId xmlns:a16="http://schemas.microsoft.com/office/drawing/2014/main" id="{5450EAB8-9911-3459-181E-97D28F9200A8}"/>
+              </a:ext>
+            </a:extLst>
+          </p:cNvPr>
+          <p:cNvPicPr>
+            <a:picLocks noChangeAspect="1"/>
+          </p:cNvPicPr>
+          <p:nvPr/>
+        </p:nvPicPr>
+        <p:blipFill>
+          <a:blip r:embed="rId3"/>
+          <a:stretch>
+            <a:fillRect/>
+          </a:stretch>
+        </p:blipFill>
+        <p:spPr>
+          <a:xfrm>
+            <a:off x="5415979" y="1325563"/>
+            <a:ext cx="5384289" cy="5308161"/>
+          </a:xfrm>
+          <a:prstGeom prst="rect">
+            <a:avLst/>
+          </a:prstGeom>
+        </p:spPr>
+      </p:pic>
+      <p:sp>
+        <p:nvSpPr>
+          <p:cNvPr id="14" name="내용 개체 틀 5">
+            <a:extLst>
+              <a:ext uri="{FF2B5EF4-FFF2-40B4-BE49-F238E27FC236}">
+                <a16:creationId xmlns:a16="http://schemas.microsoft.com/office/drawing/2014/main" id="{BA9AB3DC-7D5E-A350-1677-1988E3B77614}"/>
+              </a:ext>
+            </a:extLst>
+          </p:cNvPr>
+          <p:cNvSpPr>
+            <a:spLocks noGrp="1"/>
+          </p:cNvSpPr>
+          <p:nvPr>
+            <p:ph idx="1"/>
+          </p:nvPr>
+        </p:nvSpPr>
+        <p:spPr>
+          <a:xfrm>
+            <a:off x="838200" y="1549839"/>
+            <a:ext cx="10515600" cy="4627124"/>
+          </a:xfrm>
+        </p:spPr>
+        <p:txBody>
+          <a:bodyPr>
+            <a:normAutofit/>
+          </a:bodyPr>
+          <a:lstStyle/>
+          <a:p>
+            <a:pPr marL="0" indent="0">
+              <a:buNone/>
+            </a:pPr>
+            <a:r>
+              <a:rPr lang="ko-KR" altLang="en-US" sz="4000" b="1" dirty="0">
+                <a:solidFill>
+                  <a:srgbClr val="FF0000"/>
+                </a:solidFill>
+              </a:rPr>
+              <a:t>정답</a:t>
+            </a:r>
+            <a:endParaRPr lang="en-US" altLang="ko-KR" sz="4000" b="1" dirty="0">
+              <a:solidFill>
+                <a:srgbClr val="FF0000"/>
+              </a:solidFill>
+            </a:endParaRPr>
+          </a:p>
+        </p:txBody>
+      </p:sp>
+    </p:spTree>
+    <p:extLst>
+      <p:ext uri="{BB962C8B-B14F-4D97-AF65-F5344CB8AC3E}">
+        <p14:creationId xmlns:p14="http://schemas.microsoft.com/office/powerpoint/2010/main" val="2869353870"/>
+      </p:ext>
+    </p:extLst>
+  </p:cSld>
+  <p:clrMapOvr>
+    <a:masterClrMapping/>
+  </p:clrMapOvr>
+</p:sld>
+</file>
+
+<file path=ppt/slides/slide12.xml><?xml version="1.0" encoding="utf-8"?>
+<p:sld xmlns:a="http://schemas.openxmlformats.org/drawingml/2006/main" xmlns:r="http://schemas.openxmlformats.org/officeDocument/2006/relationships" xmlns:p="http://schemas.openxmlformats.org/presentationml/2006/main">
+  <p:cSld>
+    <p:spTree>
+      <p:nvGrpSpPr>
+        <p:cNvPr id="1" name="">
+          <a:extLst>
+            <a:ext uri="{FF2B5EF4-FFF2-40B4-BE49-F238E27FC236}">
+              <a16:creationId xmlns:a16="http://schemas.microsoft.com/office/drawing/2014/main" id="{058E95EE-189E-424D-3543-269651CDF7FD}"/>
+            </a:ext>
+          </a:extLst>
+        </p:cNvPr>
+        <p:cNvGrpSpPr/>
+        <p:nvPr/>
+      </p:nvGrpSpPr>
+      <p:grpSpPr>
+        <a:xfrm>
+          <a:off x="0" y="0"/>
+          <a:ext cx="0" cy="0"/>
+          <a:chOff x="0" y="0"/>
+          <a:chExt cx="0" cy="0"/>
+        </a:xfrm>
+      </p:grpSpPr>
+      <p:sp>
+        <p:nvSpPr>
+          <p:cNvPr id="2" name="제목 1">
+            <a:extLst>
+              <a:ext uri="{FF2B5EF4-FFF2-40B4-BE49-F238E27FC236}">
+                <a16:creationId xmlns:a16="http://schemas.microsoft.com/office/drawing/2014/main" id="{57403870-1342-522F-3739-18B439FA87AE}"/>
+              </a:ext>
+            </a:extLst>
+          </p:cNvPr>
+          <p:cNvSpPr>
+            <a:spLocks noGrp="1"/>
+          </p:cNvSpPr>
+          <p:nvPr>
+            <p:ph type="title"/>
+          </p:nvPr>
+        </p:nvSpPr>
+        <p:spPr/>
+        <p:txBody>
+          <a:bodyPr/>
+          <a:lstStyle/>
+          <a:p>
+            <a:r>
+              <a:rPr lang="ko-KR" altLang="en-US" dirty="0"/>
+              <a:t>초음파 센서</a:t>
+            </a:r>
+            <a:r>
+              <a:rPr lang="en-US" altLang="ko-KR" dirty="0"/>
+              <a:t> </a:t>
+            </a:r>
+            <a:r>
+              <a:rPr lang="ko-KR" altLang="en-US" dirty="0"/>
+              <a:t>실습 </a:t>
+            </a:r>
+            <a:r>
+              <a:rPr lang="en-US" altLang="ko-KR" dirty="0"/>
+              <a:t>Quiz</a:t>
+            </a:r>
+            <a:endParaRPr lang="ko-KR" altLang="en-US" dirty="0"/>
+          </a:p>
+        </p:txBody>
+      </p:sp>
+      <p:sp>
+        <p:nvSpPr>
+          <p:cNvPr id="14" name="내용 개체 틀 5">
+            <a:extLst>
+              <a:ext uri="{FF2B5EF4-FFF2-40B4-BE49-F238E27FC236}">
+                <a16:creationId xmlns:a16="http://schemas.microsoft.com/office/drawing/2014/main" id="{9A868864-A509-C3E9-5A7C-C55344671AC7}"/>
+              </a:ext>
+            </a:extLst>
+          </p:cNvPr>
+          <p:cNvSpPr>
+            <a:spLocks noGrp="1"/>
+          </p:cNvSpPr>
+          <p:nvPr>
+            <p:ph idx="1"/>
+          </p:nvPr>
+        </p:nvSpPr>
+        <p:spPr>
+          <a:xfrm>
+            <a:off x="838200" y="1549839"/>
+            <a:ext cx="10515600" cy="4627124"/>
+          </a:xfrm>
+        </p:spPr>
+        <p:txBody>
+          <a:bodyPr>
+            <a:normAutofit/>
+          </a:bodyPr>
+          <a:lstStyle/>
+          <a:p>
+            <a:pPr marL="0" indent="0">
+              <a:buNone/>
+            </a:pPr>
+            <a:r>
+              <a:rPr lang="ko-KR" altLang="en-US" sz="4000" b="1" dirty="0">
+                <a:solidFill>
+                  <a:srgbClr val="FF0000"/>
+                </a:solidFill>
+              </a:rPr>
+              <a:t>정답</a:t>
+            </a:r>
+            <a:endParaRPr lang="en-US" altLang="ko-KR" sz="4000" b="1" dirty="0">
+              <a:solidFill>
+                <a:srgbClr val="FF0000"/>
+              </a:solidFill>
+            </a:endParaRPr>
+          </a:p>
+        </p:txBody>
+      </p:sp>
+      <p:pic>
+        <p:nvPicPr>
+          <p:cNvPr id="4" name="그림 3">
+            <a:extLst>
+              <a:ext uri="{FF2B5EF4-FFF2-40B4-BE49-F238E27FC236}">
+                <a16:creationId xmlns:a16="http://schemas.microsoft.com/office/drawing/2014/main" id="{CC5F3326-0AF3-038C-04EF-A78B0E233D97}"/>
+              </a:ext>
+            </a:extLst>
+          </p:cNvPr>
+          <p:cNvPicPr>
+            <a:picLocks noChangeAspect="1"/>
+          </p:cNvPicPr>
+          <p:nvPr/>
+        </p:nvPicPr>
+        <p:blipFill>
+          <a:blip r:embed="rId3"/>
+          <a:stretch>
+            <a:fillRect/>
+          </a:stretch>
+        </p:blipFill>
+        <p:spPr>
+          <a:xfrm>
+            <a:off x="838200" y="2595563"/>
+            <a:ext cx="5086350" cy="3581400"/>
+          </a:xfrm>
+          <a:prstGeom prst="rect">
+            <a:avLst/>
+          </a:prstGeom>
+        </p:spPr>
+      </p:pic>
+      <p:pic>
+        <p:nvPicPr>
+          <p:cNvPr id="6" name="그림 5">
+            <a:extLst>
+              <a:ext uri="{FF2B5EF4-FFF2-40B4-BE49-F238E27FC236}">
+                <a16:creationId xmlns:a16="http://schemas.microsoft.com/office/drawing/2014/main" id="{EF066CB9-1291-242C-12A3-57EF6BBA64F9}"/>
+              </a:ext>
+            </a:extLst>
+          </p:cNvPr>
+          <p:cNvPicPr>
+            <a:picLocks noChangeAspect="1"/>
+          </p:cNvPicPr>
+          <p:nvPr/>
+        </p:nvPicPr>
+        <p:blipFill>
+          <a:blip r:embed="rId4"/>
+          <a:stretch>
+            <a:fillRect/>
+          </a:stretch>
+        </p:blipFill>
+        <p:spPr>
+          <a:xfrm>
+            <a:off x="5590872" y="1284818"/>
+            <a:ext cx="5762928" cy="5157166"/>
+          </a:xfrm>
+          <a:prstGeom prst="rect">
+            <a:avLst/>
+          </a:prstGeom>
+        </p:spPr>
+      </p:pic>
+    </p:spTree>
+    <p:extLst>
+      <p:ext uri="{BB962C8B-B14F-4D97-AF65-F5344CB8AC3E}">
+        <p14:creationId xmlns:p14="http://schemas.microsoft.com/office/powerpoint/2010/main" val="202577839"/>
+      </p:ext>
+    </p:extLst>
+  </p:cSld>
+  <p:clrMapOvr>
+    <a:masterClrMapping/>
+  </p:clrMapOvr>
+</p:sld>
+</file>
+
+<file path=ppt/slides/slide13.xml><?xml version="1.0" encoding="utf-8"?>
 <p:sld xmlns:a="http://schemas.openxmlformats.org/drawingml/2006/main" xmlns:r="http://schemas.openxmlformats.org/officeDocument/2006/relationships" xmlns:p="http://schemas.openxmlformats.org/presentationml/2006/main">
   <p:cSld>
     <p:spTree>
@@ -6179,7 +6777,7 @@
           <p:nvPr/>
         </p:nvPicPr>
         <p:blipFill rotWithShape="1">
-          <a:blip r:embed="rId2">
+          <a:blip r:embed="rId3">
             <a:extLst>
               <a:ext uri="{28A0092B-C50C-407E-A947-70E740481C1C}">
                 <a14:useLocalDpi xmlns:a14="http://schemas.microsoft.com/office/drawing/2010/main" val="0"/>
@@ -6226,7 +6824,7 @@
           <p:nvPr/>
         </p:nvPicPr>
         <p:blipFill>
-          <a:blip r:embed="rId3"/>
+          <a:blip r:embed="rId4"/>
           <a:stretch>
             <a:fillRect/>
           </a:stretch>
@@ -6256,7 +6854,7 @@
           <p:nvPr/>
         </p:nvPicPr>
         <p:blipFill>
-          <a:blip r:embed="rId4">
+          <a:blip r:embed="rId5">
             <a:extLst>
               <a:ext uri="{28A0092B-C50C-407E-A947-70E740481C1C}">
                 <a14:useLocalDpi xmlns:a14="http://schemas.microsoft.com/office/drawing/2010/main" val="0"/>
@@ -6353,7 +6951,7 @@
           <p:nvPr/>
         </p:nvPicPr>
         <p:blipFill>
-          <a:blip r:embed="rId5"/>
+          <a:blip r:embed="rId6"/>
           <a:stretch>
             <a:fillRect/>
           </a:stretch>
@@ -6415,6 +7013,519 @@
 </file>
 
 <file path=ppt/slides/slide4.xml><?xml version="1.0" encoding="utf-8"?>
+<p:sld xmlns:a="http://schemas.openxmlformats.org/drawingml/2006/main" xmlns:r="http://schemas.openxmlformats.org/officeDocument/2006/relationships" xmlns:p="http://schemas.openxmlformats.org/presentationml/2006/main">
+  <p:cSld>
+    <p:spTree>
+      <p:nvGrpSpPr>
+        <p:cNvPr id="1" name="">
+          <a:extLst>
+            <a:ext uri="{FF2B5EF4-FFF2-40B4-BE49-F238E27FC236}">
+              <a16:creationId xmlns:a16="http://schemas.microsoft.com/office/drawing/2014/main" id="{979AC403-510B-BE9C-B1F3-EE4F24345F78}"/>
+            </a:ext>
+          </a:extLst>
+        </p:cNvPr>
+        <p:cNvGrpSpPr/>
+        <p:nvPr/>
+      </p:nvGrpSpPr>
+      <p:grpSpPr>
+        <a:xfrm>
+          <a:off x="0" y="0"/>
+          <a:ext cx="0" cy="0"/>
+          <a:chOff x="0" y="0"/>
+          <a:chExt cx="0" cy="0"/>
+        </a:xfrm>
+      </p:grpSpPr>
+      <p:sp>
+        <p:nvSpPr>
+          <p:cNvPr id="2" name="제목 1">
+            <a:extLst>
+              <a:ext uri="{FF2B5EF4-FFF2-40B4-BE49-F238E27FC236}">
+                <a16:creationId xmlns:a16="http://schemas.microsoft.com/office/drawing/2014/main" id="{B081F832-041A-DA3A-5A26-F7B4A23D1BF6}"/>
+              </a:ext>
+            </a:extLst>
+          </p:cNvPr>
+          <p:cNvSpPr>
+            <a:spLocks noGrp="1"/>
+          </p:cNvSpPr>
+          <p:nvPr>
+            <p:ph type="title"/>
+          </p:nvPr>
+        </p:nvSpPr>
+        <p:spPr/>
+        <p:txBody>
+          <a:bodyPr/>
+          <a:lstStyle/>
+          <a:p>
+            <a:r>
+              <a:rPr lang="ko-KR" altLang="en-US" dirty="0"/>
+              <a:t>태양광 패널 실습 </a:t>
+            </a:r>
+            <a:r>
+              <a:rPr lang="en-US" altLang="ko-KR" dirty="0"/>
+              <a:t>Quiz</a:t>
+            </a:r>
+            <a:endParaRPr lang="ko-KR" altLang="en-US" dirty="0"/>
+          </a:p>
+        </p:txBody>
+      </p:sp>
+      <p:sp>
+        <p:nvSpPr>
+          <p:cNvPr id="5" name="내용 개체 틀 5">
+            <a:extLst>
+              <a:ext uri="{FF2B5EF4-FFF2-40B4-BE49-F238E27FC236}">
+                <a16:creationId xmlns:a16="http://schemas.microsoft.com/office/drawing/2014/main" id="{4538F2DD-2840-B570-FA70-BE07ED48FFFA}"/>
+              </a:ext>
+            </a:extLst>
+          </p:cNvPr>
+          <p:cNvSpPr>
+            <a:spLocks noGrp="1"/>
+          </p:cNvSpPr>
+          <p:nvPr>
+            <p:ph idx="1"/>
+          </p:nvPr>
+        </p:nvSpPr>
+        <p:spPr>
+          <a:xfrm>
+            <a:off x="838200" y="1549839"/>
+            <a:ext cx="10515600" cy="4627124"/>
+          </a:xfrm>
+        </p:spPr>
+        <p:txBody>
+          <a:bodyPr/>
+          <a:lstStyle/>
+          <a:p>
+            <a:pPr marL="0" indent="0">
+              <a:buNone/>
+            </a:pPr>
+            <a:r>
+              <a:rPr lang="ko-KR" altLang="en-US" dirty="0" smtClean="0"/>
+              <a:t>태양광 패널을 통해 전원을 공급받은 후</a:t>
+            </a:r>
+            <a:r>
+              <a:rPr lang="en-US" altLang="ko-KR" dirty="0" smtClean="0"/>
+              <a:t>, LED 2</a:t>
+            </a:r>
+            <a:r>
+              <a:rPr lang="ko-KR" altLang="en-US" dirty="0" smtClean="0"/>
+              <a:t>개를 </a:t>
+            </a:r>
+            <a:r>
+              <a:rPr lang="ko-KR" altLang="en-US" dirty="0" err="1" smtClean="0"/>
+              <a:t>켜시오</a:t>
+            </a:r>
+            <a:r>
+              <a:rPr lang="en-US" altLang="ko-KR" dirty="0" smtClean="0"/>
+              <a:t>.</a:t>
+            </a:r>
+            <a:endParaRPr lang="en-US" altLang="ko-KR" dirty="0"/>
+          </a:p>
+        </p:txBody>
+      </p:sp>
+      <p:pic>
+        <p:nvPicPr>
+          <p:cNvPr id="4" name="Picture 2" descr="아두이노]Breadboard Jumper Cables(20P-SET) 점퍼 케이블 (M1000006992)">
+            <a:extLst>
+              <a:ext uri="{FF2B5EF4-FFF2-40B4-BE49-F238E27FC236}">
+                <a16:creationId xmlns:a16="http://schemas.microsoft.com/office/drawing/2014/main" id="{7C334408-BC2C-74DD-0A9B-848CA5407049}"/>
+              </a:ext>
+            </a:extLst>
+          </p:cNvPr>
+          <p:cNvPicPr>
+            <a:picLocks noChangeAspect="1" noChangeArrowheads="1"/>
+          </p:cNvPicPr>
+          <p:nvPr/>
+        </p:nvPicPr>
+        <p:blipFill>
+          <a:blip r:embed="rId3" cstate="hqprint">
+            <a:extLst>
+              <a:ext uri="{28A0092B-C50C-407E-A947-70E740481C1C}">
+                <a14:useLocalDpi xmlns:a14="http://schemas.microsoft.com/office/drawing/2010/main" val="0"/>
+              </a:ext>
+            </a:extLst>
+          </a:blip>
+          <a:srcRect/>
+          <a:stretch>
+            <a:fillRect/>
+          </a:stretch>
+        </p:blipFill>
+        <p:spPr bwMode="auto">
+          <a:xfrm>
+            <a:off x="6229541" y="4324888"/>
+            <a:ext cx="1940813" cy="1940813"/>
+          </a:xfrm>
+          <a:prstGeom prst="rect">
+            <a:avLst/>
+          </a:prstGeom>
+          <a:noFill/>
+          <a:extLst>
+            <a:ext uri="{909E8E84-426E-40DD-AFC4-6F175D3DCCD1}">
+              <a14:hiddenFill xmlns:a14="http://schemas.microsoft.com/office/drawing/2010/main">
+                <a:solidFill>
+                  <a:srgbClr val="FFFFFF"/>
+                </a:solidFill>
+              </a14:hiddenFill>
+            </a:ext>
+          </a:extLst>
+        </p:spPr>
+      </p:pic>
+      <p:pic>
+        <p:nvPicPr>
+          <p:cNvPr id="6" name="그림 5">
+            <a:extLst>
+              <a:ext uri="{FF2B5EF4-FFF2-40B4-BE49-F238E27FC236}">
+                <a16:creationId xmlns:a16="http://schemas.microsoft.com/office/drawing/2014/main" id="{9ED54D7F-F36C-2708-957C-49E139DB916B}"/>
+              </a:ext>
+            </a:extLst>
+          </p:cNvPr>
+          <p:cNvPicPr>
+            <a:picLocks noChangeAspect="1"/>
+          </p:cNvPicPr>
+          <p:nvPr/>
+        </p:nvPicPr>
+        <p:blipFill>
+          <a:blip r:embed="rId4"/>
+          <a:stretch>
+            <a:fillRect/>
+          </a:stretch>
+        </p:blipFill>
+        <p:spPr>
+          <a:xfrm>
+            <a:off x="2361902" y="2704225"/>
+            <a:ext cx="1619476" cy="1095528"/>
+          </a:xfrm>
+          <a:prstGeom prst="rect">
+            <a:avLst/>
+          </a:prstGeom>
+        </p:spPr>
+      </p:pic>
+      <p:pic>
+        <p:nvPicPr>
+          <p:cNvPr id="7" name="그림 6">
+            <a:extLst>
+              <a:ext uri="{FF2B5EF4-FFF2-40B4-BE49-F238E27FC236}">
+                <a16:creationId xmlns:a16="http://schemas.microsoft.com/office/drawing/2014/main" id="{672F320F-B20D-258F-6BA0-60B157243CFD}"/>
+              </a:ext>
+            </a:extLst>
+          </p:cNvPr>
+          <p:cNvPicPr>
+            <a:picLocks noChangeAspect="1"/>
+          </p:cNvPicPr>
+          <p:nvPr/>
+        </p:nvPicPr>
+        <p:blipFill>
+          <a:blip r:embed="rId5"/>
+          <a:stretch>
+            <a:fillRect/>
+          </a:stretch>
+        </p:blipFill>
+        <p:spPr>
+          <a:xfrm>
+            <a:off x="7415578" y="2672215"/>
+            <a:ext cx="2522922" cy="959005"/>
+          </a:xfrm>
+          <a:prstGeom prst="rect">
+            <a:avLst/>
+          </a:prstGeom>
+        </p:spPr>
+      </p:pic>
+      <p:sp>
+        <p:nvSpPr>
+          <p:cNvPr id="9" name="TextBox 8">
+            <a:extLst>
+              <a:ext uri="{FF2B5EF4-FFF2-40B4-BE49-F238E27FC236}">
+                <a16:creationId xmlns:a16="http://schemas.microsoft.com/office/drawing/2014/main" id="{C7E3A299-C3E7-DF93-563E-5F69B3576D1C}"/>
+              </a:ext>
+            </a:extLst>
+          </p:cNvPr>
+          <p:cNvSpPr txBox="1"/>
+          <p:nvPr/>
+        </p:nvSpPr>
+        <p:spPr>
+          <a:xfrm>
+            <a:off x="7846273" y="3955556"/>
+            <a:ext cx="1661532" cy="369332"/>
+          </a:xfrm>
+          <a:prstGeom prst="rect">
+            <a:avLst/>
+          </a:prstGeom>
+          <a:noFill/>
+        </p:spPr>
+        <p:txBody>
+          <a:bodyPr wrap="square" rtlCol="0">
+            <a:spAutoFit/>
+          </a:bodyPr>
+          <a:lstStyle/>
+          <a:p>
+            <a:pPr algn="ctr"/>
+            <a:r>
+              <a:rPr lang="ko-KR" altLang="en-US" dirty="0" err="1"/>
+              <a:t>브레드</a:t>
+            </a:r>
+            <a:r>
+              <a:rPr lang="ko-KR" altLang="en-US" dirty="0"/>
+              <a:t> 보드</a:t>
+            </a:r>
+          </a:p>
+        </p:txBody>
+      </p:sp>
+      <p:sp>
+        <p:nvSpPr>
+          <p:cNvPr id="10" name="TextBox 9">
+            <a:extLst>
+              <a:ext uri="{FF2B5EF4-FFF2-40B4-BE49-F238E27FC236}">
+                <a16:creationId xmlns:a16="http://schemas.microsoft.com/office/drawing/2014/main" id="{C21962C1-EB2E-14E9-C60A-A5A480E3B2E2}"/>
+              </a:ext>
+            </a:extLst>
+          </p:cNvPr>
+          <p:cNvSpPr txBox="1"/>
+          <p:nvPr/>
+        </p:nvSpPr>
+        <p:spPr>
+          <a:xfrm>
+            <a:off x="6369181" y="6092354"/>
+            <a:ext cx="1661532" cy="369332"/>
+          </a:xfrm>
+          <a:prstGeom prst="rect">
+            <a:avLst/>
+          </a:prstGeom>
+          <a:noFill/>
+        </p:spPr>
+        <p:txBody>
+          <a:bodyPr wrap="square" rtlCol="0">
+            <a:spAutoFit/>
+          </a:bodyPr>
+          <a:lstStyle/>
+          <a:p>
+            <a:pPr algn="ctr"/>
+            <a:r>
+              <a:rPr lang="ko-KR" altLang="en-US" dirty="0"/>
+              <a:t>점퍼 케이블</a:t>
+            </a:r>
+          </a:p>
+        </p:txBody>
+      </p:sp>
+      <p:sp>
+        <p:nvSpPr>
+          <p:cNvPr id="12" name="TextBox 11">
+            <a:extLst>
+              <a:ext uri="{FF2B5EF4-FFF2-40B4-BE49-F238E27FC236}">
+                <a16:creationId xmlns:a16="http://schemas.microsoft.com/office/drawing/2014/main" id="{777703DE-5A17-3BD5-0288-73243A0F4066}"/>
+              </a:ext>
+            </a:extLst>
+          </p:cNvPr>
+          <p:cNvSpPr txBox="1"/>
+          <p:nvPr/>
+        </p:nvSpPr>
+        <p:spPr>
+          <a:xfrm>
+            <a:off x="2042044" y="3959685"/>
+            <a:ext cx="2222492" cy="369332"/>
+          </a:xfrm>
+          <a:prstGeom prst="rect">
+            <a:avLst/>
+          </a:prstGeom>
+          <a:noFill/>
+        </p:spPr>
+        <p:txBody>
+          <a:bodyPr wrap="square" rtlCol="0">
+            <a:spAutoFit/>
+          </a:bodyPr>
+          <a:lstStyle/>
+          <a:p>
+            <a:pPr algn="ctr"/>
+            <a:r>
+              <a:rPr lang="ko-KR" altLang="en-US" dirty="0" err="1"/>
+              <a:t>아두이노</a:t>
+            </a:r>
+            <a:r>
+              <a:rPr lang="ko-KR" altLang="en-US" dirty="0"/>
+              <a:t> 호환보드</a:t>
+            </a:r>
+          </a:p>
+        </p:txBody>
+      </p:sp>
+      <p:sp>
+        <p:nvSpPr>
+          <p:cNvPr id="13" name="TextBox 12">
+            <a:extLst>
+              <a:ext uri="{FF2B5EF4-FFF2-40B4-BE49-F238E27FC236}">
+                <a16:creationId xmlns:a16="http://schemas.microsoft.com/office/drawing/2014/main" id="{5B893316-F962-F9E4-AD21-8A32405D0025}"/>
+              </a:ext>
+            </a:extLst>
+          </p:cNvPr>
+          <p:cNvSpPr txBox="1"/>
+          <p:nvPr/>
+        </p:nvSpPr>
+        <p:spPr>
+          <a:xfrm>
+            <a:off x="3649457" y="6088580"/>
+            <a:ext cx="1619476" cy="369332"/>
+          </a:xfrm>
+          <a:prstGeom prst="rect">
+            <a:avLst/>
+          </a:prstGeom>
+          <a:noFill/>
+        </p:spPr>
+        <p:txBody>
+          <a:bodyPr wrap="square" rtlCol="0">
+            <a:spAutoFit/>
+          </a:bodyPr>
+          <a:lstStyle/>
+          <a:p>
+            <a:pPr algn="ctr"/>
+            <a:r>
+              <a:rPr lang="en-US" altLang="ko-KR" dirty="0"/>
+              <a:t>LED</a:t>
+            </a:r>
+            <a:endParaRPr lang="ko-KR" altLang="en-US" dirty="0"/>
+          </a:p>
+        </p:txBody>
+      </p:sp>
+      <p:pic>
+        <p:nvPicPr>
+          <p:cNvPr id="16" name="Picture 2" descr="4 LED 5개 색상랜덤 아두이노 베스트 부품">
+            <a:extLst>
+              <a:ext uri="{FF2B5EF4-FFF2-40B4-BE49-F238E27FC236}">
+                <a16:creationId xmlns:a16="http://schemas.microsoft.com/office/drawing/2014/main" id="{3A866A88-898D-FE34-877A-4C53B71A2021}"/>
+              </a:ext>
+            </a:extLst>
+          </p:cNvPr>
+          <p:cNvPicPr>
+            <a:picLocks noChangeAspect="1" noChangeArrowheads="1"/>
+          </p:cNvPicPr>
+          <p:nvPr/>
+        </p:nvPicPr>
+        <p:blipFill rotWithShape="1">
+          <a:blip r:embed="rId6" cstate="hqprint">
+            <a:extLst>
+              <a:ext uri="{28A0092B-C50C-407E-A947-70E740481C1C}">
+                <a14:useLocalDpi xmlns:a14="http://schemas.microsoft.com/office/drawing/2010/main" val="0"/>
+              </a:ext>
+            </a:extLst>
+          </a:blip>
+          <a:srcRect l="9673" t="25571" r="71768" b="12666"/>
+          <a:stretch>
+            <a:fillRect/>
+          </a:stretch>
+        </p:blipFill>
+        <p:spPr bwMode="auto">
+          <a:xfrm>
+            <a:off x="4206868" y="4644051"/>
+            <a:ext cx="431534" cy="1436122"/>
+          </a:xfrm>
+          <a:prstGeom prst="rect">
+            <a:avLst/>
+          </a:prstGeom>
+          <a:noFill/>
+          <a:extLst>
+            <a:ext uri="{909E8E84-426E-40DD-AFC4-6F175D3DCCD1}">
+              <a14:hiddenFill xmlns:a14="http://schemas.microsoft.com/office/drawing/2010/main">
+                <a:solidFill>
+                  <a:srgbClr val="FFFFFF"/>
+                </a:solidFill>
+              </a14:hiddenFill>
+            </a:ext>
+          </a:extLst>
+        </p:spPr>
+      </p:pic>
+      <p:sp>
+        <p:nvSpPr>
+          <p:cNvPr id="18" name="TextBox 17">
+            <a:extLst>
+              <a:ext uri="{FF2B5EF4-FFF2-40B4-BE49-F238E27FC236}">
+                <a16:creationId xmlns:a16="http://schemas.microsoft.com/office/drawing/2014/main" id="{8F71DDB0-BB1A-F7C6-C213-3E63FE4EA180}"/>
+              </a:ext>
+            </a:extLst>
+          </p:cNvPr>
+          <p:cNvSpPr txBox="1"/>
+          <p:nvPr/>
+        </p:nvSpPr>
+        <p:spPr>
+          <a:xfrm>
+            <a:off x="4798165" y="3951278"/>
+            <a:ext cx="2222492" cy="369332"/>
+          </a:xfrm>
+          <a:prstGeom prst="rect">
+            <a:avLst/>
+          </a:prstGeom>
+          <a:noFill/>
+        </p:spPr>
+        <p:txBody>
+          <a:bodyPr wrap="square" rtlCol="0">
+            <a:spAutoFit/>
+          </a:bodyPr>
+          <a:lstStyle/>
+          <a:p>
+            <a:pPr algn="ctr"/>
+            <a:r>
+              <a:rPr lang="ko-KR" altLang="en-US" dirty="0" smtClean="0"/>
+              <a:t>태양광 패널</a:t>
+            </a:r>
+            <a:endParaRPr lang="ko-KR" altLang="en-US" dirty="0"/>
+          </a:p>
+        </p:txBody>
+      </p:sp>
+      <p:pic>
+        <p:nvPicPr>
+          <p:cNvPr id="21" name="Picture 2" descr="G52 5V 200mA 1W 태양전지판 아두이노 실험 교재 키트 - 싸이피아">
+            <a:extLst>
+              <a:ext uri="{FF2B5EF4-FFF2-40B4-BE49-F238E27FC236}">
+                <a16:creationId xmlns:a16="http://schemas.microsoft.com/office/drawing/2014/main" id="{7463FFB5-D7F2-9152-0361-5EDEC8C86397}"/>
+              </a:ext>
+            </a:extLst>
+          </p:cNvPr>
+          <p:cNvPicPr>
+            <a:picLocks noChangeAspect="1" noChangeArrowheads="1"/>
+          </p:cNvPicPr>
+          <p:nvPr/>
+        </p:nvPicPr>
+        <p:blipFill rotWithShape="1">
+          <a:blip r:embed="rId7">
+            <a:extLst>
+              <a:ext uri="{28A0092B-C50C-407E-A947-70E740481C1C}">
+                <a14:useLocalDpi xmlns:a14="http://schemas.microsoft.com/office/drawing/2010/main" val="0"/>
+              </a:ext>
+            </a:extLst>
+          </a:blip>
+          <a:srcRect b="16525"/>
+          <a:stretch>
+            <a:fillRect/>
+          </a:stretch>
+        </p:blipFill>
+        <p:spPr bwMode="auto">
+          <a:xfrm>
+            <a:off x="5203697" y="2352092"/>
+            <a:ext cx="1784606" cy="1489706"/>
+          </a:xfrm>
+          <a:prstGeom prst="rect">
+            <a:avLst/>
+          </a:prstGeom>
+          <a:noFill/>
+          <a:extLst>
+            <a:ext uri="{909E8E84-426E-40DD-AFC4-6F175D3DCCD1}">
+              <a14:hiddenFill xmlns:a14="http://schemas.microsoft.com/office/drawing/2010/main">
+                <a:solidFill>
+                  <a:srgbClr val="FFFFFF"/>
+                </a:solidFill>
+              </a14:hiddenFill>
+            </a:ext>
+          </a:extLst>
+        </p:spPr>
+      </p:pic>
+    </p:spTree>
+    <p:extLst>
+      <p:ext uri="{BB962C8B-B14F-4D97-AF65-F5344CB8AC3E}">
+        <p14:creationId xmlns:p14="http://schemas.microsoft.com/office/powerpoint/2010/main" val="2926040378"/>
+      </p:ext>
+    </p:extLst>
+  </p:cSld>
+  <p:clrMapOvr>
+    <a:masterClrMapping/>
+  </p:clrMapOvr>
+</p:sld>
+</file>
+
+<file path=ppt/slides/slide5.xml><?xml version="1.0" encoding="utf-8"?>
 <p:sld xmlns:a="http://schemas.openxmlformats.org/drawingml/2006/main" xmlns:r="http://schemas.openxmlformats.org/officeDocument/2006/relationships" xmlns:p="http://schemas.openxmlformats.org/presentationml/2006/main">
   <p:cSld>
     <p:spTree>
@@ -6494,7 +7605,7 @@
             <a:fld id="{083A2CE0-18CD-4102-B738-4ACFF9E68BA4}" type="slidenum">
               <a:rPr lang="ko-KR" altLang="en-US" smtClean="0"/>
               <a:pPr/>
-              <a:t>4</a:t>
+              <a:t>5</a:t>
             </a:fld>
             <a:endParaRPr lang="ko-KR" altLang="en-US" dirty="0"/>
           </a:p>
@@ -6715,7 +7826,7 @@
           <p:nvPr/>
         </p:nvPicPr>
         <p:blipFill>
-          <a:blip r:embed="rId2">
+          <a:blip r:embed="rId3">
             <a:extLst>
               <a:ext uri="{28A0092B-C50C-407E-A947-70E740481C1C}">
                 <a14:useLocalDpi xmlns:a14="http://schemas.microsoft.com/office/drawing/2010/main" val="0"/>
@@ -6762,7 +7873,7 @@
           <p:nvPr/>
         </p:nvPicPr>
         <p:blipFill>
-          <a:blip r:embed="rId3"/>
+          <a:blip r:embed="rId4"/>
           <a:stretch>
             <a:fillRect/>
           </a:stretch>
@@ -6792,7 +7903,7 @@
           <p:nvPr/>
         </p:nvPicPr>
         <p:blipFill>
-          <a:blip r:embed="rId4">
+          <a:blip r:embed="rId5">
             <a:extLst>
               <a:ext uri="{28A0092B-C50C-407E-A947-70E740481C1C}">
                 <a14:useLocalDpi xmlns:a14="http://schemas.microsoft.com/office/drawing/2010/main" val="0"/>
@@ -7315,7 +8426,1330 @@
 </p:sld>
 </file>
 
-<file path=ppt/slides/slide5.xml><?xml version="1.0" encoding="utf-8"?>
+<file path=ppt/slides/slide6.xml><?xml version="1.0" encoding="utf-8"?>
+<p:sld xmlns:a="http://schemas.openxmlformats.org/drawingml/2006/main" xmlns:r="http://schemas.openxmlformats.org/officeDocument/2006/relationships" xmlns:p="http://schemas.openxmlformats.org/presentationml/2006/main">
+  <p:cSld>
+    <p:spTree>
+      <p:nvGrpSpPr>
+        <p:cNvPr id="1" name="">
+          <a:extLst>
+            <a:ext uri="{FF2B5EF4-FFF2-40B4-BE49-F238E27FC236}">
+              <a16:creationId xmlns:a16="http://schemas.microsoft.com/office/drawing/2014/main" id="{73323048-0E7C-81F4-EDB2-C26A68B694F7}"/>
+            </a:ext>
+          </a:extLst>
+        </p:cNvPr>
+        <p:cNvGrpSpPr/>
+        <p:nvPr/>
+      </p:nvGrpSpPr>
+      <p:grpSpPr>
+        <a:xfrm>
+          <a:off x="0" y="0"/>
+          <a:ext cx="0" cy="0"/>
+          <a:chOff x="0" y="0"/>
+          <a:chExt cx="0" cy="0"/>
+        </a:xfrm>
+      </p:grpSpPr>
+      <p:sp>
+        <p:nvSpPr>
+          <p:cNvPr id="2" name="제목 1">
+            <a:extLst>
+              <a:ext uri="{FF2B5EF4-FFF2-40B4-BE49-F238E27FC236}">
+                <a16:creationId xmlns:a16="http://schemas.microsoft.com/office/drawing/2014/main" id="{8C1CA3F3-BC8A-9ED6-91C7-E8F88E103210}"/>
+              </a:ext>
+            </a:extLst>
+          </p:cNvPr>
+          <p:cNvSpPr>
+            <a:spLocks noGrp="1"/>
+          </p:cNvSpPr>
+          <p:nvPr>
+            <p:ph type="title"/>
+          </p:nvPr>
+        </p:nvSpPr>
+        <p:spPr>
+          <a:xfrm>
+            <a:off x="548279" y="195305"/>
+            <a:ext cx="10515600" cy="1325563"/>
+          </a:xfrm>
+        </p:spPr>
+        <p:txBody>
+          <a:bodyPr/>
+          <a:lstStyle/>
+          <a:p>
+            <a:r>
+              <a:rPr lang="ko-KR" altLang="en-US" dirty="0"/>
+              <a:t>태양광 패널로 베터리 충전하기</a:t>
+            </a:r>
+          </a:p>
+        </p:txBody>
+      </p:sp>
+      <p:sp>
+        <p:nvSpPr>
+          <p:cNvPr id="4" name="슬라이드 번호 개체 틀 3">
+            <a:extLst>
+              <a:ext uri="{FF2B5EF4-FFF2-40B4-BE49-F238E27FC236}">
+                <a16:creationId xmlns:a16="http://schemas.microsoft.com/office/drawing/2014/main" id="{B8CD53B4-2E10-EFC9-242E-AE22A0A91EEA}"/>
+              </a:ext>
+            </a:extLst>
+          </p:cNvPr>
+          <p:cNvSpPr>
+            <a:spLocks noGrp="1"/>
+          </p:cNvSpPr>
+          <p:nvPr>
+            <p:ph type="sldNum" sz="quarter" idx="12"/>
+          </p:nvPr>
+        </p:nvSpPr>
+        <p:spPr/>
+        <p:txBody>
+          <a:bodyPr/>
+          <a:lstStyle/>
+          <a:p>
+            <a:fld id="{083A2CE0-18CD-4102-B738-4ACFF9E68BA4}" type="slidenum">
+              <a:rPr lang="ko-KR" altLang="en-US" smtClean="0"/>
+              <a:pPr/>
+              <a:t>6</a:t>
+            </a:fld>
+            <a:endParaRPr lang="ko-KR" altLang="en-US" dirty="0"/>
+          </a:p>
+        </p:txBody>
+      </p:sp>
+      <p:sp>
+        <p:nvSpPr>
+          <p:cNvPr id="7" name="내용 개체 틀 5">
+            <a:extLst>
+              <a:ext uri="{FF2B5EF4-FFF2-40B4-BE49-F238E27FC236}">
+                <a16:creationId xmlns:a16="http://schemas.microsoft.com/office/drawing/2014/main" id="{6F5F1D67-538B-EC24-96FC-E3C038EE0911}"/>
+              </a:ext>
+            </a:extLst>
+          </p:cNvPr>
+          <p:cNvSpPr txBox="1">
+            <a:spLocks/>
+          </p:cNvSpPr>
+          <p:nvPr/>
+        </p:nvSpPr>
+        <p:spPr>
+          <a:xfrm>
+            <a:off x="838200" y="5448299"/>
+            <a:ext cx="10515600" cy="728663"/>
+          </a:xfrm>
+          <a:prstGeom prst="rect">
+            <a:avLst/>
+          </a:prstGeom>
+        </p:spPr>
+        <p:txBody>
+          <a:bodyPr vert="horz" lIns="91440" tIns="45720" rIns="91440" bIns="45720" rtlCol="0">
+            <a:normAutofit/>
+          </a:bodyPr>
+          <a:lstStyle>
+            <a:lvl1pPr marL="228600" indent="-228600" algn="l" defTabSz="914400" rtl="0" eaLnBrk="1" latinLnBrk="1" hangingPunct="1">
+              <a:lnSpc>
+                <a:spcPct val="120000"/>
+              </a:lnSpc>
+              <a:spcBef>
+                <a:spcPts val="1000"/>
+              </a:spcBef>
+              <a:buFont typeface="Arial" panose="020B0604020202020204" pitchFamily="34" charset="0"/>
+              <a:buChar char="•"/>
+              <a:defRPr sz="2400" kern="1200">
+                <a:solidFill>
+                  <a:schemeClr val="tx1"/>
+                </a:solidFill>
+                <a:latin typeface="G마켓 산스 TTF Medium" panose="02000000000000000000" pitchFamily="2" charset="-127"/>
+                <a:ea typeface="G마켓 산스 TTF Medium" panose="02000000000000000000" pitchFamily="2" charset="-127"/>
+                <a:cs typeface="+mn-cs"/>
+              </a:defRPr>
+            </a:lvl1pPr>
+            <a:lvl2pPr marL="685800" indent="-228600" algn="l" defTabSz="914400" rtl="0" eaLnBrk="1" latinLnBrk="1" hangingPunct="1">
+              <a:lnSpc>
+                <a:spcPct val="120000"/>
+              </a:lnSpc>
+              <a:spcBef>
+                <a:spcPts val="500"/>
+              </a:spcBef>
+              <a:buFont typeface="Arial" panose="020B0604020202020204" pitchFamily="34" charset="0"/>
+              <a:buChar char="•"/>
+              <a:defRPr sz="2000" kern="1200">
+                <a:solidFill>
+                  <a:schemeClr val="tx1"/>
+                </a:solidFill>
+                <a:latin typeface="G마켓 산스 TTF Medium" panose="02000000000000000000" pitchFamily="2" charset="-127"/>
+                <a:ea typeface="G마켓 산스 TTF Medium" panose="02000000000000000000" pitchFamily="2" charset="-127"/>
+                <a:cs typeface="+mn-cs"/>
+              </a:defRPr>
+            </a:lvl2pPr>
+            <a:lvl3pPr marL="1143000" indent="-228600" algn="l" defTabSz="914400" rtl="0" eaLnBrk="1" latinLnBrk="1" hangingPunct="1">
+              <a:lnSpc>
+                <a:spcPct val="120000"/>
+              </a:lnSpc>
+              <a:spcBef>
+                <a:spcPts val="500"/>
+              </a:spcBef>
+              <a:buFont typeface="Arial" panose="020B0604020202020204" pitchFamily="34" charset="0"/>
+              <a:buChar char="•"/>
+              <a:defRPr sz="1800" kern="1200">
+                <a:solidFill>
+                  <a:schemeClr val="tx1"/>
+                </a:solidFill>
+                <a:latin typeface="G마켓 산스 TTF Medium" panose="02000000000000000000" pitchFamily="2" charset="-127"/>
+                <a:ea typeface="G마켓 산스 TTF Medium" panose="02000000000000000000" pitchFamily="2" charset="-127"/>
+                <a:cs typeface="+mn-cs"/>
+              </a:defRPr>
+            </a:lvl3pPr>
+            <a:lvl4pPr marL="1600200" indent="-228600" algn="l" defTabSz="914400" rtl="0" eaLnBrk="1" latinLnBrk="1" hangingPunct="1">
+              <a:lnSpc>
+                <a:spcPct val="120000"/>
+              </a:lnSpc>
+              <a:spcBef>
+                <a:spcPts val="500"/>
+              </a:spcBef>
+              <a:buFont typeface="Arial" panose="020B0604020202020204" pitchFamily="34" charset="0"/>
+              <a:buChar char="•"/>
+              <a:defRPr sz="1600" kern="1200">
+                <a:solidFill>
+                  <a:schemeClr val="tx1"/>
+                </a:solidFill>
+                <a:latin typeface="G마켓 산스 TTF Medium" panose="02000000000000000000" pitchFamily="2" charset="-127"/>
+                <a:ea typeface="G마켓 산스 TTF Medium" panose="02000000000000000000" pitchFamily="2" charset="-127"/>
+                <a:cs typeface="+mn-cs"/>
+              </a:defRPr>
+            </a:lvl4pPr>
+            <a:lvl5pPr marL="2057400" indent="-228600" algn="l" defTabSz="914400" rtl="0" eaLnBrk="1" latinLnBrk="1" hangingPunct="1">
+              <a:lnSpc>
+                <a:spcPct val="120000"/>
+              </a:lnSpc>
+              <a:spcBef>
+                <a:spcPts val="500"/>
+              </a:spcBef>
+              <a:buFont typeface="Arial" panose="020B0604020202020204" pitchFamily="34" charset="0"/>
+              <a:buChar char="•"/>
+              <a:defRPr sz="1600" kern="1200">
+                <a:solidFill>
+                  <a:schemeClr val="tx1"/>
+                </a:solidFill>
+                <a:latin typeface="G마켓 산스 TTF Medium" panose="02000000000000000000" pitchFamily="2" charset="-127"/>
+                <a:ea typeface="G마켓 산스 TTF Medium" panose="02000000000000000000" pitchFamily="2" charset="-127"/>
+                <a:cs typeface="+mn-cs"/>
+              </a:defRPr>
+            </a:lvl5pPr>
+            <a:lvl6pPr marL="2514600" indent="-228600" algn="l" defTabSz="914400" rtl="0" eaLnBrk="1" latinLnBrk="1" hangingPunct="1">
+              <a:lnSpc>
+                <a:spcPct val="90000"/>
+              </a:lnSpc>
+              <a:spcBef>
+                <a:spcPts val="500"/>
+              </a:spcBef>
+              <a:buFont typeface="Arial" panose="020B0604020202020204" pitchFamily="34" charset="0"/>
+              <a:buChar char="•"/>
+              <a:defRPr sz="1800" kern="1200">
+                <a:solidFill>
+                  <a:schemeClr val="tx1"/>
+                </a:solidFill>
+                <a:latin typeface="+mn-lt"/>
+                <a:ea typeface="+mn-ea"/>
+                <a:cs typeface="+mn-cs"/>
+              </a:defRPr>
+            </a:lvl6pPr>
+            <a:lvl7pPr marL="2971800" indent="-228600" algn="l" defTabSz="914400" rtl="0" eaLnBrk="1" latinLnBrk="1" hangingPunct="1">
+              <a:lnSpc>
+                <a:spcPct val="90000"/>
+              </a:lnSpc>
+              <a:spcBef>
+                <a:spcPts val="500"/>
+              </a:spcBef>
+              <a:buFont typeface="Arial" panose="020B0604020202020204" pitchFamily="34" charset="0"/>
+              <a:buChar char="•"/>
+              <a:defRPr sz="1800" kern="1200">
+                <a:solidFill>
+                  <a:schemeClr val="tx1"/>
+                </a:solidFill>
+                <a:latin typeface="+mn-lt"/>
+                <a:ea typeface="+mn-ea"/>
+                <a:cs typeface="+mn-cs"/>
+              </a:defRPr>
+            </a:lvl7pPr>
+            <a:lvl8pPr marL="3429000" indent="-228600" algn="l" defTabSz="914400" rtl="0" eaLnBrk="1" latinLnBrk="1" hangingPunct="1">
+              <a:lnSpc>
+                <a:spcPct val="90000"/>
+              </a:lnSpc>
+              <a:spcBef>
+                <a:spcPts val="500"/>
+              </a:spcBef>
+              <a:buFont typeface="Arial" panose="020B0604020202020204" pitchFamily="34" charset="0"/>
+              <a:buChar char="•"/>
+              <a:defRPr sz="1800" kern="1200">
+                <a:solidFill>
+                  <a:schemeClr val="tx1"/>
+                </a:solidFill>
+                <a:latin typeface="+mn-lt"/>
+                <a:ea typeface="+mn-ea"/>
+                <a:cs typeface="+mn-cs"/>
+              </a:defRPr>
+            </a:lvl8pPr>
+            <a:lvl9pPr marL="3886200" indent="-228600" algn="l" defTabSz="914400" rtl="0" eaLnBrk="1" latinLnBrk="1" hangingPunct="1">
+              <a:lnSpc>
+                <a:spcPct val="90000"/>
+              </a:lnSpc>
+              <a:spcBef>
+                <a:spcPts val="500"/>
+              </a:spcBef>
+              <a:buFont typeface="Arial" panose="020B0604020202020204" pitchFamily="34" charset="0"/>
+              <a:buChar char="•"/>
+              <a:defRPr sz="1800" kern="1200">
+                <a:solidFill>
+                  <a:schemeClr val="tx1"/>
+                </a:solidFill>
+                <a:latin typeface="+mn-lt"/>
+                <a:ea typeface="+mn-ea"/>
+                <a:cs typeface="+mn-cs"/>
+              </a:defRPr>
+            </a:lvl9pPr>
+          </a:lstStyle>
+          <a:p>
+            <a:pPr marL="0" indent="0" algn="ctr">
+              <a:buFont typeface="Arial" panose="020B0604020202020204" pitchFamily="34" charset="0"/>
+              <a:buNone/>
+            </a:pPr>
+            <a:endParaRPr lang="ko-KR" altLang="en-US" dirty="0"/>
+          </a:p>
+        </p:txBody>
+      </p:sp>
+      <p:pic>
+        <p:nvPicPr>
+          <p:cNvPr id="5" name="그림 4"/>
+          <p:cNvPicPr>
+            <a:picLocks noChangeAspect="1"/>
+          </p:cNvPicPr>
+          <p:nvPr/>
+        </p:nvPicPr>
+        <p:blipFill rotWithShape="1">
+          <a:blip r:embed="rId2" cstate="hqprint">
+            <a:extLst>
+              <a:ext uri="{28A0092B-C50C-407E-A947-70E740481C1C}">
+                <a14:useLocalDpi xmlns:a14="http://schemas.microsoft.com/office/drawing/2010/main" val="0"/>
+              </a:ext>
+            </a:extLst>
+          </a:blip>
+          <a:srcRect l="30322" t="26009" r="31613" b="24385"/>
+          <a:stretch/>
+        </p:blipFill>
+        <p:spPr>
+          <a:xfrm rot="5400000">
+            <a:off x="634345" y="1674855"/>
+            <a:ext cx="4553562" cy="4450652"/>
+          </a:xfrm>
+          <a:prstGeom prst="rect">
+            <a:avLst/>
+          </a:prstGeom>
+        </p:spPr>
+      </p:pic>
+      <p:graphicFrame>
+        <p:nvGraphicFramePr>
+          <p:cNvPr id="17" name="표 16">
+            <a:extLst>
+              <a:ext uri="{FF2B5EF4-FFF2-40B4-BE49-F238E27FC236}">
+                <a16:creationId xmlns:a16="http://schemas.microsoft.com/office/drawing/2014/main" id="{F3BE0895-9CC5-CA4E-0455-1FDCB1215E1A}"/>
+              </a:ext>
+            </a:extLst>
+          </p:cNvPr>
+          <p:cNvGraphicFramePr>
+            <a:graphicFrameLocks noGrp="1"/>
+          </p:cNvGraphicFramePr>
+          <p:nvPr>
+            <p:extLst>
+              <p:ext uri="{D42A27DB-BD31-4B8C-83A1-F6EECF244321}">
+                <p14:modId xmlns:p14="http://schemas.microsoft.com/office/powerpoint/2010/main" val="2264090154"/>
+              </p:ext>
+            </p:extLst>
+          </p:nvPr>
+        </p:nvGraphicFramePr>
+        <p:xfrm>
+          <a:off x="5784586" y="2325988"/>
+          <a:ext cx="5569214" cy="2415824"/>
+        </p:xfrm>
+        <a:graphic>
+          <a:graphicData uri="http://schemas.openxmlformats.org/drawingml/2006/table">
+            <a:tbl>
+              <a:tblPr firstRow="1" bandRow="1">
+                <a:tableStyleId>{5A111915-BE36-4E01-A7E5-04B1672EAD32}</a:tableStyleId>
+              </a:tblPr>
+              <a:tblGrid>
+                <a:gridCol w="2430266">
+                  <a:extLst>
+                    <a:ext uri="{9D8B030D-6E8A-4147-A177-3AD203B41FA5}">
+                      <a16:colId xmlns:a16="http://schemas.microsoft.com/office/drawing/2014/main" val="778410855"/>
+                    </a:ext>
+                  </a:extLst>
+                </a:gridCol>
+                <a:gridCol w="3138948">
+                  <a:extLst>
+                    <a:ext uri="{9D8B030D-6E8A-4147-A177-3AD203B41FA5}">
+                      <a16:colId xmlns:a16="http://schemas.microsoft.com/office/drawing/2014/main" val="2844750320"/>
+                    </a:ext>
+                  </a:extLst>
+                </a:gridCol>
+              </a:tblGrid>
+              <a:tr h="603956">
+                <a:tc>
+                  <a:txBody>
+                    <a:bodyPr/>
+                    <a:lstStyle/>
+                    <a:p>
+                      <a:pPr algn="ctr"/>
+                      <a:r>
+                        <a:rPr lang="en-US" altLang="ko-KR" dirty="0" smtClean="0"/>
+                        <a:t>LED</a:t>
+                      </a:r>
+                      <a:r>
+                        <a:rPr lang="en-US" altLang="ko-KR" baseline="0" dirty="0" smtClean="0"/>
+                        <a:t> </a:t>
+                      </a:r>
+                      <a:r>
+                        <a:rPr lang="ko-KR" altLang="en-US" baseline="0" dirty="0" smtClean="0"/>
+                        <a:t>상태</a:t>
+                      </a:r>
+                      <a:endParaRPr lang="ko-KR" altLang="en-US" dirty="0"/>
+                    </a:p>
+                  </a:txBody>
+                  <a:tcPr anchor="ctr">
+                    <a:lnL w="12700" cap="flat" cmpd="sng" algn="ctr">
+                      <a:solidFill>
+                        <a:schemeClr val="tx1"/>
+                      </a:solidFill>
+                      <a:prstDash val="solid"/>
+                      <a:round/>
+                      <a:headEnd type="none" w="med" len="med"/>
+                      <a:tailEnd type="none" w="med" len="med"/>
+                    </a:lnL>
+                    <a:lnR w="12700" cap="flat" cmpd="sng" algn="ctr">
+                      <a:solidFill>
+                        <a:schemeClr val="tx1"/>
+                      </a:solidFill>
+                      <a:prstDash val="solid"/>
+                      <a:round/>
+                      <a:headEnd type="none" w="med" len="med"/>
+                      <a:tailEnd type="none" w="med" len="med"/>
+                    </a:lnR>
+                    <a:lnT w="12700" cap="flat" cmpd="sng" algn="ctr">
+                      <a:solidFill>
+                        <a:schemeClr val="tx1"/>
+                      </a:solidFill>
+                      <a:prstDash val="solid"/>
+                      <a:round/>
+                      <a:headEnd type="none" w="med" len="med"/>
+                      <a:tailEnd type="none" w="med" len="med"/>
+                    </a:lnT>
+                    <a:lnB w="12700" cap="flat" cmpd="sng" algn="ctr">
+                      <a:solidFill>
+                        <a:schemeClr val="tx1"/>
+                      </a:solidFill>
+                      <a:prstDash val="solid"/>
+                      <a:round/>
+                      <a:headEnd type="none" w="med" len="med"/>
+                      <a:tailEnd type="none" w="med" len="med"/>
+                    </a:lnB>
+                  </a:tcPr>
+                </a:tc>
+                <a:tc>
+                  <a:txBody>
+                    <a:bodyPr/>
+                    <a:lstStyle/>
+                    <a:p>
+                      <a:pPr algn="ctr"/>
+                      <a:r>
+                        <a:rPr lang="ko-KR" altLang="en-US" dirty="0" smtClean="0"/>
+                        <a:t>의미</a:t>
+                      </a:r>
+                      <a:endParaRPr lang="ko-KR" altLang="en-US" dirty="0"/>
+                    </a:p>
+                  </a:txBody>
+                  <a:tcPr anchor="ctr">
+                    <a:lnL w="12700" cap="flat" cmpd="sng" algn="ctr">
+                      <a:solidFill>
+                        <a:schemeClr val="tx1"/>
+                      </a:solidFill>
+                      <a:prstDash val="solid"/>
+                      <a:round/>
+                      <a:headEnd type="none" w="med" len="med"/>
+                      <a:tailEnd type="none" w="med" len="med"/>
+                    </a:lnL>
+                    <a:lnR w="12700" cap="flat" cmpd="sng" algn="ctr">
+                      <a:solidFill>
+                        <a:schemeClr val="tx1"/>
+                      </a:solidFill>
+                      <a:prstDash val="solid"/>
+                      <a:round/>
+                      <a:headEnd type="none" w="med" len="med"/>
+                      <a:tailEnd type="none" w="med" len="med"/>
+                    </a:lnR>
+                    <a:lnT w="12700" cap="flat" cmpd="sng" algn="ctr">
+                      <a:solidFill>
+                        <a:schemeClr val="tx1"/>
+                      </a:solidFill>
+                      <a:prstDash val="solid"/>
+                      <a:round/>
+                      <a:headEnd type="none" w="med" len="med"/>
+                      <a:tailEnd type="none" w="med" len="med"/>
+                    </a:lnT>
+                    <a:lnB w="12700" cap="flat" cmpd="sng" algn="ctr">
+                      <a:solidFill>
+                        <a:schemeClr val="tx1"/>
+                      </a:solidFill>
+                      <a:prstDash val="solid"/>
+                      <a:round/>
+                      <a:headEnd type="none" w="med" len="med"/>
+                      <a:tailEnd type="none" w="med" len="med"/>
+                    </a:lnB>
+                  </a:tcPr>
+                </a:tc>
+                <a:extLst>
+                  <a:ext uri="{0D108BD9-81ED-4DB2-BD59-A6C34878D82A}">
+                    <a16:rowId xmlns:a16="http://schemas.microsoft.com/office/drawing/2014/main" val="2823514045"/>
+                  </a:ext>
+                </a:extLst>
+              </a:tr>
+              <a:tr h="603956">
+                <a:tc>
+                  <a:txBody>
+                    <a:bodyPr/>
+                    <a:lstStyle/>
+                    <a:p>
+                      <a:pPr algn="ctr"/>
+                      <a:r>
+                        <a:rPr lang="ko-KR" altLang="en-US" dirty="0" err="1" smtClean="0"/>
+                        <a:t>빨간불</a:t>
+                      </a:r>
+                      <a:endParaRPr lang="ko-KR" altLang="en-US" dirty="0"/>
+                    </a:p>
+                  </a:txBody>
+                  <a:tcPr anchor="ctr">
+                    <a:lnL w="12700" cap="flat" cmpd="sng" algn="ctr">
+                      <a:solidFill>
+                        <a:schemeClr val="tx1"/>
+                      </a:solidFill>
+                      <a:prstDash val="solid"/>
+                      <a:round/>
+                      <a:headEnd type="none" w="med" len="med"/>
+                      <a:tailEnd type="none" w="med" len="med"/>
+                    </a:lnL>
+                    <a:lnR w="12700" cap="flat" cmpd="sng" algn="ctr">
+                      <a:solidFill>
+                        <a:schemeClr val="tx1"/>
+                      </a:solidFill>
+                      <a:prstDash val="solid"/>
+                      <a:round/>
+                      <a:headEnd type="none" w="med" len="med"/>
+                      <a:tailEnd type="none" w="med" len="med"/>
+                    </a:lnR>
+                    <a:lnT w="12700" cap="flat" cmpd="sng" algn="ctr">
+                      <a:solidFill>
+                        <a:schemeClr val="tx1"/>
+                      </a:solidFill>
+                      <a:prstDash val="solid"/>
+                      <a:round/>
+                      <a:headEnd type="none" w="med" len="med"/>
+                      <a:tailEnd type="none" w="med" len="med"/>
+                    </a:lnT>
+                    <a:lnB w="12700" cap="flat" cmpd="sng" algn="ctr">
+                      <a:solidFill>
+                        <a:schemeClr val="tx1"/>
+                      </a:solidFill>
+                      <a:prstDash val="solid"/>
+                      <a:round/>
+                      <a:headEnd type="none" w="med" len="med"/>
+                      <a:tailEnd type="none" w="med" len="med"/>
+                    </a:lnB>
+                  </a:tcPr>
+                </a:tc>
+                <a:tc>
+                  <a:txBody>
+                    <a:bodyPr/>
+                    <a:lstStyle/>
+                    <a:p>
+                      <a:pPr algn="ctr"/>
+                      <a:r>
+                        <a:rPr lang="ko-KR" altLang="en-US" dirty="0" smtClean="0"/>
+                        <a:t>충전 중</a:t>
+                      </a:r>
+                      <a:endParaRPr lang="ko-KR" altLang="en-US" dirty="0"/>
+                    </a:p>
+                  </a:txBody>
+                  <a:tcPr anchor="ctr">
+                    <a:lnL w="12700" cap="flat" cmpd="sng" algn="ctr">
+                      <a:solidFill>
+                        <a:schemeClr val="tx1"/>
+                      </a:solidFill>
+                      <a:prstDash val="solid"/>
+                      <a:round/>
+                      <a:headEnd type="none" w="med" len="med"/>
+                      <a:tailEnd type="none" w="med" len="med"/>
+                    </a:lnL>
+                    <a:lnR w="12700" cap="flat" cmpd="sng" algn="ctr">
+                      <a:solidFill>
+                        <a:schemeClr val="tx1"/>
+                      </a:solidFill>
+                      <a:prstDash val="solid"/>
+                      <a:round/>
+                      <a:headEnd type="none" w="med" len="med"/>
+                      <a:tailEnd type="none" w="med" len="med"/>
+                    </a:lnR>
+                    <a:lnT w="12700" cap="flat" cmpd="sng" algn="ctr">
+                      <a:solidFill>
+                        <a:schemeClr val="tx1"/>
+                      </a:solidFill>
+                      <a:prstDash val="solid"/>
+                      <a:round/>
+                      <a:headEnd type="none" w="med" len="med"/>
+                      <a:tailEnd type="none" w="med" len="med"/>
+                    </a:lnT>
+                    <a:lnB w="12700" cap="flat" cmpd="sng" algn="ctr">
+                      <a:solidFill>
+                        <a:schemeClr val="tx1"/>
+                      </a:solidFill>
+                      <a:prstDash val="solid"/>
+                      <a:round/>
+                      <a:headEnd type="none" w="med" len="med"/>
+                      <a:tailEnd type="none" w="med" len="med"/>
+                    </a:lnB>
+                  </a:tcPr>
+                </a:tc>
+                <a:extLst>
+                  <a:ext uri="{0D108BD9-81ED-4DB2-BD59-A6C34878D82A}">
+                    <a16:rowId xmlns:a16="http://schemas.microsoft.com/office/drawing/2014/main" val="513567233"/>
+                  </a:ext>
+                </a:extLst>
+              </a:tr>
+              <a:tr h="603956">
+                <a:tc>
+                  <a:txBody>
+                    <a:bodyPr/>
+                    <a:lstStyle/>
+                    <a:p>
+                      <a:pPr algn="ctr"/>
+                      <a:r>
+                        <a:rPr lang="ko-KR" altLang="en-US" dirty="0" err="1" smtClean="0"/>
+                        <a:t>파란불</a:t>
+                      </a:r>
+                      <a:endParaRPr lang="ko-KR" altLang="en-US" dirty="0"/>
+                    </a:p>
+                  </a:txBody>
+                  <a:tcPr anchor="ctr">
+                    <a:lnL w="12700" cap="flat" cmpd="sng" algn="ctr">
+                      <a:solidFill>
+                        <a:schemeClr val="tx1"/>
+                      </a:solidFill>
+                      <a:prstDash val="solid"/>
+                      <a:round/>
+                      <a:headEnd type="none" w="med" len="med"/>
+                      <a:tailEnd type="none" w="med" len="med"/>
+                    </a:lnL>
+                    <a:lnR w="12700" cap="flat" cmpd="sng" algn="ctr">
+                      <a:solidFill>
+                        <a:schemeClr val="tx1"/>
+                      </a:solidFill>
+                      <a:prstDash val="solid"/>
+                      <a:round/>
+                      <a:headEnd type="none" w="med" len="med"/>
+                      <a:tailEnd type="none" w="med" len="med"/>
+                    </a:lnR>
+                    <a:lnT w="12700" cap="flat" cmpd="sng" algn="ctr">
+                      <a:solidFill>
+                        <a:schemeClr val="tx1"/>
+                      </a:solidFill>
+                      <a:prstDash val="solid"/>
+                      <a:round/>
+                      <a:headEnd type="none" w="med" len="med"/>
+                      <a:tailEnd type="none" w="med" len="med"/>
+                    </a:lnT>
+                    <a:lnB w="12700" cap="flat" cmpd="sng" algn="ctr">
+                      <a:solidFill>
+                        <a:schemeClr val="tx1"/>
+                      </a:solidFill>
+                      <a:prstDash val="solid"/>
+                      <a:round/>
+                      <a:headEnd type="none" w="med" len="med"/>
+                      <a:tailEnd type="none" w="med" len="med"/>
+                    </a:lnB>
+                  </a:tcPr>
+                </a:tc>
+                <a:tc>
+                  <a:txBody>
+                    <a:bodyPr/>
+                    <a:lstStyle/>
+                    <a:p>
+                      <a:pPr algn="ctr"/>
+                      <a:r>
+                        <a:rPr lang="ko-KR" altLang="en-US" dirty="0" smtClean="0"/>
+                        <a:t>충전 완료 </a:t>
+                      </a:r>
+                      <a:r>
+                        <a:rPr lang="en-US" altLang="ko-KR" dirty="0" smtClean="0"/>
+                        <a:t>(</a:t>
+                      </a:r>
+                      <a:r>
+                        <a:rPr lang="ko-KR" altLang="en-US" dirty="0" err="1" smtClean="0"/>
+                        <a:t>전류차단</a:t>
+                      </a:r>
+                      <a:r>
+                        <a:rPr lang="en-US" altLang="ko-KR" dirty="0" smtClean="0"/>
+                        <a:t>)</a:t>
+                      </a:r>
+                      <a:endParaRPr lang="ko-KR" altLang="en-US" dirty="0"/>
+                    </a:p>
+                  </a:txBody>
+                  <a:tcPr anchor="ctr">
+                    <a:lnL w="12700" cap="flat" cmpd="sng" algn="ctr">
+                      <a:solidFill>
+                        <a:schemeClr val="tx1"/>
+                      </a:solidFill>
+                      <a:prstDash val="solid"/>
+                      <a:round/>
+                      <a:headEnd type="none" w="med" len="med"/>
+                      <a:tailEnd type="none" w="med" len="med"/>
+                    </a:lnL>
+                    <a:lnR w="12700" cap="flat" cmpd="sng" algn="ctr">
+                      <a:solidFill>
+                        <a:schemeClr val="tx1"/>
+                      </a:solidFill>
+                      <a:prstDash val="solid"/>
+                      <a:round/>
+                      <a:headEnd type="none" w="med" len="med"/>
+                      <a:tailEnd type="none" w="med" len="med"/>
+                    </a:lnR>
+                    <a:lnT w="12700" cap="flat" cmpd="sng" algn="ctr">
+                      <a:solidFill>
+                        <a:schemeClr val="tx1"/>
+                      </a:solidFill>
+                      <a:prstDash val="solid"/>
+                      <a:round/>
+                      <a:headEnd type="none" w="med" len="med"/>
+                      <a:tailEnd type="none" w="med" len="med"/>
+                    </a:lnT>
+                    <a:lnB w="12700" cap="flat" cmpd="sng" algn="ctr">
+                      <a:solidFill>
+                        <a:schemeClr val="tx1"/>
+                      </a:solidFill>
+                      <a:prstDash val="solid"/>
+                      <a:round/>
+                      <a:headEnd type="none" w="med" len="med"/>
+                      <a:tailEnd type="none" w="med" len="med"/>
+                    </a:lnB>
+                  </a:tcPr>
+                </a:tc>
+                <a:extLst>
+                  <a:ext uri="{0D108BD9-81ED-4DB2-BD59-A6C34878D82A}">
+                    <a16:rowId xmlns:a16="http://schemas.microsoft.com/office/drawing/2014/main" val="3971988941"/>
+                  </a:ext>
+                </a:extLst>
+              </a:tr>
+              <a:tr h="603956">
+                <a:tc>
+                  <a:txBody>
+                    <a:bodyPr/>
+                    <a:lstStyle/>
+                    <a:p>
+                      <a:pPr algn="ctr"/>
+                      <a:r>
+                        <a:rPr lang="en-US" altLang="ko-KR" dirty="0" smtClean="0"/>
+                        <a:t>X</a:t>
+                      </a:r>
+                      <a:endParaRPr lang="ko-KR" altLang="en-US" dirty="0"/>
+                    </a:p>
+                  </a:txBody>
+                  <a:tcPr anchor="ctr">
+                    <a:lnL w="12700" cap="flat" cmpd="sng" algn="ctr">
+                      <a:solidFill>
+                        <a:schemeClr val="tx1"/>
+                      </a:solidFill>
+                      <a:prstDash val="solid"/>
+                      <a:round/>
+                      <a:headEnd type="none" w="med" len="med"/>
+                      <a:tailEnd type="none" w="med" len="med"/>
+                    </a:lnL>
+                    <a:lnR w="12700" cap="flat" cmpd="sng" algn="ctr">
+                      <a:solidFill>
+                        <a:schemeClr val="tx1"/>
+                      </a:solidFill>
+                      <a:prstDash val="solid"/>
+                      <a:round/>
+                      <a:headEnd type="none" w="med" len="med"/>
+                      <a:tailEnd type="none" w="med" len="med"/>
+                    </a:lnR>
+                    <a:lnT w="12700" cap="flat" cmpd="sng" algn="ctr">
+                      <a:solidFill>
+                        <a:schemeClr val="tx1"/>
+                      </a:solidFill>
+                      <a:prstDash val="solid"/>
+                      <a:round/>
+                      <a:headEnd type="none" w="med" len="med"/>
+                      <a:tailEnd type="none" w="med" len="med"/>
+                    </a:lnT>
+                    <a:lnB w="12700" cap="flat" cmpd="sng" algn="ctr">
+                      <a:solidFill>
+                        <a:schemeClr val="tx1"/>
+                      </a:solidFill>
+                      <a:prstDash val="solid"/>
+                      <a:round/>
+                      <a:headEnd type="none" w="med" len="med"/>
+                      <a:tailEnd type="none" w="med" len="med"/>
+                    </a:lnB>
+                  </a:tcPr>
+                </a:tc>
+                <a:tc>
+                  <a:txBody>
+                    <a:bodyPr/>
+                    <a:lstStyle/>
+                    <a:p>
+                      <a:pPr algn="ctr"/>
+                      <a:r>
+                        <a:rPr lang="ko-KR" altLang="en-US" dirty="0" smtClean="0"/>
+                        <a:t>전원 자체가 연결되지 않음</a:t>
+                      </a:r>
+                      <a:endParaRPr lang="ko-KR" altLang="en-US" dirty="0"/>
+                    </a:p>
+                  </a:txBody>
+                  <a:tcPr anchor="ctr">
+                    <a:lnL w="12700" cap="flat" cmpd="sng" algn="ctr">
+                      <a:solidFill>
+                        <a:schemeClr val="tx1"/>
+                      </a:solidFill>
+                      <a:prstDash val="solid"/>
+                      <a:round/>
+                      <a:headEnd type="none" w="med" len="med"/>
+                      <a:tailEnd type="none" w="med" len="med"/>
+                    </a:lnL>
+                    <a:lnR w="12700" cap="flat" cmpd="sng" algn="ctr">
+                      <a:solidFill>
+                        <a:schemeClr val="tx1"/>
+                      </a:solidFill>
+                      <a:prstDash val="solid"/>
+                      <a:round/>
+                      <a:headEnd type="none" w="med" len="med"/>
+                      <a:tailEnd type="none" w="med" len="med"/>
+                    </a:lnR>
+                    <a:lnT w="12700" cap="flat" cmpd="sng" algn="ctr">
+                      <a:solidFill>
+                        <a:schemeClr val="tx1"/>
+                      </a:solidFill>
+                      <a:prstDash val="solid"/>
+                      <a:round/>
+                      <a:headEnd type="none" w="med" len="med"/>
+                      <a:tailEnd type="none" w="med" len="med"/>
+                    </a:lnT>
+                    <a:lnB w="12700" cap="flat" cmpd="sng" algn="ctr">
+                      <a:solidFill>
+                        <a:schemeClr val="tx1"/>
+                      </a:solidFill>
+                      <a:prstDash val="solid"/>
+                      <a:round/>
+                      <a:headEnd type="none" w="med" len="med"/>
+                      <a:tailEnd type="none" w="med" len="med"/>
+                    </a:lnB>
+                  </a:tcPr>
+                </a:tc>
+                <a:extLst>
+                  <a:ext uri="{0D108BD9-81ED-4DB2-BD59-A6C34878D82A}">
+                    <a16:rowId xmlns:a16="http://schemas.microsoft.com/office/drawing/2014/main" val="2126744543"/>
+                  </a:ext>
+                </a:extLst>
+              </a:tr>
+            </a:tbl>
+          </a:graphicData>
+        </a:graphic>
+      </p:graphicFrame>
+    </p:spTree>
+    <p:extLst>
+      <p:ext uri="{BB962C8B-B14F-4D97-AF65-F5344CB8AC3E}">
+        <p14:creationId xmlns:p14="http://schemas.microsoft.com/office/powerpoint/2010/main" val="1591152959"/>
+      </p:ext>
+    </p:extLst>
+  </p:cSld>
+  <p:clrMapOvr>
+    <a:masterClrMapping/>
+  </p:clrMapOvr>
+</p:sld>
+</file>
+
+<file path=ppt/slides/slide7.xml><?xml version="1.0" encoding="utf-8"?>
+<p:sld xmlns:a="http://schemas.openxmlformats.org/drawingml/2006/main" xmlns:r="http://schemas.openxmlformats.org/officeDocument/2006/relationships" xmlns:p="http://schemas.openxmlformats.org/presentationml/2006/main">
+  <p:cSld>
+    <p:spTree>
+      <p:nvGrpSpPr>
+        <p:cNvPr id="1" name="">
+          <a:extLst>
+            <a:ext uri="{FF2B5EF4-FFF2-40B4-BE49-F238E27FC236}">
+              <a16:creationId xmlns:a16="http://schemas.microsoft.com/office/drawing/2014/main" id="{73323048-0E7C-81F4-EDB2-C26A68B694F7}"/>
+            </a:ext>
+          </a:extLst>
+        </p:cNvPr>
+        <p:cNvGrpSpPr/>
+        <p:nvPr/>
+      </p:nvGrpSpPr>
+      <p:grpSpPr>
+        <a:xfrm>
+          <a:off x="0" y="0"/>
+          <a:ext cx="0" cy="0"/>
+          <a:chOff x="0" y="0"/>
+          <a:chExt cx="0" cy="0"/>
+        </a:xfrm>
+      </p:grpSpPr>
+      <p:sp>
+        <p:nvSpPr>
+          <p:cNvPr id="2" name="제목 1">
+            <a:extLst>
+              <a:ext uri="{FF2B5EF4-FFF2-40B4-BE49-F238E27FC236}">
+                <a16:creationId xmlns:a16="http://schemas.microsoft.com/office/drawing/2014/main" id="{8C1CA3F3-BC8A-9ED6-91C7-E8F88E103210}"/>
+              </a:ext>
+            </a:extLst>
+          </p:cNvPr>
+          <p:cNvSpPr>
+            <a:spLocks noGrp="1"/>
+          </p:cNvSpPr>
+          <p:nvPr>
+            <p:ph type="title"/>
+          </p:nvPr>
+        </p:nvSpPr>
+        <p:spPr>
+          <a:xfrm>
+            <a:off x="548279" y="195305"/>
+            <a:ext cx="10515600" cy="1325563"/>
+          </a:xfrm>
+        </p:spPr>
+        <p:txBody>
+          <a:bodyPr/>
+          <a:lstStyle/>
+          <a:p>
+            <a:r>
+              <a:rPr lang="ko-KR" altLang="en-US" dirty="0" smtClean="0"/>
+              <a:t>주의할 점</a:t>
+            </a:r>
+            <a:r>
+              <a:rPr lang="en-US" altLang="ko-KR" dirty="0" smtClean="0"/>
+              <a:t>!</a:t>
+            </a:r>
+            <a:endParaRPr lang="ko-KR" altLang="en-US" dirty="0"/>
+          </a:p>
+        </p:txBody>
+      </p:sp>
+      <p:sp>
+        <p:nvSpPr>
+          <p:cNvPr id="4" name="슬라이드 번호 개체 틀 3">
+            <a:extLst>
+              <a:ext uri="{FF2B5EF4-FFF2-40B4-BE49-F238E27FC236}">
+                <a16:creationId xmlns:a16="http://schemas.microsoft.com/office/drawing/2014/main" id="{B8CD53B4-2E10-EFC9-242E-AE22A0A91EEA}"/>
+              </a:ext>
+            </a:extLst>
+          </p:cNvPr>
+          <p:cNvSpPr>
+            <a:spLocks noGrp="1"/>
+          </p:cNvSpPr>
+          <p:nvPr>
+            <p:ph type="sldNum" sz="quarter" idx="12"/>
+          </p:nvPr>
+        </p:nvSpPr>
+        <p:spPr/>
+        <p:txBody>
+          <a:bodyPr/>
+          <a:lstStyle/>
+          <a:p>
+            <a:fld id="{083A2CE0-18CD-4102-B738-4ACFF9E68BA4}" type="slidenum">
+              <a:rPr lang="ko-KR" altLang="en-US" smtClean="0"/>
+              <a:pPr/>
+              <a:t>7</a:t>
+            </a:fld>
+            <a:endParaRPr lang="ko-KR" altLang="en-US" dirty="0"/>
+          </a:p>
+        </p:txBody>
+      </p:sp>
+      <p:sp>
+        <p:nvSpPr>
+          <p:cNvPr id="7" name="내용 개체 틀 5">
+            <a:extLst>
+              <a:ext uri="{FF2B5EF4-FFF2-40B4-BE49-F238E27FC236}">
+                <a16:creationId xmlns:a16="http://schemas.microsoft.com/office/drawing/2014/main" id="{6F5F1D67-538B-EC24-96FC-E3C038EE0911}"/>
+              </a:ext>
+            </a:extLst>
+          </p:cNvPr>
+          <p:cNvSpPr txBox="1">
+            <a:spLocks/>
+          </p:cNvSpPr>
+          <p:nvPr/>
+        </p:nvSpPr>
+        <p:spPr>
+          <a:xfrm>
+            <a:off x="838200" y="5448299"/>
+            <a:ext cx="10515600" cy="728663"/>
+          </a:xfrm>
+          <a:prstGeom prst="rect">
+            <a:avLst/>
+          </a:prstGeom>
+        </p:spPr>
+        <p:txBody>
+          <a:bodyPr vert="horz" lIns="91440" tIns="45720" rIns="91440" bIns="45720" rtlCol="0">
+            <a:normAutofit/>
+          </a:bodyPr>
+          <a:lstStyle>
+            <a:lvl1pPr marL="228600" indent="-228600" algn="l" defTabSz="914400" rtl="0" eaLnBrk="1" latinLnBrk="1" hangingPunct="1">
+              <a:lnSpc>
+                <a:spcPct val="120000"/>
+              </a:lnSpc>
+              <a:spcBef>
+                <a:spcPts val="1000"/>
+              </a:spcBef>
+              <a:buFont typeface="Arial" panose="020B0604020202020204" pitchFamily="34" charset="0"/>
+              <a:buChar char="•"/>
+              <a:defRPr sz="2400" kern="1200">
+                <a:solidFill>
+                  <a:schemeClr val="tx1"/>
+                </a:solidFill>
+                <a:latin typeface="G마켓 산스 TTF Medium" panose="02000000000000000000" pitchFamily="2" charset="-127"/>
+                <a:ea typeface="G마켓 산스 TTF Medium" panose="02000000000000000000" pitchFamily="2" charset="-127"/>
+                <a:cs typeface="+mn-cs"/>
+              </a:defRPr>
+            </a:lvl1pPr>
+            <a:lvl2pPr marL="685800" indent="-228600" algn="l" defTabSz="914400" rtl="0" eaLnBrk="1" latinLnBrk="1" hangingPunct="1">
+              <a:lnSpc>
+                <a:spcPct val="120000"/>
+              </a:lnSpc>
+              <a:spcBef>
+                <a:spcPts val="500"/>
+              </a:spcBef>
+              <a:buFont typeface="Arial" panose="020B0604020202020204" pitchFamily="34" charset="0"/>
+              <a:buChar char="•"/>
+              <a:defRPr sz="2000" kern="1200">
+                <a:solidFill>
+                  <a:schemeClr val="tx1"/>
+                </a:solidFill>
+                <a:latin typeface="G마켓 산스 TTF Medium" panose="02000000000000000000" pitchFamily="2" charset="-127"/>
+                <a:ea typeface="G마켓 산스 TTF Medium" panose="02000000000000000000" pitchFamily="2" charset="-127"/>
+                <a:cs typeface="+mn-cs"/>
+              </a:defRPr>
+            </a:lvl2pPr>
+            <a:lvl3pPr marL="1143000" indent="-228600" algn="l" defTabSz="914400" rtl="0" eaLnBrk="1" latinLnBrk="1" hangingPunct="1">
+              <a:lnSpc>
+                <a:spcPct val="120000"/>
+              </a:lnSpc>
+              <a:spcBef>
+                <a:spcPts val="500"/>
+              </a:spcBef>
+              <a:buFont typeface="Arial" panose="020B0604020202020204" pitchFamily="34" charset="0"/>
+              <a:buChar char="•"/>
+              <a:defRPr sz="1800" kern="1200">
+                <a:solidFill>
+                  <a:schemeClr val="tx1"/>
+                </a:solidFill>
+                <a:latin typeface="G마켓 산스 TTF Medium" panose="02000000000000000000" pitchFamily="2" charset="-127"/>
+                <a:ea typeface="G마켓 산스 TTF Medium" panose="02000000000000000000" pitchFamily="2" charset="-127"/>
+                <a:cs typeface="+mn-cs"/>
+              </a:defRPr>
+            </a:lvl3pPr>
+            <a:lvl4pPr marL="1600200" indent="-228600" algn="l" defTabSz="914400" rtl="0" eaLnBrk="1" latinLnBrk="1" hangingPunct="1">
+              <a:lnSpc>
+                <a:spcPct val="120000"/>
+              </a:lnSpc>
+              <a:spcBef>
+                <a:spcPts val="500"/>
+              </a:spcBef>
+              <a:buFont typeface="Arial" panose="020B0604020202020204" pitchFamily="34" charset="0"/>
+              <a:buChar char="•"/>
+              <a:defRPr sz="1600" kern="1200">
+                <a:solidFill>
+                  <a:schemeClr val="tx1"/>
+                </a:solidFill>
+                <a:latin typeface="G마켓 산스 TTF Medium" panose="02000000000000000000" pitchFamily="2" charset="-127"/>
+                <a:ea typeface="G마켓 산스 TTF Medium" panose="02000000000000000000" pitchFamily="2" charset="-127"/>
+                <a:cs typeface="+mn-cs"/>
+              </a:defRPr>
+            </a:lvl4pPr>
+            <a:lvl5pPr marL="2057400" indent="-228600" algn="l" defTabSz="914400" rtl="0" eaLnBrk="1" latinLnBrk="1" hangingPunct="1">
+              <a:lnSpc>
+                <a:spcPct val="120000"/>
+              </a:lnSpc>
+              <a:spcBef>
+                <a:spcPts val="500"/>
+              </a:spcBef>
+              <a:buFont typeface="Arial" panose="020B0604020202020204" pitchFamily="34" charset="0"/>
+              <a:buChar char="•"/>
+              <a:defRPr sz="1600" kern="1200">
+                <a:solidFill>
+                  <a:schemeClr val="tx1"/>
+                </a:solidFill>
+                <a:latin typeface="G마켓 산스 TTF Medium" panose="02000000000000000000" pitchFamily="2" charset="-127"/>
+                <a:ea typeface="G마켓 산스 TTF Medium" panose="02000000000000000000" pitchFamily="2" charset="-127"/>
+                <a:cs typeface="+mn-cs"/>
+              </a:defRPr>
+            </a:lvl5pPr>
+            <a:lvl6pPr marL="2514600" indent="-228600" algn="l" defTabSz="914400" rtl="0" eaLnBrk="1" latinLnBrk="1" hangingPunct="1">
+              <a:lnSpc>
+                <a:spcPct val="90000"/>
+              </a:lnSpc>
+              <a:spcBef>
+                <a:spcPts val="500"/>
+              </a:spcBef>
+              <a:buFont typeface="Arial" panose="020B0604020202020204" pitchFamily="34" charset="0"/>
+              <a:buChar char="•"/>
+              <a:defRPr sz="1800" kern="1200">
+                <a:solidFill>
+                  <a:schemeClr val="tx1"/>
+                </a:solidFill>
+                <a:latin typeface="+mn-lt"/>
+                <a:ea typeface="+mn-ea"/>
+                <a:cs typeface="+mn-cs"/>
+              </a:defRPr>
+            </a:lvl6pPr>
+            <a:lvl7pPr marL="2971800" indent="-228600" algn="l" defTabSz="914400" rtl="0" eaLnBrk="1" latinLnBrk="1" hangingPunct="1">
+              <a:lnSpc>
+                <a:spcPct val="90000"/>
+              </a:lnSpc>
+              <a:spcBef>
+                <a:spcPts val="500"/>
+              </a:spcBef>
+              <a:buFont typeface="Arial" panose="020B0604020202020204" pitchFamily="34" charset="0"/>
+              <a:buChar char="•"/>
+              <a:defRPr sz="1800" kern="1200">
+                <a:solidFill>
+                  <a:schemeClr val="tx1"/>
+                </a:solidFill>
+                <a:latin typeface="+mn-lt"/>
+                <a:ea typeface="+mn-ea"/>
+                <a:cs typeface="+mn-cs"/>
+              </a:defRPr>
+            </a:lvl7pPr>
+            <a:lvl8pPr marL="3429000" indent="-228600" algn="l" defTabSz="914400" rtl="0" eaLnBrk="1" latinLnBrk="1" hangingPunct="1">
+              <a:lnSpc>
+                <a:spcPct val="90000"/>
+              </a:lnSpc>
+              <a:spcBef>
+                <a:spcPts val="500"/>
+              </a:spcBef>
+              <a:buFont typeface="Arial" panose="020B0604020202020204" pitchFamily="34" charset="0"/>
+              <a:buChar char="•"/>
+              <a:defRPr sz="1800" kern="1200">
+                <a:solidFill>
+                  <a:schemeClr val="tx1"/>
+                </a:solidFill>
+                <a:latin typeface="+mn-lt"/>
+                <a:ea typeface="+mn-ea"/>
+                <a:cs typeface="+mn-cs"/>
+              </a:defRPr>
+            </a:lvl8pPr>
+            <a:lvl9pPr marL="3886200" indent="-228600" algn="l" defTabSz="914400" rtl="0" eaLnBrk="1" latinLnBrk="1" hangingPunct="1">
+              <a:lnSpc>
+                <a:spcPct val="90000"/>
+              </a:lnSpc>
+              <a:spcBef>
+                <a:spcPts val="500"/>
+              </a:spcBef>
+              <a:buFont typeface="Arial" panose="020B0604020202020204" pitchFamily="34" charset="0"/>
+              <a:buChar char="•"/>
+              <a:defRPr sz="1800" kern="1200">
+                <a:solidFill>
+                  <a:schemeClr val="tx1"/>
+                </a:solidFill>
+                <a:latin typeface="+mn-lt"/>
+                <a:ea typeface="+mn-ea"/>
+                <a:cs typeface="+mn-cs"/>
+              </a:defRPr>
+            </a:lvl9pPr>
+          </a:lstStyle>
+          <a:p>
+            <a:pPr marL="0" indent="0" algn="ctr">
+              <a:buFont typeface="Arial" panose="020B0604020202020204" pitchFamily="34" charset="0"/>
+              <a:buNone/>
+            </a:pPr>
+            <a:endParaRPr lang="ko-KR" altLang="en-US" dirty="0"/>
+          </a:p>
+        </p:txBody>
+      </p:sp>
+      <p:pic>
+        <p:nvPicPr>
+          <p:cNvPr id="8" name="Picture 8" descr="리튬폴리머 배터리 3.7V, 3000mAh, KC인증 : 리튬전지 &gt; 파워/전원">
+            <a:extLst>
+              <a:ext uri="{FF2B5EF4-FFF2-40B4-BE49-F238E27FC236}">
+                <a16:creationId xmlns:a16="http://schemas.microsoft.com/office/drawing/2014/main" id="{960413FD-9749-A63D-91F0-AD839FA8CEF1}"/>
+              </a:ext>
+            </a:extLst>
+          </p:cNvPr>
+          <p:cNvPicPr>
+            <a:picLocks noChangeAspect="1" noChangeArrowheads="1"/>
+          </p:cNvPicPr>
+          <p:nvPr/>
+        </p:nvPicPr>
+        <p:blipFill rotWithShape="1">
+          <a:blip r:embed="rId2">
+            <a:extLst>
+              <a:ext uri="{28A0092B-C50C-407E-A947-70E740481C1C}">
+                <a14:useLocalDpi xmlns:a14="http://schemas.microsoft.com/office/drawing/2010/main" val="0"/>
+              </a:ext>
+            </a:extLst>
+          </a:blip>
+          <a:srcRect l="19397" t="18848" r="22399" b="17314"/>
+          <a:stretch/>
+        </p:blipFill>
+        <p:spPr bwMode="auto">
+          <a:xfrm>
+            <a:off x="1349115" y="1958103"/>
+            <a:ext cx="3182236" cy="3490196"/>
+          </a:xfrm>
+          <a:prstGeom prst="rect">
+            <a:avLst/>
+          </a:prstGeom>
+          <a:noFill/>
+          <a:extLst>
+            <a:ext uri="{909E8E84-426E-40DD-AFC4-6F175D3DCCD1}">
+              <a14:hiddenFill xmlns:a14="http://schemas.microsoft.com/office/drawing/2010/main">
+                <a:solidFill>
+                  <a:srgbClr val="FFFFFF"/>
+                </a:solidFill>
+              </a14:hiddenFill>
+            </a:ext>
+          </a:extLst>
+        </p:spPr>
+      </p:pic>
+      <p:sp>
+        <p:nvSpPr>
+          <p:cNvPr id="9" name="내용 개체 틀 2">
+            <a:extLst>
+              <a:ext uri="{FF2B5EF4-FFF2-40B4-BE49-F238E27FC236}">
+                <a16:creationId xmlns:a16="http://schemas.microsoft.com/office/drawing/2014/main" id="{FE00FF03-7862-5E1C-8F96-8762AB6CB938}"/>
+              </a:ext>
+            </a:extLst>
+          </p:cNvPr>
+          <p:cNvSpPr>
+            <a:spLocks noGrp="1"/>
+          </p:cNvSpPr>
+          <p:nvPr>
+            <p:ph idx="1"/>
+          </p:nvPr>
+        </p:nvSpPr>
+        <p:spPr>
+          <a:xfrm>
+            <a:off x="5603760" y="1884556"/>
+            <a:ext cx="5861280" cy="4292406"/>
+          </a:xfrm>
+        </p:spPr>
+        <p:txBody>
+          <a:bodyPr>
+            <a:normAutofit/>
+          </a:bodyPr>
+          <a:lstStyle/>
+          <a:p>
+            <a:r>
+              <a:rPr lang="ko-KR" altLang="en-US" sz="2000" dirty="0" smtClean="0"/>
+              <a:t>리튬 배터리의 경우</a:t>
+            </a:r>
+            <a:r>
+              <a:rPr lang="en-US" altLang="ko-KR" sz="2000" dirty="0" smtClean="0"/>
+              <a:t>, </a:t>
+            </a:r>
+            <a:r>
+              <a:rPr lang="ko-KR" altLang="en-US" sz="2000" dirty="0" smtClean="0"/>
+              <a:t>항상 </a:t>
+            </a:r>
+            <a:r>
+              <a:rPr lang="en-US" altLang="ko-KR" sz="2000" dirty="0" smtClean="0"/>
+              <a:t>3.0 ~ 4.2V </a:t>
+            </a:r>
+            <a:r>
+              <a:rPr lang="ko-KR" altLang="en-US" sz="2000" dirty="0" smtClean="0"/>
+              <a:t>사이에서 변하는 전원이다</a:t>
+            </a:r>
+            <a:r>
+              <a:rPr lang="en-US" altLang="ko-KR" sz="2000" dirty="0" smtClean="0"/>
+              <a:t>.</a:t>
+            </a:r>
+          </a:p>
+          <a:p>
+            <a:r>
+              <a:rPr lang="ko-KR" altLang="en-US" sz="2000" dirty="0" smtClean="0"/>
+              <a:t>즉</a:t>
+            </a:r>
+            <a:r>
+              <a:rPr lang="en-US" altLang="ko-KR" sz="2000" dirty="0" smtClean="0"/>
+              <a:t>, 5V</a:t>
+            </a:r>
+            <a:r>
+              <a:rPr lang="ko-KR" altLang="en-US" sz="2000" dirty="0" smtClean="0"/>
+              <a:t>보다 낮기 때문에 </a:t>
+            </a:r>
+            <a:r>
+              <a:rPr lang="ko-KR" altLang="en-US" sz="2000" dirty="0" err="1" smtClean="0"/>
+              <a:t>아두이노</a:t>
+            </a:r>
+            <a:r>
+              <a:rPr lang="ko-KR" altLang="en-US" sz="2000" dirty="0" smtClean="0"/>
+              <a:t> </a:t>
+            </a:r>
+            <a:r>
+              <a:rPr lang="ko-KR" altLang="en-US" sz="2000" dirty="0" err="1" smtClean="0"/>
+              <a:t>우노</a:t>
+            </a:r>
+            <a:r>
+              <a:rPr lang="ko-KR" altLang="en-US" sz="2000" dirty="0" smtClean="0"/>
+              <a:t> 보드에서 필요로 하는 전압</a:t>
+            </a:r>
+            <a:r>
+              <a:rPr lang="en-US" altLang="ko-KR" sz="2000" dirty="0" smtClean="0"/>
+              <a:t>(5V)</a:t>
+            </a:r>
+            <a:r>
+              <a:rPr lang="ko-KR" altLang="en-US" sz="2000" dirty="0" smtClean="0"/>
+              <a:t>을 직접 공급하지 못한다</a:t>
+            </a:r>
+            <a:r>
+              <a:rPr lang="en-US" altLang="ko-KR" sz="2000" dirty="0" smtClean="0"/>
+              <a:t>.</a:t>
+            </a:r>
+          </a:p>
+          <a:p>
+            <a:r>
+              <a:rPr lang="en-US" altLang="ko-KR" sz="2000" dirty="0" smtClean="0"/>
+              <a:t>3.7V</a:t>
+            </a:r>
+            <a:r>
+              <a:rPr lang="ko-KR" altLang="en-US" sz="2000" dirty="0" smtClean="0"/>
+              <a:t>를 안정된 </a:t>
+            </a:r>
+            <a:r>
+              <a:rPr lang="en-US" altLang="ko-KR" sz="2000" dirty="0" smtClean="0"/>
+              <a:t>5V</a:t>
+            </a:r>
+            <a:r>
+              <a:rPr lang="ko-KR" altLang="en-US" sz="2000" dirty="0" smtClean="0"/>
+              <a:t>로 전압을 올려주는 </a:t>
+            </a:r>
+            <a:r>
+              <a:rPr lang="ko-KR" altLang="en-US" sz="2000" dirty="0" err="1" smtClean="0"/>
+              <a:t>승압</a:t>
+            </a:r>
+            <a:r>
+              <a:rPr lang="ko-KR" altLang="en-US" sz="2000" dirty="0" smtClean="0"/>
+              <a:t> 모듈</a:t>
+            </a:r>
+            <a:r>
+              <a:rPr lang="en-US" altLang="ko-KR" sz="2000" dirty="0" smtClean="0"/>
+              <a:t>(ex. MT3608) </a:t>
+            </a:r>
+            <a:r>
+              <a:rPr lang="ko-KR" altLang="en-US" sz="2000" dirty="0" smtClean="0"/>
+              <a:t>필요</a:t>
+            </a:r>
+            <a:endParaRPr lang="en-US" altLang="ko-KR" sz="2000" dirty="0"/>
+          </a:p>
+        </p:txBody>
+      </p:sp>
+    </p:spTree>
+    <p:extLst>
+      <p:ext uri="{BB962C8B-B14F-4D97-AF65-F5344CB8AC3E}">
+        <p14:creationId xmlns:p14="http://schemas.microsoft.com/office/powerpoint/2010/main" val="1826270212"/>
+      </p:ext>
+    </p:extLst>
+  </p:cSld>
+  <p:clrMapOvr>
+    <a:masterClrMapping/>
+  </p:clrMapOvr>
+</p:sld>
+</file>
+
+<file path=ppt/slides/slide8.xml><?xml version="1.0" encoding="utf-8"?>
 <p:sld xmlns:a="http://schemas.openxmlformats.org/drawingml/2006/main" xmlns:r="http://schemas.openxmlformats.org/officeDocument/2006/relationships" xmlns:p="http://schemas.openxmlformats.org/presentationml/2006/main">
   <p:cSld>
     <p:spTree>
@@ -7494,7 +9928,7 @@
           <p:nvPr/>
         </p:nvPicPr>
         <p:blipFill rotWithShape="1">
-          <a:blip r:embed="rId3">
+          <a:blip r:embed="rId3" cstate="hqprint">
             <a:extLst>
               <a:ext uri="{28A0092B-C50C-407E-A947-70E740481C1C}">
                 <a14:useLocalDpi xmlns:a14="http://schemas.microsoft.com/office/drawing/2010/main" val="0"/>
@@ -7586,7 +10020,7 @@
 </p:sld>
 </file>
 
-<file path=ppt/slides/slide6.xml><?xml version="1.0" encoding="utf-8"?>
+<file path=ppt/slides/slide9.xml><?xml version="1.0" encoding="utf-8"?>
 <p:sld xmlns:a="http://schemas.openxmlformats.org/drawingml/2006/main" xmlns:r="http://schemas.openxmlformats.org/officeDocument/2006/relationships" xmlns:p="http://schemas.openxmlformats.org/presentationml/2006/main">
   <p:cSld>
     <p:spTree>
@@ -7842,982 +10276,6 @@
     <p:extLst>
       <p:ext uri="{BB962C8B-B14F-4D97-AF65-F5344CB8AC3E}">
         <p14:creationId xmlns:p14="http://schemas.microsoft.com/office/powerpoint/2010/main" val="1080240830"/>
-      </p:ext>
-    </p:extLst>
-  </p:cSld>
-  <p:clrMapOvr>
-    <a:masterClrMapping/>
-  </p:clrMapOvr>
-</p:sld>
-</file>
-
-<file path=ppt/slides/slide7.xml><?xml version="1.0" encoding="utf-8"?>
-<p:sld xmlns:a="http://schemas.openxmlformats.org/drawingml/2006/main" xmlns:r="http://schemas.openxmlformats.org/officeDocument/2006/relationships" xmlns:p="http://schemas.openxmlformats.org/presentationml/2006/main">
-  <p:cSld>
-    <p:spTree>
-      <p:nvGrpSpPr>
-        <p:cNvPr id="1" name="">
-          <a:extLst>
-            <a:ext uri="{FF2B5EF4-FFF2-40B4-BE49-F238E27FC236}">
-              <a16:creationId xmlns:a16="http://schemas.microsoft.com/office/drawing/2014/main" id="{979AC403-510B-BE9C-B1F3-EE4F24345F78}"/>
-            </a:ext>
-          </a:extLst>
-        </p:cNvPr>
-        <p:cNvGrpSpPr/>
-        <p:nvPr/>
-      </p:nvGrpSpPr>
-      <p:grpSpPr>
-        <a:xfrm>
-          <a:off x="0" y="0"/>
-          <a:ext cx="0" cy="0"/>
-          <a:chOff x="0" y="0"/>
-          <a:chExt cx="0" cy="0"/>
-        </a:xfrm>
-      </p:grpSpPr>
-      <p:sp>
-        <p:nvSpPr>
-          <p:cNvPr id="2" name="제목 1">
-            <a:extLst>
-              <a:ext uri="{FF2B5EF4-FFF2-40B4-BE49-F238E27FC236}">
-                <a16:creationId xmlns:a16="http://schemas.microsoft.com/office/drawing/2014/main" id="{B081F832-041A-DA3A-5A26-F7B4A23D1BF6}"/>
-              </a:ext>
-            </a:extLst>
-          </p:cNvPr>
-          <p:cNvSpPr>
-            <a:spLocks noGrp="1"/>
-          </p:cNvSpPr>
-          <p:nvPr>
-            <p:ph type="title"/>
-          </p:nvPr>
-        </p:nvSpPr>
-        <p:spPr/>
-        <p:txBody>
-          <a:bodyPr/>
-          <a:lstStyle/>
-          <a:p>
-            <a:r>
-              <a:rPr lang="ko-KR" altLang="en-US" dirty="0"/>
-              <a:t>초음파 센서</a:t>
-            </a:r>
-            <a:r>
-              <a:rPr lang="en-US" altLang="ko-KR" dirty="0"/>
-              <a:t> </a:t>
-            </a:r>
-            <a:r>
-              <a:rPr lang="ko-KR" altLang="en-US" dirty="0"/>
-              <a:t>실습 </a:t>
-            </a:r>
-            <a:r>
-              <a:rPr lang="en-US" altLang="ko-KR" dirty="0"/>
-              <a:t>Quiz</a:t>
-            </a:r>
-            <a:endParaRPr lang="ko-KR" altLang="en-US" dirty="0"/>
-          </a:p>
-        </p:txBody>
-      </p:sp>
-      <p:sp>
-        <p:nvSpPr>
-          <p:cNvPr id="5" name="내용 개체 틀 5">
-            <a:extLst>
-              <a:ext uri="{FF2B5EF4-FFF2-40B4-BE49-F238E27FC236}">
-                <a16:creationId xmlns:a16="http://schemas.microsoft.com/office/drawing/2014/main" id="{4538F2DD-2840-B570-FA70-BE07ED48FFFA}"/>
-              </a:ext>
-            </a:extLst>
-          </p:cNvPr>
-          <p:cNvSpPr>
-            <a:spLocks noGrp="1"/>
-          </p:cNvSpPr>
-          <p:nvPr>
-            <p:ph idx="1"/>
-          </p:nvPr>
-        </p:nvSpPr>
-        <p:spPr>
-          <a:xfrm>
-            <a:off x="838200" y="1549839"/>
-            <a:ext cx="10515600" cy="4627124"/>
-          </a:xfrm>
-        </p:spPr>
-        <p:txBody>
-          <a:bodyPr/>
-          <a:lstStyle/>
-          <a:p>
-            <a:pPr marL="0" indent="0">
-              <a:buNone/>
-            </a:pPr>
-            <a:r>
-              <a:rPr lang="ko-KR" altLang="en-US" dirty="0"/>
-              <a:t>초음파 센서를 통해 가까운 물체가 감지될 시</a:t>
-            </a:r>
-            <a:r>
-              <a:rPr lang="en-US" altLang="ko-KR" dirty="0"/>
-              <a:t>, </a:t>
-            </a:r>
-            <a:r>
-              <a:rPr lang="ko-KR" altLang="en-US" dirty="0"/>
-              <a:t>빨간 </a:t>
-            </a:r>
-            <a:r>
-              <a:rPr lang="en-US" altLang="ko-KR" dirty="0"/>
-              <a:t>LED</a:t>
-            </a:r>
-            <a:r>
-              <a:rPr lang="ko-KR" altLang="en-US" dirty="0"/>
-              <a:t>의 불을 켜고 </a:t>
-            </a:r>
-            <a:r>
-              <a:rPr lang="ko-KR" altLang="en-US" dirty="0" err="1"/>
-              <a:t>피에조</a:t>
-            </a:r>
-            <a:r>
-              <a:rPr lang="ko-KR" altLang="en-US" dirty="0"/>
-              <a:t> </a:t>
-            </a:r>
-            <a:r>
-              <a:rPr lang="ko-KR" altLang="en-US" dirty="0" err="1"/>
-              <a:t>부저를</a:t>
-            </a:r>
-            <a:r>
-              <a:rPr lang="ko-KR" altLang="en-US" dirty="0"/>
-              <a:t> 통해 경고음을 </a:t>
-            </a:r>
-            <a:r>
-              <a:rPr lang="ko-KR" altLang="en-US" dirty="0" err="1"/>
-              <a:t>울리시오</a:t>
-            </a:r>
-            <a:r>
-              <a:rPr lang="en-US" altLang="ko-KR" dirty="0"/>
-              <a:t>.</a:t>
-            </a:r>
-          </a:p>
-        </p:txBody>
-      </p:sp>
-      <p:pic>
-        <p:nvPicPr>
-          <p:cNvPr id="4" name="Picture 2" descr="아두이노]Breadboard Jumper Cables(20P-SET) 점퍼 케이블 (M1000006992)">
-            <a:extLst>
-              <a:ext uri="{FF2B5EF4-FFF2-40B4-BE49-F238E27FC236}">
-                <a16:creationId xmlns:a16="http://schemas.microsoft.com/office/drawing/2014/main" id="{7C334408-BC2C-74DD-0A9B-848CA5407049}"/>
-              </a:ext>
-            </a:extLst>
-          </p:cNvPr>
-          <p:cNvPicPr>
-            <a:picLocks noChangeAspect="1" noChangeArrowheads="1"/>
-          </p:cNvPicPr>
-          <p:nvPr/>
-        </p:nvPicPr>
-        <p:blipFill>
-          <a:blip r:embed="rId3">
-            <a:extLst>
-              <a:ext uri="{28A0092B-C50C-407E-A947-70E740481C1C}">
-                <a14:useLocalDpi xmlns:a14="http://schemas.microsoft.com/office/drawing/2010/main" val="0"/>
-              </a:ext>
-            </a:extLst>
-          </a:blip>
-          <a:srcRect/>
-          <a:stretch>
-            <a:fillRect/>
-          </a:stretch>
-        </p:blipFill>
-        <p:spPr bwMode="auto">
-          <a:xfrm>
-            <a:off x="4798165" y="4324888"/>
-            <a:ext cx="1940813" cy="1940813"/>
-          </a:xfrm>
-          <a:prstGeom prst="rect">
-            <a:avLst/>
-          </a:prstGeom>
-          <a:noFill/>
-          <a:extLst>
-            <a:ext uri="{909E8E84-426E-40DD-AFC4-6F175D3DCCD1}">
-              <a14:hiddenFill xmlns:a14="http://schemas.microsoft.com/office/drawing/2010/main">
-                <a:solidFill>
-                  <a:srgbClr val="FFFFFF"/>
-                </a:solidFill>
-              </a14:hiddenFill>
-            </a:ext>
-          </a:extLst>
-        </p:spPr>
-      </p:pic>
-      <p:pic>
-        <p:nvPicPr>
-          <p:cNvPr id="6" name="그림 5">
-            <a:extLst>
-              <a:ext uri="{FF2B5EF4-FFF2-40B4-BE49-F238E27FC236}">
-                <a16:creationId xmlns:a16="http://schemas.microsoft.com/office/drawing/2014/main" id="{9ED54D7F-F36C-2708-957C-49E139DB916B}"/>
-              </a:ext>
-            </a:extLst>
-          </p:cNvPr>
-          <p:cNvPicPr>
-            <a:picLocks noChangeAspect="1"/>
-          </p:cNvPicPr>
-          <p:nvPr/>
-        </p:nvPicPr>
-        <p:blipFill>
-          <a:blip r:embed="rId4"/>
-          <a:stretch>
-            <a:fillRect/>
-          </a:stretch>
-        </p:blipFill>
-        <p:spPr>
-          <a:xfrm>
-            <a:off x="2361902" y="2704225"/>
-            <a:ext cx="1619476" cy="1095528"/>
-          </a:xfrm>
-          <a:prstGeom prst="rect">
-            <a:avLst/>
-          </a:prstGeom>
-        </p:spPr>
-      </p:pic>
-      <p:pic>
-        <p:nvPicPr>
-          <p:cNvPr id="7" name="그림 6">
-            <a:extLst>
-              <a:ext uri="{FF2B5EF4-FFF2-40B4-BE49-F238E27FC236}">
-                <a16:creationId xmlns:a16="http://schemas.microsoft.com/office/drawing/2014/main" id="{672F320F-B20D-258F-6BA0-60B157243CFD}"/>
-              </a:ext>
-            </a:extLst>
-          </p:cNvPr>
-          <p:cNvPicPr>
-            <a:picLocks noChangeAspect="1"/>
-          </p:cNvPicPr>
-          <p:nvPr/>
-        </p:nvPicPr>
-        <p:blipFill>
-          <a:blip r:embed="rId5"/>
-          <a:stretch>
-            <a:fillRect/>
-          </a:stretch>
-        </p:blipFill>
-        <p:spPr>
-          <a:xfrm>
-            <a:off x="7415578" y="2672215"/>
-            <a:ext cx="2522922" cy="959005"/>
-          </a:xfrm>
-          <a:prstGeom prst="rect">
-            <a:avLst/>
-          </a:prstGeom>
-        </p:spPr>
-      </p:pic>
-      <p:sp>
-        <p:nvSpPr>
-          <p:cNvPr id="9" name="TextBox 8">
-            <a:extLst>
-              <a:ext uri="{FF2B5EF4-FFF2-40B4-BE49-F238E27FC236}">
-                <a16:creationId xmlns:a16="http://schemas.microsoft.com/office/drawing/2014/main" id="{C7E3A299-C3E7-DF93-563E-5F69B3576D1C}"/>
-              </a:ext>
-            </a:extLst>
-          </p:cNvPr>
-          <p:cNvSpPr txBox="1"/>
-          <p:nvPr/>
-        </p:nvSpPr>
-        <p:spPr>
-          <a:xfrm>
-            <a:off x="7846273" y="3955556"/>
-            <a:ext cx="1661532" cy="369332"/>
-          </a:xfrm>
-          <a:prstGeom prst="rect">
-            <a:avLst/>
-          </a:prstGeom>
-          <a:noFill/>
-        </p:spPr>
-        <p:txBody>
-          <a:bodyPr wrap="square" rtlCol="0">
-            <a:spAutoFit/>
-          </a:bodyPr>
-          <a:lstStyle/>
-          <a:p>
-            <a:pPr algn="ctr"/>
-            <a:r>
-              <a:rPr lang="ko-KR" altLang="en-US" dirty="0" err="1"/>
-              <a:t>브레드</a:t>
-            </a:r>
-            <a:r>
-              <a:rPr lang="ko-KR" altLang="en-US" dirty="0"/>
-              <a:t> 보드</a:t>
-            </a:r>
-          </a:p>
-        </p:txBody>
-      </p:sp>
-      <p:sp>
-        <p:nvSpPr>
-          <p:cNvPr id="10" name="TextBox 9">
-            <a:extLst>
-              <a:ext uri="{FF2B5EF4-FFF2-40B4-BE49-F238E27FC236}">
-                <a16:creationId xmlns:a16="http://schemas.microsoft.com/office/drawing/2014/main" id="{C21962C1-EB2E-14E9-C60A-A5A480E3B2E2}"/>
-              </a:ext>
-            </a:extLst>
-          </p:cNvPr>
-          <p:cNvSpPr txBox="1"/>
-          <p:nvPr/>
-        </p:nvSpPr>
-        <p:spPr>
-          <a:xfrm>
-            <a:off x="4937805" y="6092354"/>
-            <a:ext cx="1661532" cy="369332"/>
-          </a:xfrm>
-          <a:prstGeom prst="rect">
-            <a:avLst/>
-          </a:prstGeom>
-          <a:noFill/>
-        </p:spPr>
-        <p:txBody>
-          <a:bodyPr wrap="square" rtlCol="0">
-            <a:spAutoFit/>
-          </a:bodyPr>
-          <a:lstStyle/>
-          <a:p>
-            <a:pPr algn="ctr"/>
-            <a:r>
-              <a:rPr lang="ko-KR" altLang="en-US" dirty="0"/>
-              <a:t>점퍼 케이블</a:t>
-            </a:r>
-          </a:p>
-        </p:txBody>
-      </p:sp>
-      <p:sp>
-        <p:nvSpPr>
-          <p:cNvPr id="12" name="TextBox 11">
-            <a:extLst>
-              <a:ext uri="{FF2B5EF4-FFF2-40B4-BE49-F238E27FC236}">
-                <a16:creationId xmlns:a16="http://schemas.microsoft.com/office/drawing/2014/main" id="{777703DE-5A17-3BD5-0288-73243A0F4066}"/>
-              </a:ext>
-            </a:extLst>
-          </p:cNvPr>
-          <p:cNvSpPr txBox="1"/>
-          <p:nvPr/>
-        </p:nvSpPr>
-        <p:spPr>
-          <a:xfrm>
-            <a:off x="2042044" y="3959685"/>
-            <a:ext cx="2222492" cy="369332"/>
-          </a:xfrm>
-          <a:prstGeom prst="rect">
-            <a:avLst/>
-          </a:prstGeom>
-          <a:noFill/>
-        </p:spPr>
-        <p:txBody>
-          <a:bodyPr wrap="square" rtlCol="0">
-            <a:spAutoFit/>
-          </a:bodyPr>
-          <a:lstStyle/>
-          <a:p>
-            <a:pPr algn="ctr"/>
-            <a:r>
-              <a:rPr lang="ko-KR" altLang="en-US" dirty="0" err="1"/>
-              <a:t>아두이노</a:t>
-            </a:r>
-            <a:r>
-              <a:rPr lang="ko-KR" altLang="en-US" dirty="0"/>
-              <a:t> 호환보드</a:t>
-            </a:r>
-          </a:p>
-        </p:txBody>
-      </p:sp>
-      <p:sp>
-        <p:nvSpPr>
-          <p:cNvPr id="13" name="TextBox 12">
-            <a:extLst>
-              <a:ext uri="{FF2B5EF4-FFF2-40B4-BE49-F238E27FC236}">
-                <a16:creationId xmlns:a16="http://schemas.microsoft.com/office/drawing/2014/main" id="{5B893316-F962-F9E4-AD21-8A32405D0025}"/>
-              </a:ext>
-            </a:extLst>
-          </p:cNvPr>
-          <p:cNvSpPr txBox="1"/>
-          <p:nvPr/>
-        </p:nvSpPr>
-        <p:spPr>
-          <a:xfrm>
-            <a:off x="2218081" y="6088580"/>
-            <a:ext cx="1619476" cy="369332"/>
-          </a:xfrm>
-          <a:prstGeom prst="rect">
-            <a:avLst/>
-          </a:prstGeom>
-          <a:noFill/>
-        </p:spPr>
-        <p:txBody>
-          <a:bodyPr wrap="square" rtlCol="0">
-            <a:spAutoFit/>
-          </a:bodyPr>
-          <a:lstStyle/>
-          <a:p>
-            <a:pPr algn="ctr"/>
-            <a:r>
-              <a:rPr lang="en-US" altLang="ko-KR" dirty="0"/>
-              <a:t>LED</a:t>
-            </a:r>
-            <a:endParaRPr lang="ko-KR" altLang="en-US" dirty="0"/>
-          </a:p>
-        </p:txBody>
-      </p:sp>
-      <p:pic>
-        <p:nvPicPr>
-          <p:cNvPr id="16" name="Picture 2" descr="4 LED 5개 색상랜덤 아두이노 베스트 부품">
-            <a:extLst>
-              <a:ext uri="{FF2B5EF4-FFF2-40B4-BE49-F238E27FC236}">
-                <a16:creationId xmlns:a16="http://schemas.microsoft.com/office/drawing/2014/main" id="{3A866A88-898D-FE34-877A-4C53B71A2021}"/>
-              </a:ext>
-            </a:extLst>
-          </p:cNvPr>
-          <p:cNvPicPr>
-            <a:picLocks noChangeAspect="1" noChangeArrowheads="1"/>
-          </p:cNvPicPr>
-          <p:nvPr/>
-        </p:nvPicPr>
-        <p:blipFill rotWithShape="1">
-          <a:blip r:embed="rId6">
-            <a:extLst>
-              <a:ext uri="{28A0092B-C50C-407E-A947-70E740481C1C}">
-                <a14:useLocalDpi xmlns:a14="http://schemas.microsoft.com/office/drawing/2010/main" val="0"/>
-              </a:ext>
-            </a:extLst>
-          </a:blip>
-          <a:srcRect l="9673" t="25571" r="71768" b="12666"/>
-          <a:stretch>
-            <a:fillRect/>
-          </a:stretch>
-        </p:blipFill>
-        <p:spPr bwMode="auto">
-          <a:xfrm>
-            <a:off x="2775492" y="4644051"/>
-            <a:ext cx="431534" cy="1436122"/>
-          </a:xfrm>
-          <a:prstGeom prst="rect">
-            <a:avLst/>
-          </a:prstGeom>
-          <a:noFill/>
-          <a:extLst>
-            <a:ext uri="{909E8E84-426E-40DD-AFC4-6F175D3DCCD1}">
-              <a14:hiddenFill xmlns:a14="http://schemas.microsoft.com/office/drawing/2010/main">
-                <a:solidFill>
-                  <a:srgbClr val="FFFFFF"/>
-                </a:solidFill>
-              </a14:hiddenFill>
-            </a:ext>
-          </a:extLst>
-        </p:spPr>
-      </p:pic>
-      <p:pic>
-        <p:nvPicPr>
-          <p:cNvPr id="17" name="Picture 2" descr="아두이노 중급] 16. 초음파 센서(거리 측정 센서) : 네이버 블로그">
-            <a:extLst>
-              <a:ext uri="{FF2B5EF4-FFF2-40B4-BE49-F238E27FC236}">
-                <a16:creationId xmlns:a16="http://schemas.microsoft.com/office/drawing/2014/main" id="{2BF2A8C8-EC91-FEE4-653A-BDD05AFABF5C}"/>
-              </a:ext>
-            </a:extLst>
-          </p:cNvPr>
-          <p:cNvPicPr>
-            <a:picLocks noChangeAspect="1" noChangeArrowheads="1"/>
-          </p:cNvPicPr>
-          <p:nvPr/>
-        </p:nvPicPr>
-        <p:blipFill>
-          <a:blip r:embed="rId7">
-            <a:extLst>
-              <a:ext uri="{28A0092B-C50C-407E-A947-70E740481C1C}">
-                <a14:useLocalDpi xmlns:a14="http://schemas.microsoft.com/office/drawing/2010/main" val="0"/>
-              </a:ext>
-            </a:extLst>
-          </a:blip>
-          <a:srcRect/>
-          <a:stretch>
-            <a:fillRect/>
-          </a:stretch>
-        </p:blipFill>
-        <p:spPr bwMode="auto">
-          <a:xfrm>
-            <a:off x="5146148" y="2772486"/>
-            <a:ext cx="1592830" cy="959005"/>
-          </a:xfrm>
-          <a:prstGeom prst="rect">
-            <a:avLst/>
-          </a:prstGeom>
-          <a:noFill/>
-          <a:extLst>
-            <a:ext uri="{909E8E84-426E-40DD-AFC4-6F175D3DCCD1}">
-              <a14:hiddenFill xmlns:a14="http://schemas.microsoft.com/office/drawing/2010/main">
-                <a:solidFill>
-                  <a:srgbClr val="FFFFFF"/>
-                </a:solidFill>
-              </a14:hiddenFill>
-            </a:ext>
-          </a:extLst>
-        </p:spPr>
-      </p:pic>
-      <p:sp>
-        <p:nvSpPr>
-          <p:cNvPr id="18" name="TextBox 17">
-            <a:extLst>
-              <a:ext uri="{FF2B5EF4-FFF2-40B4-BE49-F238E27FC236}">
-                <a16:creationId xmlns:a16="http://schemas.microsoft.com/office/drawing/2014/main" id="{8F71DDB0-BB1A-F7C6-C213-3E63FE4EA180}"/>
-              </a:ext>
-            </a:extLst>
-          </p:cNvPr>
-          <p:cNvSpPr txBox="1"/>
-          <p:nvPr/>
-        </p:nvSpPr>
-        <p:spPr>
-          <a:xfrm>
-            <a:off x="4798165" y="3951278"/>
-            <a:ext cx="2222492" cy="369332"/>
-          </a:xfrm>
-          <a:prstGeom prst="rect">
-            <a:avLst/>
-          </a:prstGeom>
-          <a:noFill/>
-        </p:spPr>
-        <p:txBody>
-          <a:bodyPr wrap="square" rtlCol="0">
-            <a:spAutoFit/>
-          </a:bodyPr>
-          <a:lstStyle/>
-          <a:p>
-            <a:pPr algn="ctr"/>
-            <a:r>
-              <a:rPr lang="ko-KR" altLang="en-US" dirty="0"/>
-              <a:t>초음파 센서</a:t>
-            </a:r>
-          </a:p>
-        </p:txBody>
-      </p:sp>
-      <p:sp>
-        <p:nvSpPr>
-          <p:cNvPr id="19" name="TextBox 18">
-            <a:extLst>
-              <a:ext uri="{FF2B5EF4-FFF2-40B4-BE49-F238E27FC236}">
-                <a16:creationId xmlns:a16="http://schemas.microsoft.com/office/drawing/2014/main" id="{FB7865C0-384E-7A0C-E611-FB74F0171928}"/>
-              </a:ext>
-            </a:extLst>
-          </p:cNvPr>
-          <p:cNvSpPr txBox="1"/>
-          <p:nvPr/>
-        </p:nvSpPr>
-        <p:spPr>
-          <a:xfrm>
-            <a:off x="7699585" y="6088580"/>
-            <a:ext cx="1619476" cy="369332"/>
-          </a:xfrm>
-          <a:prstGeom prst="rect">
-            <a:avLst/>
-          </a:prstGeom>
-          <a:noFill/>
-        </p:spPr>
-        <p:txBody>
-          <a:bodyPr wrap="square" rtlCol="0">
-            <a:spAutoFit/>
-          </a:bodyPr>
-          <a:lstStyle/>
-          <a:p>
-            <a:pPr algn="ctr"/>
-            <a:r>
-              <a:rPr lang="ko-KR" altLang="en-US" dirty="0"/>
-              <a:t>능동 </a:t>
-            </a:r>
-            <a:r>
-              <a:rPr lang="ko-KR" altLang="en-US" dirty="0" err="1"/>
-              <a:t>부저</a:t>
-            </a:r>
-            <a:endParaRPr lang="ko-KR" altLang="en-US" dirty="0"/>
-          </a:p>
-        </p:txBody>
-      </p:sp>
-      <p:pic>
-        <p:nvPicPr>
-          <p:cNvPr id="20" name="Picture 4" descr="5V 능동 부저 [FQ-011] / 디바이스마트">
-            <a:extLst>
-              <a:ext uri="{FF2B5EF4-FFF2-40B4-BE49-F238E27FC236}">
-                <a16:creationId xmlns:a16="http://schemas.microsoft.com/office/drawing/2014/main" id="{8E2EF01C-AE31-6E4F-4697-7E84B77676F0}"/>
-              </a:ext>
-            </a:extLst>
-          </p:cNvPr>
-          <p:cNvPicPr>
-            <a:picLocks noChangeAspect="1" noChangeArrowheads="1"/>
-          </p:cNvPicPr>
-          <p:nvPr/>
-        </p:nvPicPr>
-        <p:blipFill rotWithShape="1">
-          <a:blip r:embed="rId8">
-            <a:extLst>
-              <a:ext uri="{BEBA8EAE-BF5A-486C-A8C5-ECC9F3942E4B}">
-                <a14:imgProps xmlns:a14="http://schemas.microsoft.com/office/drawing/2010/main">
-                  <a14:imgLayer r:embed="rId9">
-                    <a14:imgEffect>
-                      <a14:backgroundRemoval t="10000" b="90000" l="10000" r="90000"/>
-                    </a14:imgEffect>
-                  </a14:imgLayer>
-                </a14:imgProps>
-              </a:ext>
-              <a:ext uri="{28A0092B-C50C-407E-A947-70E740481C1C}">
-                <a14:useLocalDpi xmlns:a14="http://schemas.microsoft.com/office/drawing/2010/main" val="0"/>
-              </a:ext>
-            </a:extLst>
-          </a:blip>
-          <a:srcRect l="29064" t="17235" r="24650" b="20598"/>
-          <a:stretch/>
-        </p:blipFill>
-        <p:spPr bwMode="auto">
-          <a:xfrm>
-            <a:off x="7891848" y="4521069"/>
-            <a:ext cx="1318124" cy="1327776"/>
-          </a:xfrm>
-          <a:prstGeom prst="rect">
-            <a:avLst/>
-          </a:prstGeom>
-          <a:noFill/>
-          <a:extLst>
-            <a:ext uri="{909E8E84-426E-40DD-AFC4-6F175D3DCCD1}">
-              <a14:hiddenFill xmlns:a14="http://schemas.microsoft.com/office/drawing/2010/main">
-                <a:solidFill>
-                  <a:srgbClr val="FFFFFF"/>
-                </a:solidFill>
-              </a14:hiddenFill>
-            </a:ext>
-          </a:extLst>
-        </p:spPr>
-      </p:pic>
-    </p:spTree>
-    <p:extLst>
-      <p:ext uri="{BB962C8B-B14F-4D97-AF65-F5344CB8AC3E}">
-        <p14:creationId xmlns:p14="http://schemas.microsoft.com/office/powerpoint/2010/main" val="3423217440"/>
-      </p:ext>
-    </p:extLst>
-  </p:cSld>
-  <p:clrMapOvr>
-    <a:masterClrMapping/>
-  </p:clrMapOvr>
-</p:sld>
-</file>
-
-<file path=ppt/slides/slide8.xml><?xml version="1.0" encoding="utf-8"?>
-<p:sld xmlns:a="http://schemas.openxmlformats.org/drawingml/2006/main" xmlns:r="http://schemas.openxmlformats.org/officeDocument/2006/relationships" xmlns:p="http://schemas.openxmlformats.org/presentationml/2006/main">
-  <p:cSld>
-    <p:spTree>
-      <p:nvGrpSpPr>
-        <p:cNvPr id="1" name="">
-          <a:extLst>
-            <a:ext uri="{FF2B5EF4-FFF2-40B4-BE49-F238E27FC236}">
-              <a16:creationId xmlns:a16="http://schemas.microsoft.com/office/drawing/2014/main" id="{C7BB0736-3A39-AE75-39E4-8408EDB4BDC0}"/>
-            </a:ext>
-          </a:extLst>
-        </p:cNvPr>
-        <p:cNvGrpSpPr/>
-        <p:nvPr/>
-      </p:nvGrpSpPr>
-      <p:grpSpPr>
-        <a:xfrm>
-          <a:off x="0" y="0"/>
-          <a:ext cx="0" cy="0"/>
-          <a:chOff x="0" y="0"/>
-          <a:chExt cx="0" cy="0"/>
-        </a:xfrm>
-      </p:grpSpPr>
-      <p:sp>
-        <p:nvSpPr>
-          <p:cNvPr id="2" name="제목 1">
-            <a:extLst>
-              <a:ext uri="{FF2B5EF4-FFF2-40B4-BE49-F238E27FC236}">
-                <a16:creationId xmlns:a16="http://schemas.microsoft.com/office/drawing/2014/main" id="{7A06332D-49D3-02F8-A177-0E811BF53555}"/>
-              </a:ext>
-            </a:extLst>
-          </p:cNvPr>
-          <p:cNvSpPr>
-            <a:spLocks noGrp="1"/>
-          </p:cNvSpPr>
-          <p:nvPr>
-            <p:ph type="title"/>
-          </p:nvPr>
-        </p:nvSpPr>
-        <p:spPr/>
-        <p:txBody>
-          <a:bodyPr/>
-          <a:lstStyle/>
-          <a:p>
-            <a:r>
-              <a:rPr lang="ko-KR" altLang="en-US" dirty="0"/>
-              <a:t>초음파 센서</a:t>
-            </a:r>
-            <a:r>
-              <a:rPr lang="en-US" altLang="ko-KR" dirty="0"/>
-              <a:t> </a:t>
-            </a:r>
-            <a:r>
-              <a:rPr lang="ko-KR" altLang="en-US" dirty="0"/>
-              <a:t>실습 </a:t>
-            </a:r>
-            <a:r>
-              <a:rPr lang="en-US" altLang="ko-KR" dirty="0"/>
-              <a:t>Quiz</a:t>
-            </a:r>
-            <a:endParaRPr lang="ko-KR" altLang="en-US" dirty="0"/>
-          </a:p>
-        </p:txBody>
-      </p:sp>
-      <p:pic>
-        <p:nvPicPr>
-          <p:cNvPr id="11" name="그림 10">
-            <a:extLst>
-              <a:ext uri="{FF2B5EF4-FFF2-40B4-BE49-F238E27FC236}">
-                <a16:creationId xmlns:a16="http://schemas.microsoft.com/office/drawing/2014/main" id="{5450EAB8-9911-3459-181E-97D28F9200A8}"/>
-              </a:ext>
-            </a:extLst>
-          </p:cNvPr>
-          <p:cNvPicPr>
-            <a:picLocks noChangeAspect="1"/>
-          </p:cNvPicPr>
-          <p:nvPr/>
-        </p:nvPicPr>
-        <p:blipFill>
-          <a:blip r:embed="rId3"/>
-          <a:stretch>
-            <a:fillRect/>
-          </a:stretch>
-        </p:blipFill>
-        <p:spPr>
-          <a:xfrm>
-            <a:off x="5415979" y="1325563"/>
-            <a:ext cx="5384289" cy="5308161"/>
-          </a:xfrm>
-          <a:prstGeom prst="rect">
-            <a:avLst/>
-          </a:prstGeom>
-        </p:spPr>
-      </p:pic>
-      <p:sp>
-        <p:nvSpPr>
-          <p:cNvPr id="14" name="내용 개체 틀 5">
-            <a:extLst>
-              <a:ext uri="{FF2B5EF4-FFF2-40B4-BE49-F238E27FC236}">
-                <a16:creationId xmlns:a16="http://schemas.microsoft.com/office/drawing/2014/main" id="{BA9AB3DC-7D5E-A350-1677-1988E3B77614}"/>
-              </a:ext>
-            </a:extLst>
-          </p:cNvPr>
-          <p:cNvSpPr>
-            <a:spLocks noGrp="1"/>
-          </p:cNvSpPr>
-          <p:nvPr>
-            <p:ph idx="1"/>
-          </p:nvPr>
-        </p:nvSpPr>
-        <p:spPr>
-          <a:xfrm>
-            <a:off x="838200" y="1549839"/>
-            <a:ext cx="10515600" cy="4627124"/>
-          </a:xfrm>
-        </p:spPr>
-        <p:txBody>
-          <a:bodyPr>
-            <a:normAutofit/>
-          </a:bodyPr>
-          <a:lstStyle/>
-          <a:p>
-            <a:pPr marL="0" indent="0">
-              <a:buNone/>
-            </a:pPr>
-            <a:r>
-              <a:rPr lang="ko-KR" altLang="en-US" sz="4000" b="1" dirty="0">
-                <a:solidFill>
-                  <a:srgbClr val="FF0000"/>
-                </a:solidFill>
-              </a:rPr>
-              <a:t>정답</a:t>
-            </a:r>
-            <a:endParaRPr lang="en-US" altLang="ko-KR" sz="4000" b="1" dirty="0">
-              <a:solidFill>
-                <a:srgbClr val="FF0000"/>
-              </a:solidFill>
-            </a:endParaRPr>
-          </a:p>
-        </p:txBody>
-      </p:sp>
-    </p:spTree>
-    <p:extLst>
-      <p:ext uri="{BB962C8B-B14F-4D97-AF65-F5344CB8AC3E}">
-        <p14:creationId xmlns:p14="http://schemas.microsoft.com/office/powerpoint/2010/main" val="2869353870"/>
-      </p:ext>
-    </p:extLst>
-  </p:cSld>
-  <p:clrMapOvr>
-    <a:masterClrMapping/>
-  </p:clrMapOvr>
-</p:sld>
-</file>
-
-<file path=ppt/slides/slide9.xml><?xml version="1.0" encoding="utf-8"?>
-<p:sld xmlns:a="http://schemas.openxmlformats.org/drawingml/2006/main" xmlns:r="http://schemas.openxmlformats.org/officeDocument/2006/relationships" xmlns:p="http://schemas.openxmlformats.org/presentationml/2006/main">
-  <p:cSld>
-    <p:spTree>
-      <p:nvGrpSpPr>
-        <p:cNvPr id="1" name="">
-          <a:extLst>
-            <a:ext uri="{FF2B5EF4-FFF2-40B4-BE49-F238E27FC236}">
-              <a16:creationId xmlns:a16="http://schemas.microsoft.com/office/drawing/2014/main" id="{058E95EE-189E-424D-3543-269651CDF7FD}"/>
-            </a:ext>
-          </a:extLst>
-        </p:cNvPr>
-        <p:cNvGrpSpPr/>
-        <p:nvPr/>
-      </p:nvGrpSpPr>
-      <p:grpSpPr>
-        <a:xfrm>
-          <a:off x="0" y="0"/>
-          <a:ext cx="0" cy="0"/>
-          <a:chOff x="0" y="0"/>
-          <a:chExt cx="0" cy="0"/>
-        </a:xfrm>
-      </p:grpSpPr>
-      <p:sp>
-        <p:nvSpPr>
-          <p:cNvPr id="2" name="제목 1">
-            <a:extLst>
-              <a:ext uri="{FF2B5EF4-FFF2-40B4-BE49-F238E27FC236}">
-                <a16:creationId xmlns:a16="http://schemas.microsoft.com/office/drawing/2014/main" id="{57403870-1342-522F-3739-18B439FA87AE}"/>
-              </a:ext>
-            </a:extLst>
-          </p:cNvPr>
-          <p:cNvSpPr>
-            <a:spLocks noGrp="1"/>
-          </p:cNvSpPr>
-          <p:nvPr>
-            <p:ph type="title"/>
-          </p:nvPr>
-        </p:nvSpPr>
-        <p:spPr/>
-        <p:txBody>
-          <a:bodyPr/>
-          <a:lstStyle/>
-          <a:p>
-            <a:r>
-              <a:rPr lang="ko-KR" altLang="en-US" dirty="0"/>
-              <a:t>초음파 센서</a:t>
-            </a:r>
-            <a:r>
-              <a:rPr lang="en-US" altLang="ko-KR" dirty="0"/>
-              <a:t> </a:t>
-            </a:r>
-            <a:r>
-              <a:rPr lang="ko-KR" altLang="en-US" dirty="0"/>
-              <a:t>실습 </a:t>
-            </a:r>
-            <a:r>
-              <a:rPr lang="en-US" altLang="ko-KR" dirty="0"/>
-              <a:t>Quiz</a:t>
-            </a:r>
-            <a:endParaRPr lang="ko-KR" altLang="en-US" dirty="0"/>
-          </a:p>
-        </p:txBody>
-      </p:sp>
-      <p:sp>
-        <p:nvSpPr>
-          <p:cNvPr id="14" name="내용 개체 틀 5">
-            <a:extLst>
-              <a:ext uri="{FF2B5EF4-FFF2-40B4-BE49-F238E27FC236}">
-                <a16:creationId xmlns:a16="http://schemas.microsoft.com/office/drawing/2014/main" id="{9A868864-A509-C3E9-5A7C-C55344671AC7}"/>
-              </a:ext>
-            </a:extLst>
-          </p:cNvPr>
-          <p:cNvSpPr>
-            <a:spLocks noGrp="1"/>
-          </p:cNvSpPr>
-          <p:nvPr>
-            <p:ph idx="1"/>
-          </p:nvPr>
-        </p:nvSpPr>
-        <p:spPr>
-          <a:xfrm>
-            <a:off x="838200" y="1549839"/>
-            <a:ext cx="10515600" cy="4627124"/>
-          </a:xfrm>
-        </p:spPr>
-        <p:txBody>
-          <a:bodyPr>
-            <a:normAutofit/>
-          </a:bodyPr>
-          <a:lstStyle/>
-          <a:p>
-            <a:pPr marL="0" indent="0">
-              <a:buNone/>
-            </a:pPr>
-            <a:r>
-              <a:rPr lang="ko-KR" altLang="en-US" sz="4000" b="1" dirty="0">
-                <a:solidFill>
-                  <a:srgbClr val="FF0000"/>
-                </a:solidFill>
-              </a:rPr>
-              <a:t>정답</a:t>
-            </a:r>
-            <a:endParaRPr lang="en-US" altLang="ko-KR" sz="4000" b="1" dirty="0">
-              <a:solidFill>
-                <a:srgbClr val="FF0000"/>
-              </a:solidFill>
-            </a:endParaRPr>
-          </a:p>
-        </p:txBody>
-      </p:sp>
-      <p:pic>
-        <p:nvPicPr>
-          <p:cNvPr id="4" name="그림 3">
-            <a:extLst>
-              <a:ext uri="{FF2B5EF4-FFF2-40B4-BE49-F238E27FC236}">
-                <a16:creationId xmlns:a16="http://schemas.microsoft.com/office/drawing/2014/main" id="{CC5F3326-0AF3-038C-04EF-A78B0E233D97}"/>
-              </a:ext>
-            </a:extLst>
-          </p:cNvPr>
-          <p:cNvPicPr>
-            <a:picLocks noChangeAspect="1"/>
-          </p:cNvPicPr>
-          <p:nvPr/>
-        </p:nvPicPr>
-        <p:blipFill>
-          <a:blip r:embed="rId3"/>
-          <a:stretch>
-            <a:fillRect/>
-          </a:stretch>
-        </p:blipFill>
-        <p:spPr>
-          <a:xfrm>
-            <a:off x="838200" y="2595563"/>
-            <a:ext cx="5086350" cy="3581400"/>
-          </a:xfrm>
-          <a:prstGeom prst="rect">
-            <a:avLst/>
-          </a:prstGeom>
-        </p:spPr>
-      </p:pic>
-      <p:pic>
-        <p:nvPicPr>
-          <p:cNvPr id="6" name="그림 5">
-            <a:extLst>
-              <a:ext uri="{FF2B5EF4-FFF2-40B4-BE49-F238E27FC236}">
-                <a16:creationId xmlns:a16="http://schemas.microsoft.com/office/drawing/2014/main" id="{EF066CB9-1291-242C-12A3-57EF6BBA64F9}"/>
-              </a:ext>
-            </a:extLst>
-          </p:cNvPr>
-          <p:cNvPicPr>
-            <a:picLocks noChangeAspect="1"/>
-          </p:cNvPicPr>
-          <p:nvPr/>
-        </p:nvPicPr>
-        <p:blipFill>
-          <a:blip r:embed="rId4"/>
-          <a:stretch>
-            <a:fillRect/>
-          </a:stretch>
-        </p:blipFill>
-        <p:spPr>
-          <a:xfrm>
-            <a:off x="5590872" y="1284818"/>
-            <a:ext cx="5762928" cy="5157166"/>
-          </a:xfrm>
-          <a:prstGeom prst="rect">
-            <a:avLst/>
-          </a:prstGeom>
-        </p:spPr>
-      </p:pic>
-    </p:spTree>
-    <p:extLst>
-      <p:ext uri="{BB962C8B-B14F-4D97-AF65-F5344CB8AC3E}">
-        <p14:creationId xmlns:p14="http://schemas.microsoft.com/office/powerpoint/2010/main" val="202577839"/>
       </p:ext>
     </p:extLst>
   </p:cSld>
